--- a/lecons/LSA/Geomorphology/08_LSA_GEOMO_L06_Volcanism.pptx
+++ b/lecons/LSA/Geomorphology/08_LSA_GEOMO_L06_Volcanism.pptx
@@ -62,9 +62,14 @@
     <p:sldId id="310" r:id="rId56"/>
     <p:sldId id="311" r:id="rId57"/>
     <p:sldId id="312" r:id="rId58"/>
+    <p:sldId id="313" r:id="rId59"/>
+    <p:sldId id="314" r:id="rId60"/>
+    <p:sldId id="315" r:id="rId61"/>
+    <p:sldId id="316" r:id="rId62"/>
+    <p:sldId id="317" r:id="rId63"/>
   </p:sldIdLst>
   <p:notesMasterIdLst>
-    <p:notesMasterId r:id="rId59"/>
+    <p:notesMasterId r:id="rId64"/>
   </p:notesMasterIdLst>
   <p:sldSz cx="12192000" cy="6858000"/>
   <p:notesSz cx="6858000" cy="12192000"/>
@@ -646,7 +651,7 @@
           <a:p>
             <a:r>
               <a:rPr lang="en-US" dirty="0"/>
-              <a:t>Question 1: What is the problem in the situation? Think for a moment, then raise your hand to answer.</a:t>
+              <a:t>Take your time to copy this part; we will continue together.</a:t>
             </a:r>
             <a:endParaRPr lang="en-US" dirty="0"/>
           </a:p>
@@ -734,7 +739,7 @@
           <a:p>
             <a:r>
               <a:rPr lang="en-US" dirty="0"/>
-              <a:t>Good. The visitors do not know why volcanoes have different shapes.</a:t>
+              <a:t>Listen carefully to this situation from real life. The news says that Mount Cameroon shows signs of activity, with rumbling and smoke near its peak. Your uncle in Mokolo says: "Don't worry, the peak of Rhumsiki near here looks like a volcano, but it has been silent for millions of years." You ask: "Why is one mountain active and the other a quiet rocky peak, and why do volcanoes have different shapes?" Think about it, because I am going to ask you some questions.</a:t>
             </a:r>
             <a:endParaRPr lang="en-US" dirty="0"/>
           </a:p>
@@ -822,7 +827,7 @@
           <a:p>
             <a:r>
               <a:rPr lang="en-US" dirty="0"/>
-              <a:t>Question 2: What came out of Mount Cameroon in 2000? Think for a moment, then raise your hand to answer.</a:t>
+              <a:t>Question 1: What is the problem in the situation? Think for a moment, then raise your hand to answer.</a:t>
             </a:r>
             <a:endParaRPr lang="en-US" dirty="0"/>
           </a:p>
@@ -910,7 +915,7 @@
           <a:p>
             <a:r>
               <a:rPr lang="en-US" dirty="0"/>
-              <a:t>Good. Lava.</a:t>
+              <a:t>Good. The learner does not know the life cycle of volcanoes and the causes of their shapes.</a:t>
             </a:r>
             <a:endParaRPr lang="en-US" dirty="0"/>
           </a:p>
@@ -998,7 +1003,7 @@
           <a:p>
             <a:r>
               <a:rPr lang="en-US" dirty="0"/>
-              <a:t>Question 3: What decides the shape of a volcano? Think for a moment, then raise your hand to answer.</a:t>
+              <a:t>Question 2: What is the process of molten rock reaching the surface called? Think for a moment, then raise your hand to answer.</a:t>
             </a:r>
             <a:endParaRPr lang="en-US" dirty="0"/>
           </a:p>
@@ -1086,7 +1091,7 @@
           <a:p>
             <a:r>
               <a:rPr lang="en-US" dirty="0"/>
-              <a:t>Good. The type of lava and the type of eruption.</a:t>
+              <a:t>Good. Volcanism (vulcanicity).</a:t>
             </a:r>
             <a:endParaRPr lang="en-US" dirty="0"/>
           </a:p>
@@ -1174,7 +1179,7 @@
           <a:p>
             <a:r>
               <a:rPr lang="en-US" dirty="0"/>
-              <a:t>From this situation, the action we are working towards in this lesson is the following: recognise volcanic landforms in Cameroon and understand how they formed.</a:t>
+              <a:t>Question 3: Why is Mount Cameroon active and Rhumsiki not? Think for a moment, then raise your hand to answer.</a:t>
             </a:r>
             <a:endParaRPr lang="en-US" dirty="0"/>
           </a:p>
@@ -1262,7 +1267,7 @@
           <a:p>
             <a:r>
               <a:rPr lang="en-US" dirty="0"/>
-              <a:t>Why is this lesson important for you? This lesson helps us to understand how volcanoes form and why their landforms differ.</a:t>
+              <a:t>Good. Mount Cameroon erupted recently; Rhumsiki is the remains of an extinct volcano.</a:t>
             </a:r>
             <a:endParaRPr lang="en-US" dirty="0"/>
           </a:p>
@@ -1350,7 +1355,7 @@
           <a:p>
             <a:r>
               <a:rPr lang="en-US" dirty="0"/>
-              <a:t>Activity 1. Look carefully at this picture: a flow of hot lava. Observe every detail before I ask the question.</a:t>
+              <a:t>From this situation, the action we are working towards in this lesson is the following: recognise volcanic landforms and rocks in Cameroon.</a:t>
             </a:r>
             <a:endParaRPr lang="en-US" dirty="0"/>
           </a:p>
@@ -1438,7 +1443,7 @@
           <a:p>
             <a:r>
               <a:rPr lang="en-US" dirty="0"/>
-              <a:t>Here is the question for Activity 1: What is the difference between magma and lava? Take one minute to think and write your answer in your rough notebook.</a:t>
+              <a:t>Why is this lesson important for you? This lesson helps us to understand the volcanic landforms of Cameroon and the risks of active volcanoes.</a:t>
             </a:r>
             <a:endParaRPr lang="en-US" dirty="0"/>
           </a:p>
@@ -1614,7 +1619,7 @@
           <a:p>
             <a:r>
               <a:rPr lang="en-US" dirty="0"/>
-              <a:t>Let us check the answer together. Magma is melted rock underground; lava is magma that reaches the surface.</a:t>
+              <a:t>Activity 1. Look carefully at this diagram: the parts of a volcano. Observe every detail before I ask the question.</a:t>
             </a:r>
             <a:endParaRPr lang="en-US" dirty="0"/>
           </a:p>
@@ -1702,7 +1707,7 @@
           <a:p>
             <a:r>
               <a:rPr lang="en-US" dirty="0"/>
-              <a:t>Activity 2. Look carefully at this diagram: the parts of a volcano. Observe every detail before I ask the question.</a:t>
+              <a:t>Here is the question for Activity 1: What is the difference between magma and lava? Take one minute to think and write your answer in your rough notebook.</a:t>
             </a:r>
             <a:endParaRPr lang="en-US" dirty="0"/>
           </a:p>
@@ -1790,7 +1795,7 @@
           <a:p>
             <a:r>
               <a:rPr lang="en-US" dirty="0"/>
-              <a:t>Here is the question for Activity 2: Name three products of a volcano. Take one minute to think and write your answer in your rough notebook.</a:t>
+              <a:t>Let us check the answer together. Magma is below the surface; lava has reached the surface.</a:t>
             </a:r>
             <a:endParaRPr lang="en-US" dirty="0"/>
           </a:p>
@@ -1878,7 +1883,7 @@
           <a:p>
             <a:r>
               <a:rPr lang="en-US" dirty="0"/>
-              <a:t>Let us check the answer together. Lava, ash (pyroclasts) and gases.</a:t>
+              <a:t>Activity 2. Look carefully at this picture: mount Cameroon. Observe every detail before I ask the question.</a:t>
             </a:r>
             <a:endParaRPr lang="en-US" dirty="0"/>
           </a:p>
@@ -1966,7 +1971,7 @@
           <a:p>
             <a:r>
               <a:rPr lang="en-US" dirty="0"/>
-              <a:t>Activity 3. Look carefully at this picture: mayon Volcano, Philippines: a steep cone of ash and lava. Observe every detail before I ask the question.</a:t>
+              <a:t>Here is the question for Activity 2: When did Mount Cameroon last erupt significantly? Take one minute to think and write your answer in your rough notebook.</a:t>
             </a:r>
             <a:endParaRPr lang="en-US" dirty="0"/>
           </a:p>
@@ -2054,7 +2059,7 @@
           <a:p>
             <a:r>
               <a:rPr lang="en-US" dirty="0"/>
-              <a:t>Here is the question for Activity 3: This cone has layers of ash and lava. What type of cone is it? Take one minute to think and write your answer in your rough notebook.</a:t>
+              <a:t>Let us check the answer together. In 1999–2000 (small activity in 2012).</a:t>
             </a:r>
             <a:endParaRPr lang="en-US" dirty="0"/>
           </a:p>
@@ -2142,7 +2147,7 @@
           <a:p>
             <a:r>
               <a:rPr lang="en-US" dirty="0"/>
-              <a:t>Let us check the answer together. A strato-volcano (composite cone).</a:t>
+              <a:t>Activity 3. Look carefully at this picture: volcanic necks near Rhumsiki. Observe every detail before I ask the question.</a:t>
             </a:r>
             <a:endParaRPr lang="en-US" dirty="0"/>
           </a:p>
@@ -2230,7 +2235,7 @@
           <a:p>
             <a:r>
               <a:rPr lang="en-US" dirty="0"/>
-              <a:t>Activity 4. Look carefully at this picture: a large lake inside an old volcano. Observe every detail before I ask the question.</a:t>
+              <a:t>Here is the question for Activity 3: Why is the peak of Rhumsiki called extinct? Take one minute to think and write your answer in your rough notebook.</a:t>
             </a:r>
             <a:endParaRPr lang="en-US" dirty="0"/>
           </a:p>
@@ -2318,7 +2323,7 @@
           <a:p>
             <a:r>
               <a:rPr lang="en-US" dirty="0"/>
-              <a:t>Here is the question for Activity 4: What is the difference between a crater and a caldera? Take one minute to think and write your answer in your rough notebook.</a:t>
+              <a:t>Let us check the answer together. It has not erupted for millions of years and will not erupt again.</a:t>
             </a:r>
             <a:endParaRPr lang="en-US" dirty="0"/>
           </a:p>
@@ -2406,7 +2411,7 @@
           <a:p>
             <a:r>
               <a:rPr lang="en-US" dirty="0"/>
-              <a:t>Let us check the answer together. A crater is a small hollow at the top; a caldera is a huge hollow after a collapse.</a:t>
+              <a:t>Activity 4. Look carefully at this picture: solidified runny lava. Observe every detail before I ask the question.</a:t>
             </a:r>
             <a:endParaRPr lang="en-US" dirty="0"/>
           </a:p>
@@ -2494,7 +2499,7 @@
           <a:p>
             <a:r>
               <a:rPr lang="en-US" dirty="0"/>
-              <a:t>Our topic is Crustal Processes and their Effect on the Land Surface and Man, and the sub-topic is Volcanicity. The key notions we shall use today are: volcanicity, lava, magma, cones, crater, caldera. At the end, you should be able to do this: learners are able to identify volcanic landforms and explain why they differ.</a:t>
+              <a:t>Our topic is Crustal Processes and their Effect on the Land Surface and Man, and the sub-topic is Volcanicity. The key notions we shall use today are: volcanism (vulcanicity), magma, lava, active, dormant and extinct volcanoes, pyroclasts, basic and acid lava, cone, crater, caldera, lava plateau. At the end, you should be able to do this: learners are able to classify volcanoes and explain the landforms built by different volcanic materials, with Cameroonian examples.</a:t>
             </a:r>
             <a:endParaRPr lang="en-US" dirty="0"/>
           </a:p>
@@ -2582,7 +2587,7 @@
           <a:p>
             <a:r>
               <a:rPr lang="en-US" dirty="0"/>
-              <a:t>Activity 5. Look carefully at this picture: columns of basalt from old lava. Observe every detail before I ask the question.</a:t>
+              <a:t>Here is the question for Activity 4: Which lava flows far: basic or acid? Take one minute to think and write your answer in your rough notebook.</a:t>
             </a:r>
             <a:endParaRPr lang="en-US" dirty="0"/>
           </a:p>
@@ -2670,7 +2675,7 @@
           <a:p>
             <a:r>
               <a:rPr lang="en-US" dirty="0"/>
-              <a:t>Here is the question for Activity 5: Many flows of runny lava can cover a large area. What landform do they form? Take one minute to think and write your answer in your rough notebook.</a:t>
+              <a:t>Let us check the answer together. Basic lava (runny, low in silica).</a:t>
             </a:r>
             <a:endParaRPr lang="en-US" dirty="0"/>
           </a:p>
@@ -2758,7 +2763,7 @@
           <a:p>
             <a:r>
               <a:rPr lang="en-US" dirty="0"/>
-              <a:t>Let us check the answer together. A lava plateau.</a:t>
+              <a:t>Activity 5. Look carefully at this picture: a volcanic crater. Observe every detail before I ask the question.</a:t>
             </a:r>
             <a:endParaRPr lang="en-US" dirty="0"/>
           </a:p>
@@ -2846,7 +2851,7 @@
           <a:p>
             <a:r>
               <a:rPr lang="en-US" dirty="0"/>
-              <a:t>Now we are going to copy the board summary. Write the title and the headings neatly in your notebooks. I will give you enough time for each slide, so do not rush.</a:t>
+              <a:t>Here is the question for Activity 5: What is the difference between a crater and a caldera? Take one minute to think and write your answer in your rough notebook.</a:t>
             </a:r>
             <a:endParaRPr lang="en-US" dirty="0"/>
           </a:p>
@@ -2934,7 +2939,7 @@
           <a:p>
             <a:r>
               <a:rPr lang="en-US" dirty="0"/>
-              <a:t>Let us copy Meaning, Process and Cycle. Volcanism can be understood as follows. On this slide we have Volcanism. Write each point on a new line, with the key term first, and explain it in your own words when we revise. When you finish, we go to the next slide.</a:t>
+              <a:t>Let us check the answer together. A crater is small (under 1 km); a caldera is a very large basin formed by collapse.</a:t>
             </a:r>
             <a:endParaRPr lang="en-US" dirty="0"/>
           </a:p>
@@ -3022,7 +3027,7 @@
           <a:p>
             <a:r>
               <a:rPr lang="en-US" dirty="0"/>
-              <a:t>We continue with Meaning, Process and Cycle. On this slide we have Process. Write each point on a new line, with the key term first, and explain it in your own words when we revise. When you finish, we go to the next slide.</a:t>
+              <a:t>Now we are going to copy the board summary. Write the title and the headings neatly in your notebooks. I will give you enough time for each slide, so do not rush.</a:t>
             </a:r>
             <a:endParaRPr lang="en-US" dirty="0"/>
           </a:p>
@@ -3110,7 +3115,7 @@
           <a:p>
             <a:r>
               <a:rPr lang="en-US" dirty="0"/>
-              <a:t>We continue with Meaning, Process and Cycle. On this slide we have Life cycle of a volcano. Write each point on a new line, with the key term first, and explain it in your own words when we revise.</a:t>
+              <a:t>Let us copy the definitions. The key terms of this lesson are defined as follows. On this slide we have Volcanism (vulcanicity) and Magma. Write each point on a new line, with the key term first, and explain it in your own words when we revise. When you finish, we go to the next slide.</a:t>
             </a:r>
             <a:endParaRPr lang="en-US" dirty="0"/>
           </a:p>
@@ -3198,7 +3203,7 @@
           <a:p>
             <a:r>
               <a:rPr lang="en-US" dirty="0"/>
-              <a:t>Now draw this illustration in your notebook: structure of a volcano. Give it a title and label it clearly.</a:t>
+              <a:t>We continue with the definitions. On this slide we have Lava and Pyroclasts. Write each point on a new line, with the key term first, and explain it in your own words when we revise.</a:t>
             </a:r>
             <a:endParaRPr lang="en-US" dirty="0"/>
           </a:p>
@@ -3286,7 +3291,7 @@
           <a:p>
             <a:r>
               <a:rPr lang="en-US" dirty="0"/>
-              <a:t>Let us copy Products of Volcanoes. Volcanoes produce the following materials. On this slide we have Lava and Pyroclasts. Write each point on a new line, with the key term first, and explain it in your own words when we revise. When you finish, we go to the next slide.</a:t>
+              <a:t>Let us copy The Life Cycle of a Volcano. Volcanoes are classified by their activity as follows. Copy the point on Active volcano on the left, then draw the diagram on the right: the life cycle of a volcano. Give it a title and label it clearly.</a:t>
             </a:r>
             <a:endParaRPr lang="en-US" dirty="0"/>
           </a:p>
@@ -3374,7 +3379,7 @@
           <a:p>
             <a:r>
               <a:rPr lang="en-US" dirty="0"/>
-              <a:t>We continue with Products of Volcanoes. On this slide we have Gases. Write each point on a new line, with the key term first, and explain it in your own words when we revise.</a:t>
+              <a:t>Copy the point on Dormant volcano on the left, then draw the diagram on the right: kilimanjaro. Give it a title and label it clearly.</a:t>
             </a:r>
             <a:endParaRPr lang="en-US" dirty="0"/>
           </a:p>
@@ -3462,7 +3467,7 @@
           <a:p>
             <a:r>
               <a:rPr lang="en-US" dirty="0"/>
-              <a:t>Before we start the new lesson, let us correct the homework I gave you at the end of Lesson 5: Landforms at Destructive and Conservative Margins. The question was: Collect information about Mount Cameroon: its height and the years of its recent eruptions. Take out your exercise books.</a:t>
+              <a:t>Before we start the new lesson, let us correct the homework I gave you at the end of Lesson 5: Landforms at Destructive and Conservative Margins. The question was: Distinguish magma from lava. Take out your exercise books.</a:t>
             </a:r>
             <a:endParaRPr lang="en-US" dirty="0"/>
           </a:p>
@@ -3550,7 +3555,7 @@
           <a:p>
             <a:r>
               <a:rPr lang="en-US" dirty="0"/>
-              <a:t>Let us copy Volcanic Landforms. The type of landform depends on the lava and the eruption. On this slide we have Basic lava cones. Write each point on a new line, with the key term first, and explain it in your own words when we revise. When you finish, we go to the next slide.</a:t>
+              <a:t>Copy the point on Extinct volcano on the left, then draw the diagram on the right: volcanic necks near Rhumsiki. Give it a title and label it clearly.</a:t>
             </a:r>
             <a:endParaRPr lang="en-US" dirty="0"/>
           </a:p>
@@ -3638,7 +3643,7 @@
           <a:p>
             <a:r>
               <a:rPr lang="en-US" dirty="0"/>
-              <a:t>We continue with Volcanic Landforms. On this slide we have Acid lava cones (cumulo-domes) and Ash and cinder cones. Write each point on a new line, with the key term first, and explain it in your own words when we revise. When you finish, we go to the next slide.</a:t>
+              <a:t>Let us copy Products of a Volcanic Eruption. An eruption releases the following products. On this slide we have Lava. Write each point on a new line, with the key term first, and explain it in your own words when we revise.</a:t>
             </a:r>
             <a:endParaRPr lang="en-US" dirty="0"/>
           </a:p>
@@ -3726,7 +3731,7 @@
           <a:p>
             <a:r>
               <a:rPr lang="en-US" dirty="0"/>
-              <a:t>We continue with Volcanic Landforms. On this slide we have Composite (strato) cones. Write each point on a new line, with the key term first, and explain it in your own words when we revise.</a:t>
+              <a:t>Copy the point on Pyroclastic materials on the left, then draw the diagram on the right: products of an eruption. Give it a title and label it clearly.</a:t>
             </a:r>
             <a:endParaRPr lang="en-US" dirty="0"/>
           </a:p>
@@ -3814,7 +3819,7 @@
           <a:p>
             <a:r>
               <a:rPr lang="en-US" dirty="0"/>
-              <a:t>Now draw this illustration in your notebook: a composite cone. Give it a title and label it clearly.</a:t>
+              <a:t>We continue with Products of a Volcanic Eruption. On this slide we have Gases. Write each point on a new line, with the key term first, and explain it in your own words when we revise.</a:t>
             </a:r>
             <a:endParaRPr lang="en-US" dirty="0"/>
           </a:p>
@@ -3902,7 +3907,7 @@
           <a:p>
             <a:r>
               <a:rPr lang="en-US" dirty="0"/>
-              <a:t>Let us copy Plateaux and Depressions. Other volcanic landforms include. On this slide we have Lava plateaux. Write each point on a new line, with the key term first, and explain it in your own words when we revise. When you finish, we go to the next slide.</a:t>
+              <a:t>Let us copy Volcanic Cones. The main types of volcanic cones are the following. Copy the point on Shield (basic lava) cones on the left, then draw the diagram on the right: a shield volcano. Give it a title and label it clearly.</a:t>
             </a:r>
             <a:endParaRPr lang="en-US" dirty="0"/>
           </a:p>
@@ -3990,7 +3995,7 @@
           <a:p>
             <a:r>
               <a:rPr lang="en-US" dirty="0"/>
-              <a:t>We continue with Plateaux and Depressions. On this slide we have Craters and calderas. Write each point on a new line, with the key term first, and explain it in your own words when we revise.</a:t>
+              <a:t>We continue with Volcanic Cones. On this slide we have Acid lava domes and Ash and cinder cones. Write each point on a new line, with the key term first, and explain it in your own words when we revise.</a:t>
             </a:r>
             <a:endParaRPr lang="en-US" dirty="0"/>
           </a:p>
@@ -4078,7 +4083,7 @@
           <a:p>
             <a:r>
               <a:rPr lang="en-US" dirty="0"/>
-              <a:t>Now let us check what you have understood. Question 1: What is the difference between magma and lava? Answer in your exercise book.</a:t>
+              <a:t>Copy the point on Composite cones (stratovolcanoes) on the left, then draw the diagram on the right: a composite cone. Give it a title and label it clearly.</a:t>
             </a:r>
             <a:endParaRPr lang="en-US" dirty="0"/>
           </a:p>
@@ -4166,7 +4171,7 @@
           <a:p>
             <a:r>
               <a:rPr lang="en-US" dirty="0"/>
-              <a:t>The expected answer is: magma is underground; lava is on the surface. If you got it right, well done.</a:t>
+              <a:t>Let us copy Other Volcanic Landforms. Other volcanic landforms are the following. Copy the point on Lava plateau on the left, then draw the diagram on the right: basalt columns. Give it a title and label it clearly.</a:t>
             </a:r>
             <a:endParaRPr lang="en-US" dirty="0"/>
           </a:p>
@@ -4254,7 +4259,7 @@
           <a:p>
             <a:r>
               <a:rPr lang="en-US" dirty="0"/>
-              <a:t>Now let us check what you have understood. Question 2: Why is a composite cone steep and layered? Answer in your exercise book.</a:t>
+              <a:t>Copy the point on Crater on the left, then draw the diagram on the right: a crater. Give it a title and label it clearly.</a:t>
             </a:r>
             <a:endParaRPr lang="en-US" dirty="0"/>
           </a:p>
@@ -4342,7 +4347,7 @@
           <a:p>
             <a:r>
               <a:rPr lang="en-US" dirty="0"/>
-              <a:t>The expected answer is: it is built of alternating layers of ash and lava. If you got it right, well done.</a:t>
+              <a:t>We continue with Other Volcanic Landforms. On this slide we have Crater lakes and Caldera. Write each point on a new line, with the key term first, and explain it in your own words when we revise.</a:t>
             </a:r>
             <a:endParaRPr lang="en-US" dirty="0"/>
           </a:p>
@@ -4430,7 +4435,7 @@
           <a:p>
             <a:r>
               <a:rPr lang="en-US" dirty="0"/>
-              <a:t>Here is a good answer. Mount Cameroon is about 4,040 m high, the highest mountain in West and Central Africa. Recent eruptions: 1959, 1982, 1999 and 2000. Compare it with your own answer and correct your work in red.</a:t>
+              <a:t>Here is a good answer. Magma is molten rock below the surface; lava is molten rock that has reached the surface. Compare it with your own answer and correct your work in red.</a:t>
             </a:r>
             <a:endParaRPr lang="en-US" dirty="0"/>
           </a:p>
@@ -4518,7 +4523,7 @@
           <a:p>
             <a:r>
               <a:rPr lang="en-US" dirty="0"/>
-              <a:t>For those who need more practice, fill in the blanks in your exercise book. The answers are: number 1, lava; number 2, caldera; number 3, shield (basic lava).</a:t>
+              <a:t>Now let us check what you have understood. Question 1: Distinguish an active volcano from an extinct volcano with one example each. Answer in your exercise book.</a:t>
             </a:r>
             <a:endParaRPr lang="en-US" dirty="0"/>
           </a:p>
@@ -4606,7 +4611,7 @@
           <a:p>
             <a:r>
               <a:rPr lang="en-US" dirty="0"/>
-              <a:t>For your homework: Ask an adult what people grow around Buea and Limbe, and why the soils are good. We shall correct it at the beginning of our next lesson.</a:t>
+              <a:t>The expected answer is: an active volcano has erupted in recorded history (Mount Cameroon); an extinct one will not erupt again (Rhumsiki necks). If you got it right, well done.</a:t>
             </a:r>
             <a:endParaRPr lang="en-US" dirty="0"/>
           </a:p>
@@ -4694,7 +4699,7 @@
           <a:p>
             <a:r>
               <a:rPr lang="en-US" dirty="0"/>
-              <a:t>Our next lesson will be on Lesson 7: Volcanoes and Man. Thank you for your attention, and see you next time.</a:t>
+              <a:t>Now let us check what you have understood. Question 2: Why are shield volcanoes wide and composite cones steep? Answer in your exercise book.</a:t>
             </a:r>
             <a:endParaRPr lang="en-US" dirty="0"/>
           </a:p>
@@ -4782,7 +4787,7 @@
           <a:p>
             <a:r>
               <a:rPr lang="en-US" dirty="0"/>
-              <a:t>Let us play the bilingual game. I say a word in English, and you give me the French word. Then we do the reverse.</a:t>
+              <a:t>The expected answer is: shield volcanoes are built by runny lava that flows far; composite cones are built by layers of lava and ash that pile up. If you got it right, well done.</a:t>
             </a:r>
             <a:endParaRPr lang="en-US" dirty="0"/>
           </a:p>
@@ -4870,7 +4875,7 @@
           <a:p>
             <a:r>
               <a:rPr lang="en-US" dirty="0"/>
-              <a:t>I record this information in the official logbook of the class after the lesson.</a:t>
+              <a:t>For those who need more practice, fill in the blanks in your exercise book. The answers are: number 1, magma; number 2, dormant; number 3, caldera.</a:t>
             </a:r>
             <a:endParaRPr lang="en-US" dirty="0"/>
           </a:p>
@@ -4958,7 +4963,7 @@
           <a:p>
             <a:r>
               <a:rPr lang="en-US" dirty="0"/>
-              <a:t>I complete the second page of the logbook: the matter taught, the evaluation, the homework and the attendance.</a:t>
+              <a:t>For your homework: Give one benefit of volcanoes to man. We shall correct it at the beginning of our next lesson.</a:t>
             </a:r>
             <a:endParaRPr lang="en-US" dirty="0"/>
           </a:p>
@@ -5046,7 +5051,7 @@
           <a:p>
             <a:r>
               <a:rPr lang="en-US" dirty="0"/>
-              <a:t>This slide is for me, the teacher: it gives the timing of the lesson and what to do if the projector is not available.</a:t>
+              <a:t>Our next lesson will be on Lesson 7: Volcanoes and Man. Thank you for your attention, and see you next time.</a:t>
             </a:r>
             <a:endParaRPr lang="en-US" dirty="0"/>
           </a:p>
@@ -5134,7 +5139,7 @@
           <a:p>
             <a:r>
               <a:rPr lang="en-US" dirty="0"/>
-              <a:t>These are the references and picture credits used to prepare this lesson.</a:t>
+              <a:t>Let us play the bilingual game. I say a word in English, and you give me the French word. Then we do the reverse.</a:t>
             </a:r>
             <a:endParaRPr lang="en-US" dirty="0"/>
           </a:p>
@@ -5158,6 +5163,182 @@
             <a:fld id="{F7021451-1387-4CA6-816F-3879F97B5CBC}" type="slidenum">
               <a:rPr lang="en-US"/>
               <a:t>57</a:t>
+            </a:fld>
+            <a:endParaRPr lang="en-US"/>
+          </a:p>
+        </p:txBody>
+      </p:sp>
+    </p:spTree>
+    <p:extLst>
+      <p:ext uri="{BB962C8B-B14F-4D97-AF65-F5344CB8AC3E}">
+        <p14:creationId xmlns:p14="http://schemas.microsoft.com/office/powerpoint/2010/main" val="1024086991"/>
+      </p:ext>
+    </p:extLst>
+  </p:cSld>
+  <p:clrMapOvr>
+    <a:masterClrMapping/>
+  </p:clrMapOvr>
+</p:notes>
+</file>
+
+<file path=ppt/notesSlides/notesSlide58.xml><?xml version="1.0" encoding="utf-8"?>
+<p:notes xmlns:a="http://schemas.openxmlformats.org/drawingml/2006/main" xmlns:r="http://schemas.openxmlformats.org/officeDocument/2006/relationships" xmlns:p="http://schemas.openxmlformats.org/presentationml/2006/main">
+  <p:cSld>
+    <p:spTree>
+      <p:nvGrpSpPr>
+        <p:cNvPr id="1" name=""/>
+        <p:cNvGrpSpPr/>
+        <p:nvPr/>
+      </p:nvGrpSpPr>
+      <p:grpSpPr>
+        <a:xfrm>
+          <a:off x="0" y="0"/>
+          <a:ext cx="0" cy="0"/>
+          <a:chOff x="0" y="0"/>
+          <a:chExt cx="0" cy="0"/>
+        </a:xfrm>
+      </p:grpSpPr>
+      <p:sp>
+        <p:nvSpPr>
+          <p:cNvPr id="2" name="Slide Image Placeholder 1"/>
+          <p:cNvSpPr>
+            <a:spLocks noGrp="1" noRot="1" noChangeAspect="1"/>
+          </p:cNvSpPr>
+          <p:nvPr>
+            <p:ph type="sldImg"/>
+          </p:nvPr>
+        </p:nvSpPr>
+        <p:spPr/>
+      </p:sp>
+      <p:sp>
+        <p:nvSpPr>
+          <p:cNvPr id="3" name="Notes Placeholder 2"/>
+          <p:cNvSpPr>
+            <a:spLocks noGrp="1"/>
+          </p:cNvSpPr>
+          <p:nvPr>
+            <p:ph type="body" idx="1"/>
+          </p:nvPr>
+        </p:nvSpPr>
+        <p:spPr/>
+        <p:txBody>
+          <a:bodyPr/>
+          <a:lstStyle/>
+          <a:p>
+            <a:r>
+              <a:rPr lang="en-US" dirty="0"/>
+              <a:t>I record this information in the official logbook of the class after the lesson.</a:t>
+            </a:r>
+            <a:endParaRPr lang="en-US" dirty="0"/>
+          </a:p>
+        </p:txBody>
+      </p:sp>
+      <p:sp>
+        <p:nvSpPr>
+          <p:cNvPr id="4" name="Slide Number Placeholder 3"/>
+          <p:cNvSpPr>
+            <a:spLocks noGrp="1"/>
+          </p:cNvSpPr>
+          <p:nvPr>
+            <p:ph type="sldNum" sz="quarter" idx="10"/>
+          </p:nvPr>
+        </p:nvSpPr>
+        <p:spPr/>
+        <p:txBody>
+          <a:bodyPr/>
+          <a:lstStyle/>
+          <a:p>
+            <a:fld id="{F7021451-1387-4CA6-816F-3879F97B5CBC}" type="slidenum">
+              <a:rPr lang="en-US"/>
+              <a:t>58</a:t>
+            </a:fld>
+            <a:endParaRPr lang="en-US"/>
+          </a:p>
+        </p:txBody>
+      </p:sp>
+    </p:spTree>
+    <p:extLst>
+      <p:ext uri="{BB962C8B-B14F-4D97-AF65-F5344CB8AC3E}">
+        <p14:creationId xmlns:p14="http://schemas.microsoft.com/office/powerpoint/2010/main" val="1024086991"/>
+      </p:ext>
+    </p:extLst>
+  </p:cSld>
+  <p:clrMapOvr>
+    <a:masterClrMapping/>
+  </p:clrMapOvr>
+</p:notes>
+</file>
+
+<file path=ppt/notesSlides/notesSlide59.xml><?xml version="1.0" encoding="utf-8"?>
+<p:notes xmlns:a="http://schemas.openxmlformats.org/drawingml/2006/main" xmlns:r="http://schemas.openxmlformats.org/officeDocument/2006/relationships" xmlns:p="http://schemas.openxmlformats.org/presentationml/2006/main">
+  <p:cSld>
+    <p:spTree>
+      <p:nvGrpSpPr>
+        <p:cNvPr id="1" name=""/>
+        <p:cNvGrpSpPr/>
+        <p:nvPr/>
+      </p:nvGrpSpPr>
+      <p:grpSpPr>
+        <a:xfrm>
+          <a:off x="0" y="0"/>
+          <a:ext cx="0" cy="0"/>
+          <a:chOff x="0" y="0"/>
+          <a:chExt cx="0" cy="0"/>
+        </a:xfrm>
+      </p:grpSpPr>
+      <p:sp>
+        <p:nvSpPr>
+          <p:cNvPr id="2" name="Slide Image Placeholder 1"/>
+          <p:cNvSpPr>
+            <a:spLocks noGrp="1" noRot="1" noChangeAspect="1"/>
+          </p:cNvSpPr>
+          <p:nvPr>
+            <p:ph type="sldImg"/>
+          </p:nvPr>
+        </p:nvSpPr>
+        <p:spPr/>
+      </p:sp>
+      <p:sp>
+        <p:nvSpPr>
+          <p:cNvPr id="3" name="Notes Placeholder 2"/>
+          <p:cNvSpPr>
+            <a:spLocks noGrp="1"/>
+          </p:cNvSpPr>
+          <p:nvPr>
+            <p:ph type="body" idx="1"/>
+          </p:nvPr>
+        </p:nvSpPr>
+        <p:spPr/>
+        <p:txBody>
+          <a:bodyPr/>
+          <a:lstStyle/>
+          <a:p>
+            <a:r>
+              <a:rPr lang="en-US" dirty="0"/>
+              <a:t>I complete the second page of the logbook: the matter taught, the evaluation, the homework and the attendance.</a:t>
+            </a:r>
+            <a:endParaRPr lang="en-US" dirty="0"/>
+          </a:p>
+        </p:txBody>
+      </p:sp>
+      <p:sp>
+        <p:nvSpPr>
+          <p:cNvPr id="4" name="Slide Number Placeholder 3"/>
+          <p:cNvSpPr>
+            <a:spLocks noGrp="1"/>
+          </p:cNvSpPr>
+          <p:nvPr>
+            <p:ph type="sldNum" sz="quarter" idx="10"/>
+          </p:nvPr>
+        </p:nvSpPr>
+        <p:spPr/>
+        <p:txBody>
+          <a:bodyPr/>
+          <a:lstStyle/>
+          <a:p>
+            <a:fld id="{F7021451-1387-4CA6-816F-3879F97B5CBC}" type="slidenum">
+              <a:rPr lang="en-US"/>
+              <a:t>59</a:t>
             </a:fld>
             <a:endParaRPr lang="en-US"/>
           </a:p>
@@ -5264,6 +5445,270 @@
 </p:notes>
 </file>
 
+<file path=ppt/notesSlides/notesSlide60.xml><?xml version="1.0" encoding="utf-8"?>
+<p:notes xmlns:a="http://schemas.openxmlformats.org/drawingml/2006/main" xmlns:r="http://schemas.openxmlformats.org/officeDocument/2006/relationships" xmlns:p="http://schemas.openxmlformats.org/presentationml/2006/main">
+  <p:cSld>
+    <p:spTree>
+      <p:nvGrpSpPr>
+        <p:cNvPr id="1" name=""/>
+        <p:cNvGrpSpPr/>
+        <p:nvPr/>
+      </p:nvGrpSpPr>
+      <p:grpSpPr>
+        <a:xfrm>
+          <a:off x="0" y="0"/>
+          <a:ext cx="0" cy="0"/>
+          <a:chOff x="0" y="0"/>
+          <a:chExt cx="0" cy="0"/>
+        </a:xfrm>
+      </p:grpSpPr>
+      <p:sp>
+        <p:nvSpPr>
+          <p:cNvPr id="2" name="Slide Image Placeholder 1"/>
+          <p:cNvSpPr>
+            <a:spLocks noGrp="1" noRot="1" noChangeAspect="1"/>
+          </p:cNvSpPr>
+          <p:nvPr>
+            <p:ph type="sldImg"/>
+          </p:nvPr>
+        </p:nvSpPr>
+        <p:spPr/>
+      </p:sp>
+      <p:sp>
+        <p:nvSpPr>
+          <p:cNvPr id="3" name="Notes Placeholder 2"/>
+          <p:cNvSpPr>
+            <a:spLocks noGrp="1"/>
+          </p:cNvSpPr>
+          <p:nvPr>
+            <p:ph type="body" idx="1"/>
+          </p:nvPr>
+        </p:nvSpPr>
+        <p:spPr/>
+        <p:txBody>
+          <a:bodyPr/>
+          <a:lstStyle/>
+          <a:p>
+            <a:r>
+              <a:rPr lang="en-US" dirty="0"/>
+              <a:t>This slide is for me, the teacher: it gives the timing of the lesson and what to do if the projector is not available.</a:t>
+            </a:r>
+            <a:endParaRPr lang="en-US" dirty="0"/>
+          </a:p>
+        </p:txBody>
+      </p:sp>
+      <p:sp>
+        <p:nvSpPr>
+          <p:cNvPr id="4" name="Slide Number Placeholder 3"/>
+          <p:cNvSpPr>
+            <a:spLocks noGrp="1"/>
+          </p:cNvSpPr>
+          <p:nvPr>
+            <p:ph type="sldNum" sz="quarter" idx="10"/>
+          </p:nvPr>
+        </p:nvSpPr>
+        <p:spPr/>
+        <p:txBody>
+          <a:bodyPr/>
+          <a:lstStyle/>
+          <a:p>
+            <a:fld id="{F7021451-1387-4CA6-816F-3879F97B5CBC}" type="slidenum">
+              <a:rPr lang="en-US"/>
+              <a:t>60</a:t>
+            </a:fld>
+            <a:endParaRPr lang="en-US"/>
+          </a:p>
+        </p:txBody>
+      </p:sp>
+    </p:spTree>
+    <p:extLst>
+      <p:ext uri="{BB962C8B-B14F-4D97-AF65-F5344CB8AC3E}">
+        <p14:creationId xmlns:p14="http://schemas.microsoft.com/office/powerpoint/2010/main" val="1024086991"/>
+      </p:ext>
+    </p:extLst>
+  </p:cSld>
+  <p:clrMapOvr>
+    <a:masterClrMapping/>
+  </p:clrMapOvr>
+</p:notes>
+</file>
+
+<file path=ppt/notesSlides/notesSlide61.xml><?xml version="1.0" encoding="utf-8"?>
+<p:notes xmlns:a="http://schemas.openxmlformats.org/drawingml/2006/main" xmlns:r="http://schemas.openxmlformats.org/officeDocument/2006/relationships" xmlns:p="http://schemas.openxmlformats.org/presentationml/2006/main">
+  <p:cSld>
+    <p:spTree>
+      <p:nvGrpSpPr>
+        <p:cNvPr id="1" name=""/>
+        <p:cNvGrpSpPr/>
+        <p:nvPr/>
+      </p:nvGrpSpPr>
+      <p:grpSpPr>
+        <a:xfrm>
+          <a:off x="0" y="0"/>
+          <a:ext cx="0" cy="0"/>
+          <a:chOff x="0" y="0"/>
+          <a:chExt cx="0" cy="0"/>
+        </a:xfrm>
+      </p:grpSpPr>
+      <p:sp>
+        <p:nvSpPr>
+          <p:cNvPr id="2" name="Slide Image Placeholder 1"/>
+          <p:cNvSpPr>
+            <a:spLocks noGrp="1" noRot="1" noChangeAspect="1"/>
+          </p:cNvSpPr>
+          <p:nvPr>
+            <p:ph type="sldImg"/>
+          </p:nvPr>
+        </p:nvSpPr>
+        <p:spPr/>
+      </p:sp>
+      <p:sp>
+        <p:nvSpPr>
+          <p:cNvPr id="3" name="Notes Placeholder 2"/>
+          <p:cNvSpPr>
+            <a:spLocks noGrp="1"/>
+          </p:cNvSpPr>
+          <p:nvPr>
+            <p:ph type="body" idx="1"/>
+          </p:nvPr>
+        </p:nvSpPr>
+        <p:spPr/>
+        <p:txBody>
+          <a:bodyPr/>
+          <a:lstStyle/>
+          <a:p>
+            <a:r>
+              <a:rPr lang="en-US" dirty="0"/>
+              <a:t>Take your time to copy this part; we will continue together.</a:t>
+            </a:r>
+            <a:endParaRPr lang="en-US" dirty="0"/>
+          </a:p>
+        </p:txBody>
+      </p:sp>
+      <p:sp>
+        <p:nvSpPr>
+          <p:cNvPr id="4" name="Slide Number Placeholder 3"/>
+          <p:cNvSpPr>
+            <a:spLocks noGrp="1"/>
+          </p:cNvSpPr>
+          <p:nvPr>
+            <p:ph type="sldNum" sz="quarter" idx="10"/>
+          </p:nvPr>
+        </p:nvSpPr>
+        <p:spPr/>
+        <p:txBody>
+          <a:bodyPr/>
+          <a:lstStyle/>
+          <a:p>
+            <a:fld id="{F7021451-1387-4CA6-816F-3879F97B5CBC}" type="slidenum">
+              <a:rPr lang="en-US"/>
+              <a:t>61</a:t>
+            </a:fld>
+            <a:endParaRPr lang="en-US"/>
+          </a:p>
+        </p:txBody>
+      </p:sp>
+    </p:spTree>
+    <p:extLst>
+      <p:ext uri="{BB962C8B-B14F-4D97-AF65-F5344CB8AC3E}">
+        <p14:creationId xmlns:p14="http://schemas.microsoft.com/office/powerpoint/2010/main" val="1024086991"/>
+      </p:ext>
+    </p:extLst>
+  </p:cSld>
+  <p:clrMapOvr>
+    <a:masterClrMapping/>
+  </p:clrMapOvr>
+</p:notes>
+</file>
+
+<file path=ppt/notesSlides/notesSlide62.xml><?xml version="1.0" encoding="utf-8"?>
+<p:notes xmlns:a="http://schemas.openxmlformats.org/drawingml/2006/main" xmlns:r="http://schemas.openxmlformats.org/officeDocument/2006/relationships" xmlns:p="http://schemas.openxmlformats.org/presentationml/2006/main">
+  <p:cSld>
+    <p:spTree>
+      <p:nvGrpSpPr>
+        <p:cNvPr id="1" name=""/>
+        <p:cNvGrpSpPr/>
+        <p:nvPr/>
+      </p:nvGrpSpPr>
+      <p:grpSpPr>
+        <a:xfrm>
+          <a:off x="0" y="0"/>
+          <a:ext cx="0" cy="0"/>
+          <a:chOff x="0" y="0"/>
+          <a:chExt cx="0" cy="0"/>
+        </a:xfrm>
+      </p:grpSpPr>
+      <p:sp>
+        <p:nvSpPr>
+          <p:cNvPr id="2" name="Slide Image Placeholder 1"/>
+          <p:cNvSpPr>
+            <a:spLocks noGrp="1" noRot="1" noChangeAspect="1"/>
+          </p:cNvSpPr>
+          <p:nvPr>
+            <p:ph type="sldImg"/>
+          </p:nvPr>
+        </p:nvSpPr>
+        <p:spPr/>
+      </p:sp>
+      <p:sp>
+        <p:nvSpPr>
+          <p:cNvPr id="3" name="Notes Placeholder 2"/>
+          <p:cNvSpPr>
+            <a:spLocks noGrp="1"/>
+          </p:cNvSpPr>
+          <p:nvPr>
+            <p:ph type="body" idx="1"/>
+          </p:nvPr>
+        </p:nvSpPr>
+        <p:spPr/>
+        <p:txBody>
+          <a:bodyPr/>
+          <a:lstStyle/>
+          <a:p>
+            <a:r>
+              <a:rPr lang="en-US" dirty="0"/>
+              <a:t>These are the references and picture credits used to prepare this lesson.</a:t>
+            </a:r>
+            <a:endParaRPr lang="en-US" dirty="0"/>
+          </a:p>
+        </p:txBody>
+      </p:sp>
+      <p:sp>
+        <p:nvSpPr>
+          <p:cNvPr id="4" name="Slide Number Placeholder 3"/>
+          <p:cNvSpPr>
+            <a:spLocks noGrp="1"/>
+          </p:cNvSpPr>
+          <p:nvPr>
+            <p:ph type="sldNum" sz="quarter" idx="10"/>
+          </p:nvPr>
+        </p:nvSpPr>
+        <p:spPr/>
+        <p:txBody>
+          <a:bodyPr/>
+          <a:lstStyle/>
+          <a:p>
+            <a:fld id="{F7021451-1387-4CA6-816F-3879F97B5CBC}" type="slidenum">
+              <a:rPr lang="en-US"/>
+              <a:t>62</a:t>
+            </a:fld>
+            <a:endParaRPr lang="en-US"/>
+          </a:p>
+        </p:txBody>
+      </p:sp>
+    </p:spTree>
+    <p:extLst>
+      <p:ext uri="{BB962C8B-B14F-4D97-AF65-F5344CB8AC3E}">
+        <p14:creationId xmlns:p14="http://schemas.microsoft.com/office/powerpoint/2010/main" val="1024086991"/>
+      </p:ext>
+    </p:extLst>
+  </p:cSld>
+  <p:clrMapOvr>
+    <a:masterClrMapping/>
+  </p:clrMapOvr>
+</p:notes>
+</file>
+
 <file path=ppt/notesSlides/notesSlide7.xml><?xml version="1.0" encoding="utf-8"?>
 <p:notes xmlns:a="http://schemas.openxmlformats.org/drawingml/2006/main" xmlns:r="http://schemas.openxmlformats.org/officeDocument/2006/relationships" xmlns:p="http://schemas.openxmlformats.org/presentationml/2006/main">
   <p:cSld>
@@ -5310,7 +5755,7 @@
           <a:p>
             <a:r>
               <a:rPr lang="en-US" dirty="0"/>
-              <a:t>By the end of this lesson, you should be able to do three things. Number 1: explain the process of volcanism. Number 2: describe the products of volcanoes. Number 3: explain the different types of volcanic cones and depressions.</a:t>
+              <a:t>Take your time to copy this part; we will continue together.</a:t>
             </a:r>
             <a:endParaRPr lang="en-US" dirty="0"/>
           </a:p>
@@ -5398,7 +5843,7 @@
           <a:p>
             <a:r>
               <a:rPr lang="en-US" dirty="0"/>
-              <a:t>Let us first remember what you already know. Magma rises at plate margins and hot spots. Mount Cameroon is an active volcano. Keep this in mind, because we shall build on it today.</a:t>
+              <a:t>By the end of this lesson, you should be able to do four things. Number 1: define volcanism, magma and lava. Number 2: distinguish active, dormant and extinct volcanoes. Number 3: describe the products of an eruption. Number 4: explain the formation of volcanic cones and other landforms.</a:t>
             </a:r>
             <a:endParaRPr lang="en-US" dirty="0"/>
           </a:p>
@@ -5486,7 +5931,7 @@
           <a:p>
             <a:r>
               <a:rPr lang="en-US" dirty="0"/>
-              <a:t>Listen carefully to this situation from real life. In 2000, lava from Mount Cameroon flowed towards the road near Bakingili. Some visitors are surprised that the mountain has gentle slopes, while pictures of Mount Fuji show a steep cone. Think about it, because I am going to ask you some questions.</a:t>
+              <a:t>Let us first remember what you already know. Magma rises at weak zones of the crust. Mount Cameroon is on the Cameroon Volcanic Line. Shield volcanoes have gentle slopes. Keep this in mind, because we shall build on it today.</a:t>
             </a:r>
             <a:endParaRPr lang="en-US" dirty="0"/>
           </a:p>
@@ -6866,7 +7311,7 @@
         <p:spPr>
           <a:xfrm>
             <a:off x="0" y="658368"/>
-            <a:ext cx="5120640" cy="5833872"/>
+            <a:ext cx="2468880" cy="5833872"/>
           </a:xfrm>
           <a:prstGeom prst="rect">
             <a:avLst/>
@@ -6881,8 +7326,8 @@
         </p:nvSpPr>
         <p:spPr>
           <a:xfrm>
-            <a:off x="5349240" y="1005840"/>
-            <a:ext cx="6522415" cy="731520"/>
+            <a:off x="2697480" y="1005840"/>
+            <a:ext cx="9174175" cy="731520"/>
           </a:xfrm>
           <a:prstGeom prst="rect">
             <a:avLst/>
@@ -6908,7 +7353,7 @@
                 <a:ea typeface="Times New Roman" pitchFamily="34" charset="-122"/>
                 <a:cs typeface="Times New Roman" pitchFamily="34" charset="-120"/>
               </a:rPr>
-              <a:t>Situation: Question 1</a:t>
+              <a:t>Situation in Real Life</a:t>
             </a:r>
             <a:endParaRPr lang="en-US" sz="3600" dirty="0"/>
           </a:p>
@@ -6922,8 +7367,8 @@
         </p:nvSpPr>
         <p:spPr>
           <a:xfrm>
-            <a:off x="5349240" y="1783080"/>
-            <a:ext cx="6522415" cy="4663440"/>
+            <a:off x="2697480" y="1783080"/>
+            <a:ext cx="9174175" cy="4663440"/>
           </a:xfrm>
           <a:prstGeom prst="rect">
             <a:avLst/>
@@ -6950,7 +7395,27 @@
                 <a:ea typeface="Times New Roman" pitchFamily="34" charset="-122"/>
                 <a:cs typeface="Times New Roman" pitchFamily="34" charset="-120"/>
               </a:rPr>
-              <a:t>What is the problem in the situation?</a:t>
+              <a:t>The news says that Mount Cameroon shows signs of activity, with rumbling and smoke near its peak.</a:t>
+            </a:r>
+            <a:endParaRPr lang="en-US" sz="4000" dirty="0"/>
+          </a:p>
+          <a:p>
+            <a:pPr algn="l" indent="0" marL="0">
+              <a:spcAft>
+                <a:spcPts val="800"/>
+              </a:spcAft>
+              <a:buNone/>
+            </a:pPr>
+            <a:r>
+              <a:rPr lang="en-US" sz="4000" dirty="0">
+                <a:solidFill>
+                  <a:srgbClr val="111111"/>
+                </a:solidFill>
+                <a:latin typeface="Times New Roman" pitchFamily="34" charset="0"/>
+                <a:ea typeface="Times New Roman" pitchFamily="34" charset="-122"/>
+                <a:cs typeface="Times New Roman" pitchFamily="34" charset="-120"/>
+              </a:rPr>
+              <a:t>Your uncle in Mokolo says: "Don't worry, the peak of Rhumsiki near here looks like a volcano, but it has been silent for millions of years."</a:t>
             </a:r>
             <a:endParaRPr lang="en-US" sz="4000" dirty="0"/>
           </a:p>
@@ -7127,7 +7592,7 @@
                 <a:ea typeface="Times New Roman" pitchFamily="34" charset="-122"/>
                 <a:cs typeface="Times New Roman" pitchFamily="34" charset="-120"/>
               </a:rPr>
-              <a:t>Answer</a:t>
+              <a:t>Situation in Real Life (continued)</a:t>
             </a:r>
             <a:endParaRPr lang="en-US" sz="3600" dirty="0"/>
           </a:p>
@@ -7169,7 +7634,7 @@
                 <a:ea typeface="Times New Roman" pitchFamily="34" charset="-122"/>
                 <a:cs typeface="Times New Roman" pitchFamily="34" charset="-120"/>
               </a:rPr>
-              <a:t>The visitors do not know why volcanoes have different shapes.</a:t>
+              <a:t>You ask: "Why is one mountain active and the other a quiet rocky peak, and why do volcanoes have different shapes?"</a:t>
             </a:r>
             <a:endParaRPr lang="en-US" sz="4000" dirty="0"/>
           </a:p>
@@ -7346,7 +7811,7 @@
                 <a:ea typeface="Times New Roman" pitchFamily="34" charset="-122"/>
                 <a:cs typeface="Times New Roman" pitchFamily="34" charset="-120"/>
               </a:rPr>
-              <a:t>Situation: Question 2</a:t>
+              <a:t>Situation: Question 1</a:t>
             </a:r>
             <a:endParaRPr lang="en-US" sz="3600" dirty="0"/>
           </a:p>
@@ -7388,7 +7853,7 @@
                 <a:ea typeface="Times New Roman" pitchFamily="34" charset="-122"/>
                 <a:cs typeface="Times New Roman" pitchFamily="34" charset="-120"/>
               </a:rPr>
-              <a:t>What came out of Mount Cameroon in 2000?</a:t>
+              <a:t>What is the problem in the situation?</a:t>
             </a:r>
             <a:endParaRPr lang="en-US" sz="4000" dirty="0"/>
           </a:p>
@@ -7607,7 +8072,7 @@
                 <a:ea typeface="Times New Roman" pitchFamily="34" charset="-122"/>
                 <a:cs typeface="Times New Roman" pitchFamily="34" charset="-120"/>
               </a:rPr>
-              <a:t>Lava.</a:t>
+              <a:t>The learner does not know the life cycle of volcanoes and the causes of their shapes.</a:t>
             </a:r>
             <a:endParaRPr lang="en-US" sz="4000" dirty="0"/>
           </a:p>
@@ -7784,7 +8249,7 @@
                 <a:ea typeface="Times New Roman" pitchFamily="34" charset="-122"/>
                 <a:cs typeface="Times New Roman" pitchFamily="34" charset="-120"/>
               </a:rPr>
-              <a:t>Situation: Question 3</a:t>
+              <a:t>Situation: Question 2</a:t>
             </a:r>
             <a:endParaRPr lang="en-US" sz="3600" dirty="0"/>
           </a:p>
@@ -7826,7 +8291,7 @@
                 <a:ea typeface="Times New Roman" pitchFamily="34" charset="-122"/>
                 <a:cs typeface="Times New Roman" pitchFamily="34" charset="-120"/>
               </a:rPr>
-              <a:t>What decides the shape of a volcano?</a:t>
+              <a:t>What is the process of molten rock reaching the surface called?</a:t>
             </a:r>
             <a:endParaRPr lang="en-US" sz="4000" dirty="0"/>
           </a:p>
@@ -8003,7 +8468,7 @@
                 <a:ea typeface="Times New Roman" pitchFamily="34" charset="-122"/>
                 <a:cs typeface="Times New Roman" pitchFamily="34" charset="-120"/>
               </a:rPr>
-              <a:t>Possible Answer</a:t>
+              <a:t>Answer</a:t>
             </a:r>
             <a:endParaRPr lang="en-US" sz="3600" dirty="0"/>
           </a:p>
@@ -8045,7 +8510,7 @@
                 <a:ea typeface="Times New Roman" pitchFamily="34" charset="-122"/>
                 <a:cs typeface="Times New Roman" pitchFamily="34" charset="-120"/>
               </a:rPr>
-              <a:t>The type of lava and the type of eruption.</a:t>
+              <a:t>Volcanism (vulcanicity).</a:t>
             </a:r>
             <a:endParaRPr lang="en-US" sz="4000" dirty="0"/>
           </a:p>
@@ -8157,7 +8622,7 @@
                 <a:ea typeface="Calibri" pitchFamily="34" charset="-122"/>
                 <a:cs typeface="Calibri" pitchFamily="34" charset="-120"/>
               </a:rPr>
-              <a:t>ACTION TO TAKE</a:t>
+              <a:t>REAL-LIFE SITUATION</a:t>
             </a:r>
             <a:endParaRPr lang="en-US" sz="1400" dirty="0"/>
           </a:p>
@@ -8222,7 +8687,7 @@
                 <a:ea typeface="Times New Roman" pitchFamily="34" charset="-122"/>
                 <a:cs typeface="Times New Roman" pitchFamily="34" charset="-120"/>
               </a:rPr>
-              <a:t>Action to Take</a:t>
+              <a:t>Situation: Question 3</a:t>
             </a:r>
             <a:endParaRPr lang="en-US" sz="3600" dirty="0"/>
           </a:p>
@@ -8264,7 +8729,7 @@
                 <a:ea typeface="Times New Roman" pitchFamily="34" charset="-122"/>
                 <a:cs typeface="Times New Roman" pitchFamily="34" charset="-120"/>
               </a:rPr>
-              <a:t>Recognise volcanic landforms in Cameroon and understand how they formed.</a:t>
+              <a:t>Why is Mount Cameroon active and Rhumsiki not?</a:t>
             </a:r>
             <a:endParaRPr lang="en-US" sz="4000" dirty="0"/>
           </a:p>
@@ -8376,7 +8841,7 @@
                 <a:ea typeface="Calibri" pitchFamily="34" charset="-122"/>
                 <a:cs typeface="Calibri" pitchFamily="34" charset="-120"/>
               </a:rPr>
-              <a:t>JUSTIFICATION</a:t>
+              <a:t>REAL-LIFE SITUATION</a:t>
             </a:r>
             <a:endParaRPr lang="en-US" sz="1400" dirty="0"/>
           </a:p>
@@ -8441,7 +8906,7 @@
                 <a:ea typeface="Times New Roman" pitchFamily="34" charset="-122"/>
                 <a:cs typeface="Times New Roman" pitchFamily="34" charset="-120"/>
               </a:rPr>
-              <a:t>Justification of the Lesson</a:t>
+              <a:t>Possible Answer</a:t>
             </a:r>
             <a:endParaRPr lang="en-US" sz="3600" dirty="0"/>
           </a:p>
@@ -8483,7 +8948,7 @@
                 <a:ea typeface="Times New Roman" pitchFamily="34" charset="-122"/>
                 <a:cs typeface="Times New Roman" pitchFamily="34" charset="-120"/>
               </a:rPr>
-              <a:t>This lesson helps us to understand how volcanoes form and why their landforms differ.</a:t>
+              <a:t>Mount Cameroon erupted recently; Rhumsiki is the remains of an extinct volcano.</a:t>
             </a:r>
             <a:endParaRPr lang="en-US" sz="4000" dirty="0"/>
           </a:p>
@@ -8595,54 +9060,15 @@
                 <a:ea typeface="Calibri" pitchFamily="34" charset="-122"/>
                 <a:cs typeface="Calibri" pitchFamily="34" charset="-120"/>
               </a:rPr>
-              <a:t>1. MEANING AND PROCESS</a:t>
+              <a:t>ACTION TO TAKE</a:t>
             </a:r>
             <a:endParaRPr lang="en-US" sz="1400" dirty="0"/>
-          </a:p>
-        </p:txBody>
-      </p:sp>
-      <p:sp>
-        <p:nvSpPr>
-          <p:cNvPr id="3" name="Text 1"/>
-          <p:cNvSpPr/>
-          <p:nvPr/>
-        </p:nvSpPr>
-        <p:spPr>
-          <a:xfrm>
-            <a:off x="457200" y="1005840"/>
-            <a:ext cx="11277295" cy="731520"/>
-          </a:xfrm>
-          <a:prstGeom prst="rect">
-            <a:avLst/>
-          </a:prstGeom>
-          <a:noFill/>
-          <a:ln/>
-        </p:spPr>
-        <p:txBody>
-          <a:bodyPr wrap="square" lIns="0" tIns="0" rIns="0" bIns="0" rtlCol="0" anchor="ctr"/>
-          <a:lstStyle/>
-          <a:p>
-            <a:pPr algn="ctr" indent="0" marL="0">
-              <a:buNone/>
-            </a:pPr>
-            <a:r>
-              <a:rPr lang="en-US" sz="3600" b="1" dirty="0">
-                <a:solidFill>
-                  <a:srgbClr val="990011"/>
-                </a:solidFill>
-                <a:latin typeface="Times New Roman" pitchFamily="34" charset="0"/>
-                <a:ea typeface="Times New Roman" pitchFamily="34" charset="-122"/>
-                <a:cs typeface="Times New Roman" pitchFamily="34" charset="-120"/>
-              </a:rPr>
-              <a:t>Activity 1</a:t>
-            </a:r>
-            <a:endParaRPr lang="en-US" sz="3600" dirty="0"/>
           </a:p>
         </p:txBody>
       </p:sp>
       <p:pic>
         <p:nvPicPr>
-          <p:cNvPr id="4" name="Image 0" descr="/home/claude/f4/img/v2/lsa_pahoehoe.jpg">    </p:cNvPr>
+          <p:cNvPr id="3" name="Image 0" descr="/home/claude/f4/img/minesec_sheet.png">    </p:cNvPr>
           <p:cNvPicPr>
             <a:picLocks noChangeAspect="1"/>
           </p:cNvPicPr>
@@ -8656,8 +9082,8 @@
         </p:blipFill>
         <p:spPr>
           <a:xfrm>
-            <a:off x="2246610" y="1783080"/>
-            <a:ext cx="7698475" cy="4270248"/>
+            <a:off x="0" y="658368"/>
+            <a:ext cx="5120640" cy="5833872"/>
           </a:xfrm>
           <a:prstGeom prst="rect">
             <a:avLst/>
@@ -8666,14 +9092,14 @@
       </p:pic>
       <p:sp>
         <p:nvSpPr>
-          <p:cNvPr id="5" name="Text 2"/>
+          <p:cNvPr id="4" name="Text 1"/>
           <p:cNvSpPr/>
           <p:nvPr/>
         </p:nvSpPr>
         <p:spPr>
           <a:xfrm>
-            <a:off x="457200" y="6089904"/>
-            <a:ext cx="11277295" cy="347472"/>
+            <a:off x="5349240" y="1005840"/>
+            <a:ext cx="6522415" cy="731520"/>
           </a:xfrm>
           <a:prstGeom prst="rect">
             <a:avLst/>
@@ -8682,24 +9108,68 @@
           <a:ln/>
         </p:spPr>
         <p:txBody>
-          <a:bodyPr wrap="square" lIns="0" tIns="0" rIns="0" bIns="0" rtlCol="0" anchor="ctr"/>
+          <a:bodyPr wrap="square" lIns="0" tIns="0" rIns="0" bIns="0" rtlCol="0" anchor="ctr">
+            <a:normAutofit/>
+          </a:bodyPr>
           <a:lstStyle/>
           <a:p>
             <a:pPr algn="ctr" indent="0" marL="0">
               <a:buNone/>
             </a:pPr>
             <a:r>
-              <a:rPr lang="en-US" sz="1800" i="1" dirty="0">
-                <a:solidFill>
-                  <a:srgbClr val="555555"/>
+              <a:rPr lang="en-US" sz="3600" b="1" dirty="0">
+                <a:solidFill>
+                  <a:srgbClr val="990011"/>
                 </a:solidFill>
                 <a:latin typeface="Times New Roman" pitchFamily="34" charset="0"/>
                 <a:ea typeface="Times New Roman" pitchFamily="34" charset="-122"/>
                 <a:cs typeface="Times New Roman" pitchFamily="34" charset="-120"/>
               </a:rPr>
-              <a:t>A flow of hot lava.</a:t>
-            </a:r>
-            <a:endParaRPr lang="en-US" sz="1800" dirty="0"/>
+              <a:t>Action to Take</a:t>
+            </a:r>
+            <a:endParaRPr lang="en-US" sz="3600" dirty="0"/>
+          </a:p>
+        </p:txBody>
+      </p:sp>
+      <p:sp>
+        <p:nvSpPr>
+          <p:cNvPr id="5" name="Text 2"/>
+          <p:cNvSpPr/>
+          <p:nvPr/>
+        </p:nvSpPr>
+        <p:spPr>
+          <a:xfrm>
+            <a:off x="5349240" y="1783080"/>
+            <a:ext cx="6522415" cy="4663440"/>
+          </a:xfrm>
+          <a:prstGeom prst="rect">
+            <a:avLst/>
+          </a:prstGeom>
+          <a:noFill/>
+          <a:ln/>
+        </p:spPr>
+        <p:txBody>
+          <a:bodyPr wrap="square" lIns="0" tIns="0" rIns="0" bIns="0" rtlCol="0" anchor="t"/>
+          <a:lstStyle/>
+          <a:p>
+            <a:pPr algn="l" indent="0" marL="0">
+              <a:spcAft>
+                <a:spcPts val="800"/>
+              </a:spcAft>
+              <a:buNone/>
+            </a:pPr>
+            <a:r>
+              <a:rPr lang="en-US" sz="4000" dirty="0">
+                <a:solidFill>
+                  <a:srgbClr val="111111"/>
+                </a:solidFill>
+                <a:latin typeface="Times New Roman" pitchFamily="34" charset="0"/>
+                <a:ea typeface="Times New Roman" pitchFamily="34" charset="-122"/>
+                <a:cs typeface="Times New Roman" pitchFamily="34" charset="-120"/>
+              </a:rPr>
+              <a:t>Recognise volcanic landforms and rocks in Cameroon.</a:t>
+            </a:r>
+            <a:endParaRPr lang="en-US" sz="4000" dirty="0"/>
           </a:p>
         </p:txBody>
       </p:sp>
@@ -8809,7 +9279,7 @@
                 <a:ea typeface="Calibri" pitchFamily="34" charset="-122"/>
                 <a:cs typeface="Calibri" pitchFamily="34" charset="-120"/>
               </a:rPr>
-              <a:t>1. MEANING AND PROCESS</a:t>
+              <a:t>JUSTIFICATION</a:t>
             </a:r>
             <a:endParaRPr lang="en-US" sz="1400" dirty="0"/>
           </a:p>
@@ -8874,7 +9344,7 @@
                 <a:ea typeface="Times New Roman" pitchFamily="34" charset="-122"/>
                 <a:cs typeface="Times New Roman" pitchFamily="34" charset="-120"/>
               </a:rPr>
-              <a:t>Activity 1: Question</a:t>
+              <a:t>Justification of the Lesson</a:t>
             </a:r>
             <a:endParaRPr lang="en-US" sz="3600" dirty="0"/>
           </a:p>
@@ -8916,7 +9386,7 @@
                 <a:ea typeface="Times New Roman" pitchFamily="34" charset="-122"/>
                 <a:cs typeface="Times New Roman" pitchFamily="34" charset="-120"/>
               </a:rPr>
-              <a:t>What is the difference between magma and lava?</a:t>
+              <a:t>This lesson helps us to understand the volcanic landforms of Cameroon and the risks of active volcanoes.</a:t>
             </a:r>
             <a:endParaRPr lang="en-US" sz="4000" dirty="0"/>
           </a:p>
@@ -9623,15 +10093,54 @@
                 <a:ea typeface="Calibri" pitchFamily="34" charset="-122"/>
                 <a:cs typeface="Calibri" pitchFamily="34" charset="-120"/>
               </a:rPr>
-              <a:t>1. MEANING AND PROCESS</a:t>
+              <a:t>1. MEANING</a:t>
             </a:r>
             <a:endParaRPr lang="en-US" sz="1400" dirty="0"/>
+          </a:p>
+        </p:txBody>
+      </p:sp>
+      <p:sp>
+        <p:nvSpPr>
+          <p:cNvPr id="3" name="Text 1"/>
+          <p:cNvSpPr/>
+          <p:nvPr/>
+        </p:nvSpPr>
+        <p:spPr>
+          <a:xfrm>
+            <a:off x="457200" y="1005840"/>
+            <a:ext cx="11277295" cy="731520"/>
+          </a:xfrm>
+          <a:prstGeom prst="rect">
+            <a:avLst/>
+          </a:prstGeom>
+          <a:noFill/>
+          <a:ln/>
+        </p:spPr>
+        <p:txBody>
+          <a:bodyPr wrap="square" lIns="0" tIns="0" rIns="0" bIns="0" rtlCol="0" anchor="ctr"/>
+          <a:lstStyle/>
+          <a:p>
+            <a:pPr algn="ctr" indent="0" marL="0">
+              <a:buNone/>
+            </a:pPr>
+            <a:r>
+              <a:rPr lang="en-US" sz="3600" b="1" dirty="0">
+                <a:solidFill>
+                  <a:srgbClr val="990011"/>
+                </a:solidFill>
+                <a:latin typeface="Times New Roman" pitchFamily="34" charset="0"/>
+                <a:ea typeface="Times New Roman" pitchFamily="34" charset="-122"/>
+                <a:cs typeface="Times New Roman" pitchFamily="34" charset="-120"/>
+              </a:rPr>
+              <a:t>Activity 1</a:t>
+            </a:r>
+            <a:endParaRPr lang="en-US" sz="3600" dirty="0"/>
           </a:p>
         </p:txBody>
       </p:sp>
       <p:pic>
         <p:nvPicPr>
-          <p:cNvPr id="3" name="Image 0" descr="/home/claude/f4/img/minesec_sheet.png">    </p:cNvPr>
+          <p:cNvPr id="4" name="Image 0" descr="/home/claude/f4/img/v2/volcano_big.png">    </p:cNvPr>
           <p:cNvPicPr>
             <a:picLocks noChangeAspect="1"/>
           </p:cNvPicPr>
@@ -9645,8 +10154,8 @@
         </p:blipFill>
         <p:spPr>
           <a:xfrm>
-            <a:off x="0" y="658368"/>
-            <a:ext cx="5120640" cy="5833872"/>
+            <a:off x="629930" y="1783080"/>
+            <a:ext cx="10931835" cy="4270248"/>
           </a:xfrm>
           <a:prstGeom prst="rect">
             <a:avLst/>
@@ -9655,14 +10164,14 @@
       </p:pic>
       <p:sp>
         <p:nvSpPr>
-          <p:cNvPr id="4" name="Text 1"/>
+          <p:cNvPr id="5" name="Text 2"/>
           <p:cNvSpPr/>
           <p:nvPr/>
         </p:nvSpPr>
         <p:spPr>
           <a:xfrm>
-            <a:off x="5349240" y="1005840"/>
-            <a:ext cx="6522415" cy="731520"/>
+            <a:off x="457200" y="6089904"/>
+            <a:ext cx="11277295" cy="347472"/>
           </a:xfrm>
           <a:prstGeom prst="rect">
             <a:avLst/>
@@ -9671,68 +10180,24 @@
           <a:ln/>
         </p:spPr>
         <p:txBody>
-          <a:bodyPr wrap="square" lIns="0" tIns="0" rIns="0" bIns="0" rtlCol="0" anchor="ctr">
-            <a:normAutofit/>
-          </a:bodyPr>
+          <a:bodyPr wrap="square" lIns="0" tIns="0" rIns="0" bIns="0" rtlCol="0" anchor="ctr"/>
           <a:lstStyle/>
           <a:p>
             <a:pPr algn="ctr" indent="0" marL="0">
               <a:buNone/>
             </a:pPr>
             <a:r>
-              <a:rPr lang="en-US" sz="3600" b="1" dirty="0">
-                <a:solidFill>
-                  <a:srgbClr val="990011"/>
+              <a:rPr lang="en-US" sz="1800" i="1" dirty="0">
+                <a:solidFill>
+                  <a:srgbClr val="555555"/>
                 </a:solidFill>
                 <a:latin typeface="Times New Roman" pitchFamily="34" charset="0"/>
                 <a:ea typeface="Times New Roman" pitchFamily="34" charset="-122"/>
                 <a:cs typeface="Times New Roman" pitchFamily="34" charset="-120"/>
               </a:rPr>
-              <a:t>Activity 1: Answer</a:t>
-            </a:r>
-            <a:endParaRPr lang="en-US" sz="3600" dirty="0"/>
-          </a:p>
-        </p:txBody>
-      </p:sp>
-      <p:sp>
-        <p:nvSpPr>
-          <p:cNvPr id="5" name="Text 2"/>
-          <p:cNvSpPr/>
-          <p:nvPr/>
-        </p:nvSpPr>
-        <p:spPr>
-          <a:xfrm>
-            <a:off x="5349240" y="1783080"/>
-            <a:ext cx="6522415" cy="4663440"/>
-          </a:xfrm>
-          <a:prstGeom prst="rect">
-            <a:avLst/>
-          </a:prstGeom>
-          <a:noFill/>
-          <a:ln/>
-        </p:spPr>
-        <p:txBody>
-          <a:bodyPr wrap="square" lIns="0" tIns="0" rIns="0" bIns="0" rtlCol="0" anchor="t"/>
-          <a:lstStyle/>
-          <a:p>
-            <a:pPr algn="l" indent="0" marL="0">
-              <a:spcAft>
-                <a:spcPts val="800"/>
-              </a:spcAft>
-              <a:buNone/>
-            </a:pPr>
-            <a:r>
-              <a:rPr lang="en-US" sz="4000" dirty="0">
-                <a:solidFill>
-                  <a:srgbClr val="111111"/>
-                </a:solidFill>
-                <a:latin typeface="Times New Roman" pitchFamily="34" charset="0"/>
-                <a:ea typeface="Times New Roman" pitchFamily="34" charset="-122"/>
-                <a:cs typeface="Times New Roman" pitchFamily="34" charset="-120"/>
-              </a:rPr>
-              <a:t>Magma is melted rock underground; lava is magma that reaches the surface.</a:t>
-            </a:r>
-            <a:endParaRPr lang="en-US" sz="4000" dirty="0"/>
+              <a:t>The parts of a volcano.</a:t>
+            </a:r>
+            <a:endParaRPr lang="en-US" sz="1800" dirty="0"/>
           </a:p>
         </p:txBody>
       </p:sp>
@@ -9842,54 +10307,15 @@
                 <a:ea typeface="Calibri" pitchFamily="34" charset="-122"/>
                 <a:cs typeface="Calibri" pitchFamily="34" charset="-120"/>
               </a:rPr>
-              <a:t>2. PRODUCTS</a:t>
+              <a:t>1. MEANING</a:t>
             </a:r>
             <a:endParaRPr lang="en-US" sz="1400" dirty="0"/>
-          </a:p>
-        </p:txBody>
-      </p:sp>
-      <p:sp>
-        <p:nvSpPr>
-          <p:cNvPr id="3" name="Text 1"/>
-          <p:cNvSpPr/>
-          <p:nvPr/>
-        </p:nvSpPr>
-        <p:spPr>
-          <a:xfrm>
-            <a:off x="457200" y="1005840"/>
-            <a:ext cx="11277295" cy="731520"/>
-          </a:xfrm>
-          <a:prstGeom prst="rect">
-            <a:avLst/>
-          </a:prstGeom>
-          <a:noFill/>
-          <a:ln/>
-        </p:spPr>
-        <p:txBody>
-          <a:bodyPr wrap="square" lIns="0" tIns="0" rIns="0" bIns="0" rtlCol="0" anchor="ctr"/>
-          <a:lstStyle/>
-          <a:p>
-            <a:pPr algn="ctr" indent="0" marL="0">
-              <a:buNone/>
-            </a:pPr>
-            <a:r>
-              <a:rPr lang="en-US" sz="3600" b="1" dirty="0">
-                <a:solidFill>
-                  <a:srgbClr val="990011"/>
-                </a:solidFill>
-                <a:latin typeface="Times New Roman" pitchFamily="34" charset="0"/>
-                <a:ea typeface="Times New Roman" pitchFamily="34" charset="-122"/>
-                <a:cs typeface="Times New Roman" pitchFamily="34" charset="-120"/>
-              </a:rPr>
-              <a:t>Activity 2</a:t>
-            </a:r>
-            <a:endParaRPr lang="en-US" sz="3600" dirty="0"/>
           </a:p>
         </p:txBody>
       </p:sp>
       <p:pic>
         <p:nvPicPr>
-          <p:cNvPr id="4" name="Image 0" descr="/home/claude/f4/img/v2/volcano_big.png">    </p:cNvPr>
+          <p:cNvPr id="3" name="Image 0" descr="/home/claude/f4/img/minesec_sheet.png">    </p:cNvPr>
           <p:cNvPicPr>
             <a:picLocks noChangeAspect="1"/>
           </p:cNvPicPr>
@@ -9903,8 +10329,8 @@
         </p:blipFill>
         <p:spPr>
           <a:xfrm>
-            <a:off x="629930" y="1783080"/>
-            <a:ext cx="10931835" cy="4270248"/>
+            <a:off x="0" y="658368"/>
+            <a:ext cx="5120640" cy="5833872"/>
           </a:xfrm>
           <a:prstGeom prst="rect">
             <a:avLst/>
@@ -9913,14 +10339,14 @@
       </p:pic>
       <p:sp>
         <p:nvSpPr>
-          <p:cNvPr id="5" name="Text 2"/>
+          <p:cNvPr id="4" name="Text 1"/>
           <p:cNvSpPr/>
           <p:nvPr/>
         </p:nvSpPr>
         <p:spPr>
           <a:xfrm>
-            <a:off x="457200" y="6089904"/>
-            <a:ext cx="11277295" cy="347472"/>
+            <a:off x="5349240" y="1005840"/>
+            <a:ext cx="6522415" cy="731520"/>
           </a:xfrm>
           <a:prstGeom prst="rect">
             <a:avLst/>
@@ -9929,24 +10355,68 @@
           <a:ln/>
         </p:spPr>
         <p:txBody>
-          <a:bodyPr wrap="square" lIns="0" tIns="0" rIns="0" bIns="0" rtlCol="0" anchor="ctr"/>
+          <a:bodyPr wrap="square" lIns="0" tIns="0" rIns="0" bIns="0" rtlCol="0" anchor="ctr">
+            <a:normAutofit/>
+          </a:bodyPr>
           <a:lstStyle/>
           <a:p>
             <a:pPr algn="ctr" indent="0" marL="0">
               <a:buNone/>
             </a:pPr>
             <a:r>
-              <a:rPr lang="en-US" sz="1800" i="1" dirty="0">
-                <a:solidFill>
-                  <a:srgbClr val="555555"/>
+              <a:rPr lang="en-US" sz="3600" b="1" dirty="0">
+                <a:solidFill>
+                  <a:srgbClr val="990011"/>
                 </a:solidFill>
                 <a:latin typeface="Times New Roman" pitchFamily="34" charset="0"/>
                 <a:ea typeface="Times New Roman" pitchFamily="34" charset="-122"/>
                 <a:cs typeface="Times New Roman" pitchFamily="34" charset="-120"/>
               </a:rPr>
-              <a:t>The parts of a volcano.</a:t>
-            </a:r>
-            <a:endParaRPr lang="en-US" sz="1800" dirty="0"/>
+              <a:t>Activity 1: Question</a:t>
+            </a:r>
+            <a:endParaRPr lang="en-US" sz="3600" dirty="0"/>
+          </a:p>
+        </p:txBody>
+      </p:sp>
+      <p:sp>
+        <p:nvSpPr>
+          <p:cNvPr id="5" name="Text 2"/>
+          <p:cNvSpPr/>
+          <p:nvPr/>
+        </p:nvSpPr>
+        <p:spPr>
+          <a:xfrm>
+            <a:off x="5349240" y="1783080"/>
+            <a:ext cx="6522415" cy="4663440"/>
+          </a:xfrm>
+          <a:prstGeom prst="rect">
+            <a:avLst/>
+          </a:prstGeom>
+          <a:noFill/>
+          <a:ln/>
+        </p:spPr>
+        <p:txBody>
+          <a:bodyPr wrap="square" lIns="0" tIns="0" rIns="0" bIns="0" rtlCol="0" anchor="t"/>
+          <a:lstStyle/>
+          <a:p>
+            <a:pPr algn="l" indent="0" marL="0">
+              <a:spcAft>
+                <a:spcPts val="800"/>
+              </a:spcAft>
+              <a:buNone/>
+            </a:pPr>
+            <a:r>
+              <a:rPr lang="en-US" sz="4000" dirty="0">
+                <a:solidFill>
+                  <a:srgbClr val="111111"/>
+                </a:solidFill>
+                <a:latin typeface="Times New Roman" pitchFamily="34" charset="0"/>
+                <a:ea typeface="Times New Roman" pitchFamily="34" charset="-122"/>
+                <a:cs typeface="Times New Roman" pitchFamily="34" charset="-120"/>
+              </a:rPr>
+              <a:t>What is the difference between magma and lava?</a:t>
+            </a:r>
+            <a:endParaRPr lang="en-US" sz="4000" dirty="0"/>
           </a:p>
         </p:txBody>
       </p:sp>
@@ -10056,7 +10526,7 @@
                 <a:ea typeface="Calibri" pitchFamily="34" charset="-122"/>
                 <a:cs typeface="Calibri" pitchFamily="34" charset="-120"/>
               </a:rPr>
-              <a:t>2. PRODUCTS</a:t>
+              <a:t>1. MEANING</a:t>
             </a:r>
             <a:endParaRPr lang="en-US" sz="1400" dirty="0"/>
           </a:p>
@@ -10121,7 +10591,7 @@
                 <a:ea typeface="Times New Roman" pitchFamily="34" charset="-122"/>
                 <a:cs typeface="Times New Roman" pitchFamily="34" charset="-120"/>
               </a:rPr>
-              <a:t>Activity 2: Question</a:t>
+              <a:t>Activity 1: Answer</a:t>
             </a:r>
             <a:endParaRPr lang="en-US" sz="3600" dirty="0"/>
           </a:p>
@@ -10163,7 +10633,7 @@
                 <a:ea typeface="Times New Roman" pitchFamily="34" charset="-122"/>
                 <a:cs typeface="Times New Roman" pitchFamily="34" charset="-120"/>
               </a:rPr>
-              <a:t>Name three products of a volcano.</a:t>
+              <a:t>Magma is below the surface; lava has reached the surface.</a:t>
             </a:r>
             <a:endParaRPr lang="en-US" sz="4000" dirty="0"/>
           </a:p>
@@ -10275,15 +10745,54 @@
                 <a:ea typeface="Calibri" pitchFamily="34" charset="-122"/>
                 <a:cs typeface="Calibri" pitchFamily="34" charset="-120"/>
               </a:rPr>
-              <a:t>2. PRODUCTS</a:t>
+              <a:t>2. LIFE CYCLE</a:t>
             </a:r>
             <a:endParaRPr lang="en-US" sz="1400" dirty="0"/>
+          </a:p>
+        </p:txBody>
+      </p:sp>
+      <p:sp>
+        <p:nvSpPr>
+          <p:cNvPr id="3" name="Text 1"/>
+          <p:cNvSpPr/>
+          <p:nvPr/>
+        </p:nvSpPr>
+        <p:spPr>
+          <a:xfrm>
+            <a:off x="457200" y="1005840"/>
+            <a:ext cx="11277295" cy="731520"/>
+          </a:xfrm>
+          <a:prstGeom prst="rect">
+            <a:avLst/>
+          </a:prstGeom>
+          <a:noFill/>
+          <a:ln/>
+        </p:spPr>
+        <p:txBody>
+          <a:bodyPr wrap="square" lIns="0" tIns="0" rIns="0" bIns="0" rtlCol="0" anchor="ctr"/>
+          <a:lstStyle/>
+          <a:p>
+            <a:pPr algn="ctr" indent="0" marL="0">
+              <a:buNone/>
+            </a:pPr>
+            <a:r>
+              <a:rPr lang="en-US" sz="3600" b="1" dirty="0">
+                <a:solidFill>
+                  <a:srgbClr val="990011"/>
+                </a:solidFill>
+                <a:latin typeface="Times New Roman" pitchFamily="34" charset="0"/>
+                <a:ea typeface="Times New Roman" pitchFamily="34" charset="-122"/>
+                <a:cs typeface="Times New Roman" pitchFamily="34" charset="-120"/>
+              </a:rPr>
+              <a:t>Activity 2</a:t>
+            </a:r>
+            <a:endParaRPr lang="en-US" sz="3600" dirty="0"/>
           </a:p>
         </p:txBody>
       </p:sp>
       <p:pic>
         <p:nvPicPr>
-          <p:cNvPr id="3" name="Image 0" descr="/home/claude/f4/img/minesec_sheet.png">    </p:cNvPr>
+          <p:cNvPr id="4" name="Image 0" descr="/home/claude/f4/img/v2/lsa_mtcameroon.jpg">    </p:cNvPr>
           <p:cNvPicPr>
             <a:picLocks noChangeAspect="1"/>
           </p:cNvPicPr>
@@ -10297,8 +10806,8 @@
         </p:blipFill>
         <p:spPr>
           <a:xfrm>
-            <a:off x="0" y="658368"/>
-            <a:ext cx="5120640" cy="5833872"/>
+            <a:off x="2246610" y="1783080"/>
+            <a:ext cx="7698475" cy="4270248"/>
           </a:xfrm>
           <a:prstGeom prst="rect">
             <a:avLst/>
@@ -10307,14 +10816,14 @@
       </p:pic>
       <p:sp>
         <p:nvSpPr>
-          <p:cNvPr id="4" name="Text 1"/>
+          <p:cNvPr id="5" name="Text 2"/>
           <p:cNvSpPr/>
           <p:nvPr/>
         </p:nvSpPr>
         <p:spPr>
           <a:xfrm>
-            <a:off x="5349240" y="1005840"/>
-            <a:ext cx="6522415" cy="731520"/>
+            <a:off x="457200" y="6089904"/>
+            <a:ext cx="11277295" cy="347472"/>
           </a:xfrm>
           <a:prstGeom prst="rect">
             <a:avLst/>
@@ -10323,68 +10832,24 @@
           <a:ln/>
         </p:spPr>
         <p:txBody>
-          <a:bodyPr wrap="square" lIns="0" tIns="0" rIns="0" bIns="0" rtlCol="0" anchor="ctr">
-            <a:normAutofit/>
-          </a:bodyPr>
+          <a:bodyPr wrap="square" lIns="0" tIns="0" rIns="0" bIns="0" rtlCol="0" anchor="ctr"/>
           <a:lstStyle/>
           <a:p>
             <a:pPr algn="ctr" indent="0" marL="0">
               <a:buNone/>
             </a:pPr>
             <a:r>
-              <a:rPr lang="en-US" sz="3600" b="1" dirty="0">
-                <a:solidFill>
-                  <a:srgbClr val="990011"/>
+              <a:rPr lang="en-US" sz="1800" i="1" dirty="0">
+                <a:solidFill>
+                  <a:srgbClr val="555555"/>
                 </a:solidFill>
                 <a:latin typeface="Times New Roman" pitchFamily="34" charset="0"/>
                 <a:ea typeface="Times New Roman" pitchFamily="34" charset="-122"/>
                 <a:cs typeface="Times New Roman" pitchFamily="34" charset="-120"/>
               </a:rPr>
-              <a:t>Activity 2: Answer</a:t>
-            </a:r>
-            <a:endParaRPr lang="en-US" sz="3600" dirty="0"/>
-          </a:p>
-        </p:txBody>
-      </p:sp>
-      <p:sp>
-        <p:nvSpPr>
-          <p:cNvPr id="5" name="Text 2"/>
-          <p:cNvSpPr/>
-          <p:nvPr/>
-        </p:nvSpPr>
-        <p:spPr>
-          <a:xfrm>
-            <a:off x="5349240" y="1783080"/>
-            <a:ext cx="6522415" cy="4663440"/>
-          </a:xfrm>
-          <a:prstGeom prst="rect">
-            <a:avLst/>
-          </a:prstGeom>
-          <a:noFill/>
-          <a:ln/>
-        </p:spPr>
-        <p:txBody>
-          <a:bodyPr wrap="square" lIns="0" tIns="0" rIns="0" bIns="0" rtlCol="0" anchor="t"/>
-          <a:lstStyle/>
-          <a:p>
-            <a:pPr algn="l" indent="0" marL="0">
-              <a:spcAft>
-                <a:spcPts val="800"/>
-              </a:spcAft>
-              <a:buNone/>
-            </a:pPr>
-            <a:r>
-              <a:rPr lang="en-US" sz="4000" dirty="0">
-                <a:solidFill>
-                  <a:srgbClr val="111111"/>
-                </a:solidFill>
-                <a:latin typeface="Times New Roman" pitchFamily="34" charset="0"/>
-                <a:ea typeface="Times New Roman" pitchFamily="34" charset="-122"/>
-                <a:cs typeface="Times New Roman" pitchFamily="34" charset="-120"/>
-              </a:rPr>
-              <a:t>Lava, ash (pyroclasts) and gases.</a:t>
-            </a:r>
-            <a:endParaRPr lang="en-US" sz="4000" dirty="0"/>
+              <a:t>Mount Cameroon.</a:t>
+            </a:r>
+            <a:endParaRPr lang="en-US" sz="1800" dirty="0"/>
           </a:p>
         </p:txBody>
       </p:sp>
@@ -10494,54 +10959,15 @@
                 <a:ea typeface="Calibri" pitchFamily="34" charset="-122"/>
                 <a:cs typeface="Calibri" pitchFamily="34" charset="-120"/>
               </a:rPr>
-              <a:t>3. LANDFORMS: CONES</a:t>
+              <a:t>2. LIFE CYCLE</a:t>
             </a:r>
             <a:endParaRPr lang="en-US" sz="1400" dirty="0"/>
-          </a:p>
-        </p:txBody>
-      </p:sp>
-      <p:sp>
-        <p:nvSpPr>
-          <p:cNvPr id="3" name="Text 1"/>
-          <p:cNvSpPr/>
-          <p:nvPr/>
-        </p:nvSpPr>
-        <p:spPr>
-          <a:xfrm>
-            <a:off x="457200" y="1005840"/>
-            <a:ext cx="11277295" cy="731520"/>
-          </a:xfrm>
-          <a:prstGeom prst="rect">
-            <a:avLst/>
-          </a:prstGeom>
-          <a:noFill/>
-          <a:ln/>
-        </p:spPr>
-        <p:txBody>
-          <a:bodyPr wrap="square" lIns="0" tIns="0" rIns="0" bIns="0" rtlCol="0" anchor="ctr"/>
-          <a:lstStyle/>
-          <a:p>
-            <a:pPr algn="ctr" indent="0" marL="0">
-              <a:buNone/>
-            </a:pPr>
-            <a:r>
-              <a:rPr lang="en-US" sz="3600" b="1" dirty="0">
-                <a:solidFill>
-                  <a:srgbClr val="990011"/>
-                </a:solidFill>
-                <a:latin typeface="Times New Roman" pitchFamily="34" charset="0"/>
-                <a:ea typeface="Times New Roman" pitchFamily="34" charset="-122"/>
-                <a:cs typeface="Times New Roman" pitchFamily="34" charset="-120"/>
-              </a:rPr>
-              <a:t>Activity 3</a:t>
-            </a:r>
-            <a:endParaRPr lang="en-US" sz="3600" dirty="0"/>
           </a:p>
         </p:txBody>
       </p:sp>
       <p:pic>
         <p:nvPicPr>
-          <p:cNvPr id="4" name="Image 0" descr="/home/claude/f4/img/v2/lsa_mayon.jpg">    </p:cNvPr>
+          <p:cNvPr id="3" name="Image 0" descr="/home/claude/f4/img/minesec_sheet.png">    </p:cNvPr>
           <p:cNvPicPr>
             <a:picLocks noChangeAspect="1"/>
           </p:cNvPicPr>
@@ -10555,8 +10981,8 @@
         </p:blipFill>
         <p:spPr>
           <a:xfrm>
-            <a:off x="2246610" y="1783080"/>
-            <a:ext cx="7698475" cy="4270248"/>
+            <a:off x="0" y="658368"/>
+            <a:ext cx="5120640" cy="5833872"/>
           </a:xfrm>
           <a:prstGeom prst="rect">
             <a:avLst/>
@@ -10565,14 +10991,14 @@
       </p:pic>
       <p:sp>
         <p:nvSpPr>
-          <p:cNvPr id="5" name="Text 2"/>
+          <p:cNvPr id="4" name="Text 1"/>
           <p:cNvSpPr/>
           <p:nvPr/>
         </p:nvSpPr>
         <p:spPr>
           <a:xfrm>
-            <a:off x="457200" y="6089904"/>
-            <a:ext cx="11277295" cy="347472"/>
+            <a:off x="5349240" y="1005840"/>
+            <a:ext cx="6522415" cy="731520"/>
           </a:xfrm>
           <a:prstGeom prst="rect">
             <a:avLst/>
@@ -10581,24 +11007,68 @@
           <a:ln/>
         </p:spPr>
         <p:txBody>
-          <a:bodyPr wrap="square" lIns="0" tIns="0" rIns="0" bIns="0" rtlCol="0" anchor="ctr"/>
+          <a:bodyPr wrap="square" lIns="0" tIns="0" rIns="0" bIns="0" rtlCol="0" anchor="ctr">
+            <a:normAutofit/>
+          </a:bodyPr>
           <a:lstStyle/>
           <a:p>
             <a:pPr algn="ctr" indent="0" marL="0">
               <a:buNone/>
             </a:pPr>
             <a:r>
-              <a:rPr lang="en-US" sz="1800" i="1" dirty="0">
-                <a:solidFill>
-                  <a:srgbClr val="555555"/>
+              <a:rPr lang="en-US" sz="3600" b="1" dirty="0">
+                <a:solidFill>
+                  <a:srgbClr val="990011"/>
                 </a:solidFill>
                 <a:latin typeface="Times New Roman" pitchFamily="34" charset="0"/>
                 <a:ea typeface="Times New Roman" pitchFamily="34" charset="-122"/>
                 <a:cs typeface="Times New Roman" pitchFamily="34" charset="-120"/>
               </a:rPr>
-              <a:t>Mayon Volcano, Philippines: a steep cone of ash and lava.</a:t>
-            </a:r>
-            <a:endParaRPr lang="en-US" sz="1800" dirty="0"/>
+              <a:t>Activity 2: Question</a:t>
+            </a:r>
+            <a:endParaRPr lang="en-US" sz="3600" dirty="0"/>
+          </a:p>
+        </p:txBody>
+      </p:sp>
+      <p:sp>
+        <p:nvSpPr>
+          <p:cNvPr id="5" name="Text 2"/>
+          <p:cNvSpPr/>
+          <p:nvPr/>
+        </p:nvSpPr>
+        <p:spPr>
+          <a:xfrm>
+            <a:off x="5349240" y="1783080"/>
+            <a:ext cx="6522415" cy="4663440"/>
+          </a:xfrm>
+          <a:prstGeom prst="rect">
+            <a:avLst/>
+          </a:prstGeom>
+          <a:noFill/>
+          <a:ln/>
+        </p:spPr>
+        <p:txBody>
+          <a:bodyPr wrap="square" lIns="0" tIns="0" rIns="0" bIns="0" rtlCol="0" anchor="t"/>
+          <a:lstStyle/>
+          <a:p>
+            <a:pPr algn="l" indent="0" marL="0">
+              <a:spcAft>
+                <a:spcPts val="800"/>
+              </a:spcAft>
+              <a:buNone/>
+            </a:pPr>
+            <a:r>
+              <a:rPr lang="en-US" sz="4000" dirty="0">
+                <a:solidFill>
+                  <a:srgbClr val="111111"/>
+                </a:solidFill>
+                <a:latin typeface="Times New Roman" pitchFamily="34" charset="0"/>
+                <a:ea typeface="Times New Roman" pitchFamily="34" charset="-122"/>
+                <a:cs typeface="Times New Roman" pitchFamily="34" charset="-120"/>
+              </a:rPr>
+              <a:t>When did Mount Cameroon last erupt significantly?</a:t>
+            </a:r>
+            <a:endParaRPr lang="en-US" sz="4000" dirty="0"/>
           </a:p>
         </p:txBody>
       </p:sp>
@@ -10708,7 +11178,7 @@
                 <a:ea typeface="Calibri" pitchFamily="34" charset="-122"/>
                 <a:cs typeface="Calibri" pitchFamily="34" charset="-120"/>
               </a:rPr>
-              <a:t>3. LANDFORMS: CONES</a:t>
+              <a:t>2. LIFE CYCLE</a:t>
             </a:r>
             <a:endParaRPr lang="en-US" sz="1400" dirty="0"/>
           </a:p>
@@ -10773,7 +11243,7 @@
                 <a:ea typeface="Times New Roman" pitchFamily="34" charset="-122"/>
                 <a:cs typeface="Times New Roman" pitchFamily="34" charset="-120"/>
               </a:rPr>
-              <a:t>Activity 3: Question</a:t>
+              <a:t>Activity 2: Answer</a:t>
             </a:r>
             <a:endParaRPr lang="en-US" sz="3600" dirty="0"/>
           </a:p>
@@ -10815,7 +11285,7 @@
                 <a:ea typeface="Times New Roman" pitchFamily="34" charset="-122"/>
                 <a:cs typeface="Times New Roman" pitchFamily="34" charset="-120"/>
               </a:rPr>
-              <a:t>This cone has layers of ash and lava. What type of cone is it?</a:t>
+              <a:t>In 1999–2000 (small activity in 2012).</a:t>
             </a:r>
             <a:endParaRPr lang="en-US" sz="4000" dirty="0"/>
           </a:p>
@@ -10927,15 +11397,54 @@
                 <a:ea typeface="Calibri" pitchFamily="34" charset="-122"/>
                 <a:cs typeface="Calibri" pitchFamily="34" charset="-120"/>
               </a:rPr>
-              <a:t>3. LANDFORMS: CONES</a:t>
+              <a:t>2. LIFE CYCLE</a:t>
             </a:r>
             <a:endParaRPr lang="en-US" sz="1400" dirty="0"/>
+          </a:p>
+        </p:txBody>
+      </p:sp>
+      <p:sp>
+        <p:nvSpPr>
+          <p:cNvPr id="3" name="Text 1"/>
+          <p:cNvSpPr/>
+          <p:nvPr/>
+        </p:nvSpPr>
+        <p:spPr>
+          <a:xfrm>
+            <a:off x="457200" y="1005840"/>
+            <a:ext cx="11277295" cy="731520"/>
+          </a:xfrm>
+          <a:prstGeom prst="rect">
+            <a:avLst/>
+          </a:prstGeom>
+          <a:noFill/>
+          <a:ln/>
+        </p:spPr>
+        <p:txBody>
+          <a:bodyPr wrap="square" lIns="0" tIns="0" rIns="0" bIns="0" rtlCol="0" anchor="ctr"/>
+          <a:lstStyle/>
+          <a:p>
+            <a:pPr algn="ctr" indent="0" marL="0">
+              <a:buNone/>
+            </a:pPr>
+            <a:r>
+              <a:rPr lang="en-US" sz="3600" b="1" dirty="0">
+                <a:solidFill>
+                  <a:srgbClr val="990011"/>
+                </a:solidFill>
+                <a:latin typeface="Times New Roman" pitchFamily="34" charset="0"/>
+                <a:ea typeface="Times New Roman" pitchFamily="34" charset="-122"/>
+                <a:cs typeface="Times New Roman" pitchFamily="34" charset="-120"/>
+              </a:rPr>
+              <a:t>Activity 3</a:t>
+            </a:r>
+            <a:endParaRPr lang="en-US" sz="3600" dirty="0"/>
           </a:p>
         </p:txBody>
       </p:sp>
       <p:pic>
         <p:nvPicPr>
-          <p:cNvPr id="3" name="Image 0" descr="/home/claude/f4/img/minesec_sheet.png">    </p:cNvPr>
+          <p:cNvPr id="4" name="Image 0" descr="/home/claude/f4/img/v2/lsa_mandara.jpg">    </p:cNvPr>
           <p:cNvPicPr>
             <a:picLocks noChangeAspect="1"/>
           </p:cNvPicPr>
@@ -10949,8 +11458,8 @@
         </p:blipFill>
         <p:spPr>
           <a:xfrm>
-            <a:off x="0" y="658368"/>
-            <a:ext cx="5120640" cy="5833872"/>
+            <a:off x="274320" y="2383231"/>
+            <a:ext cx="11643055" cy="3069946"/>
           </a:xfrm>
           <a:prstGeom prst="rect">
             <a:avLst/>
@@ -10959,14 +11468,14 @@
       </p:pic>
       <p:sp>
         <p:nvSpPr>
-          <p:cNvPr id="4" name="Text 1"/>
+          <p:cNvPr id="5" name="Text 2"/>
           <p:cNvSpPr/>
           <p:nvPr/>
         </p:nvSpPr>
         <p:spPr>
           <a:xfrm>
-            <a:off x="5349240" y="1005840"/>
-            <a:ext cx="6522415" cy="731520"/>
+            <a:off x="457200" y="6089904"/>
+            <a:ext cx="11277295" cy="347472"/>
           </a:xfrm>
           <a:prstGeom prst="rect">
             <a:avLst/>
@@ -10975,68 +11484,24 @@
           <a:ln/>
         </p:spPr>
         <p:txBody>
-          <a:bodyPr wrap="square" lIns="0" tIns="0" rIns="0" bIns="0" rtlCol="0" anchor="ctr">
-            <a:normAutofit/>
-          </a:bodyPr>
+          <a:bodyPr wrap="square" lIns="0" tIns="0" rIns="0" bIns="0" rtlCol="0" anchor="ctr"/>
           <a:lstStyle/>
           <a:p>
             <a:pPr algn="ctr" indent="0" marL="0">
               <a:buNone/>
             </a:pPr>
             <a:r>
-              <a:rPr lang="en-US" sz="3600" b="1" dirty="0">
-                <a:solidFill>
-                  <a:srgbClr val="990011"/>
+              <a:rPr lang="en-US" sz="1800" i="1" dirty="0">
+                <a:solidFill>
+                  <a:srgbClr val="555555"/>
                 </a:solidFill>
                 <a:latin typeface="Times New Roman" pitchFamily="34" charset="0"/>
                 <a:ea typeface="Times New Roman" pitchFamily="34" charset="-122"/>
                 <a:cs typeface="Times New Roman" pitchFamily="34" charset="-120"/>
               </a:rPr>
-              <a:t>Activity 3: Answer</a:t>
-            </a:r>
-            <a:endParaRPr lang="en-US" sz="3600" dirty="0"/>
-          </a:p>
-        </p:txBody>
-      </p:sp>
-      <p:sp>
-        <p:nvSpPr>
-          <p:cNvPr id="5" name="Text 2"/>
-          <p:cNvSpPr/>
-          <p:nvPr/>
-        </p:nvSpPr>
-        <p:spPr>
-          <a:xfrm>
-            <a:off x="5349240" y="1783080"/>
-            <a:ext cx="6522415" cy="4663440"/>
-          </a:xfrm>
-          <a:prstGeom prst="rect">
-            <a:avLst/>
-          </a:prstGeom>
-          <a:noFill/>
-          <a:ln/>
-        </p:spPr>
-        <p:txBody>
-          <a:bodyPr wrap="square" lIns="0" tIns="0" rIns="0" bIns="0" rtlCol="0" anchor="t"/>
-          <a:lstStyle/>
-          <a:p>
-            <a:pPr algn="l" indent="0" marL="0">
-              <a:spcAft>
-                <a:spcPts val="800"/>
-              </a:spcAft>
-              <a:buNone/>
-            </a:pPr>
-            <a:r>
-              <a:rPr lang="en-US" sz="4000" dirty="0">
-                <a:solidFill>
-                  <a:srgbClr val="111111"/>
-                </a:solidFill>
-                <a:latin typeface="Times New Roman" pitchFamily="34" charset="0"/>
-                <a:ea typeface="Times New Roman" pitchFamily="34" charset="-122"/>
-                <a:cs typeface="Times New Roman" pitchFamily="34" charset="-120"/>
-              </a:rPr>
-              <a:t>A strato-volcano (composite cone).</a:t>
-            </a:r>
-            <a:endParaRPr lang="en-US" sz="4000" dirty="0"/>
+              <a:t>Volcanic necks near Rhumsiki.</a:t>
+            </a:r>
+            <a:endParaRPr lang="en-US" sz="1800" dirty="0"/>
           </a:p>
         </p:txBody>
       </p:sp>
@@ -11146,54 +11611,15 @@
                 <a:ea typeface="Calibri" pitchFamily="34" charset="-122"/>
                 <a:cs typeface="Calibri" pitchFamily="34" charset="-120"/>
               </a:rPr>
-              <a:t>3. LANDFORMS: DEPRESSIONS</a:t>
+              <a:t>2. LIFE CYCLE</a:t>
             </a:r>
             <a:endParaRPr lang="en-US" sz="1400" dirty="0"/>
-          </a:p>
-        </p:txBody>
-      </p:sp>
-      <p:sp>
-        <p:nvSpPr>
-          <p:cNvPr id="3" name="Text 1"/>
-          <p:cNvSpPr/>
-          <p:nvPr/>
-        </p:nvSpPr>
-        <p:spPr>
-          <a:xfrm>
-            <a:off x="457200" y="1005840"/>
-            <a:ext cx="11277295" cy="731520"/>
-          </a:xfrm>
-          <a:prstGeom prst="rect">
-            <a:avLst/>
-          </a:prstGeom>
-          <a:noFill/>
-          <a:ln/>
-        </p:spPr>
-        <p:txBody>
-          <a:bodyPr wrap="square" lIns="0" tIns="0" rIns="0" bIns="0" rtlCol="0" anchor="ctr"/>
-          <a:lstStyle/>
-          <a:p>
-            <a:pPr algn="ctr" indent="0" marL="0">
-              <a:buNone/>
-            </a:pPr>
-            <a:r>
-              <a:rPr lang="en-US" sz="3600" b="1" dirty="0">
-                <a:solidFill>
-                  <a:srgbClr val="990011"/>
-                </a:solidFill>
-                <a:latin typeface="Times New Roman" pitchFamily="34" charset="0"/>
-                <a:ea typeface="Times New Roman" pitchFamily="34" charset="-122"/>
-                <a:cs typeface="Times New Roman" pitchFamily="34" charset="-120"/>
-              </a:rPr>
-              <a:t>Activity 4</a:t>
-            </a:r>
-            <a:endParaRPr lang="en-US" sz="3600" dirty="0"/>
           </a:p>
         </p:txBody>
       </p:sp>
       <p:pic>
         <p:nvPicPr>
-          <p:cNvPr id="4" name="Image 0" descr="/home/claude/f4/img/v2/f4_crater.jpg">    </p:cNvPr>
+          <p:cNvPr id="3" name="Image 0" descr="/home/claude/f4/img/minesec_sheet.png">    </p:cNvPr>
           <p:cNvPicPr>
             <a:picLocks noChangeAspect="1"/>
           </p:cNvPicPr>
@@ -11207,8 +11633,8 @@
         </p:blipFill>
         <p:spPr>
           <a:xfrm>
-            <a:off x="2246610" y="1783080"/>
-            <a:ext cx="7698475" cy="4270248"/>
+            <a:off x="0" y="658368"/>
+            <a:ext cx="5120640" cy="5833872"/>
           </a:xfrm>
           <a:prstGeom prst="rect">
             <a:avLst/>
@@ -11217,14 +11643,14 @@
       </p:pic>
       <p:sp>
         <p:nvSpPr>
-          <p:cNvPr id="5" name="Text 2"/>
+          <p:cNvPr id="4" name="Text 1"/>
           <p:cNvSpPr/>
           <p:nvPr/>
         </p:nvSpPr>
         <p:spPr>
           <a:xfrm>
-            <a:off x="457200" y="6089904"/>
-            <a:ext cx="11277295" cy="347472"/>
+            <a:off x="5349240" y="1005840"/>
+            <a:ext cx="6522415" cy="731520"/>
           </a:xfrm>
           <a:prstGeom prst="rect">
             <a:avLst/>
@@ -11233,24 +11659,68 @@
           <a:ln/>
         </p:spPr>
         <p:txBody>
-          <a:bodyPr wrap="square" lIns="0" tIns="0" rIns="0" bIns="0" rtlCol="0" anchor="ctr"/>
+          <a:bodyPr wrap="square" lIns="0" tIns="0" rIns="0" bIns="0" rtlCol="0" anchor="ctr">
+            <a:normAutofit/>
+          </a:bodyPr>
           <a:lstStyle/>
           <a:p>
             <a:pPr algn="ctr" indent="0" marL="0">
               <a:buNone/>
             </a:pPr>
             <a:r>
-              <a:rPr lang="en-US" sz="1800" i="1" dirty="0">
-                <a:solidFill>
-                  <a:srgbClr val="555555"/>
+              <a:rPr lang="en-US" sz="3600" b="1" dirty="0">
+                <a:solidFill>
+                  <a:srgbClr val="990011"/>
                 </a:solidFill>
                 <a:latin typeface="Times New Roman" pitchFamily="34" charset="0"/>
                 <a:ea typeface="Times New Roman" pitchFamily="34" charset="-122"/>
                 <a:cs typeface="Times New Roman" pitchFamily="34" charset="-120"/>
               </a:rPr>
-              <a:t>A large lake inside an old volcano.</a:t>
-            </a:r>
-            <a:endParaRPr lang="en-US" sz="1800" dirty="0"/>
+              <a:t>Activity 3: Question</a:t>
+            </a:r>
+            <a:endParaRPr lang="en-US" sz="3600" dirty="0"/>
+          </a:p>
+        </p:txBody>
+      </p:sp>
+      <p:sp>
+        <p:nvSpPr>
+          <p:cNvPr id="5" name="Text 2"/>
+          <p:cNvSpPr/>
+          <p:nvPr/>
+        </p:nvSpPr>
+        <p:spPr>
+          <a:xfrm>
+            <a:off x="5349240" y="1783080"/>
+            <a:ext cx="6522415" cy="4663440"/>
+          </a:xfrm>
+          <a:prstGeom prst="rect">
+            <a:avLst/>
+          </a:prstGeom>
+          <a:noFill/>
+          <a:ln/>
+        </p:spPr>
+        <p:txBody>
+          <a:bodyPr wrap="square" lIns="0" tIns="0" rIns="0" bIns="0" rtlCol="0" anchor="t"/>
+          <a:lstStyle/>
+          <a:p>
+            <a:pPr algn="l" indent="0" marL="0">
+              <a:spcAft>
+                <a:spcPts val="800"/>
+              </a:spcAft>
+              <a:buNone/>
+            </a:pPr>
+            <a:r>
+              <a:rPr lang="en-US" sz="4000" dirty="0">
+                <a:solidFill>
+                  <a:srgbClr val="111111"/>
+                </a:solidFill>
+                <a:latin typeface="Times New Roman" pitchFamily="34" charset="0"/>
+                <a:ea typeface="Times New Roman" pitchFamily="34" charset="-122"/>
+                <a:cs typeface="Times New Roman" pitchFamily="34" charset="-120"/>
+              </a:rPr>
+              <a:t>Why is the peak of Rhumsiki called extinct?</a:t>
+            </a:r>
+            <a:endParaRPr lang="en-US" sz="4000" dirty="0"/>
           </a:p>
         </p:txBody>
       </p:sp>
@@ -11360,7 +11830,7 @@
                 <a:ea typeface="Calibri" pitchFamily="34" charset="-122"/>
                 <a:cs typeface="Calibri" pitchFamily="34" charset="-120"/>
               </a:rPr>
-              <a:t>3. LANDFORMS: DEPRESSIONS</a:t>
+              <a:t>2. LIFE CYCLE</a:t>
             </a:r>
             <a:endParaRPr lang="en-US" sz="1400" dirty="0"/>
           </a:p>
@@ -11425,7 +11895,7 @@
                 <a:ea typeface="Times New Roman" pitchFamily="34" charset="-122"/>
                 <a:cs typeface="Times New Roman" pitchFamily="34" charset="-120"/>
               </a:rPr>
-              <a:t>Activity 4: Question</a:t>
+              <a:t>Activity 3: Answer</a:t>
             </a:r>
             <a:endParaRPr lang="en-US" sz="3600" dirty="0"/>
           </a:p>
@@ -11467,7 +11937,7 @@
                 <a:ea typeface="Times New Roman" pitchFamily="34" charset="-122"/>
                 <a:cs typeface="Times New Roman" pitchFamily="34" charset="-120"/>
               </a:rPr>
-              <a:t>What is the difference between a crater and a caldera?</a:t>
+              <a:t>It has not erupted for millions of years and will not erupt again.</a:t>
             </a:r>
             <a:endParaRPr lang="en-US" sz="4000" dirty="0"/>
           </a:p>
@@ -11579,15 +12049,54 @@
                 <a:ea typeface="Calibri" pitchFamily="34" charset="-122"/>
                 <a:cs typeface="Calibri" pitchFamily="34" charset="-120"/>
               </a:rPr>
-              <a:t>3. LANDFORMS: DEPRESSIONS</a:t>
+              <a:t>3. PRODUCTS</a:t>
             </a:r>
             <a:endParaRPr lang="en-US" sz="1400" dirty="0"/>
+          </a:p>
+        </p:txBody>
+      </p:sp>
+      <p:sp>
+        <p:nvSpPr>
+          <p:cNvPr id="3" name="Text 1"/>
+          <p:cNvSpPr/>
+          <p:nvPr/>
+        </p:nvSpPr>
+        <p:spPr>
+          <a:xfrm>
+            <a:off x="457200" y="1005840"/>
+            <a:ext cx="11277295" cy="731520"/>
+          </a:xfrm>
+          <a:prstGeom prst="rect">
+            <a:avLst/>
+          </a:prstGeom>
+          <a:noFill/>
+          <a:ln/>
+        </p:spPr>
+        <p:txBody>
+          <a:bodyPr wrap="square" lIns="0" tIns="0" rIns="0" bIns="0" rtlCol="0" anchor="ctr"/>
+          <a:lstStyle/>
+          <a:p>
+            <a:pPr algn="ctr" indent="0" marL="0">
+              <a:buNone/>
+            </a:pPr>
+            <a:r>
+              <a:rPr lang="en-US" sz="3600" b="1" dirty="0">
+                <a:solidFill>
+                  <a:srgbClr val="990011"/>
+                </a:solidFill>
+                <a:latin typeface="Times New Roman" pitchFamily="34" charset="0"/>
+                <a:ea typeface="Times New Roman" pitchFamily="34" charset="-122"/>
+                <a:cs typeface="Times New Roman" pitchFamily="34" charset="-120"/>
+              </a:rPr>
+              <a:t>Activity 4</a:t>
+            </a:r>
+            <a:endParaRPr lang="en-US" sz="3600" dirty="0"/>
           </a:p>
         </p:txBody>
       </p:sp>
       <p:pic>
         <p:nvPicPr>
-          <p:cNvPr id="3" name="Image 0" descr="/home/claude/f4/img/minesec_sheet.png">    </p:cNvPr>
+          <p:cNvPr id="4" name="Image 0" descr="/home/claude/f4/img/v2/lsa_pahoehoe.jpg">    </p:cNvPr>
           <p:cNvPicPr>
             <a:picLocks noChangeAspect="1"/>
           </p:cNvPicPr>
@@ -11601,8 +12110,8 @@
         </p:blipFill>
         <p:spPr>
           <a:xfrm>
-            <a:off x="0" y="658368"/>
-            <a:ext cx="5120640" cy="5833872"/>
+            <a:off x="2246610" y="1783080"/>
+            <a:ext cx="7698475" cy="4270248"/>
           </a:xfrm>
           <a:prstGeom prst="rect">
             <a:avLst/>
@@ -11611,14 +12120,14 @@
       </p:pic>
       <p:sp>
         <p:nvSpPr>
-          <p:cNvPr id="4" name="Text 1"/>
+          <p:cNvPr id="5" name="Text 2"/>
           <p:cNvSpPr/>
           <p:nvPr/>
         </p:nvSpPr>
         <p:spPr>
           <a:xfrm>
-            <a:off x="5349240" y="1005840"/>
-            <a:ext cx="6522415" cy="731520"/>
+            <a:off x="457200" y="6089904"/>
+            <a:ext cx="11277295" cy="347472"/>
           </a:xfrm>
           <a:prstGeom prst="rect">
             <a:avLst/>
@@ -11627,68 +12136,24 @@
           <a:ln/>
         </p:spPr>
         <p:txBody>
-          <a:bodyPr wrap="square" lIns="0" tIns="0" rIns="0" bIns="0" rtlCol="0" anchor="ctr">
-            <a:normAutofit/>
-          </a:bodyPr>
+          <a:bodyPr wrap="square" lIns="0" tIns="0" rIns="0" bIns="0" rtlCol="0" anchor="ctr"/>
           <a:lstStyle/>
           <a:p>
             <a:pPr algn="ctr" indent="0" marL="0">
               <a:buNone/>
             </a:pPr>
             <a:r>
-              <a:rPr lang="en-US" sz="3600" b="1" dirty="0">
-                <a:solidFill>
-                  <a:srgbClr val="990011"/>
+              <a:rPr lang="en-US" sz="1800" i="1" dirty="0">
+                <a:solidFill>
+                  <a:srgbClr val="555555"/>
                 </a:solidFill>
                 <a:latin typeface="Times New Roman" pitchFamily="34" charset="0"/>
                 <a:ea typeface="Times New Roman" pitchFamily="34" charset="-122"/>
                 <a:cs typeface="Times New Roman" pitchFamily="34" charset="-120"/>
               </a:rPr>
-              <a:t>Activity 4: Answer</a:t>
-            </a:r>
-            <a:endParaRPr lang="en-US" sz="3600" dirty="0"/>
-          </a:p>
-        </p:txBody>
-      </p:sp>
-      <p:sp>
-        <p:nvSpPr>
-          <p:cNvPr id="5" name="Text 2"/>
-          <p:cNvSpPr/>
-          <p:nvPr/>
-        </p:nvSpPr>
-        <p:spPr>
-          <a:xfrm>
-            <a:off x="5349240" y="1783080"/>
-            <a:ext cx="6522415" cy="4663440"/>
-          </a:xfrm>
-          <a:prstGeom prst="rect">
-            <a:avLst/>
-          </a:prstGeom>
-          <a:noFill/>
-          <a:ln/>
-        </p:spPr>
-        <p:txBody>
-          <a:bodyPr wrap="square" lIns="0" tIns="0" rIns="0" bIns="0" rtlCol="0" anchor="t"/>
-          <a:lstStyle/>
-          <a:p>
-            <a:pPr algn="l" indent="0" marL="0">
-              <a:spcAft>
-                <a:spcPts val="800"/>
-              </a:spcAft>
-              <a:buNone/>
-            </a:pPr>
-            <a:r>
-              <a:rPr lang="en-US" sz="4000" dirty="0">
-                <a:solidFill>
-                  <a:srgbClr val="111111"/>
-                </a:solidFill>
-                <a:latin typeface="Times New Roman" pitchFamily="34" charset="0"/>
-                <a:ea typeface="Times New Roman" pitchFamily="34" charset="-122"/>
-                <a:cs typeface="Times New Roman" pitchFamily="34" charset="-120"/>
-              </a:rPr>
-              <a:t>A crater is a small hollow at the top; a caldera is a huge hollow after a collapse.</a:t>
-            </a:r>
-            <a:endParaRPr lang="en-US" sz="4000" dirty="0"/>
+              <a:t>Solidified runny lava.</a:t>
+            </a:r>
+            <a:endParaRPr lang="en-US" sz="1800" dirty="0"/>
           </a:p>
         </p:txBody>
       </p:sp>
@@ -12369,7 +12834,7 @@
                           <a:ea typeface="Calibri" pitchFamily="34" charset="-122"/>
                           <a:cs typeface="Calibri" pitchFamily="34" charset="-120"/>
                         </a:rPr>
-                        <a:t>Volcanicity, lava, magma, cones, crater, caldera.</a:t>
+                        <a:t>Volcanism (vulcanicity), magma, lava, active, dormant and extinct volcanoes, pyroclasts, basic and acid lava, cone, crater, caldera, lava plateau.</a:t>
                       </a:r>
                       <a:endParaRPr lang="en-US" sz="1700" dirty="0">
                         <a:latin typeface="Calibri" charset="0"/>
@@ -12507,7 +12972,7 @@
                           <a:ea typeface="Calibri" pitchFamily="34" charset="-122"/>
                           <a:cs typeface="Calibri" pitchFamily="34" charset="-120"/>
                         </a:rPr>
-                        <a:t>Meaning and process; products; types of cones and why they differ; the life cycle of a volcano.</a:t>
+                        <a:t>Meaning of volcanism; the life cycle of volcanoes; products of eruptions; volcanic landforms (cones, lava plateaux, craters and calderas).</a:t>
                       </a:r>
                       <a:endParaRPr lang="en-US" sz="1700" dirty="0">
                         <a:latin typeface="Calibri" charset="0"/>
@@ -12645,7 +13110,7 @@
                           <a:ea typeface="Calibri" pitchFamily="34" charset="-122"/>
                           <a:cs typeface="Calibri" pitchFamily="34" charset="-120"/>
                         </a:rPr>
-                        <a:t>Learners are able to identify volcanic landforms and explain why they differ.</a:t>
+                        <a:t>Learners are able to classify volcanoes and explain the landforms built by different volcanic materials, with Cameroonian examples.</a:t>
                       </a:r>
                       <a:endParaRPr lang="en-US" sz="1700" dirty="0">
                         <a:latin typeface="Calibri" charset="0"/>
@@ -12807,54 +13272,15 @@
                 <a:ea typeface="Calibri" pitchFamily="34" charset="-122"/>
                 <a:cs typeface="Calibri" pitchFamily="34" charset="-120"/>
               </a:rPr>
-              <a:t>3. LANDFORMS: LAVA PLATEAUX</a:t>
+              <a:t>3. PRODUCTS</a:t>
             </a:r>
             <a:endParaRPr lang="en-US" sz="1400" dirty="0"/>
-          </a:p>
-        </p:txBody>
-      </p:sp>
-      <p:sp>
-        <p:nvSpPr>
-          <p:cNvPr id="3" name="Text 1"/>
-          <p:cNvSpPr/>
-          <p:nvPr/>
-        </p:nvSpPr>
-        <p:spPr>
-          <a:xfrm>
-            <a:off x="457200" y="1005840"/>
-            <a:ext cx="11277295" cy="731520"/>
-          </a:xfrm>
-          <a:prstGeom prst="rect">
-            <a:avLst/>
-          </a:prstGeom>
-          <a:noFill/>
-          <a:ln/>
-        </p:spPr>
-        <p:txBody>
-          <a:bodyPr wrap="square" lIns="0" tIns="0" rIns="0" bIns="0" rtlCol="0" anchor="ctr"/>
-          <a:lstStyle/>
-          <a:p>
-            <a:pPr algn="ctr" indent="0" marL="0">
-              <a:buNone/>
-            </a:pPr>
-            <a:r>
-              <a:rPr lang="en-US" sz="3600" b="1" dirty="0">
-                <a:solidFill>
-                  <a:srgbClr val="990011"/>
-                </a:solidFill>
-                <a:latin typeface="Times New Roman" pitchFamily="34" charset="0"/>
-                <a:ea typeface="Times New Roman" pitchFamily="34" charset="-122"/>
-                <a:cs typeface="Times New Roman" pitchFamily="34" charset="-120"/>
-              </a:rPr>
-              <a:t>Activity 5</a:t>
-            </a:r>
-            <a:endParaRPr lang="en-US" sz="3600" dirty="0"/>
           </a:p>
         </p:txBody>
       </p:sp>
       <p:pic>
         <p:nvPicPr>
-          <p:cNvPr id="4" name="Image 0" descr="/home/claude/f4/img/v2/lsa_basalt.jpg">    </p:cNvPr>
+          <p:cNvPr id="3" name="Image 0" descr="/home/claude/f4/img/minesec_sheet.png">    </p:cNvPr>
           <p:cNvPicPr>
             <a:picLocks noChangeAspect="1"/>
           </p:cNvPicPr>
@@ -12868,8 +13294,8 @@
         </p:blipFill>
         <p:spPr>
           <a:xfrm>
-            <a:off x="2246610" y="1783080"/>
-            <a:ext cx="7698475" cy="4270248"/>
+            <a:off x="0" y="658368"/>
+            <a:ext cx="5120640" cy="5833872"/>
           </a:xfrm>
           <a:prstGeom prst="rect">
             <a:avLst/>
@@ -12878,14 +13304,14 @@
       </p:pic>
       <p:sp>
         <p:nvSpPr>
-          <p:cNvPr id="5" name="Text 2"/>
+          <p:cNvPr id="4" name="Text 1"/>
           <p:cNvSpPr/>
           <p:nvPr/>
         </p:nvSpPr>
         <p:spPr>
           <a:xfrm>
-            <a:off x="457200" y="6089904"/>
-            <a:ext cx="11277295" cy="347472"/>
+            <a:off x="5349240" y="1005840"/>
+            <a:ext cx="6522415" cy="731520"/>
           </a:xfrm>
           <a:prstGeom prst="rect">
             <a:avLst/>
@@ -12894,24 +13320,68 @@
           <a:ln/>
         </p:spPr>
         <p:txBody>
-          <a:bodyPr wrap="square" lIns="0" tIns="0" rIns="0" bIns="0" rtlCol="0" anchor="ctr"/>
+          <a:bodyPr wrap="square" lIns="0" tIns="0" rIns="0" bIns="0" rtlCol="0" anchor="ctr">
+            <a:normAutofit/>
+          </a:bodyPr>
           <a:lstStyle/>
           <a:p>
             <a:pPr algn="ctr" indent="0" marL="0">
               <a:buNone/>
             </a:pPr>
             <a:r>
-              <a:rPr lang="en-US" sz="1800" i="1" dirty="0">
-                <a:solidFill>
-                  <a:srgbClr val="555555"/>
+              <a:rPr lang="en-US" sz="3600" b="1" dirty="0">
+                <a:solidFill>
+                  <a:srgbClr val="990011"/>
                 </a:solidFill>
                 <a:latin typeface="Times New Roman" pitchFamily="34" charset="0"/>
                 <a:ea typeface="Times New Roman" pitchFamily="34" charset="-122"/>
                 <a:cs typeface="Times New Roman" pitchFamily="34" charset="-120"/>
               </a:rPr>
-              <a:t>Columns of basalt from old lava.</a:t>
-            </a:r>
-            <a:endParaRPr lang="en-US" sz="1800" dirty="0"/>
+              <a:t>Activity 4: Question</a:t>
+            </a:r>
+            <a:endParaRPr lang="en-US" sz="3600" dirty="0"/>
+          </a:p>
+        </p:txBody>
+      </p:sp>
+      <p:sp>
+        <p:nvSpPr>
+          <p:cNvPr id="5" name="Text 2"/>
+          <p:cNvSpPr/>
+          <p:nvPr/>
+        </p:nvSpPr>
+        <p:spPr>
+          <a:xfrm>
+            <a:off x="5349240" y="1783080"/>
+            <a:ext cx="6522415" cy="4663440"/>
+          </a:xfrm>
+          <a:prstGeom prst="rect">
+            <a:avLst/>
+          </a:prstGeom>
+          <a:noFill/>
+          <a:ln/>
+        </p:spPr>
+        <p:txBody>
+          <a:bodyPr wrap="square" lIns="0" tIns="0" rIns="0" bIns="0" rtlCol="0" anchor="t"/>
+          <a:lstStyle/>
+          <a:p>
+            <a:pPr algn="l" indent="0" marL="0">
+              <a:spcAft>
+                <a:spcPts val="800"/>
+              </a:spcAft>
+              <a:buNone/>
+            </a:pPr>
+            <a:r>
+              <a:rPr lang="en-US" sz="4000" dirty="0">
+                <a:solidFill>
+                  <a:srgbClr val="111111"/>
+                </a:solidFill>
+                <a:latin typeface="Times New Roman" pitchFamily="34" charset="0"/>
+                <a:ea typeface="Times New Roman" pitchFamily="34" charset="-122"/>
+                <a:cs typeface="Times New Roman" pitchFamily="34" charset="-120"/>
+              </a:rPr>
+              <a:t>Which lava flows far: basic or acid?</a:t>
+            </a:r>
+            <a:endParaRPr lang="en-US" sz="4000" dirty="0"/>
           </a:p>
         </p:txBody>
       </p:sp>
@@ -13021,7 +13491,7 @@
                 <a:ea typeface="Calibri" pitchFamily="34" charset="-122"/>
                 <a:cs typeface="Calibri" pitchFamily="34" charset="-120"/>
               </a:rPr>
-              <a:t>3. LANDFORMS: LAVA PLATEAUX</a:t>
+              <a:t>3. PRODUCTS</a:t>
             </a:r>
             <a:endParaRPr lang="en-US" sz="1400" dirty="0"/>
           </a:p>
@@ -13086,7 +13556,7 @@
                 <a:ea typeface="Times New Roman" pitchFamily="34" charset="-122"/>
                 <a:cs typeface="Times New Roman" pitchFamily="34" charset="-120"/>
               </a:rPr>
-              <a:t>Activity 5: Question</a:t>
+              <a:t>Activity 4: Answer</a:t>
             </a:r>
             <a:endParaRPr lang="en-US" sz="3600" dirty="0"/>
           </a:p>
@@ -13128,7 +13598,7 @@
                 <a:ea typeface="Times New Roman" pitchFamily="34" charset="-122"/>
                 <a:cs typeface="Times New Roman" pitchFamily="34" charset="-120"/>
               </a:rPr>
-              <a:t>Many flows of runny lava can cover a large area. What landform do they form?</a:t>
+              <a:t>Basic lava (runny, low in silica).</a:t>
             </a:r>
             <a:endParaRPr lang="en-US" sz="4000" dirty="0"/>
           </a:p>
@@ -13240,15 +13710,54 @@
                 <a:ea typeface="Calibri" pitchFamily="34" charset="-122"/>
                 <a:cs typeface="Calibri" pitchFamily="34" charset="-120"/>
               </a:rPr>
-              <a:t>3. LANDFORMS: LAVA PLATEAUX</a:t>
+              <a:t>4. LANDFORMS</a:t>
             </a:r>
             <a:endParaRPr lang="en-US" sz="1400" dirty="0"/>
+          </a:p>
+        </p:txBody>
+      </p:sp>
+      <p:sp>
+        <p:nvSpPr>
+          <p:cNvPr id="3" name="Text 1"/>
+          <p:cNvSpPr/>
+          <p:nvPr/>
+        </p:nvSpPr>
+        <p:spPr>
+          <a:xfrm>
+            <a:off x="457200" y="1005840"/>
+            <a:ext cx="11277295" cy="731520"/>
+          </a:xfrm>
+          <a:prstGeom prst="rect">
+            <a:avLst/>
+          </a:prstGeom>
+          <a:noFill/>
+          <a:ln/>
+        </p:spPr>
+        <p:txBody>
+          <a:bodyPr wrap="square" lIns="0" tIns="0" rIns="0" bIns="0" rtlCol="0" anchor="ctr"/>
+          <a:lstStyle/>
+          <a:p>
+            <a:pPr algn="ctr" indent="0" marL="0">
+              <a:buNone/>
+            </a:pPr>
+            <a:r>
+              <a:rPr lang="en-US" sz="3600" b="1" dirty="0">
+                <a:solidFill>
+                  <a:srgbClr val="990011"/>
+                </a:solidFill>
+                <a:latin typeface="Times New Roman" pitchFamily="34" charset="0"/>
+                <a:ea typeface="Times New Roman" pitchFamily="34" charset="-122"/>
+                <a:cs typeface="Times New Roman" pitchFamily="34" charset="-120"/>
+              </a:rPr>
+              <a:t>Activity 5</a:t>
+            </a:r>
+            <a:endParaRPr lang="en-US" sz="3600" dirty="0"/>
           </a:p>
         </p:txBody>
       </p:sp>
       <p:pic>
         <p:nvPicPr>
-          <p:cNvPr id="3" name="Image 0" descr="/home/claude/f4/img/minesec_sheet.png">    </p:cNvPr>
+          <p:cNvPr id="4" name="Image 0" descr="/home/claude/f4/img/v2/f4_crater.jpg">    </p:cNvPr>
           <p:cNvPicPr>
             <a:picLocks noChangeAspect="1"/>
           </p:cNvPicPr>
@@ -13262,8 +13771,8 @@
         </p:blipFill>
         <p:spPr>
           <a:xfrm>
-            <a:off x="0" y="658368"/>
-            <a:ext cx="5120640" cy="5833872"/>
+            <a:off x="2246610" y="1783080"/>
+            <a:ext cx="7698475" cy="4270248"/>
           </a:xfrm>
           <a:prstGeom prst="rect">
             <a:avLst/>
@@ -13272,14 +13781,14 @@
       </p:pic>
       <p:sp>
         <p:nvSpPr>
-          <p:cNvPr id="4" name="Text 1"/>
+          <p:cNvPr id="5" name="Text 2"/>
           <p:cNvSpPr/>
           <p:nvPr/>
         </p:nvSpPr>
         <p:spPr>
           <a:xfrm>
-            <a:off x="5349240" y="1005840"/>
-            <a:ext cx="6522415" cy="731520"/>
+            <a:off x="457200" y="6089904"/>
+            <a:ext cx="11277295" cy="347472"/>
           </a:xfrm>
           <a:prstGeom prst="rect">
             <a:avLst/>
@@ -13288,68 +13797,24 @@
           <a:ln/>
         </p:spPr>
         <p:txBody>
-          <a:bodyPr wrap="square" lIns="0" tIns="0" rIns="0" bIns="0" rtlCol="0" anchor="ctr">
-            <a:normAutofit/>
-          </a:bodyPr>
+          <a:bodyPr wrap="square" lIns="0" tIns="0" rIns="0" bIns="0" rtlCol="0" anchor="ctr"/>
           <a:lstStyle/>
           <a:p>
             <a:pPr algn="ctr" indent="0" marL="0">
               <a:buNone/>
             </a:pPr>
             <a:r>
-              <a:rPr lang="en-US" sz="3600" b="1" dirty="0">
-                <a:solidFill>
-                  <a:srgbClr val="990011"/>
+              <a:rPr lang="en-US" sz="1800" i="1" dirty="0">
+                <a:solidFill>
+                  <a:srgbClr val="555555"/>
                 </a:solidFill>
                 <a:latin typeface="Times New Roman" pitchFamily="34" charset="0"/>
                 <a:ea typeface="Times New Roman" pitchFamily="34" charset="-122"/>
                 <a:cs typeface="Times New Roman" pitchFamily="34" charset="-120"/>
               </a:rPr>
-              <a:t>Activity 5: Answer</a:t>
-            </a:r>
-            <a:endParaRPr lang="en-US" sz="3600" dirty="0"/>
-          </a:p>
-        </p:txBody>
-      </p:sp>
-      <p:sp>
-        <p:nvSpPr>
-          <p:cNvPr id="5" name="Text 2"/>
-          <p:cNvSpPr/>
-          <p:nvPr/>
-        </p:nvSpPr>
-        <p:spPr>
-          <a:xfrm>
-            <a:off x="5349240" y="1783080"/>
-            <a:ext cx="6522415" cy="4663440"/>
-          </a:xfrm>
-          <a:prstGeom prst="rect">
-            <a:avLst/>
-          </a:prstGeom>
-          <a:noFill/>
-          <a:ln/>
-        </p:spPr>
-        <p:txBody>
-          <a:bodyPr wrap="square" lIns="0" tIns="0" rIns="0" bIns="0" rtlCol="0" anchor="t"/>
-          <a:lstStyle/>
-          <a:p>
-            <a:pPr algn="l" indent="0" marL="0">
-              <a:spcAft>
-                <a:spcPts val="800"/>
-              </a:spcAft>
-              <a:buNone/>
-            </a:pPr>
-            <a:r>
-              <a:rPr lang="en-US" sz="4000" dirty="0">
-                <a:solidFill>
-                  <a:srgbClr val="111111"/>
-                </a:solidFill>
-                <a:latin typeface="Times New Roman" pitchFamily="34" charset="0"/>
-                <a:ea typeface="Times New Roman" pitchFamily="34" charset="-122"/>
-                <a:cs typeface="Times New Roman" pitchFamily="34" charset="-120"/>
-              </a:rPr>
-              <a:t>A lava plateau.</a:t>
-            </a:r>
-            <a:endParaRPr lang="en-US" sz="4000" dirty="0"/>
+              <a:t>A volcanic crater.</a:t>
+            </a:r>
+            <a:endParaRPr lang="en-US" sz="1800" dirty="0"/>
           </a:p>
         </p:txBody>
       </p:sp>
@@ -13459,7 +13924,7 @@
                 <a:ea typeface="Calibri" pitchFamily="34" charset="-122"/>
                 <a:cs typeface="Calibri" pitchFamily="34" charset="-120"/>
               </a:rPr>
-              <a:t>BOARD SUMMARY</a:t>
+              <a:t>4. LANDFORMS</a:t>
             </a:r>
             <a:endParaRPr lang="en-US" sz="1400" dirty="0"/>
           </a:p>
@@ -13524,7 +13989,7 @@
                 <a:ea typeface="Times New Roman" pitchFamily="34" charset="-122"/>
                 <a:cs typeface="Times New Roman" pitchFamily="34" charset="-120"/>
               </a:rPr>
-              <a:t>Board Summary</a:t>
+              <a:t>Activity 5: Question</a:t>
             </a:r>
             <a:endParaRPr lang="en-US" sz="3600" dirty="0"/>
           </a:p>
@@ -13558,7 +14023,7 @@
               <a:buNone/>
             </a:pPr>
             <a:r>
-              <a:rPr lang="en-US" sz="4000" b="1" dirty="0">
+              <a:rPr lang="en-US" sz="4000" dirty="0">
                 <a:solidFill>
                   <a:srgbClr val="111111"/>
                 </a:solidFill>
@@ -13566,47 +14031,7 @@
                 <a:ea typeface="Times New Roman" pitchFamily="34" charset="-122"/>
                 <a:cs typeface="Times New Roman" pitchFamily="34" charset="-120"/>
               </a:rPr>
-              <a:t>Topic: Crustal Processes and their Effect on the Land Surface and Man</a:t>
-            </a:r>
-            <a:endParaRPr lang="en-US" sz="4000" dirty="0"/>
-          </a:p>
-          <a:p>
-            <a:pPr algn="l" indent="0" marL="0">
-              <a:spcAft>
-                <a:spcPts val="800"/>
-              </a:spcAft>
-              <a:buNone/>
-            </a:pPr>
-            <a:r>
-              <a:rPr lang="en-US" sz="4000" b="1" dirty="0">
-                <a:solidFill>
-                  <a:srgbClr val="111111"/>
-                </a:solidFill>
-                <a:latin typeface="Times New Roman" pitchFamily="34" charset="0"/>
-                <a:ea typeface="Times New Roman" pitchFamily="34" charset="-122"/>
-                <a:cs typeface="Times New Roman" pitchFamily="34" charset="-120"/>
-              </a:rPr>
-              <a:t>Sub-topic: Volcanicity</a:t>
-            </a:r>
-            <a:endParaRPr lang="en-US" sz="4000" dirty="0"/>
-          </a:p>
-          <a:p>
-            <a:pPr algn="l" indent="0" marL="0">
-              <a:spcAft>
-                <a:spcPts val="800"/>
-              </a:spcAft>
-              <a:buNone/>
-            </a:pPr>
-            <a:r>
-              <a:rPr lang="en-US" sz="4000" b="1" dirty="0">
-                <a:solidFill>
-                  <a:srgbClr val="990011"/>
-                </a:solidFill>
-                <a:latin typeface="Times New Roman" pitchFamily="34" charset="0"/>
-                <a:ea typeface="Times New Roman" pitchFamily="34" charset="-122"/>
-                <a:cs typeface="Times New Roman" pitchFamily="34" charset="-120"/>
-              </a:rPr>
-              <a:t>Lesson 6: Volcanism</a:t>
+              <a:t>What is the difference between a crater and a caldera?</a:t>
             </a:r>
             <a:endParaRPr lang="en-US" sz="4000" dirty="0"/>
           </a:p>
@@ -13718,7 +14143,7 @@
                 <a:ea typeface="Calibri" pitchFamily="34" charset="-122"/>
                 <a:cs typeface="Calibri" pitchFamily="34" charset="-120"/>
               </a:rPr>
-              <a:t>BOARD SUMMARY</a:t>
+              <a:t>4. LANDFORMS</a:t>
             </a:r>
             <a:endParaRPr lang="en-US" sz="1400" dirty="0"/>
           </a:p>
@@ -13783,7 +14208,7 @@
                 <a:ea typeface="Times New Roman" pitchFamily="34" charset="-122"/>
                 <a:cs typeface="Times New Roman" pitchFamily="34" charset="-120"/>
               </a:rPr>
-              <a:t>1. Meaning, Process and Cycle</a:t>
+              <a:t>Activity 5: Answer</a:t>
             </a:r>
             <a:endParaRPr lang="en-US" sz="3600" dirty="0"/>
           </a:p>
@@ -13817,7 +14242,7 @@
               <a:buNone/>
             </a:pPr>
             <a:r>
-              <a:rPr lang="en-US" sz="4000" i="1" dirty="0">
+              <a:rPr lang="en-US" sz="4000" dirty="0">
                 <a:solidFill>
                   <a:srgbClr val="111111"/>
                 </a:solidFill>
@@ -13825,44 +14250,7 @@
                 <a:ea typeface="Times New Roman" pitchFamily="34" charset="-122"/>
                 <a:cs typeface="Times New Roman" pitchFamily="34" charset="-120"/>
               </a:rPr>
-              <a:t>Volcanism can be understood as follows:</a:t>
-            </a:r>
-            <a:endParaRPr lang="en-US" sz="4000" dirty="0"/>
-          </a:p>
-          <a:p>
-            <a:pPr algn="l" indent="0" marL="0">
-              <a:spcAft>
-                <a:spcPts val="800"/>
-              </a:spcAft>
-              <a:buNone/>
-            </a:pPr>
-            <a:r>
-              <a:rPr lang="en-US" sz="4000" b="1" dirty="0">
-                <a:solidFill>
-                  <a:srgbClr val="111111"/>
-                </a:solidFill>
-                <a:latin typeface="Times New Roman" pitchFamily="34" charset="0"/>
-                <a:ea typeface="Times New Roman" pitchFamily="34" charset="-122"/>
-                <a:cs typeface="Times New Roman" pitchFamily="34" charset="-120"/>
-              </a:rPr>
-              <a:t>Volcanism: </a:t>
-            </a:r>
-            <a:pPr algn="l" indent="0" marL="0">
-              <a:spcAft>
-                <a:spcPts val="800"/>
-              </a:spcAft>
-              <a:buNone/>
-            </a:pPr>
-            <a:r>
-              <a:rPr lang="en-US" sz="4000" dirty="0">
-                <a:solidFill>
-                  <a:srgbClr val="111111"/>
-                </a:solidFill>
-                <a:latin typeface="Times New Roman" pitchFamily="34" charset="0"/>
-                <a:ea typeface="Times New Roman" pitchFamily="34" charset="-122"/>
-                <a:cs typeface="Times New Roman" pitchFamily="34" charset="-120"/>
-              </a:rPr>
-              <a:t>It is the process by which magma and gases from inside the Earth reach the surface or the crust.</a:t>
+              <a:t>A crater is small (under 1 km); a caldera is a very large basin formed by collapse.</a:t>
             </a:r>
             <a:endParaRPr lang="en-US" sz="4000" dirty="0"/>
           </a:p>
@@ -14039,7 +14427,7 @@
                 <a:ea typeface="Times New Roman" pitchFamily="34" charset="-122"/>
                 <a:cs typeface="Times New Roman" pitchFamily="34" charset="-120"/>
               </a:rPr>
-              <a:t>1. Meaning, Process and Cycle (continued)</a:t>
+              <a:t>Board Summary</a:t>
             </a:r>
             <a:endParaRPr lang="en-US" sz="3600" dirty="0"/>
           </a:p>
@@ -14081,8 +14469,11 @@
                 <a:ea typeface="Times New Roman" pitchFamily="34" charset="-122"/>
                 <a:cs typeface="Times New Roman" pitchFamily="34" charset="-120"/>
               </a:rPr>
-              <a:t>Process: </a:t>
-            </a:r>
+              <a:t>Topic: Crustal Processes and their Effect on the Land Surface and Man</a:t>
+            </a:r>
+            <a:endParaRPr lang="en-US" sz="4000" dirty="0"/>
+          </a:p>
+          <a:p>
             <a:pPr algn="l" indent="0" marL="0">
               <a:spcAft>
                 <a:spcPts val="800"/>
@@ -14090,7 +14481,7 @@
               <a:buNone/>
             </a:pPr>
             <a:r>
-              <a:rPr lang="en-US" sz="4000" dirty="0">
+              <a:rPr lang="en-US" sz="4000" b="1" dirty="0">
                 <a:solidFill>
                   <a:srgbClr val="111111"/>
                 </a:solidFill>
@@ -14098,7 +14489,27 @@
                 <a:ea typeface="Times New Roman" pitchFamily="34" charset="-122"/>
                 <a:cs typeface="Times New Roman" pitchFamily="34" charset="-120"/>
               </a:rPr>
-              <a:t>Magma forms in the mantle, rises because it is lighter and collects in a magma chamber. It escapes through a vent when gas pressure is high enough.</a:t>
+              <a:t>Sub-topic: Volcanicity</a:t>
+            </a:r>
+            <a:endParaRPr lang="en-US" sz="4000" dirty="0"/>
+          </a:p>
+          <a:p>
+            <a:pPr algn="l" indent="0" marL="0">
+              <a:spcAft>
+                <a:spcPts val="800"/>
+              </a:spcAft>
+              <a:buNone/>
+            </a:pPr>
+            <a:r>
+              <a:rPr lang="en-US" sz="4000" b="1" dirty="0">
+                <a:solidFill>
+                  <a:srgbClr val="990011"/>
+                </a:solidFill>
+                <a:latin typeface="Times New Roman" pitchFamily="34" charset="0"/>
+                <a:ea typeface="Times New Roman" pitchFamily="34" charset="-122"/>
+                <a:cs typeface="Times New Roman" pitchFamily="34" charset="-120"/>
+              </a:rPr>
+              <a:t>Lesson 6: Volcanism</a:t>
             </a:r>
             <a:endParaRPr lang="en-US" sz="4000" dirty="0"/>
           </a:p>
@@ -14233,7 +14644,7 @@
         <p:spPr>
           <a:xfrm>
             <a:off x="0" y="658368"/>
-            <a:ext cx="3840480" cy="5833872"/>
+            <a:ext cx="1463040" cy="5833872"/>
           </a:xfrm>
           <a:prstGeom prst="rect">
             <a:avLst/>
@@ -14248,8 +14659,8 @@
         </p:nvSpPr>
         <p:spPr>
           <a:xfrm>
-            <a:off x="4069080" y="1005840"/>
-            <a:ext cx="7802575" cy="731520"/>
+            <a:off x="1691640" y="1005840"/>
+            <a:ext cx="10180015" cy="731520"/>
           </a:xfrm>
           <a:prstGeom prst="rect">
             <a:avLst/>
@@ -14275,7 +14686,7 @@
                 <a:ea typeface="Times New Roman" pitchFamily="34" charset="-122"/>
                 <a:cs typeface="Times New Roman" pitchFamily="34" charset="-120"/>
               </a:rPr>
-              <a:t>1. Meaning, Process and Cycle (continued)</a:t>
+              <a:t>DEFINITIONS</a:t>
             </a:r>
             <a:endParaRPr lang="en-US" sz="3600" dirty="0"/>
           </a:p>
@@ -14289,8 +14700,8 @@
         </p:nvSpPr>
         <p:spPr>
           <a:xfrm>
-            <a:off x="4069080" y="1783080"/>
-            <a:ext cx="7802575" cy="4663440"/>
+            <a:off x="1691640" y="1783080"/>
+            <a:ext cx="10180015" cy="4663440"/>
           </a:xfrm>
           <a:prstGeom prst="rect">
             <a:avLst/>
@@ -14309,7 +14720,7 @@
               <a:buNone/>
             </a:pPr>
             <a:r>
-              <a:rPr lang="en-US" sz="4000" b="1" dirty="0">
+              <a:rPr lang="en-US" sz="4000" i="1" dirty="0">
                 <a:solidFill>
                   <a:srgbClr val="111111"/>
                 </a:solidFill>
@@ -14317,8 +14728,11 @@
                 <a:ea typeface="Times New Roman" pitchFamily="34" charset="-122"/>
                 <a:cs typeface="Times New Roman" pitchFamily="34" charset="-120"/>
               </a:rPr>
-              <a:t>Life cycle of a volcano: </a:t>
-            </a:r>
+              <a:t>The key terms of this lesson are defined as follows:</a:t>
+            </a:r>
+            <a:endParaRPr lang="en-US" sz="4000" dirty="0"/>
+          </a:p>
+          <a:p>
             <a:pPr algn="l" indent="0" marL="0">
               <a:spcAft>
                 <a:spcPts val="800"/>
@@ -14326,7 +14740,7 @@
               <a:buNone/>
             </a:pPr>
             <a:r>
-              <a:rPr lang="en-US" sz="4000" dirty="0">
+              <a:rPr lang="en-US" sz="4000" b="1" dirty="0">
                 <a:solidFill>
                   <a:srgbClr val="111111"/>
                 </a:solidFill>
@@ -14334,7 +14748,61 @@
                 <a:ea typeface="Times New Roman" pitchFamily="34" charset="-122"/>
                 <a:cs typeface="Times New Roman" pitchFamily="34" charset="-120"/>
               </a:rPr>
-              <a:t>A volcano is active when it erupts often, dormant when it is sleeping, and extinct when it will not erupt again. Mount Cameroon is active, Mount Manengouba is extinct.</a:t>
+              <a:t>Volcanism (vulcanicity): </a:t>
+            </a:r>
+            <a:pPr algn="l" indent="0" marL="0">
+              <a:spcAft>
+                <a:spcPts val="800"/>
+              </a:spcAft>
+              <a:buNone/>
+            </a:pPr>
+            <a:r>
+              <a:rPr lang="en-US" sz="4000" dirty="0">
+                <a:solidFill>
+                  <a:srgbClr val="111111"/>
+                </a:solidFill>
+                <a:latin typeface="Times New Roman" pitchFamily="34" charset="0"/>
+                <a:ea typeface="Times New Roman" pitchFamily="34" charset="-122"/>
+                <a:cs typeface="Times New Roman" pitchFamily="34" charset="-120"/>
+              </a:rPr>
+              <a:t>It is the set of processes by which molten rock, gases and other materials are forced from the interior of the Earth to the surface.</a:t>
+            </a:r>
+            <a:endParaRPr lang="en-US" sz="4000" dirty="0"/>
+          </a:p>
+          <a:p>
+            <a:pPr algn="l" indent="0" marL="0">
+              <a:spcAft>
+                <a:spcPts val="800"/>
+              </a:spcAft>
+              <a:buNone/>
+            </a:pPr>
+            <a:r>
+              <a:rPr lang="en-US" sz="4000" b="1" dirty="0">
+                <a:solidFill>
+                  <a:srgbClr val="111111"/>
+                </a:solidFill>
+                <a:latin typeface="Times New Roman" pitchFamily="34" charset="0"/>
+                <a:ea typeface="Times New Roman" pitchFamily="34" charset="-122"/>
+                <a:cs typeface="Times New Roman" pitchFamily="34" charset="-120"/>
+              </a:rPr>
+              <a:t>Magma: </a:t>
+            </a:r>
+            <a:pPr algn="l" indent="0" marL="0">
+              <a:spcAft>
+                <a:spcPts val="800"/>
+              </a:spcAft>
+              <a:buNone/>
+            </a:pPr>
+            <a:r>
+              <a:rPr lang="en-US" sz="4000" dirty="0">
+                <a:solidFill>
+                  <a:srgbClr val="111111"/>
+                </a:solidFill>
+                <a:latin typeface="Times New Roman" pitchFamily="34" charset="0"/>
+                <a:ea typeface="Times New Roman" pitchFamily="34" charset="-122"/>
+                <a:cs typeface="Times New Roman" pitchFamily="34" charset="-120"/>
+              </a:rPr>
+              <a:t>It is molten rock below the surface.</a:t>
             </a:r>
             <a:endParaRPr lang="en-US" sz="4000" dirty="0"/>
           </a:p>
@@ -14452,48 +14920,9 @@
           </a:p>
         </p:txBody>
       </p:sp>
-      <p:sp>
-        <p:nvSpPr>
-          <p:cNvPr id="3" name="Text 1"/>
-          <p:cNvSpPr/>
-          <p:nvPr/>
-        </p:nvSpPr>
-        <p:spPr>
-          <a:xfrm>
-            <a:off x="457200" y="1005840"/>
-            <a:ext cx="11277295" cy="731520"/>
-          </a:xfrm>
-          <a:prstGeom prst="rect">
-            <a:avLst/>
-          </a:prstGeom>
-          <a:noFill/>
-          <a:ln/>
-        </p:spPr>
-        <p:txBody>
-          <a:bodyPr wrap="square" lIns="0" tIns="0" rIns="0" bIns="0" rtlCol="0" anchor="ctr"/>
-          <a:lstStyle/>
-          <a:p>
-            <a:pPr algn="ctr" indent="0" marL="0">
-              <a:buNone/>
-            </a:pPr>
-            <a:r>
-              <a:rPr lang="en-US" sz="3600" b="1" dirty="0">
-                <a:solidFill>
-                  <a:srgbClr val="990011"/>
-                </a:solidFill>
-                <a:latin typeface="Times New Roman" pitchFamily="34" charset="0"/>
-                <a:ea typeface="Times New Roman" pitchFamily="34" charset="-122"/>
-                <a:cs typeface="Times New Roman" pitchFamily="34" charset="-120"/>
-              </a:rPr>
-              <a:t>1. Meaning, Process and Cycle</a:t>
-            </a:r>
-            <a:endParaRPr lang="en-US" sz="3600" dirty="0"/>
-          </a:p>
-        </p:txBody>
-      </p:sp>
       <p:pic>
         <p:nvPicPr>
-          <p:cNvPr id="4" name="Image 0" descr="/home/claude/f4/img/v2/volcano_big.png">    </p:cNvPr>
+          <p:cNvPr id="3" name="Image 0" descr="/home/claude/f4/img/minesec_sheet.png">    </p:cNvPr>
           <p:cNvPicPr>
             <a:picLocks noChangeAspect="1"/>
           </p:cNvPicPr>
@@ -14507,8 +14936,8 @@
         </p:blipFill>
         <p:spPr>
           <a:xfrm>
-            <a:off x="629930" y="1783080"/>
-            <a:ext cx="10931835" cy="4270248"/>
+            <a:off x="0" y="658368"/>
+            <a:ext cx="5120640" cy="5833872"/>
           </a:xfrm>
           <a:prstGeom prst="rect">
             <a:avLst/>
@@ -14517,14 +14946,14 @@
       </p:pic>
       <p:sp>
         <p:nvSpPr>
-          <p:cNvPr id="5" name="Text 2"/>
+          <p:cNvPr id="4" name="Text 1"/>
           <p:cNvSpPr/>
           <p:nvPr/>
         </p:nvSpPr>
         <p:spPr>
           <a:xfrm>
-            <a:off x="457200" y="6089904"/>
-            <a:ext cx="11277295" cy="347472"/>
+            <a:off x="5349240" y="1005840"/>
+            <a:ext cx="6522415" cy="731520"/>
           </a:xfrm>
           <a:prstGeom prst="rect">
             <a:avLst/>
@@ -14533,24 +14962,122 @@
           <a:ln/>
         </p:spPr>
         <p:txBody>
-          <a:bodyPr wrap="square" lIns="0" tIns="0" rIns="0" bIns="0" rtlCol="0" anchor="ctr"/>
+          <a:bodyPr wrap="square" lIns="0" tIns="0" rIns="0" bIns="0" rtlCol="0" anchor="ctr">
+            <a:normAutofit/>
+          </a:bodyPr>
           <a:lstStyle/>
           <a:p>
             <a:pPr algn="ctr" indent="0" marL="0">
               <a:buNone/>
             </a:pPr>
             <a:r>
-              <a:rPr lang="en-US" sz="1800" i="1" dirty="0">
-                <a:solidFill>
-                  <a:srgbClr val="555555"/>
+              <a:rPr lang="en-US" sz="3600" b="1" dirty="0">
+                <a:solidFill>
+                  <a:srgbClr val="990011"/>
                 </a:solidFill>
                 <a:latin typeface="Times New Roman" pitchFamily="34" charset="0"/>
                 <a:ea typeface="Times New Roman" pitchFamily="34" charset="-122"/>
                 <a:cs typeface="Times New Roman" pitchFamily="34" charset="-120"/>
               </a:rPr>
-              <a:t>Illustration: structure of a volcano</a:t>
-            </a:r>
-            <a:endParaRPr lang="en-US" sz="1800" dirty="0"/>
+              <a:t>DEFINITIONS (continued)</a:t>
+            </a:r>
+            <a:endParaRPr lang="en-US" sz="3600" dirty="0"/>
+          </a:p>
+        </p:txBody>
+      </p:sp>
+      <p:sp>
+        <p:nvSpPr>
+          <p:cNvPr id="5" name="Text 2"/>
+          <p:cNvSpPr/>
+          <p:nvPr/>
+        </p:nvSpPr>
+        <p:spPr>
+          <a:xfrm>
+            <a:off x="5349240" y="1783080"/>
+            <a:ext cx="6522415" cy="4663440"/>
+          </a:xfrm>
+          <a:prstGeom prst="rect">
+            <a:avLst/>
+          </a:prstGeom>
+          <a:noFill/>
+          <a:ln/>
+        </p:spPr>
+        <p:txBody>
+          <a:bodyPr wrap="square" lIns="0" tIns="0" rIns="0" bIns="0" rtlCol="0" anchor="t"/>
+          <a:lstStyle/>
+          <a:p>
+            <a:pPr algn="l" indent="0" marL="0">
+              <a:spcAft>
+                <a:spcPts val="800"/>
+              </a:spcAft>
+              <a:buNone/>
+            </a:pPr>
+            <a:r>
+              <a:rPr lang="en-US" sz="4000" b="1" dirty="0">
+                <a:solidFill>
+                  <a:srgbClr val="111111"/>
+                </a:solidFill>
+                <a:latin typeface="Times New Roman" pitchFamily="34" charset="0"/>
+                <a:ea typeface="Times New Roman" pitchFamily="34" charset="-122"/>
+                <a:cs typeface="Times New Roman" pitchFamily="34" charset="-120"/>
+              </a:rPr>
+              <a:t>Lava: </a:t>
+            </a:r>
+            <a:pPr algn="l" indent="0" marL="0">
+              <a:spcAft>
+                <a:spcPts val="800"/>
+              </a:spcAft>
+              <a:buNone/>
+            </a:pPr>
+            <a:r>
+              <a:rPr lang="en-US" sz="4000" dirty="0">
+                <a:solidFill>
+                  <a:srgbClr val="111111"/>
+                </a:solidFill>
+                <a:latin typeface="Times New Roman" pitchFamily="34" charset="0"/>
+                <a:ea typeface="Times New Roman" pitchFamily="34" charset="-122"/>
+                <a:cs typeface="Times New Roman" pitchFamily="34" charset="-120"/>
+              </a:rPr>
+              <a:t>It is molten rock that has reached the surface.</a:t>
+            </a:r>
+            <a:endParaRPr lang="en-US" sz="4000" dirty="0"/>
+          </a:p>
+          <a:p>
+            <a:pPr algn="l" indent="0" marL="0">
+              <a:spcAft>
+                <a:spcPts val="800"/>
+              </a:spcAft>
+              <a:buNone/>
+            </a:pPr>
+            <a:r>
+              <a:rPr lang="en-US" sz="4000" b="1" dirty="0">
+                <a:solidFill>
+                  <a:srgbClr val="111111"/>
+                </a:solidFill>
+                <a:latin typeface="Times New Roman" pitchFamily="34" charset="0"/>
+                <a:ea typeface="Times New Roman" pitchFamily="34" charset="-122"/>
+                <a:cs typeface="Times New Roman" pitchFamily="34" charset="-120"/>
+              </a:rPr>
+              <a:t>Pyroclasts: </a:t>
+            </a:r>
+            <a:pPr algn="l" indent="0" marL="0">
+              <a:spcAft>
+                <a:spcPts val="800"/>
+              </a:spcAft>
+              <a:buNone/>
+            </a:pPr>
+            <a:r>
+              <a:rPr lang="en-US" sz="4000" dirty="0">
+                <a:solidFill>
+                  <a:srgbClr val="111111"/>
+                </a:solidFill>
+                <a:latin typeface="Times New Roman" pitchFamily="34" charset="0"/>
+                <a:ea typeface="Times New Roman" pitchFamily="34" charset="-122"/>
+                <a:cs typeface="Times New Roman" pitchFamily="34" charset="-120"/>
+              </a:rPr>
+              <a:t>They are solid fragments thrown out by an eruption, such as ash, cinders and bombs.</a:t>
+            </a:r>
+            <a:endParaRPr lang="en-US" sz="4000" dirty="0"/>
           </a:p>
         </p:txBody>
       </p:sp>
@@ -14666,9 +15193,129 @@
           </a:p>
         </p:txBody>
       </p:sp>
+      <p:sp>
+        <p:nvSpPr>
+          <p:cNvPr id="3" name="Text 1"/>
+          <p:cNvSpPr/>
+          <p:nvPr/>
+        </p:nvSpPr>
+        <p:spPr>
+          <a:xfrm>
+            <a:off x="365760" y="1005840"/>
+            <a:ext cx="11460175" cy="731520"/>
+          </a:xfrm>
+          <a:prstGeom prst="rect">
+            <a:avLst/>
+          </a:prstGeom>
+          <a:noFill/>
+          <a:ln/>
+        </p:spPr>
+        <p:txBody>
+          <a:bodyPr wrap="square" lIns="0" tIns="0" rIns="0" bIns="0" rtlCol="0" anchor="ctr">
+            <a:normAutofit/>
+          </a:bodyPr>
+          <a:lstStyle/>
+          <a:p>
+            <a:pPr algn="ctr" indent="0" marL="0">
+              <a:buNone/>
+            </a:pPr>
+            <a:r>
+              <a:rPr lang="en-US" sz="3600" b="1" dirty="0">
+                <a:solidFill>
+                  <a:srgbClr val="990011"/>
+                </a:solidFill>
+                <a:latin typeface="Times New Roman" pitchFamily="34" charset="0"/>
+                <a:ea typeface="Times New Roman" pitchFamily="34" charset="-122"/>
+                <a:cs typeface="Times New Roman" pitchFamily="34" charset="-120"/>
+              </a:rPr>
+              <a:t>1. The Life Cycle of a Volcano</a:t>
+            </a:r>
+            <a:endParaRPr lang="en-US" sz="3600" dirty="0"/>
+          </a:p>
+        </p:txBody>
+      </p:sp>
+      <p:sp>
+        <p:nvSpPr>
+          <p:cNvPr id="4" name="Text 2"/>
+          <p:cNvSpPr/>
+          <p:nvPr/>
+        </p:nvSpPr>
+        <p:spPr>
+          <a:xfrm>
+            <a:off x="365760" y="1783080"/>
+            <a:ext cx="4846320" cy="4617720"/>
+          </a:xfrm>
+          <a:prstGeom prst="rect">
+            <a:avLst/>
+          </a:prstGeom>
+          <a:noFill/>
+          <a:ln/>
+        </p:spPr>
+        <p:txBody>
+          <a:bodyPr wrap="square" lIns="0" tIns="0" rIns="0" bIns="0" rtlCol="0" anchor="t"/>
+          <a:lstStyle/>
+          <a:p>
+            <a:pPr algn="l" indent="0" marL="0">
+              <a:spcAft>
+                <a:spcPts val="800"/>
+              </a:spcAft>
+              <a:buNone/>
+            </a:pPr>
+            <a:r>
+              <a:rPr lang="en-US" sz="3200" i="1" dirty="0">
+                <a:solidFill>
+                  <a:srgbClr val="111111"/>
+                </a:solidFill>
+                <a:latin typeface="Times New Roman" pitchFamily="34" charset="0"/>
+                <a:ea typeface="Times New Roman" pitchFamily="34" charset="-122"/>
+                <a:cs typeface="Times New Roman" pitchFamily="34" charset="-120"/>
+              </a:rPr>
+              <a:t>Volcanoes are classified by their activity as follows:</a:t>
+            </a:r>
+            <a:endParaRPr lang="en-US" sz="3200" dirty="0"/>
+          </a:p>
+          <a:p>
+            <a:pPr algn="l" indent="0" marL="0">
+              <a:spcAft>
+                <a:spcPts val="800"/>
+              </a:spcAft>
+              <a:buNone/>
+            </a:pPr>
+            <a:r>
+              <a:rPr lang="en-US" sz="3200" b="1" dirty="0">
+                <a:solidFill>
+                  <a:srgbClr val="111111"/>
+                </a:solidFill>
+                <a:latin typeface="Times New Roman" pitchFamily="34" charset="0"/>
+                <a:ea typeface="Times New Roman" pitchFamily="34" charset="-122"/>
+                <a:cs typeface="Times New Roman" pitchFamily="34" charset="-120"/>
+              </a:rPr>
+              <a:t>Active volcano: </a:t>
+            </a:r>
+            <a:pPr algn="l" indent="0" marL="0">
+              <a:spcAft>
+                <a:spcPts val="800"/>
+              </a:spcAft>
+              <a:buNone/>
+            </a:pPr>
+            <a:r>
+              <a:rPr lang="en-US" sz="3200" dirty="0">
+                <a:solidFill>
+                  <a:srgbClr val="111111"/>
+                </a:solidFill>
+                <a:latin typeface="Times New Roman" pitchFamily="34" charset="0"/>
+                <a:ea typeface="Times New Roman" pitchFamily="34" charset="-122"/>
+                <a:cs typeface="Times New Roman" pitchFamily="34" charset="-120"/>
+              </a:rPr>
+              <a:t>It is erupting or has erupted in recorded history, like Mount Cameroon (1999, 2000 and small activity in 2012).</a:t>
+            </a:r>
+            <a:endParaRPr lang="en-US" sz="3200" dirty="0"/>
+          </a:p>
+        </p:txBody>
+      </p:sp>
       <p:pic>
         <p:nvPicPr>
-          <p:cNvPr id="3" name="Image 0" descr="/home/claude/f4/img/minesec_sheet.png">    </p:cNvPr>
+          <p:cNvPr id="5" name="Image 0" descr="/home/claude/f4/img/v2/geo2_volc_life.png">    </p:cNvPr>
           <p:cNvPicPr>
             <a:picLocks noChangeAspect="1"/>
           </p:cNvPicPr>
@@ -14682,8 +15329,8 @@
         </p:blipFill>
         <p:spPr>
           <a:xfrm>
-            <a:off x="0" y="658368"/>
-            <a:ext cx="1463040" cy="5833872"/>
+            <a:off x="5349240" y="2617506"/>
+            <a:ext cx="6659575" cy="2601397"/>
           </a:xfrm>
           <a:prstGeom prst="rect">
             <a:avLst/>
@@ -14692,14 +15339,14 @@
       </p:pic>
       <p:sp>
         <p:nvSpPr>
-          <p:cNvPr id="4" name="Text 1"/>
+          <p:cNvPr id="6" name="Text 3"/>
           <p:cNvSpPr/>
           <p:nvPr/>
         </p:nvSpPr>
         <p:spPr>
           <a:xfrm>
-            <a:off x="1691640" y="1005840"/>
-            <a:ext cx="10180015" cy="731520"/>
+            <a:off x="5349240" y="6089904"/>
+            <a:ext cx="6659575" cy="347472"/>
           </a:xfrm>
           <a:prstGeom prst="rect">
             <a:avLst/>
@@ -14708,142 +15355,24 @@
           <a:ln/>
         </p:spPr>
         <p:txBody>
-          <a:bodyPr wrap="square" lIns="0" tIns="0" rIns="0" bIns="0" rtlCol="0" anchor="ctr">
-            <a:normAutofit/>
-          </a:bodyPr>
+          <a:bodyPr wrap="square" lIns="0" tIns="0" rIns="0" bIns="0" rtlCol="0" anchor="ctr"/>
           <a:lstStyle/>
           <a:p>
             <a:pPr algn="ctr" indent="0" marL="0">
               <a:buNone/>
             </a:pPr>
             <a:r>
-              <a:rPr lang="en-US" sz="3600" b="1" dirty="0">
-                <a:solidFill>
-                  <a:srgbClr val="990011"/>
+              <a:rPr lang="en-US" sz="1600" i="1" dirty="0">
+                <a:solidFill>
+                  <a:srgbClr val="555555"/>
                 </a:solidFill>
                 <a:latin typeface="Times New Roman" pitchFamily="34" charset="0"/>
                 <a:ea typeface="Times New Roman" pitchFamily="34" charset="-122"/>
                 <a:cs typeface="Times New Roman" pitchFamily="34" charset="-120"/>
               </a:rPr>
-              <a:t>2. Products of Volcanoes</a:t>
-            </a:r>
-            <a:endParaRPr lang="en-US" sz="3600" dirty="0"/>
-          </a:p>
-        </p:txBody>
-      </p:sp>
-      <p:sp>
-        <p:nvSpPr>
-          <p:cNvPr id="5" name="Text 2"/>
-          <p:cNvSpPr/>
-          <p:nvPr/>
-        </p:nvSpPr>
-        <p:spPr>
-          <a:xfrm>
-            <a:off x="1691640" y="1783080"/>
-            <a:ext cx="10180015" cy="4663440"/>
-          </a:xfrm>
-          <a:prstGeom prst="rect">
-            <a:avLst/>
-          </a:prstGeom>
-          <a:noFill/>
-          <a:ln/>
-        </p:spPr>
-        <p:txBody>
-          <a:bodyPr wrap="square" lIns="0" tIns="0" rIns="0" bIns="0" rtlCol="0" anchor="t"/>
-          <a:lstStyle/>
-          <a:p>
-            <a:pPr algn="l" indent="0" marL="0">
-              <a:spcAft>
-                <a:spcPts val="800"/>
-              </a:spcAft>
-              <a:buNone/>
-            </a:pPr>
-            <a:r>
-              <a:rPr lang="en-US" sz="4000" i="1" dirty="0">
-                <a:solidFill>
-                  <a:srgbClr val="111111"/>
-                </a:solidFill>
-                <a:latin typeface="Times New Roman" pitchFamily="34" charset="0"/>
-                <a:ea typeface="Times New Roman" pitchFamily="34" charset="-122"/>
-                <a:cs typeface="Times New Roman" pitchFamily="34" charset="-120"/>
-              </a:rPr>
-              <a:t>Volcanoes produce the following materials:</a:t>
-            </a:r>
-            <a:endParaRPr lang="en-US" sz="4000" dirty="0"/>
-          </a:p>
-          <a:p>
-            <a:pPr algn="l" indent="0" marL="0">
-              <a:spcAft>
-                <a:spcPts val="800"/>
-              </a:spcAft>
-              <a:buNone/>
-            </a:pPr>
-            <a:r>
-              <a:rPr lang="en-US" sz="4000" b="1" dirty="0">
-                <a:solidFill>
-                  <a:srgbClr val="111111"/>
-                </a:solidFill>
-                <a:latin typeface="Times New Roman" pitchFamily="34" charset="0"/>
-                <a:ea typeface="Times New Roman" pitchFamily="34" charset="-122"/>
-                <a:cs typeface="Times New Roman" pitchFamily="34" charset="-120"/>
-              </a:rPr>
-              <a:t>Lava: </a:t>
-            </a:r>
-            <a:pPr algn="l" indent="0" marL="0">
-              <a:spcAft>
-                <a:spcPts val="800"/>
-              </a:spcAft>
-              <a:buNone/>
-            </a:pPr>
-            <a:r>
-              <a:rPr lang="en-US" sz="4000" dirty="0">
-                <a:solidFill>
-                  <a:srgbClr val="111111"/>
-                </a:solidFill>
-                <a:latin typeface="Times New Roman" pitchFamily="34" charset="0"/>
-                <a:ea typeface="Times New Roman" pitchFamily="34" charset="-122"/>
-                <a:cs typeface="Times New Roman" pitchFamily="34" charset="-120"/>
-              </a:rPr>
-              <a:t>It is magma at the surface; basic lava is runny, while acid lava is thick. Pahoehoe and aa are types of lava flows.</a:t>
-            </a:r>
-            <a:endParaRPr lang="en-US" sz="4000" dirty="0"/>
-          </a:p>
-          <a:p>
-            <a:pPr algn="l" indent="0" marL="0">
-              <a:spcAft>
-                <a:spcPts val="800"/>
-              </a:spcAft>
-              <a:buNone/>
-            </a:pPr>
-            <a:r>
-              <a:rPr lang="en-US" sz="4000" b="1" dirty="0">
-                <a:solidFill>
-                  <a:srgbClr val="111111"/>
-                </a:solidFill>
-                <a:latin typeface="Times New Roman" pitchFamily="34" charset="0"/>
-                <a:ea typeface="Times New Roman" pitchFamily="34" charset="-122"/>
-                <a:cs typeface="Times New Roman" pitchFamily="34" charset="-120"/>
-              </a:rPr>
-              <a:t>Pyroclasts: </a:t>
-            </a:r>
-            <a:pPr algn="l" indent="0" marL="0">
-              <a:spcAft>
-                <a:spcPts val="800"/>
-              </a:spcAft>
-              <a:buNone/>
-            </a:pPr>
-            <a:r>
-              <a:rPr lang="en-US" sz="4000" dirty="0">
-                <a:solidFill>
-                  <a:srgbClr val="111111"/>
-                </a:solidFill>
-                <a:latin typeface="Times New Roman" pitchFamily="34" charset="0"/>
-                <a:ea typeface="Times New Roman" pitchFamily="34" charset="-122"/>
-                <a:cs typeface="Times New Roman" pitchFamily="34" charset="-120"/>
-              </a:rPr>
-              <a:t>They are solid fragments: ash, lapilli and volcanic bombs. They fall around the volcano and build cones.</a:t>
-            </a:r>
-            <a:endParaRPr lang="en-US" sz="4000" dirty="0"/>
+              <a:t>Illustration: the life cycle of a volcano</a:t>
+            </a:r>
+            <a:endParaRPr lang="en-US" sz="1600" dirty="0"/>
           </a:p>
         </p:txBody>
       </p:sp>
@@ -14959,9 +15488,109 @@
           </a:p>
         </p:txBody>
       </p:sp>
+      <p:sp>
+        <p:nvSpPr>
+          <p:cNvPr id="3" name="Text 1"/>
+          <p:cNvSpPr/>
+          <p:nvPr/>
+        </p:nvSpPr>
+        <p:spPr>
+          <a:xfrm>
+            <a:off x="365760" y="1005840"/>
+            <a:ext cx="11460175" cy="731520"/>
+          </a:xfrm>
+          <a:prstGeom prst="rect">
+            <a:avLst/>
+          </a:prstGeom>
+          <a:noFill/>
+          <a:ln/>
+        </p:spPr>
+        <p:txBody>
+          <a:bodyPr wrap="square" lIns="0" tIns="0" rIns="0" bIns="0" rtlCol="0" anchor="ctr">
+            <a:normAutofit/>
+          </a:bodyPr>
+          <a:lstStyle/>
+          <a:p>
+            <a:pPr algn="ctr" indent="0" marL="0">
+              <a:buNone/>
+            </a:pPr>
+            <a:r>
+              <a:rPr lang="en-US" sz="3600" b="1" dirty="0">
+                <a:solidFill>
+                  <a:srgbClr val="990011"/>
+                </a:solidFill>
+                <a:latin typeface="Times New Roman" pitchFamily="34" charset="0"/>
+                <a:ea typeface="Times New Roman" pitchFamily="34" charset="-122"/>
+                <a:cs typeface="Times New Roman" pitchFamily="34" charset="-120"/>
+              </a:rPr>
+              <a:t>1. The Life Cycle of a Volcano</a:t>
+            </a:r>
+            <a:endParaRPr lang="en-US" sz="3600" dirty="0"/>
+          </a:p>
+        </p:txBody>
+      </p:sp>
+      <p:sp>
+        <p:nvSpPr>
+          <p:cNvPr id="4" name="Text 2"/>
+          <p:cNvSpPr/>
+          <p:nvPr/>
+        </p:nvSpPr>
+        <p:spPr>
+          <a:xfrm>
+            <a:off x="365760" y="1783080"/>
+            <a:ext cx="4846320" cy="4617720"/>
+          </a:xfrm>
+          <a:prstGeom prst="rect">
+            <a:avLst/>
+          </a:prstGeom>
+          <a:noFill/>
+          <a:ln/>
+        </p:spPr>
+        <p:txBody>
+          <a:bodyPr wrap="square" lIns="0" tIns="0" rIns="0" bIns="0" rtlCol="0" anchor="t"/>
+          <a:lstStyle/>
+          <a:p>
+            <a:pPr algn="l" indent="0" marL="0">
+              <a:spcAft>
+                <a:spcPts val="800"/>
+              </a:spcAft>
+              <a:buNone/>
+            </a:pPr>
+            <a:r>
+              <a:rPr lang="en-US" sz="3600" b="1" dirty="0">
+                <a:solidFill>
+                  <a:srgbClr val="111111"/>
+                </a:solidFill>
+                <a:latin typeface="Times New Roman" pitchFamily="34" charset="0"/>
+                <a:ea typeface="Times New Roman" pitchFamily="34" charset="-122"/>
+                <a:cs typeface="Times New Roman" pitchFamily="34" charset="-120"/>
+              </a:rPr>
+              <a:t>Dormant volcano: </a:t>
+            </a:r>
+            <a:pPr algn="l" indent="0" marL="0">
+              <a:spcAft>
+                <a:spcPts val="800"/>
+              </a:spcAft>
+              <a:buNone/>
+            </a:pPr>
+            <a:r>
+              <a:rPr lang="en-US" sz="3600" dirty="0">
+                <a:solidFill>
+                  <a:srgbClr val="111111"/>
+                </a:solidFill>
+                <a:latin typeface="Times New Roman" pitchFamily="34" charset="0"/>
+                <a:ea typeface="Times New Roman" pitchFamily="34" charset="-122"/>
+                <a:cs typeface="Times New Roman" pitchFamily="34" charset="-120"/>
+              </a:rPr>
+              <a:t>It has not erupted for a long time but may erupt again, like Kilimanjaro and Mount Fuji.</a:t>
+            </a:r>
+            <a:endParaRPr lang="en-US" sz="3600" dirty="0"/>
+          </a:p>
+        </p:txBody>
+      </p:sp>
       <p:pic>
         <p:nvPicPr>
-          <p:cNvPr id="3" name="Image 0" descr="/home/claude/f4/img/minesec_sheet.png">    </p:cNvPr>
+          <p:cNvPr id="5" name="Image 0" descr="/home/claude/f4/img/v2/f2t_kilimanjaro.jpg">    </p:cNvPr>
           <p:cNvPicPr>
             <a:picLocks noChangeAspect="1"/>
           </p:cNvPicPr>
@@ -14975,8 +15604,8 @@
         </p:blipFill>
         <p:spPr>
           <a:xfrm>
-            <a:off x="0" y="658368"/>
-            <a:ext cx="5120640" cy="5833872"/>
+            <a:off x="5349240" y="2071212"/>
+            <a:ext cx="6659575" cy="3693983"/>
           </a:xfrm>
           <a:prstGeom prst="rect">
             <a:avLst/>
@@ -14985,14 +15614,14 @@
       </p:pic>
       <p:sp>
         <p:nvSpPr>
-          <p:cNvPr id="4" name="Text 1"/>
+          <p:cNvPr id="6" name="Text 3"/>
           <p:cNvSpPr/>
           <p:nvPr/>
         </p:nvSpPr>
         <p:spPr>
           <a:xfrm>
-            <a:off x="5349240" y="1005840"/>
-            <a:ext cx="6522415" cy="731520"/>
+            <a:off x="5349240" y="6089904"/>
+            <a:ext cx="6659575" cy="347472"/>
           </a:xfrm>
           <a:prstGeom prst="rect">
             <a:avLst/>
@@ -15001,85 +15630,24 @@
           <a:ln/>
         </p:spPr>
         <p:txBody>
-          <a:bodyPr wrap="square" lIns="0" tIns="0" rIns="0" bIns="0" rtlCol="0" anchor="ctr">
-            <a:normAutofit/>
-          </a:bodyPr>
+          <a:bodyPr wrap="square" lIns="0" tIns="0" rIns="0" bIns="0" rtlCol="0" anchor="ctr"/>
           <a:lstStyle/>
           <a:p>
             <a:pPr algn="ctr" indent="0" marL="0">
               <a:buNone/>
             </a:pPr>
             <a:r>
-              <a:rPr lang="en-US" sz="3600" b="1" dirty="0">
-                <a:solidFill>
-                  <a:srgbClr val="990011"/>
+              <a:rPr lang="en-US" sz="1600" i="1" dirty="0">
+                <a:solidFill>
+                  <a:srgbClr val="555555"/>
                 </a:solidFill>
                 <a:latin typeface="Times New Roman" pitchFamily="34" charset="0"/>
                 <a:ea typeface="Times New Roman" pitchFamily="34" charset="-122"/>
                 <a:cs typeface="Times New Roman" pitchFamily="34" charset="-120"/>
               </a:rPr>
-              <a:t>2. Products of Volcanoes (continued)</a:t>
-            </a:r>
-            <a:endParaRPr lang="en-US" sz="3600" dirty="0"/>
-          </a:p>
-        </p:txBody>
-      </p:sp>
-      <p:sp>
-        <p:nvSpPr>
-          <p:cNvPr id="5" name="Text 2"/>
-          <p:cNvSpPr/>
-          <p:nvPr/>
-        </p:nvSpPr>
-        <p:spPr>
-          <a:xfrm>
-            <a:off x="5349240" y="1783080"/>
-            <a:ext cx="6522415" cy="4663440"/>
-          </a:xfrm>
-          <a:prstGeom prst="rect">
-            <a:avLst/>
-          </a:prstGeom>
-          <a:noFill/>
-          <a:ln/>
-        </p:spPr>
-        <p:txBody>
-          <a:bodyPr wrap="square" lIns="0" tIns="0" rIns="0" bIns="0" rtlCol="0" anchor="t"/>
-          <a:lstStyle/>
-          <a:p>
-            <a:pPr algn="l" indent="0" marL="0">
-              <a:spcAft>
-                <a:spcPts val="800"/>
-              </a:spcAft>
-              <a:buNone/>
-            </a:pPr>
-            <a:r>
-              <a:rPr lang="en-US" sz="4000" b="1" dirty="0">
-                <a:solidFill>
-                  <a:srgbClr val="111111"/>
-                </a:solidFill>
-                <a:latin typeface="Times New Roman" pitchFamily="34" charset="0"/>
-                <a:ea typeface="Times New Roman" pitchFamily="34" charset="-122"/>
-                <a:cs typeface="Times New Roman" pitchFamily="34" charset="-120"/>
-              </a:rPr>
-              <a:t>Gases: </a:t>
-            </a:r>
-            <a:pPr algn="l" indent="0" marL="0">
-              <a:spcAft>
-                <a:spcPts val="800"/>
-              </a:spcAft>
-              <a:buNone/>
-            </a:pPr>
-            <a:r>
-              <a:rPr lang="en-US" sz="4000" dirty="0">
-                <a:solidFill>
-                  <a:srgbClr val="111111"/>
-                </a:solidFill>
-                <a:latin typeface="Times New Roman" pitchFamily="34" charset="0"/>
-                <a:ea typeface="Times New Roman" pitchFamily="34" charset="-122"/>
-                <a:cs typeface="Times New Roman" pitchFamily="34" charset="-120"/>
-              </a:rPr>
-              <a:t>Volcanoes release water vapour, carbon dioxide and sulphur gases. These gases can be deadly, as at Lake Nyos.</a:t>
-            </a:r>
-            <a:endParaRPr lang="en-US" sz="4000" dirty="0"/>
+              <a:t>Illustration: Kilimanjaro</a:t>
+            </a:r>
+            <a:endParaRPr lang="en-US" sz="1600" dirty="0"/>
           </a:p>
         </p:txBody>
       </p:sp>
@@ -15316,7 +15884,7 @@
                 <a:ea typeface="Times New Roman" pitchFamily="34" charset="-122"/>
                 <a:cs typeface="Times New Roman" pitchFamily="34" charset="-120"/>
               </a:rPr>
-              <a:t>Collect information about Mount Cameroon: its height and the years of its recent eruptions.</a:t>
+              <a:t>Distinguish magma from lava.</a:t>
             </a:r>
             <a:endParaRPr lang="en-US" sz="4000" dirty="0"/>
           </a:p>
@@ -15434,9 +16002,109 @@
           </a:p>
         </p:txBody>
       </p:sp>
+      <p:sp>
+        <p:nvSpPr>
+          <p:cNvPr id="3" name="Text 1"/>
+          <p:cNvSpPr/>
+          <p:nvPr/>
+        </p:nvSpPr>
+        <p:spPr>
+          <a:xfrm>
+            <a:off x="365760" y="1005840"/>
+            <a:ext cx="11460175" cy="731520"/>
+          </a:xfrm>
+          <a:prstGeom prst="rect">
+            <a:avLst/>
+          </a:prstGeom>
+          <a:noFill/>
+          <a:ln/>
+        </p:spPr>
+        <p:txBody>
+          <a:bodyPr wrap="square" lIns="0" tIns="0" rIns="0" bIns="0" rtlCol="0" anchor="ctr">
+            <a:normAutofit/>
+          </a:bodyPr>
+          <a:lstStyle/>
+          <a:p>
+            <a:pPr algn="ctr" indent="0" marL="0">
+              <a:buNone/>
+            </a:pPr>
+            <a:r>
+              <a:rPr lang="en-US" sz="3600" b="1" dirty="0">
+                <a:solidFill>
+                  <a:srgbClr val="990011"/>
+                </a:solidFill>
+                <a:latin typeface="Times New Roman" pitchFamily="34" charset="0"/>
+                <a:ea typeface="Times New Roman" pitchFamily="34" charset="-122"/>
+                <a:cs typeface="Times New Roman" pitchFamily="34" charset="-120"/>
+              </a:rPr>
+              <a:t>1. The Life Cycle of a Volcano</a:t>
+            </a:r>
+            <a:endParaRPr lang="en-US" sz="3600" dirty="0"/>
+          </a:p>
+        </p:txBody>
+      </p:sp>
+      <p:sp>
+        <p:nvSpPr>
+          <p:cNvPr id="4" name="Text 2"/>
+          <p:cNvSpPr/>
+          <p:nvPr/>
+        </p:nvSpPr>
+        <p:spPr>
+          <a:xfrm>
+            <a:off x="365760" y="1783080"/>
+            <a:ext cx="4846320" cy="4617720"/>
+          </a:xfrm>
+          <a:prstGeom prst="rect">
+            <a:avLst/>
+          </a:prstGeom>
+          <a:noFill/>
+          <a:ln/>
+        </p:spPr>
+        <p:txBody>
+          <a:bodyPr wrap="square" lIns="0" tIns="0" rIns="0" bIns="0" rtlCol="0" anchor="t"/>
+          <a:lstStyle/>
+          <a:p>
+            <a:pPr algn="l" indent="0" marL="0">
+              <a:spcAft>
+                <a:spcPts val="800"/>
+              </a:spcAft>
+              <a:buNone/>
+            </a:pPr>
+            <a:r>
+              <a:rPr lang="en-US" sz="3600" b="1" dirty="0">
+                <a:solidFill>
+                  <a:srgbClr val="111111"/>
+                </a:solidFill>
+                <a:latin typeface="Times New Roman" pitchFamily="34" charset="0"/>
+                <a:ea typeface="Times New Roman" pitchFamily="34" charset="-122"/>
+                <a:cs typeface="Times New Roman" pitchFamily="34" charset="-120"/>
+              </a:rPr>
+              <a:t>Extinct volcano: </a:t>
+            </a:r>
+            <a:pPr algn="l" indent="0" marL="0">
+              <a:spcAft>
+                <a:spcPts val="800"/>
+              </a:spcAft>
+              <a:buNone/>
+            </a:pPr>
+            <a:r>
+              <a:rPr lang="en-US" sz="3600" dirty="0">
+                <a:solidFill>
+                  <a:srgbClr val="111111"/>
+                </a:solidFill>
+                <a:latin typeface="Times New Roman" pitchFamily="34" charset="0"/>
+                <a:ea typeface="Times New Roman" pitchFamily="34" charset="-122"/>
+                <a:cs typeface="Times New Roman" pitchFamily="34" charset="-120"/>
+              </a:rPr>
+              <a:t>It has not erupted for thousands or millions of years and will not erupt again, like the volcanic necks of Rhumsiki.</a:t>
+            </a:r>
+            <a:endParaRPr lang="en-US" sz="3600" dirty="0"/>
+          </a:p>
+        </p:txBody>
+      </p:sp>
       <p:pic>
         <p:nvPicPr>
-          <p:cNvPr id="3" name="Image 0" descr="/home/claude/f4/img/minesec_sheet.png">    </p:cNvPr>
+          <p:cNvPr id="5" name="Image 0" descr="/home/claude/f4/img/v2/lsa_mandara.jpg">    </p:cNvPr>
           <p:cNvPicPr>
             <a:picLocks noChangeAspect="1"/>
           </p:cNvPicPr>
@@ -15450,8 +16118,8 @@
         </p:blipFill>
         <p:spPr>
           <a:xfrm>
-            <a:off x="0" y="658368"/>
-            <a:ext cx="5120640" cy="5833872"/>
+            <a:off x="5349240" y="3040233"/>
+            <a:ext cx="6659575" cy="1755943"/>
           </a:xfrm>
           <a:prstGeom prst="rect">
             <a:avLst/>
@@ -15460,14 +16128,14 @@
       </p:pic>
       <p:sp>
         <p:nvSpPr>
-          <p:cNvPr id="4" name="Text 1"/>
+          <p:cNvPr id="6" name="Text 3"/>
           <p:cNvSpPr/>
           <p:nvPr/>
         </p:nvSpPr>
         <p:spPr>
           <a:xfrm>
-            <a:off x="5349240" y="1005840"/>
-            <a:ext cx="6522415" cy="731520"/>
+            <a:off x="5349240" y="6089904"/>
+            <a:ext cx="6659575" cy="347472"/>
           </a:xfrm>
           <a:prstGeom prst="rect">
             <a:avLst/>
@@ -15476,105 +16144,24 @@
           <a:ln/>
         </p:spPr>
         <p:txBody>
-          <a:bodyPr wrap="square" lIns="0" tIns="0" rIns="0" bIns="0" rtlCol="0" anchor="ctr">
-            <a:normAutofit/>
-          </a:bodyPr>
+          <a:bodyPr wrap="square" lIns="0" tIns="0" rIns="0" bIns="0" rtlCol="0" anchor="ctr"/>
           <a:lstStyle/>
           <a:p>
             <a:pPr algn="ctr" indent="0" marL="0">
               <a:buNone/>
             </a:pPr>
             <a:r>
-              <a:rPr lang="en-US" sz="3600" b="1" dirty="0">
-                <a:solidFill>
-                  <a:srgbClr val="990011"/>
+              <a:rPr lang="en-US" sz="1600" i="1" dirty="0">
+                <a:solidFill>
+                  <a:srgbClr val="555555"/>
                 </a:solidFill>
                 <a:latin typeface="Times New Roman" pitchFamily="34" charset="0"/>
                 <a:ea typeface="Times New Roman" pitchFamily="34" charset="-122"/>
                 <a:cs typeface="Times New Roman" pitchFamily="34" charset="-120"/>
               </a:rPr>
-              <a:t>3. Volcanic Landforms</a:t>
-            </a:r>
-            <a:endParaRPr lang="en-US" sz="3600" dirty="0"/>
-          </a:p>
-        </p:txBody>
-      </p:sp>
-      <p:sp>
-        <p:nvSpPr>
-          <p:cNvPr id="5" name="Text 2"/>
-          <p:cNvSpPr/>
-          <p:nvPr/>
-        </p:nvSpPr>
-        <p:spPr>
-          <a:xfrm>
-            <a:off x="5349240" y="1783080"/>
-            <a:ext cx="6522415" cy="4663440"/>
-          </a:xfrm>
-          <a:prstGeom prst="rect">
-            <a:avLst/>
-          </a:prstGeom>
-          <a:noFill/>
-          <a:ln/>
-        </p:spPr>
-        <p:txBody>
-          <a:bodyPr wrap="square" lIns="0" tIns="0" rIns="0" bIns="0" rtlCol="0" anchor="t"/>
-          <a:lstStyle/>
-          <a:p>
-            <a:pPr algn="l" indent="0" marL="0">
-              <a:spcAft>
-                <a:spcPts val="800"/>
-              </a:spcAft>
-              <a:buNone/>
-            </a:pPr>
-            <a:r>
-              <a:rPr lang="en-US" sz="4000" i="1" dirty="0">
-                <a:solidFill>
-                  <a:srgbClr val="111111"/>
-                </a:solidFill>
-                <a:latin typeface="Times New Roman" pitchFamily="34" charset="0"/>
-                <a:ea typeface="Times New Roman" pitchFamily="34" charset="-122"/>
-                <a:cs typeface="Times New Roman" pitchFamily="34" charset="-120"/>
-              </a:rPr>
-              <a:t>The type of landform depends on the lava and the eruption:</a:t>
-            </a:r>
-            <a:endParaRPr lang="en-US" sz="4000" dirty="0"/>
-          </a:p>
-          <a:p>
-            <a:pPr algn="l" indent="0" marL="0">
-              <a:spcAft>
-                <a:spcPts val="800"/>
-              </a:spcAft>
-              <a:buNone/>
-            </a:pPr>
-            <a:r>
-              <a:rPr lang="en-US" sz="4000" b="1" dirty="0">
-                <a:solidFill>
-                  <a:srgbClr val="111111"/>
-                </a:solidFill>
-                <a:latin typeface="Times New Roman" pitchFamily="34" charset="0"/>
-                <a:ea typeface="Times New Roman" pitchFamily="34" charset="-122"/>
-                <a:cs typeface="Times New Roman" pitchFamily="34" charset="-120"/>
-              </a:rPr>
-              <a:t>Basic lava cones: </a:t>
-            </a:r>
-            <a:pPr algn="l" indent="0" marL="0">
-              <a:spcAft>
-                <a:spcPts val="800"/>
-              </a:spcAft>
-              <a:buNone/>
-            </a:pPr>
-            <a:r>
-              <a:rPr lang="en-US" sz="4000" dirty="0">
-                <a:solidFill>
-                  <a:srgbClr val="111111"/>
-                </a:solidFill>
-                <a:latin typeface="Times New Roman" pitchFamily="34" charset="0"/>
-                <a:ea typeface="Times New Roman" pitchFamily="34" charset="-122"/>
-                <a:cs typeface="Times New Roman" pitchFamily="34" charset="-120"/>
-              </a:rPr>
-              <a:t>Runny lava forms wide cones with gentle slopes (shield volcanoes). Mauna Loa is an example.</a:t>
-            </a:r>
-            <a:endParaRPr lang="en-US" sz="4000" dirty="0"/>
+              <a:t>Illustration: volcanic necks near Rhumsiki</a:t>
+            </a:r>
+            <a:endParaRPr lang="en-US" sz="1600" dirty="0"/>
           </a:p>
         </p:txBody>
       </p:sp>
@@ -15707,7 +16294,7 @@
         <p:spPr>
           <a:xfrm>
             <a:off x="0" y="658368"/>
-            <a:ext cx="2468880" cy="5833872"/>
+            <a:ext cx="1463040" cy="5833872"/>
           </a:xfrm>
           <a:prstGeom prst="rect">
             <a:avLst/>
@@ -15722,8 +16309,8 @@
         </p:nvSpPr>
         <p:spPr>
           <a:xfrm>
-            <a:off x="2697480" y="1005840"/>
-            <a:ext cx="9174175" cy="731520"/>
+            <a:off x="1691640" y="1005840"/>
+            <a:ext cx="10180015" cy="731520"/>
           </a:xfrm>
           <a:prstGeom prst="rect">
             <a:avLst/>
@@ -15749,7 +16336,7 @@
                 <a:ea typeface="Times New Roman" pitchFamily="34" charset="-122"/>
                 <a:cs typeface="Times New Roman" pitchFamily="34" charset="-120"/>
               </a:rPr>
-              <a:t>3. Volcanic Landforms (continued)</a:t>
+              <a:t>2. Products of a Volcanic Eruption</a:t>
             </a:r>
             <a:endParaRPr lang="en-US" sz="3600" dirty="0"/>
           </a:p>
@@ -15763,8 +16350,8 @@
         </p:nvSpPr>
         <p:spPr>
           <a:xfrm>
-            <a:off x="2697480" y="1783080"/>
-            <a:ext cx="9174175" cy="4663440"/>
+            <a:off x="1691640" y="1783080"/>
+            <a:ext cx="10180015" cy="4663440"/>
           </a:xfrm>
           <a:prstGeom prst="rect">
             <a:avLst/>
@@ -15783,7 +16370,7 @@
               <a:buNone/>
             </a:pPr>
             <a:r>
-              <a:rPr lang="en-US" sz="4000" b="1" dirty="0">
+              <a:rPr lang="en-US" sz="4000" i="1" dirty="0">
                 <a:solidFill>
                   <a:srgbClr val="111111"/>
                 </a:solidFill>
@@ -15791,8 +16378,11 @@
                 <a:ea typeface="Times New Roman" pitchFamily="34" charset="-122"/>
                 <a:cs typeface="Times New Roman" pitchFamily="34" charset="-120"/>
               </a:rPr>
-              <a:t>Acid lava cones (cumulo-domes): </a:t>
-            </a:r>
+              <a:t>An eruption releases the following products:</a:t>
+            </a:r>
+            <a:endParaRPr lang="en-US" sz="4000" dirty="0"/>
+          </a:p>
+          <a:p>
             <a:pPr algn="l" indent="0" marL="0">
               <a:spcAft>
                 <a:spcPts val="800"/>
@@ -15800,7 +16390,7 @@
               <a:buNone/>
             </a:pPr>
             <a:r>
-              <a:rPr lang="en-US" sz="4000" dirty="0">
+              <a:rPr lang="en-US" sz="4000" b="1" dirty="0">
                 <a:solidFill>
                   <a:srgbClr val="111111"/>
                 </a:solidFill>
@@ -15808,19 +16398,20 @@
                 <a:ea typeface="Times New Roman" pitchFamily="34" charset="-122"/>
                 <a:cs typeface="Times New Roman" pitchFamily="34" charset="-120"/>
               </a:rPr>
-              <a:t>Thick lava forms steep, dome-shaped cones. The lava does not flow far.</a:t>
+              <a:t>Lava:</a:t>
             </a:r>
             <a:endParaRPr lang="en-US" sz="4000" dirty="0"/>
           </a:p>
           <a:p>
-            <a:pPr algn="l" indent="0" marL="0">
+            <a:pPr algn="l" marL="342900" indent="-342900">
               <a:spcAft>
                 <a:spcPts val="800"/>
               </a:spcAft>
-              <a:buNone/>
-            </a:pPr>
-            <a:r>
-              <a:rPr lang="en-US" sz="4000" b="1" dirty="0">
+              <a:buSzPct val="100000"/>
+              <a:buChar char="•"/>
+            </a:pPr>
+            <a:r>
+              <a:rPr lang="en-US" sz="4000" dirty="0">
                 <a:solidFill>
                   <a:srgbClr val="111111"/>
                 </a:solidFill>
@@ -15828,13 +16419,17 @@
                 <a:ea typeface="Times New Roman" pitchFamily="34" charset="-122"/>
                 <a:cs typeface="Times New Roman" pitchFamily="34" charset="-120"/>
               </a:rPr>
-              <a:t>Ash and cinder cones: </a:t>
-            </a:r>
-            <a:pPr algn="l" indent="0" marL="0">
+              <a:t>Basic lava: runny, low in silica, flows far (basalt).</a:t>
+            </a:r>
+            <a:endParaRPr lang="en-US" sz="4000" dirty="0"/>
+          </a:p>
+          <a:p>
+            <a:pPr algn="l" marL="342900" indent="-342900">
               <a:spcAft>
                 <a:spcPts val="800"/>
               </a:spcAft>
-              <a:buNone/>
+              <a:buSzPct val="100000"/>
+              <a:buChar char="•"/>
             </a:pPr>
             <a:r>
               <a:rPr lang="en-US" sz="4000" dirty="0">
@@ -15845,7 +16440,7 @@
                 <a:ea typeface="Times New Roman" pitchFamily="34" charset="-122"/>
                 <a:cs typeface="Times New Roman" pitchFamily="34" charset="-120"/>
               </a:rPr>
-              <a:t>Pyroclasts pile up into small, steep, concave cones. Many exist on Mount Cameroon.</a:t>
+              <a:t>Acid lava: thick and sticky, rich in silica, stays near the vent.</a:t>
             </a:r>
             <a:endParaRPr lang="en-US" sz="4000" dirty="0"/>
           </a:p>
@@ -15963,9 +16558,109 @@
           </a:p>
         </p:txBody>
       </p:sp>
+      <p:sp>
+        <p:nvSpPr>
+          <p:cNvPr id="3" name="Text 1"/>
+          <p:cNvSpPr/>
+          <p:nvPr/>
+        </p:nvSpPr>
+        <p:spPr>
+          <a:xfrm>
+            <a:off x="365760" y="1005840"/>
+            <a:ext cx="11460175" cy="731520"/>
+          </a:xfrm>
+          <a:prstGeom prst="rect">
+            <a:avLst/>
+          </a:prstGeom>
+          <a:noFill/>
+          <a:ln/>
+        </p:spPr>
+        <p:txBody>
+          <a:bodyPr wrap="square" lIns="0" tIns="0" rIns="0" bIns="0" rtlCol="0" anchor="ctr">
+            <a:normAutofit/>
+          </a:bodyPr>
+          <a:lstStyle/>
+          <a:p>
+            <a:pPr algn="ctr" indent="0" marL="0">
+              <a:buNone/>
+            </a:pPr>
+            <a:r>
+              <a:rPr lang="en-US" sz="3600" b="1" dirty="0">
+                <a:solidFill>
+                  <a:srgbClr val="990011"/>
+                </a:solidFill>
+                <a:latin typeface="Times New Roman" pitchFamily="34" charset="0"/>
+                <a:ea typeface="Times New Roman" pitchFamily="34" charset="-122"/>
+                <a:cs typeface="Times New Roman" pitchFamily="34" charset="-120"/>
+              </a:rPr>
+              <a:t>2. Products of a Volcanic Eruption</a:t>
+            </a:r>
+            <a:endParaRPr lang="en-US" sz="3600" dirty="0"/>
+          </a:p>
+        </p:txBody>
+      </p:sp>
+      <p:sp>
+        <p:nvSpPr>
+          <p:cNvPr id="4" name="Text 2"/>
+          <p:cNvSpPr/>
+          <p:nvPr/>
+        </p:nvSpPr>
+        <p:spPr>
+          <a:xfrm>
+            <a:off x="365760" y="1783080"/>
+            <a:ext cx="4846320" cy="4617720"/>
+          </a:xfrm>
+          <a:prstGeom prst="rect">
+            <a:avLst/>
+          </a:prstGeom>
+          <a:noFill/>
+          <a:ln/>
+        </p:spPr>
+        <p:txBody>
+          <a:bodyPr wrap="square" lIns="0" tIns="0" rIns="0" bIns="0" rtlCol="0" anchor="t"/>
+          <a:lstStyle/>
+          <a:p>
+            <a:pPr algn="l" indent="0" marL="0">
+              <a:spcAft>
+                <a:spcPts val="800"/>
+              </a:spcAft>
+              <a:buNone/>
+            </a:pPr>
+            <a:r>
+              <a:rPr lang="en-US" sz="3600" b="1" dirty="0">
+                <a:solidFill>
+                  <a:srgbClr val="111111"/>
+                </a:solidFill>
+                <a:latin typeface="Times New Roman" pitchFamily="34" charset="0"/>
+                <a:ea typeface="Times New Roman" pitchFamily="34" charset="-122"/>
+                <a:cs typeface="Times New Roman" pitchFamily="34" charset="-120"/>
+              </a:rPr>
+              <a:t>Pyroclastic materials: </a:t>
+            </a:r>
+            <a:pPr algn="l" indent="0" marL="0">
+              <a:spcAft>
+                <a:spcPts val="800"/>
+              </a:spcAft>
+              <a:buNone/>
+            </a:pPr>
+            <a:r>
+              <a:rPr lang="en-US" sz="3600" dirty="0">
+                <a:solidFill>
+                  <a:srgbClr val="111111"/>
+                </a:solidFill>
+                <a:latin typeface="Times New Roman" pitchFamily="34" charset="0"/>
+                <a:ea typeface="Times New Roman" pitchFamily="34" charset="-122"/>
+                <a:cs typeface="Times New Roman" pitchFamily="34" charset="-120"/>
+              </a:rPr>
+              <a:t>Fine ash, small stones (cinders or lapilli) and large volcanic bombs are blown into the air.</a:t>
+            </a:r>
+            <a:endParaRPr lang="en-US" sz="3600" dirty="0"/>
+          </a:p>
+        </p:txBody>
+      </p:sp>
       <p:pic>
         <p:nvPicPr>
-          <p:cNvPr id="3" name="Image 0" descr="/home/claude/f4/img/minesec_sheet.png">    </p:cNvPr>
+          <p:cNvPr id="5" name="Image 0" descr="/home/claude/f4/img/v2/geo2_products.png">    </p:cNvPr>
           <p:cNvPicPr>
             <a:picLocks noChangeAspect="1"/>
           </p:cNvPicPr>
@@ -15979,8 +16674,8 @@
         </p:blipFill>
         <p:spPr>
           <a:xfrm>
-            <a:off x="0" y="658368"/>
-            <a:ext cx="5120640" cy="5833872"/>
+            <a:off x="5349240" y="2617506"/>
+            <a:ext cx="6659575" cy="2601397"/>
           </a:xfrm>
           <a:prstGeom prst="rect">
             <a:avLst/>
@@ -15989,14 +16684,14 @@
       </p:pic>
       <p:sp>
         <p:nvSpPr>
-          <p:cNvPr id="4" name="Text 1"/>
+          <p:cNvPr id="6" name="Text 3"/>
           <p:cNvSpPr/>
           <p:nvPr/>
         </p:nvSpPr>
         <p:spPr>
           <a:xfrm>
-            <a:off x="5349240" y="1005840"/>
-            <a:ext cx="6522415" cy="731520"/>
+            <a:off x="5349240" y="6089904"/>
+            <a:ext cx="6659575" cy="347472"/>
           </a:xfrm>
           <a:prstGeom prst="rect">
             <a:avLst/>
@@ -16005,85 +16700,24 @@
           <a:ln/>
         </p:spPr>
         <p:txBody>
-          <a:bodyPr wrap="square" lIns="0" tIns="0" rIns="0" bIns="0" rtlCol="0" anchor="ctr">
-            <a:normAutofit/>
-          </a:bodyPr>
+          <a:bodyPr wrap="square" lIns="0" tIns="0" rIns="0" bIns="0" rtlCol="0" anchor="ctr"/>
           <a:lstStyle/>
           <a:p>
             <a:pPr algn="ctr" indent="0" marL="0">
               <a:buNone/>
             </a:pPr>
             <a:r>
-              <a:rPr lang="en-US" sz="3600" b="1" dirty="0">
-                <a:solidFill>
-                  <a:srgbClr val="990011"/>
+              <a:rPr lang="en-US" sz="1600" i="1" dirty="0">
+                <a:solidFill>
+                  <a:srgbClr val="555555"/>
                 </a:solidFill>
                 <a:latin typeface="Times New Roman" pitchFamily="34" charset="0"/>
                 <a:ea typeface="Times New Roman" pitchFamily="34" charset="-122"/>
                 <a:cs typeface="Times New Roman" pitchFamily="34" charset="-120"/>
               </a:rPr>
-              <a:t>3. Volcanic Landforms (continued)</a:t>
-            </a:r>
-            <a:endParaRPr lang="en-US" sz="3600" dirty="0"/>
-          </a:p>
-        </p:txBody>
-      </p:sp>
-      <p:sp>
-        <p:nvSpPr>
-          <p:cNvPr id="5" name="Text 2"/>
-          <p:cNvSpPr/>
-          <p:nvPr/>
-        </p:nvSpPr>
-        <p:spPr>
-          <a:xfrm>
-            <a:off x="5349240" y="1783080"/>
-            <a:ext cx="6522415" cy="4663440"/>
-          </a:xfrm>
-          <a:prstGeom prst="rect">
-            <a:avLst/>
-          </a:prstGeom>
-          <a:noFill/>
-          <a:ln/>
-        </p:spPr>
-        <p:txBody>
-          <a:bodyPr wrap="square" lIns="0" tIns="0" rIns="0" bIns="0" rtlCol="0" anchor="t"/>
-          <a:lstStyle/>
-          <a:p>
-            <a:pPr algn="l" indent="0" marL="0">
-              <a:spcAft>
-                <a:spcPts val="800"/>
-              </a:spcAft>
-              <a:buNone/>
-            </a:pPr>
-            <a:r>
-              <a:rPr lang="en-US" sz="4000" b="1" dirty="0">
-                <a:solidFill>
-                  <a:srgbClr val="111111"/>
-                </a:solidFill>
-                <a:latin typeface="Times New Roman" pitchFamily="34" charset="0"/>
-                <a:ea typeface="Times New Roman" pitchFamily="34" charset="-122"/>
-                <a:cs typeface="Times New Roman" pitchFamily="34" charset="-120"/>
-              </a:rPr>
-              <a:t>Composite (strato) cones: </a:t>
-            </a:r>
-            <a:pPr algn="l" indent="0" marL="0">
-              <a:spcAft>
-                <a:spcPts val="800"/>
-              </a:spcAft>
-              <a:buNone/>
-            </a:pPr>
-            <a:r>
-              <a:rPr lang="en-US" sz="4000" dirty="0">
-                <a:solidFill>
-                  <a:srgbClr val="111111"/>
-                </a:solidFill>
-                <a:latin typeface="Times New Roman" pitchFamily="34" charset="0"/>
-                <a:ea typeface="Times New Roman" pitchFamily="34" charset="-122"/>
-                <a:cs typeface="Times New Roman" pitchFamily="34" charset="-120"/>
-              </a:rPr>
-              <a:t>Layers of ash and lava build large, symmetrical cones. Mount Cameroon and Mount Fuji are composite cones.</a:t>
-            </a:r>
-            <a:endParaRPr lang="en-US" sz="4000" dirty="0"/>
+              <a:t>Illustration: products of an eruption</a:t>
+            </a:r>
+            <a:endParaRPr lang="en-US" sz="1600" dirty="0"/>
           </a:p>
         </p:txBody>
       </p:sp>
@@ -16199,48 +16833,9 @@
           </a:p>
         </p:txBody>
       </p:sp>
-      <p:sp>
-        <p:nvSpPr>
-          <p:cNvPr id="3" name="Text 1"/>
-          <p:cNvSpPr/>
-          <p:nvPr/>
-        </p:nvSpPr>
-        <p:spPr>
-          <a:xfrm>
-            <a:off x="457200" y="1005840"/>
-            <a:ext cx="11277295" cy="731520"/>
-          </a:xfrm>
-          <a:prstGeom prst="rect">
-            <a:avLst/>
-          </a:prstGeom>
-          <a:noFill/>
-          <a:ln/>
-        </p:spPr>
-        <p:txBody>
-          <a:bodyPr wrap="square" lIns="0" tIns="0" rIns="0" bIns="0" rtlCol="0" anchor="ctr"/>
-          <a:lstStyle/>
-          <a:p>
-            <a:pPr algn="ctr" indent="0" marL="0">
-              <a:buNone/>
-            </a:pPr>
-            <a:r>
-              <a:rPr lang="en-US" sz="3600" b="1" dirty="0">
-                <a:solidFill>
-                  <a:srgbClr val="990011"/>
-                </a:solidFill>
-                <a:latin typeface="Times New Roman" pitchFamily="34" charset="0"/>
-                <a:ea typeface="Times New Roman" pitchFamily="34" charset="-122"/>
-                <a:cs typeface="Times New Roman" pitchFamily="34" charset="-120"/>
-              </a:rPr>
-              <a:t>3. Volcanic Landforms</a:t>
-            </a:r>
-            <a:endParaRPr lang="en-US" sz="3600" dirty="0"/>
-          </a:p>
-        </p:txBody>
-      </p:sp>
       <p:pic>
         <p:nvPicPr>
-          <p:cNvPr id="4" name="Image 0" descr="/home/claude/f4/img/v2/lsa_mayon.jpg">    </p:cNvPr>
+          <p:cNvPr id="3" name="Image 0" descr="/home/claude/f4/img/minesec_sheet.png">    </p:cNvPr>
           <p:cNvPicPr>
             <a:picLocks noChangeAspect="1"/>
           </p:cNvPicPr>
@@ -16254,8 +16849,8 @@
         </p:blipFill>
         <p:spPr>
           <a:xfrm>
-            <a:off x="2246610" y="1783080"/>
-            <a:ext cx="7698475" cy="4270248"/>
+            <a:off x="0" y="658368"/>
+            <a:ext cx="5120640" cy="5833872"/>
           </a:xfrm>
           <a:prstGeom prst="rect">
             <a:avLst/>
@@ -16264,14 +16859,14 @@
       </p:pic>
       <p:sp>
         <p:nvSpPr>
-          <p:cNvPr id="5" name="Text 2"/>
+          <p:cNvPr id="4" name="Text 1"/>
           <p:cNvSpPr/>
           <p:nvPr/>
         </p:nvSpPr>
         <p:spPr>
           <a:xfrm>
-            <a:off x="457200" y="6089904"/>
-            <a:ext cx="11277295" cy="347472"/>
+            <a:off x="5349240" y="1005840"/>
+            <a:ext cx="6522415" cy="731520"/>
           </a:xfrm>
           <a:prstGeom prst="rect">
             <a:avLst/>
@@ -16280,24 +16875,85 @@
           <a:ln/>
         </p:spPr>
         <p:txBody>
-          <a:bodyPr wrap="square" lIns="0" tIns="0" rIns="0" bIns="0" rtlCol="0" anchor="ctr"/>
+          <a:bodyPr wrap="square" lIns="0" tIns="0" rIns="0" bIns="0" rtlCol="0" anchor="ctr">
+            <a:normAutofit/>
+          </a:bodyPr>
           <a:lstStyle/>
           <a:p>
             <a:pPr algn="ctr" indent="0" marL="0">
               <a:buNone/>
             </a:pPr>
             <a:r>
-              <a:rPr lang="en-US" sz="1800" i="1" dirty="0">
-                <a:solidFill>
-                  <a:srgbClr val="555555"/>
+              <a:rPr lang="en-US" sz="3600" b="1" dirty="0">
+                <a:solidFill>
+                  <a:srgbClr val="990011"/>
                 </a:solidFill>
                 <a:latin typeface="Times New Roman" pitchFamily="34" charset="0"/>
                 <a:ea typeface="Times New Roman" pitchFamily="34" charset="-122"/>
                 <a:cs typeface="Times New Roman" pitchFamily="34" charset="-120"/>
               </a:rPr>
-              <a:t>Illustration: a composite cone</a:t>
-            </a:r>
-            <a:endParaRPr lang="en-US" sz="1800" dirty="0"/>
+              <a:t>2. Products of a Volcanic Eruption</a:t>
+            </a:r>
+            <a:endParaRPr lang="en-US" sz="3600" dirty="0"/>
+          </a:p>
+        </p:txBody>
+      </p:sp>
+      <p:sp>
+        <p:nvSpPr>
+          <p:cNvPr id="5" name="Text 2"/>
+          <p:cNvSpPr/>
+          <p:nvPr/>
+        </p:nvSpPr>
+        <p:spPr>
+          <a:xfrm>
+            <a:off x="5349240" y="1783080"/>
+            <a:ext cx="6522415" cy="4663440"/>
+          </a:xfrm>
+          <a:prstGeom prst="rect">
+            <a:avLst/>
+          </a:prstGeom>
+          <a:noFill/>
+          <a:ln/>
+        </p:spPr>
+        <p:txBody>
+          <a:bodyPr wrap="square" lIns="0" tIns="0" rIns="0" bIns="0" rtlCol="0" anchor="t"/>
+          <a:lstStyle/>
+          <a:p>
+            <a:pPr algn="l" indent="0" marL="0">
+              <a:spcAft>
+                <a:spcPts val="800"/>
+              </a:spcAft>
+              <a:buNone/>
+            </a:pPr>
+            <a:r>
+              <a:rPr lang="en-US" sz="4000" b="1" dirty="0">
+                <a:solidFill>
+                  <a:srgbClr val="111111"/>
+                </a:solidFill>
+                <a:latin typeface="Times New Roman" pitchFamily="34" charset="0"/>
+                <a:ea typeface="Times New Roman" pitchFamily="34" charset="-122"/>
+                <a:cs typeface="Times New Roman" pitchFamily="34" charset="-120"/>
+              </a:rPr>
+              <a:t>Gases: </a:t>
+            </a:r>
+            <a:pPr algn="l" indent="0" marL="0">
+              <a:spcAft>
+                <a:spcPts val="800"/>
+              </a:spcAft>
+              <a:buNone/>
+            </a:pPr>
+            <a:r>
+              <a:rPr lang="en-US" sz="4000" dirty="0">
+                <a:solidFill>
+                  <a:srgbClr val="111111"/>
+                </a:solidFill>
+                <a:latin typeface="Times New Roman" pitchFamily="34" charset="0"/>
+                <a:ea typeface="Times New Roman" pitchFamily="34" charset="-122"/>
+                <a:cs typeface="Times New Roman" pitchFamily="34" charset="-120"/>
+              </a:rPr>
+              <a:t>Mostly water vapour, with carbon dioxide and sulphur dioxide.</a:t>
+            </a:r>
+            <a:endParaRPr lang="en-US" sz="4000" dirty="0"/>
           </a:p>
         </p:txBody>
       </p:sp>
@@ -16413,9 +17069,170 @@
           </a:p>
         </p:txBody>
       </p:sp>
+      <p:sp>
+        <p:nvSpPr>
+          <p:cNvPr id="3" name="Text 1"/>
+          <p:cNvSpPr/>
+          <p:nvPr/>
+        </p:nvSpPr>
+        <p:spPr>
+          <a:xfrm>
+            <a:off x="365760" y="1005840"/>
+            <a:ext cx="11460175" cy="731520"/>
+          </a:xfrm>
+          <a:prstGeom prst="rect">
+            <a:avLst/>
+          </a:prstGeom>
+          <a:noFill/>
+          <a:ln/>
+        </p:spPr>
+        <p:txBody>
+          <a:bodyPr wrap="square" lIns="0" tIns="0" rIns="0" bIns="0" rtlCol="0" anchor="ctr">
+            <a:normAutofit/>
+          </a:bodyPr>
+          <a:lstStyle/>
+          <a:p>
+            <a:pPr algn="ctr" indent="0" marL="0">
+              <a:buNone/>
+            </a:pPr>
+            <a:r>
+              <a:rPr lang="en-US" sz="3600" b="1" dirty="0">
+                <a:solidFill>
+                  <a:srgbClr val="990011"/>
+                </a:solidFill>
+                <a:latin typeface="Times New Roman" pitchFamily="34" charset="0"/>
+                <a:ea typeface="Times New Roman" pitchFamily="34" charset="-122"/>
+                <a:cs typeface="Times New Roman" pitchFamily="34" charset="-120"/>
+              </a:rPr>
+              <a:t>3. Volcanic Landforms</a:t>
+            </a:r>
+            <a:endParaRPr lang="en-US" sz="3600" dirty="0"/>
+          </a:p>
+        </p:txBody>
+      </p:sp>
+      <p:sp>
+        <p:nvSpPr>
+          <p:cNvPr id="4" name="Text 2"/>
+          <p:cNvSpPr/>
+          <p:nvPr/>
+        </p:nvSpPr>
+        <p:spPr>
+          <a:xfrm>
+            <a:off x="365760" y="1737360"/>
+            <a:ext cx="5120640" cy="457200"/>
+          </a:xfrm>
+          <a:prstGeom prst="rect">
+            <a:avLst/>
+          </a:prstGeom>
+          <a:noFill/>
+          <a:ln/>
+        </p:spPr>
+        <p:txBody>
+          <a:bodyPr wrap="square" lIns="0" tIns="0" rIns="0" bIns="0" rtlCol="0" anchor="ctr">
+            <a:normAutofit/>
+          </a:bodyPr>
+          <a:lstStyle/>
+          <a:p>
+            <a:pPr algn="l" indent="0" marL="0">
+              <a:buNone/>
+            </a:pPr>
+            <a:r>
+              <a:rPr lang="en-US" sz="3000" b="1" dirty="0">
+                <a:solidFill>
+                  <a:srgbClr val="990011"/>
+                </a:solidFill>
+                <a:latin typeface="Times New Roman" pitchFamily="34" charset="0"/>
+                <a:ea typeface="Times New Roman" pitchFamily="34" charset="-122"/>
+                <a:cs typeface="Times New Roman" pitchFamily="34" charset="-120"/>
+              </a:rPr>
+              <a:t>A) Volcanic Cones</a:t>
+            </a:r>
+            <a:endParaRPr lang="en-US" sz="3000" dirty="0"/>
+          </a:p>
+        </p:txBody>
+      </p:sp>
+      <p:sp>
+        <p:nvSpPr>
+          <p:cNvPr id="5" name="Text 3"/>
+          <p:cNvSpPr/>
+          <p:nvPr/>
+        </p:nvSpPr>
+        <p:spPr>
+          <a:xfrm>
+            <a:off x="365760" y="2240280"/>
+            <a:ext cx="4846320" cy="4160520"/>
+          </a:xfrm>
+          <a:prstGeom prst="rect">
+            <a:avLst/>
+          </a:prstGeom>
+          <a:noFill/>
+          <a:ln/>
+        </p:spPr>
+        <p:txBody>
+          <a:bodyPr wrap="square" lIns="0" tIns="0" rIns="0" bIns="0" rtlCol="0" anchor="t"/>
+          <a:lstStyle/>
+          <a:p>
+            <a:pPr algn="l" indent="0" marL="0">
+              <a:spcAft>
+                <a:spcPts val="800"/>
+              </a:spcAft>
+              <a:buNone/>
+            </a:pPr>
+            <a:r>
+              <a:rPr lang="en-US" sz="3200" i="1" dirty="0">
+                <a:solidFill>
+                  <a:srgbClr val="111111"/>
+                </a:solidFill>
+                <a:latin typeface="Times New Roman" pitchFamily="34" charset="0"/>
+                <a:ea typeface="Times New Roman" pitchFamily="34" charset="-122"/>
+                <a:cs typeface="Times New Roman" pitchFamily="34" charset="-120"/>
+              </a:rPr>
+              <a:t>The main types of volcanic cones are the following:</a:t>
+            </a:r>
+            <a:endParaRPr lang="en-US" sz="3200" dirty="0"/>
+          </a:p>
+          <a:p>
+            <a:pPr algn="l" indent="0" marL="0">
+              <a:spcAft>
+                <a:spcPts val="800"/>
+              </a:spcAft>
+              <a:buNone/>
+            </a:pPr>
+            <a:r>
+              <a:rPr lang="en-US" sz="3200" b="1" dirty="0">
+                <a:solidFill>
+                  <a:srgbClr val="111111"/>
+                </a:solidFill>
+                <a:latin typeface="Times New Roman" pitchFamily="34" charset="0"/>
+                <a:ea typeface="Times New Roman" pitchFamily="34" charset="-122"/>
+                <a:cs typeface="Times New Roman" pitchFamily="34" charset="-120"/>
+              </a:rPr>
+              <a:t>Shield (basic lava) cones: </a:t>
+            </a:r>
+            <a:pPr algn="l" indent="0" marL="0">
+              <a:spcAft>
+                <a:spcPts val="800"/>
+              </a:spcAft>
+              <a:buNone/>
+            </a:pPr>
+            <a:r>
+              <a:rPr lang="en-US" sz="3200" dirty="0">
+                <a:solidFill>
+                  <a:srgbClr val="111111"/>
+                </a:solidFill>
+                <a:latin typeface="Times New Roman" pitchFamily="34" charset="0"/>
+                <a:ea typeface="Times New Roman" pitchFamily="34" charset="-122"/>
+                <a:cs typeface="Times New Roman" pitchFamily="34" charset="-120"/>
+              </a:rPr>
+              <a:t>Runny lava builds very wide volcanoes with gentle slopes, like Mauna Loa in Hawaii.</a:t>
+            </a:r>
+            <a:endParaRPr lang="en-US" sz="3200" dirty="0"/>
+          </a:p>
+        </p:txBody>
+      </p:sp>
       <p:pic>
         <p:nvPicPr>
-          <p:cNvPr id="3" name="Image 0" descr="/home/claude/f4/img/minesec_sheet.png">    </p:cNvPr>
+          <p:cNvPr id="6" name="Image 0" descr="/home/claude/f4/img/v2/lsa_shield.jpg">    </p:cNvPr>
           <p:cNvPicPr>
             <a:picLocks noChangeAspect="1"/>
           </p:cNvPicPr>
@@ -16429,8 +17246,8 @@
         </p:blipFill>
         <p:spPr>
           <a:xfrm>
-            <a:off x="0" y="658368"/>
-            <a:ext cx="3840480" cy="5833872"/>
+            <a:off x="5349240" y="2071212"/>
+            <a:ext cx="6659575" cy="3693983"/>
           </a:xfrm>
           <a:prstGeom prst="rect">
             <a:avLst/>
@@ -16439,14 +17256,14 @@
       </p:pic>
       <p:sp>
         <p:nvSpPr>
-          <p:cNvPr id="4" name="Text 1"/>
+          <p:cNvPr id="7" name="Text 4"/>
           <p:cNvSpPr/>
           <p:nvPr/>
         </p:nvSpPr>
         <p:spPr>
           <a:xfrm>
-            <a:off x="4069080" y="1005840"/>
-            <a:ext cx="7802575" cy="731520"/>
+            <a:off x="5349240" y="6089904"/>
+            <a:ext cx="6659575" cy="347472"/>
           </a:xfrm>
           <a:prstGeom prst="rect">
             <a:avLst/>
@@ -16455,144 +17272,24 @@
           <a:ln/>
         </p:spPr>
         <p:txBody>
-          <a:bodyPr wrap="square" lIns="0" tIns="0" rIns="0" bIns="0" rtlCol="0" anchor="ctr">
-            <a:normAutofit/>
-          </a:bodyPr>
+          <a:bodyPr wrap="square" lIns="0" tIns="0" rIns="0" bIns="0" rtlCol="0" anchor="ctr"/>
           <a:lstStyle/>
           <a:p>
             <a:pPr algn="ctr" indent="0" marL="0">
               <a:buNone/>
             </a:pPr>
             <a:r>
-              <a:rPr lang="en-US" sz="3600" b="1" dirty="0">
-                <a:solidFill>
-                  <a:srgbClr val="990011"/>
+              <a:rPr lang="en-US" sz="1600" i="1" dirty="0">
+                <a:solidFill>
+                  <a:srgbClr val="555555"/>
                 </a:solidFill>
                 <a:latin typeface="Times New Roman" pitchFamily="34" charset="0"/>
                 <a:ea typeface="Times New Roman" pitchFamily="34" charset="-122"/>
                 <a:cs typeface="Times New Roman" pitchFamily="34" charset="-120"/>
               </a:rPr>
-              <a:t>3. Volcanic Landforms</a:t>
-            </a:r>
-            <a:endParaRPr lang="en-US" sz="3600" dirty="0"/>
-          </a:p>
-        </p:txBody>
-      </p:sp>
-      <p:sp>
-        <p:nvSpPr>
-          <p:cNvPr id="5" name="Text 2"/>
-          <p:cNvSpPr/>
-          <p:nvPr/>
-        </p:nvSpPr>
-        <p:spPr>
-          <a:xfrm>
-            <a:off x="4069080" y="1737360"/>
-            <a:ext cx="7802575" cy="457200"/>
-          </a:xfrm>
-          <a:prstGeom prst="rect">
-            <a:avLst/>
-          </a:prstGeom>
-          <a:noFill/>
-          <a:ln/>
-        </p:spPr>
-        <p:txBody>
-          <a:bodyPr wrap="square" lIns="0" tIns="0" rIns="0" bIns="0" rtlCol="0" anchor="ctr"/>
-          <a:lstStyle/>
-          <a:p>
-            <a:pPr algn="l" indent="0" marL="0">
-              <a:buNone/>
-            </a:pPr>
-            <a:r>
-              <a:rPr lang="en-US" sz="3200" b="1" dirty="0">
-                <a:solidFill>
-                  <a:srgbClr val="990011"/>
-                </a:solidFill>
-                <a:latin typeface="Times New Roman" pitchFamily="34" charset="0"/>
-                <a:ea typeface="Times New Roman" pitchFamily="34" charset="-122"/>
-                <a:cs typeface="Times New Roman" pitchFamily="34" charset="-120"/>
-              </a:rPr>
-              <a:t>Plateaux and Depressions</a:t>
-            </a:r>
-            <a:endParaRPr lang="en-US" sz="3200" dirty="0"/>
-          </a:p>
-        </p:txBody>
-      </p:sp>
-      <p:sp>
-        <p:nvSpPr>
-          <p:cNvPr id="6" name="Text 3"/>
-          <p:cNvSpPr/>
-          <p:nvPr/>
-        </p:nvSpPr>
-        <p:spPr>
-          <a:xfrm>
-            <a:off x="4069080" y="2240280"/>
-            <a:ext cx="7802575" cy="4206240"/>
-          </a:xfrm>
-          <a:prstGeom prst="rect">
-            <a:avLst/>
-          </a:prstGeom>
-          <a:noFill/>
-          <a:ln/>
-        </p:spPr>
-        <p:txBody>
-          <a:bodyPr wrap="square" lIns="0" tIns="0" rIns="0" bIns="0" rtlCol="0" anchor="t"/>
-          <a:lstStyle/>
-          <a:p>
-            <a:pPr algn="l" indent="0" marL="0">
-              <a:spcAft>
-                <a:spcPts val="800"/>
-              </a:spcAft>
-              <a:buNone/>
-            </a:pPr>
-            <a:r>
-              <a:rPr lang="en-US" sz="4000" i="1" dirty="0">
-                <a:solidFill>
-                  <a:srgbClr val="111111"/>
-                </a:solidFill>
-                <a:latin typeface="Times New Roman" pitchFamily="34" charset="0"/>
-                <a:ea typeface="Times New Roman" pitchFamily="34" charset="-122"/>
-                <a:cs typeface="Times New Roman" pitchFamily="34" charset="-120"/>
-              </a:rPr>
-              <a:t>Other volcanic landforms include:</a:t>
-            </a:r>
-            <a:endParaRPr lang="en-US" sz="4000" dirty="0"/>
-          </a:p>
-          <a:p>
-            <a:pPr algn="l" indent="0" marL="0">
-              <a:spcAft>
-                <a:spcPts val="800"/>
-              </a:spcAft>
-              <a:buNone/>
-            </a:pPr>
-            <a:r>
-              <a:rPr lang="en-US" sz="4000" b="1" dirty="0">
-                <a:solidFill>
-                  <a:srgbClr val="111111"/>
-                </a:solidFill>
-                <a:latin typeface="Times New Roman" pitchFamily="34" charset="0"/>
-                <a:ea typeface="Times New Roman" pitchFamily="34" charset="-122"/>
-                <a:cs typeface="Times New Roman" pitchFamily="34" charset="-120"/>
-              </a:rPr>
-              <a:t>Lava plateaux: </a:t>
-            </a:r>
-            <a:pPr algn="l" indent="0" marL="0">
-              <a:spcAft>
-                <a:spcPts val="800"/>
-              </a:spcAft>
-              <a:buNone/>
-            </a:pPr>
-            <a:r>
-              <a:rPr lang="en-US" sz="4000" dirty="0">
-                <a:solidFill>
-                  <a:srgbClr val="111111"/>
-                </a:solidFill>
-                <a:latin typeface="Times New Roman" pitchFamily="34" charset="0"/>
-                <a:ea typeface="Times New Roman" pitchFamily="34" charset="-122"/>
-                <a:cs typeface="Times New Roman" pitchFamily="34" charset="-120"/>
-              </a:rPr>
-              <a:t>Many flows of runny lava from fissures cover large areas. The Deccan plateau and parts of the Adamawa and Bamenda plateaux are examples.</a:t>
-            </a:r>
-            <a:endParaRPr lang="en-US" sz="4000" dirty="0"/>
+              <a:t>Illustration: a shield volcano</a:t>
+            </a:r>
+            <a:endParaRPr lang="en-US" sz="1600" dirty="0"/>
           </a:p>
         </p:txBody>
       </p:sp>
@@ -16806,7 +17503,7 @@
                 <a:ea typeface="Times New Roman" pitchFamily="34" charset="-122"/>
                 <a:cs typeface="Times New Roman" pitchFamily="34" charset="-120"/>
               </a:rPr>
-              <a:t>Plateaux and Depressions (continued)</a:t>
+              <a:t>A) Volcanic Cones</a:t>
             </a:r>
             <a:endParaRPr lang="en-US" sz="3200" dirty="0"/>
           </a:p>
@@ -16848,7 +17545,7 @@
                 <a:ea typeface="Times New Roman" pitchFamily="34" charset="-122"/>
                 <a:cs typeface="Times New Roman" pitchFamily="34" charset="-120"/>
               </a:rPr>
-              <a:t>Craters and calderas: </a:t>
+              <a:t>Acid lava domes: </a:t>
             </a:r>
             <a:pPr algn="l" indent="0" marL="0">
               <a:spcAft>
@@ -16865,7 +17562,44 @@
                 <a:ea typeface="Times New Roman" pitchFamily="34" charset="-122"/>
                 <a:cs typeface="Times New Roman" pitchFamily="34" charset="-120"/>
               </a:rPr>
-              <a:t>A crater is the small hollow at the top of the vent. A caldera is a much larger hollow formed when the top collapses; it may contain a lake like Lake Nyos.</a:t>
+              <a:t>Sticky lava piles up near the vent and forms steep domes.</a:t>
+            </a:r>
+            <a:endParaRPr lang="en-US" sz="4000" dirty="0"/>
+          </a:p>
+          <a:p>
+            <a:pPr algn="l" indent="0" marL="0">
+              <a:spcAft>
+                <a:spcPts val="800"/>
+              </a:spcAft>
+              <a:buNone/>
+            </a:pPr>
+            <a:r>
+              <a:rPr lang="en-US" sz="4000" b="1" dirty="0">
+                <a:solidFill>
+                  <a:srgbClr val="111111"/>
+                </a:solidFill>
+                <a:latin typeface="Times New Roman" pitchFamily="34" charset="0"/>
+                <a:ea typeface="Times New Roman" pitchFamily="34" charset="-122"/>
+                <a:cs typeface="Times New Roman" pitchFamily="34" charset="-120"/>
+              </a:rPr>
+              <a:t>Ash and cinder cones: </a:t>
+            </a:r>
+            <a:pPr algn="l" indent="0" marL="0">
+              <a:spcAft>
+                <a:spcPts val="800"/>
+              </a:spcAft>
+              <a:buNone/>
+            </a:pPr>
+            <a:r>
+              <a:rPr lang="en-US" sz="4000" dirty="0">
+                <a:solidFill>
+                  <a:srgbClr val="111111"/>
+                </a:solidFill>
+                <a:latin typeface="Times New Roman" pitchFamily="34" charset="0"/>
+                <a:ea typeface="Times New Roman" pitchFamily="34" charset="-122"/>
+                <a:cs typeface="Times New Roman" pitchFamily="34" charset="-120"/>
+              </a:rPr>
+              <a:t>Explosive eruptions of pyroclasts build steep but small cones.</a:t>
             </a:r>
             <a:endParaRPr lang="en-US" sz="4000" dirty="0"/>
           </a:p>
@@ -16977,15 +17711,156 @@
                 <a:ea typeface="Calibri" pitchFamily="34" charset="-122"/>
                 <a:cs typeface="Calibri" pitchFamily="34" charset="-120"/>
               </a:rPr>
-              <a:t>FORMATIVE EVALUATION</a:t>
+              <a:t>BOARD SUMMARY</a:t>
             </a:r>
             <a:endParaRPr lang="en-US" sz="1400" dirty="0"/>
+          </a:p>
+        </p:txBody>
+      </p:sp>
+      <p:sp>
+        <p:nvSpPr>
+          <p:cNvPr id="3" name="Text 1"/>
+          <p:cNvSpPr/>
+          <p:nvPr/>
+        </p:nvSpPr>
+        <p:spPr>
+          <a:xfrm>
+            <a:off x="365760" y="1005840"/>
+            <a:ext cx="11460175" cy="731520"/>
+          </a:xfrm>
+          <a:prstGeom prst="rect">
+            <a:avLst/>
+          </a:prstGeom>
+          <a:noFill/>
+          <a:ln/>
+        </p:spPr>
+        <p:txBody>
+          <a:bodyPr wrap="square" lIns="0" tIns="0" rIns="0" bIns="0" rtlCol="0" anchor="ctr">
+            <a:normAutofit/>
+          </a:bodyPr>
+          <a:lstStyle/>
+          <a:p>
+            <a:pPr algn="ctr" indent="0" marL="0">
+              <a:buNone/>
+            </a:pPr>
+            <a:r>
+              <a:rPr lang="en-US" sz="3600" b="1" dirty="0">
+                <a:solidFill>
+                  <a:srgbClr val="990011"/>
+                </a:solidFill>
+                <a:latin typeface="Times New Roman" pitchFamily="34" charset="0"/>
+                <a:ea typeface="Times New Roman" pitchFamily="34" charset="-122"/>
+                <a:cs typeface="Times New Roman" pitchFamily="34" charset="-120"/>
+              </a:rPr>
+              <a:t>3. Volcanic Landforms</a:t>
+            </a:r>
+            <a:endParaRPr lang="en-US" sz="3600" dirty="0"/>
+          </a:p>
+        </p:txBody>
+      </p:sp>
+      <p:sp>
+        <p:nvSpPr>
+          <p:cNvPr id="4" name="Text 2"/>
+          <p:cNvSpPr/>
+          <p:nvPr/>
+        </p:nvSpPr>
+        <p:spPr>
+          <a:xfrm>
+            <a:off x="365760" y="1737360"/>
+            <a:ext cx="5120640" cy="457200"/>
+          </a:xfrm>
+          <a:prstGeom prst="rect">
+            <a:avLst/>
+          </a:prstGeom>
+          <a:noFill/>
+          <a:ln/>
+        </p:spPr>
+        <p:txBody>
+          <a:bodyPr wrap="square" lIns="0" tIns="0" rIns="0" bIns="0" rtlCol="0" anchor="ctr">
+            <a:normAutofit/>
+          </a:bodyPr>
+          <a:lstStyle/>
+          <a:p>
+            <a:pPr algn="l" indent="0" marL="0">
+              <a:buNone/>
+            </a:pPr>
+            <a:r>
+              <a:rPr lang="en-US" sz="3000" b="1" dirty="0">
+                <a:solidFill>
+                  <a:srgbClr val="990011"/>
+                </a:solidFill>
+                <a:latin typeface="Times New Roman" pitchFamily="34" charset="0"/>
+                <a:ea typeface="Times New Roman" pitchFamily="34" charset="-122"/>
+                <a:cs typeface="Times New Roman" pitchFamily="34" charset="-120"/>
+              </a:rPr>
+              <a:t>A) Volcanic Cones</a:t>
+            </a:r>
+            <a:endParaRPr lang="en-US" sz="3000" dirty="0"/>
+          </a:p>
+        </p:txBody>
+      </p:sp>
+      <p:sp>
+        <p:nvSpPr>
+          <p:cNvPr id="5" name="Text 3"/>
+          <p:cNvSpPr/>
+          <p:nvPr/>
+        </p:nvSpPr>
+        <p:spPr>
+          <a:xfrm>
+            <a:off x="365760" y="2240280"/>
+            <a:ext cx="4846320" cy="4160520"/>
+          </a:xfrm>
+          <a:prstGeom prst="rect">
+            <a:avLst/>
+          </a:prstGeom>
+          <a:noFill/>
+          <a:ln/>
+        </p:spPr>
+        <p:txBody>
+          <a:bodyPr wrap="square" lIns="0" tIns="0" rIns="0" bIns="0" rtlCol="0" anchor="t"/>
+          <a:lstStyle/>
+          <a:p>
+            <a:pPr algn="l" indent="0" marL="0">
+              <a:spcAft>
+                <a:spcPts val="800"/>
+              </a:spcAft>
+              <a:buNone/>
+            </a:pPr>
+            <a:r>
+              <a:rPr lang="en-US" sz="3600" b="1" dirty="0">
+                <a:solidFill>
+                  <a:srgbClr val="111111"/>
+                </a:solidFill>
+                <a:latin typeface="Times New Roman" pitchFamily="34" charset="0"/>
+                <a:ea typeface="Times New Roman" pitchFamily="34" charset="-122"/>
+                <a:cs typeface="Times New Roman" pitchFamily="34" charset="-120"/>
+              </a:rPr>
+              <a:t>Composite cones (stratovolcanoes): </a:t>
+            </a:r>
+            <a:pPr algn="l" indent="0" marL="0">
+              <a:spcAft>
+                <a:spcPts val="800"/>
+              </a:spcAft>
+              <a:buNone/>
+            </a:pPr>
+            <a:r>
+              <a:rPr lang="en-US" sz="3600" dirty="0">
+                <a:solidFill>
+                  <a:srgbClr val="111111"/>
+                </a:solidFill>
+                <a:latin typeface="Times New Roman" pitchFamily="34" charset="0"/>
+                <a:ea typeface="Times New Roman" pitchFamily="34" charset="-122"/>
+                <a:cs typeface="Times New Roman" pitchFamily="34" charset="-120"/>
+              </a:rPr>
+              <a:t>Alternate layers of lava and ash build tall, steep cones, like Mount Cameroon (4,095 m) and Mount Fuji.</a:t>
+            </a:r>
+            <a:endParaRPr lang="en-US" sz="3600" dirty="0"/>
           </a:p>
         </p:txBody>
       </p:sp>
       <p:pic>
         <p:nvPicPr>
-          <p:cNvPr id="3" name="Image 0" descr="/home/claude/f4/img/minesec_sheet.png">    </p:cNvPr>
+          <p:cNvPr id="6" name="Image 0" descr="/home/claude/f4/img/v2/lsa_mayon.jpg">    </p:cNvPr>
           <p:cNvPicPr>
             <a:picLocks noChangeAspect="1"/>
           </p:cNvPicPr>
@@ -16999,8 +17874,8 @@
         </p:blipFill>
         <p:spPr>
           <a:xfrm>
-            <a:off x="0" y="658368"/>
-            <a:ext cx="5120640" cy="5833872"/>
+            <a:off x="5349240" y="2071212"/>
+            <a:ext cx="6659575" cy="3693983"/>
           </a:xfrm>
           <a:prstGeom prst="rect">
             <a:avLst/>
@@ -17009,14 +17884,14 @@
       </p:pic>
       <p:sp>
         <p:nvSpPr>
-          <p:cNvPr id="4" name="Text 1"/>
+          <p:cNvPr id="7" name="Text 4"/>
           <p:cNvSpPr/>
           <p:nvPr/>
         </p:nvSpPr>
         <p:spPr>
           <a:xfrm>
-            <a:off x="5349240" y="1005840"/>
-            <a:ext cx="6522415" cy="731520"/>
+            <a:off x="5349240" y="6089904"/>
+            <a:ext cx="6659575" cy="347472"/>
           </a:xfrm>
           <a:prstGeom prst="rect">
             <a:avLst/>
@@ -17025,68 +17900,24 @@
           <a:ln/>
         </p:spPr>
         <p:txBody>
-          <a:bodyPr wrap="square" lIns="0" tIns="0" rIns="0" bIns="0" rtlCol="0" anchor="ctr">
-            <a:normAutofit/>
-          </a:bodyPr>
+          <a:bodyPr wrap="square" lIns="0" tIns="0" rIns="0" bIns="0" rtlCol="0" anchor="ctr"/>
           <a:lstStyle/>
           <a:p>
             <a:pPr algn="ctr" indent="0" marL="0">
               <a:buNone/>
             </a:pPr>
             <a:r>
-              <a:rPr lang="en-US" sz="3600" b="1" dirty="0">
-                <a:solidFill>
-                  <a:srgbClr val="990011"/>
+              <a:rPr lang="en-US" sz="1600" i="1" dirty="0">
+                <a:solidFill>
+                  <a:srgbClr val="555555"/>
                 </a:solidFill>
                 <a:latin typeface="Times New Roman" pitchFamily="34" charset="0"/>
                 <a:ea typeface="Times New Roman" pitchFamily="34" charset="-122"/>
                 <a:cs typeface="Times New Roman" pitchFamily="34" charset="-120"/>
               </a:rPr>
-              <a:t>Evaluation 1</a:t>
-            </a:r>
-            <a:endParaRPr lang="en-US" sz="3600" dirty="0"/>
-          </a:p>
-        </p:txBody>
-      </p:sp>
-      <p:sp>
-        <p:nvSpPr>
-          <p:cNvPr id="5" name="Text 2"/>
-          <p:cNvSpPr/>
-          <p:nvPr/>
-        </p:nvSpPr>
-        <p:spPr>
-          <a:xfrm>
-            <a:off x="5349240" y="1783080"/>
-            <a:ext cx="6522415" cy="4663440"/>
-          </a:xfrm>
-          <a:prstGeom prst="rect">
-            <a:avLst/>
-          </a:prstGeom>
-          <a:noFill/>
-          <a:ln/>
-        </p:spPr>
-        <p:txBody>
-          <a:bodyPr wrap="square" lIns="0" tIns="0" rIns="0" bIns="0" rtlCol="0" anchor="t"/>
-          <a:lstStyle/>
-          <a:p>
-            <a:pPr algn="l" indent="0" marL="0">
-              <a:spcAft>
-                <a:spcPts val="800"/>
-              </a:spcAft>
-              <a:buNone/>
-            </a:pPr>
-            <a:r>
-              <a:rPr lang="en-US" sz="4000" dirty="0">
-                <a:solidFill>
-                  <a:srgbClr val="111111"/>
-                </a:solidFill>
-                <a:latin typeface="Times New Roman" pitchFamily="34" charset="0"/>
-                <a:ea typeface="Times New Roman" pitchFamily="34" charset="-122"/>
-                <a:cs typeface="Times New Roman" pitchFamily="34" charset="-120"/>
-              </a:rPr>
-              <a:t>What is the difference between magma and lava?</a:t>
-            </a:r>
-            <a:endParaRPr lang="en-US" sz="4000" dirty="0"/>
+              <a:t>Illustration: a composite cone</a:t>
+            </a:r>
+            <a:endParaRPr lang="en-US" sz="1600" dirty="0"/>
           </a:p>
         </p:txBody>
       </p:sp>
@@ -17196,15 +18027,176 @@
                 <a:ea typeface="Calibri" pitchFamily="34" charset="-122"/>
                 <a:cs typeface="Calibri" pitchFamily="34" charset="-120"/>
               </a:rPr>
-              <a:t>FORMATIVE EVALUATION</a:t>
+              <a:t>BOARD SUMMARY</a:t>
             </a:r>
             <a:endParaRPr lang="en-US" sz="1400" dirty="0"/>
+          </a:p>
+        </p:txBody>
+      </p:sp>
+      <p:sp>
+        <p:nvSpPr>
+          <p:cNvPr id="3" name="Text 1"/>
+          <p:cNvSpPr/>
+          <p:nvPr/>
+        </p:nvSpPr>
+        <p:spPr>
+          <a:xfrm>
+            <a:off x="365760" y="1005840"/>
+            <a:ext cx="11460175" cy="731520"/>
+          </a:xfrm>
+          <a:prstGeom prst="rect">
+            <a:avLst/>
+          </a:prstGeom>
+          <a:noFill/>
+          <a:ln/>
+        </p:spPr>
+        <p:txBody>
+          <a:bodyPr wrap="square" lIns="0" tIns="0" rIns="0" bIns="0" rtlCol="0" anchor="ctr">
+            <a:normAutofit/>
+          </a:bodyPr>
+          <a:lstStyle/>
+          <a:p>
+            <a:pPr algn="ctr" indent="0" marL="0">
+              <a:buNone/>
+            </a:pPr>
+            <a:r>
+              <a:rPr lang="en-US" sz="3600" b="1" dirty="0">
+                <a:solidFill>
+                  <a:srgbClr val="990011"/>
+                </a:solidFill>
+                <a:latin typeface="Times New Roman" pitchFamily="34" charset="0"/>
+                <a:ea typeface="Times New Roman" pitchFamily="34" charset="-122"/>
+                <a:cs typeface="Times New Roman" pitchFamily="34" charset="-120"/>
+              </a:rPr>
+              <a:t>3. Volcanic Landforms</a:t>
+            </a:r>
+            <a:endParaRPr lang="en-US" sz="3600" dirty="0"/>
+          </a:p>
+        </p:txBody>
+      </p:sp>
+      <p:sp>
+        <p:nvSpPr>
+          <p:cNvPr id="4" name="Text 2"/>
+          <p:cNvSpPr/>
+          <p:nvPr/>
+        </p:nvSpPr>
+        <p:spPr>
+          <a:xfrm>
+            <a:off x="365760" y="1737360"/>
+            <a:ext cx="5120640" cy="457200"/>
+          </a:xfrm>
+          <a:prstGeom prst="rect">
+            <a:avLst/>
+          </a:prstGeom>
+          <a:noFill/>
+          <a:ln/>
+        </p:spPr>
+        <p:txBody>
+          <a:bodyPr wrap="square" lIns="0" tIns="0" rIns="0" bIns="0" rtlCol="0" anchor="ctr">
+            <a:normAutofit/>
+          </a:bodyPr>
+          <a:lstStyle/>
+          <a:p>
+            <a:pPr algn="l" indent="0" marL="0">
+              <a:buNone/>
+            </a:pPr>
+            <a:r>
+              <a:rPr lang="en-US" sz="3000" b="1" dirty="0">
+                <a:solidFill>
+                  <a:srgbClr val="990011"/>
+                </a:solidFill>
+                <a:latin typeface="Times New Roman" pitchFamily="34" charset="0"/>
+                <a:ea typeface="Times New Roman" pitchFamily="34" charset="-122"/>
+                <a:cs typeface="Times New Roman" pitchFamily="34" charset="-120"/>
+              </a:rPr>
+              <a:t>B) Other Volcanic Landforms</a:t>
+            </a:r>
+            <a:endParaRPr lang="en-US" sz="3000" dirty="0"/>
+          </a:p>
+        </p:txBody>
+      </p:sp>
+      <p:sp>
+        <p:nvSpPr>
+          <p:cNvPr id="5" name="Text 3"/>
+          <p:cNvSpPr/>
+          <p:nvPr/>
+        </p:nvSpPr>
+        <p:spPr>
+          <a:xfrm>
+            <a:off x="365760" y="2240280"/>
+            <a:ext cx="4846320" cy="4160520"/>
+          </a:xfrm>
+          <a:prstGeom prst="rect">
+            <a:avLst/>
+          </a:prstGeom>
+          <a:noFill/>
+          <a:ln/>
+        </p:spPr>
+        <p:txBody>
+          <a:bodyPr wrap="square" lIns="0" tIns="0" rIns="0" bIns="0" rtlCol="0" anchor="t"/>
+          <a:lstStyle/>
+          <a:p>
+            <a:pPr algn="l" indent="0" marL="0">
+              <a:spcAft>
+                <a:spcPts val="800"/>
+              </a:spcAft>
+              <a:buNone/>
+            </a:pPr>
+            <a:r>
+              <a:rPr lang="en-US" sz="3400" i="1" dirty="0">
+                <a:solidFill>
+                  <a:srgbClr val="111111"/>
+                </a:solidFill>
+                <a:latin typeface="Times New Roman" pitchFamily="34" charset="0"/>
+                <a:ea typeface="Times New Roman" pitchFamily="34" charset="-122"/>
+                <a:cs typeface="Times New Roman" pitchFamily="34" charset="-120"/>
+              </a:rPr>
+              <a:t>Other volcanic landforms are the following:</a:t>
+            </a:r>
+            <a:endParaRPr lang="en-US" sz="3400" dirty="0"/>
+          </a:p>
+          <a:p>
+            <a:pPr algn="l" indent="0" marL="0">
+              <a:spcAft>
+                <a:spcPts val="800"/>
+              </a:spcAft>
+              <a:buNone/>
+            </a:pPr>
+            <a:r>
+              <a:rPr lang="en-US" sz="3400" b="1" dirty="0">
+                <a:solidFill>
+                  <a:srgbClr val="111111"/>
+                </a:solidFill>
+                <a:latin typeface="Times New Roman" pitchFamily="34" charset="0"/>
+                <a:ea typeface="Times New Roman" pitchFamily="34" charset="-122"/>
+                <a:cs typeface="Times New Roman" pitchFamily="34" charset="-120"/>
+              </a:rPr>
+              <a:t>Lava plateau: </a:t>
+            </a:r>
+            <a:pPr algn="l" indent="0" marL="0">
+              <a:spcAft>
+                <a:spcPts val="800"/>
+              </a:spcAft>
+              <a:buNone/>
+            </a:pPr>
+            <a:r>
+              <a:rPr lang="en-US" sz="3400" dirty="0">
+                <a:solidFill>
+                  <a:srgbClr val="111111"/>
+                </a:solidFill>
+                <a:latin typeface="Times New Roman" pitchFamily="34" charset="0"/>
+                <a:ea typeface="Times New Roman" pitchFamily="34" charset="-122"/>
+                <a:cs typeface="Times New Roman" pitchFamily="34" charset="-120"/>
+              </a:rPr>
+              <a:t>Very runny lava erupts from long fissures and covers huge areas, like the Deccan Plateau of India.</a:t>
+            </a:r>
+            <a:endParaRPr lang="en-US" sz="3400" dirty="0"/>
           </a:p>
         </p:txBody>
       </p:sp>
       <p:pic>
         <p:nvPicPr>
-          <p:cNvPr id="3" name="Image 0" descr="/home/claude/f4/img/minesec_sheet.png">    </p:cNvPr>
+          <p:cNvPr id="6" name="Image 0" descr="/home/claude/f4/img/v2/lsa_basalt.jpg">    </p:cNvPr>
           <p:cNvPicPr>
             <a:picLocks noChangeAspect="1"/>
           </p:cNvPicPr>
@@ -17218,8 +18210,8 @@
         </p:blipFill>
         <p:spPr>
           <a:xfrm>
-            <a:off x="0" y="658368"/>
-            <a:ext cx="5120640" cy="5833872"/>
+            <a:off x="5349240" y="2071212"/>
+            <a:ext cx="6659575" cy="3693983"/>
           </a:xfrm>
           <a:prstGeom prst="rect">
             <a:avLst/>
@@ -17228,14 +18220,14 @@
       </p:pic>
       <p:sp>
         <p:nvSpPr>
-          <p:cNvPr id="4" name="Text 1"/>
+          <p:cNvPr id="7" name="Text 4"/>
           <p:cNvSpPr/>
           <p:nvPr/>
         </p:nvSpPr>
         <p:spPr>
           <a:xfrm>
-            <a:off x="5349240" y="1005840"/>
-            <a:ext cx="6522415" cy="731520"/>
+            <a:off x="5349240" y="6089904"/>
+            <a:ext cx="6659575" cy="347472"/>
           </a:xfrm>
           <a:prstGeom prst="rect">
             <a:avLst/>
@@ -17244,68 +18236,24 @@
           <a:ln/>
         </p:spPr>
         <p:txBody>
-          <a:bodyPr wrap="square" lIns="0" tIns="0" rIns="0" bIns="0" rtlCol="0" anchor="ctr">
-            <a:normAutofit/>
-          </a:bodyPr>
+          <a:bodyPr wrap="square" lIns="0" tIns="0" rIns="0" bIns="0" rtlCol="0" anchor="ctr"/>
           <a:lstStyle/>
           <a:p>
             <a:pPr algn="ctr" indent="0" marL="0">
               <a:buNone/>
             </a:pPr>
             <a:r>
-              <a:rPr lang="en-US" sz="3600" b="1" dirty="0">
-                <a:solidFill>
-                  <a:srgbClr val="990011"/>
+              <a:rPr lang="en-US" sz="1600" i="1" dirty="0">
+                <a:solidFill>
+                  <a:srgbClr val="555555"/>
                 </a:solidFill>
                 <a:latin typeface="Times New Roman" pitchFamily="34" charset="0"/>
                 <a:ea typeface="Times New Roman" pitchFamily="34" charset="-122"/>
                 <a:cs typeface="Times New Roman" pitchFamily="34" charset="-120"/>
               </a:rPr>
-              <a:t>Expected Answer</a:t>
-            </a:r>
-            <a:endParaRPr lang="en-US" sz="3600" dirty="0"/>
-          </a:p>
-        </p:txBody>
-      </p:sp>
-      <p:sp>
-        <p:nvSpPr>
-          <p:cNvPr id="5" name="Text 2"/>
-          <p:cNvSpPr/>
-          <p:nvPr/>
-        </p:nvSpPr>
-        <p:spPr>
-          <a:xfrm>
-            <a:off x="5349240" y="1783080"/>
-            <a:ext cx="6522415" cy="4663440"/>
-          </a:xfrm>
-          <a:prstGeom prst="rect">
-            <a:avLst/>
-          </a:prstGeom>
-          <a:noFill/>
-          <a:ln/>
-        </p:spPr>
-        <p:txBody>
-          <a:bodyPr wrap="square" lIns="0" tIns="0" rIns="0" bIns="0" rtlCol="0" anchor="t"/>
-          <a:lstStyle/>
-          <a:p>
-            <a:pPr algn="l" indent="0" marL="0">
-              <a:spcAft>
-                <a:spcPts val="800"/>
-              </a:spcAft>
-              <a:buNone/>
-            </a:pPr>
-            <a:r>
-              <a:rPr lang="en-US" sz="4000" dirty="0">
-                <a:solidFill>
-                  <a:srgbClr val="111111"/>
-                </a:solidFill>
-                <a:latin typeface="Times New Roman" pitchFamily="34" charset="0"/>
-                <a:ea typeface="Times New Roman" pitchFamily="34" charset="-122"/>
-                <a:cs typeface="Times New Roman" pitchFamily="34" charset="-120"/>
-              </a:rPr>
-              <a:t>Magma is underground; lava is on the surface.</a:t>
-            </a:r>
-            <a:endParaRPr lang="en-US" sz="4000" dirty="0"/>
+              <a:t>Illustration: basalt columns</a:t>
+            </a:r>
+            <a:endParaRPr lang="en-US" sz="1600" dirty="0"/>
           </a:p>
         </p:txBody>
       </p:sp>
@@ -17415,15 +18363,156 @@
                 <a:ea typeface="Calibri" pitchFamily="34" charset="-122"/>
                 <a:cs typeface="Calibri" pitchFamily="34" charset="-120"/>
               </a:rPr>
-              <a:t>FORMATIVE EVALUATION</a:t>
+              <a:t>BOARD SUMMARY</a:t>
             </a:r>
             <a:endParaRPr lang="en-US" sz="1400" dirty="0"/>
+          </a:p>
+        </p:txBody>
+      </p:sp>
+      <p:sp>
+        <p:nvSpPr>
+          <p:cNvPr id="3" name="Text 1"/>
+          <p:cNvSpPr/>
+          <p:nvPr/>
+        </p:nvSpPr>
+        <p:spPr>
+          <a:xfrm>
+            <a:off x="365760" y="1005840"/>
+            <a:ext cx="11460175" cy="731520"/>
+          </a:xfrm>
+          <a:prstGeom prst="rect">
+            <a:avLst/>
+          </a:prstGeom>
+          <a:noFill/>
+          <a:ln/>
+        </p:spPr>
+        <p:txBody>
+          <a:bodyPr wrap="square" lIns="0" tIns="0" rIns="0" bIns="0" rtlCol="0" anchor="ctr">
+            <a:normAutofit/>
+          </a:bodyPr>
+          <a:lstStyle/>
+          <a:p>
+            <a:pPr algn="ctr" indent="0" marL="0">
+              <a:buNone/>
+            </a:pPr>
+            <a:r>
+              <a:rPr lang="en-US" sz="3600" b="1" dirty="0">
+                <a:solidFill>
+                  <a:srgbClr val="990011"/>
+                </a:solidFill>
+                <a:latin typeface="Times New Roman" pitchFamily="34" charset="0"/>
+                <a:ea typeface="Times New Roman" pitchFamily="34" charset="-122"/>
+                <a:cs typeface="Times New Roman" pitchFamily="34" charset="-120"/>
+              </a:rPr>
+              <a:t>3. Volcanic Landforms</a:t>
+            </a:r>
+            <a:endParaRPr lang="en-US" sz="3600" dirty="0"/>
+          </a:p>
+        </p:txBody>
+      </p:sp>
+      <p:sp>
+        <p:nvSpPr>
+          <p:cNvPr id="4" name="Text 2"/>
+          <p:cNvSpPr/>
+          <p:nvPr/>
+        </p:nvSpPr>
+        <p:spPr>
+          <a:xfrm>
+            <a:off x="365760" y="1737360"/>
+            <a:ext cx="5120640" cy="457200"/>
+          </a:xfrm>
+          <a:prstGeom prst="rect">
+            <a:avLst/>
+          </a:prstGeom>
+          <a:noFill/>
+          <a:ln/>
+        </p:spPr>
+        <p:txBody>
+          <a:bodyPr wrap="square" lIns="0" tIns="0" rIns="0" bIns="0" rtlCol="0" anchor="ctr">
+            <a:normAutofit/>
+          </a:bodyPr>
+          <a:lstStyle/>
+          <a:p>
+            <a:pPr algn="l" indent="0" marL="0">
+              <a:buNone/>
+            </a:pPr>
+            <a:r>
+              <a:rPr lang="en-US" sz="3000" b="1" dirty="0">
+                <a:solidFill>
+                  <a:srgbClr val="990011"/>
+                </a:solidFill>
+                <a:latin typeface="Times New Roman" pitchFamily="34" charset="0"/>
+                <a:ea typeface="Times New Roman" pitchFamily="34" charset="-122"/>
+                <a:cs typeface="Times New Roman" pitchFamily="34" charset="-120"/>
+              </a:rPr>
+              <a:t>B) Other Volcanic Landforms</a:t>
+            </a:r>
+            <a:endParaRPr lang="en-US" sz="3000" dirty="0"/>
+          </a:p>
+        </p:txBody>
+      </p:sp>
+      <p:sp>
+        <p:nvSpPr>
+          <p:cNvPr id="5" name="Text 3"/>
+          <p:cNvSpPr/>
+          <p:nvPr/>
+        </p:nvSpPr>
+        <p:spPr>
+          <a:xfrm>
+            <a:off x="365760" y="2240280"/>
+            <a:ext cx="4846320" cy="4160520"/>
+          </a:xfrm>
+          <a:prstGeom prst="rect">
+            <a:avLst/>
+          </a:prstGeom>
+          <a:noFill/>
+          <a:ln/>
+        </p:spPr>
+        <p:txBody>
+          <a:bodyPr wrap="square" lIns="0" tIns="0" rIns="0" bIns="0" rtlCol="0" anchor="t"/>
+          <a:lstStyle/>
+          <a:p>
+            <a:pPr algn="l" indent="0" marL="0">
+              <a:spcAft>
+                <a:spcPts val="800"/>
+              </a:spcAft>
+              <a:buNone/>
+            </a:pPr>
+            <a:r>
+              <a:rPr lang="en-US" sz="3600" b="1" dirty="0">
+                <a:solidFill>
+                  <a:srgbClr val="111111"/>
+                </a:solidFill>
+                <a:latin typeface="Times New Roman" pitchFamily="34" charset="0"/>
+                <a:ea typeface="Times New Roman" pitchFamily="34" charset="-122"/>
+                <a:cs typeface="Times New Roman" pitchFamily="34" charset="-120"/>
+              </a:rPr>
+              <a:t>Crater: </a:t>
+            </a:r>
+            <a:pPr algn="l" indent="0" marL="0">
+              <a:spcAft>
+                <a:spcPts val="800"/>
+              </a:spcAft>
+              <a:buNone/>
+            </a:pPr>
+            <a:r>
+              <a:rPr lang="en-US" sz="3600" dirty="0">
+                <a:solidFill>
+                  <a:srgbClr val="111111"/>
+                </a:solidFill>
+                <a:latin typeface="Times New Roman" pitchFamily="34" charset="0"/>
+                <a:ea typeface="Times New Roman" pitchFamily="34" charset="-122"/>
+                <a:cs typeface="Times New Roman" pitchFamily="34" charset="-120"/>
+              </a:rPr>
+              <a:t>A bowl-shaped depression at the top of the vent, usually less than 1 km wide.</a:t>
+            </a:r>
+            <a:endParaRPr lang="en-US" sz="3600" dirty="0"/>
           </a:p>
         </p:txBody>
       </p:sp>
       <p:pic>
         <p:nvPicPr>
-          <p:cNvPr id="3" name="Image 0" descr="/home/claude/f4/img/minesec_sheet.png">    </p:cNvPr>
+          <p:cNvPr id="6" name="Image 0" descr="/home/claude/f4/img/v2/f4_crater.jpg">    </p:cNvPr>
           <p:cNvPicPr>
             <a:picLocks noChangeAspect="1"/>
           </p:cNvPicPr>
@@ -17437,8 +18526,8 @@
         </p:blipFill>
         <p:spPr>
           <a:xfrm>
-            <a:off x="0" y="658368"/>
-            <a:ext cx="5120640" cy="5833872"/>
+            <a:off x="5349240" y="2071212"/>
+            <a:ext cx="6659575" cy="3693983"/>
           </a:xfrm>
           <a:prstGeom prst="rect">
             <a:avLst/>
@@ -17447,14 +18536,14 @@
       </p:pic>
       <p:sp>
         <p:nvSpPr>
-          <p:cNvPr id="4" name="Text 1"/>
+          <p:cNvPr id="7" name="Text 4"/>
           <p:cNvSpPr/>
           <p:nvPr/>
         </p:nvSpPr>
         <p:spPr>
           <a:xfrm>
-            <a:off x="5349240" y="1005840"/>
-            <a:ext cx="6522415" cy="731520"/>
+            <a:off x="5349240" y="6089904"/>
+            <a:ext cx="6659575" cy="347472"/>
           </a:xfrm>
           <a:prstGeom prst="rect">
             <a:avLst/>
@@ -17463,68 +18552,24 @@
           <a:ln/>
         </p:spPr>
         <p:txBody>
-          <a:bodyPr wrap="square" lIns="0" tIns="0" rIns="0" bIns="0" rtlCol="0" anchor="ctr">
-            <a:normAutofit/>
-          </a:bodyPr>
+          <a:bodyPr wrap="square" lIns="0" tIns="0" rIns="0" bIns="0" rtlCol="0" anchor="ctr"/>
           <a:lstStyle/>
           <a:p>
             <a:pPr algn="ctr" indent="0" marL="0">
               <a:buNone/>
             </a:pPr>
             <a:r>
-              <a:rPr lang="en-US" sz="3600" b="1" dirty="0">
-                <a:solidFill>
-                  <a:srgbClr val="990011"/>
+              <a:rPr lang="en-US" sz="1600" i="1" dirty="0">
+                <a:solidFill>
+                  <a:srgbClr val="555555"/>
                 </a:solidFill>
                 <a:latin typeface="Times New Roman" pitchFamily="34" charset="0"/>
                 <a:ea typeface="Times New Roman" pitchFamily="34" charset="-122"/>
                 <a:cs typeface="Times New Roman" pitchFamily="34" charset="-120"/>
               </a:rPr>
-              <a:t>Evaluation 2</a:t>
-            </a:r>
-            <a:endParaRPr lang="en-US" sz="3600" dirty="0"/>
-          </a:p>
-        </p:txBody>
-      </p:sp>
-      <p:sp>
-        <p:nvSpPr>
-          <p:cNvPr id="5" name="Text 2"/>
-          <p:cNvSpPr/>
-          <p:nvPr/>
-        </p:nvSpPr>
-        <p:spPr>
-          <a:xfrm>
-            <a:off x="5349240" y="1783080"/>
-            <a:ext cx="6522415" cy="4663440"/>
-          </a:xfrm>
-          <a:prstGeom prst="rect">
-            <a:avLst/>
-          </a:prstGeom>
-          <a:noFill/>
-          <a:ln/>
-        </p:spPr>
-        <p:txBody>
-          <a:bodyPr wrap="square" lIns="0" tIns="0" rIns="0" bIns="0" rtlCol="0" anchor="t"/>
-          <a:lstStyle/>
-          <a:p>
-            <a:pPr algn="l" indent="0" marL="0">
-              <a:spcAft>
-                <a:spcPts val="800"/>
-              </a:spcAft>
-              <a:buNone/>
-            </a:pPr>
-            <a:r>
-              <a:rPr lang="en-US" sz="4000" dirty="0">
-                <a:solidFill>
-                  <a:srgbClr val="111111"/>
-                </a:solidFill>
-                <a:latin typeface="Times New Roman" pitchFamily="34" charset="0"/>
-                <a:ea typeface="Times New Roman" pitchFamily="34" charset="-122"/>
-                <a:cs typeface="Times New Roman" pitchFamily="34" charset="-120"/>
-              </a:rPr>
-              <a:t>Why is a composite cone steep and layered?</a:t>
-            </a:r>
-            <a:endParaRPr lang="en-US" sz="4000" dirty="0"/>
+              <a:t>Illustration: a crater</a:t>
+            </a:r>
+            <a:endParaRPr lang="en-US" sz="1600" dirty="0"/>
           </a:p>
         </p:txBody>
       </p:sp>
@@ -17634,7 +18679,7 @@
                 <a:ea typeface="Calibri" pitchFamily="34" charset="-122"/>
                 <a:cs typeface="Calibri" pitchFamily="34" charset="-120"/>
               </a:rPr>
-              <a:t>FORMATIVE EVALUATION</a:t>
+              <a:t>BOARD SUMMARY</a:t>
             </a:r>
             <a:endParaRPr lang="en-US" sz="1400" dirty="0"/>
           </a:p>
@@ -17657,7 +18702,7 @@
         <p:spPr>
           <a:xfrm>
             <a:off x="0" y="658368"/>
-            <a:ext cx="5120640" cy="5833872"/>
+            <a:ext cx="1463040" cy="5833872"/>
           </a:xfrm>
           <a:prstGeom prst="rect">
             <a:avLst/>
@@ -17672,8 +18717,8 @@
         </p:nvSpPr>
         <p:spPr>
           <a:xfrm>
-            <a:off x="5349240" y="1005840"/>
-            <a:ext cx="6522415" cy="731520"/>
+            <a:off x="1691640" y="1005840"/>
+            <a:ext cx="10180015" cy="731520"/>
           </a:xfrm>
           <a:prstGeom prst="rect">
             <a:avLst/>
@@ -17699,7 +18744,7 @@
                 <a:ea typeface="Times New Roman" pitchFamily="34" charset="-122"/>
                 <a:cs typeface="Times New Roman" pitchFamily="34" charset="-120"/>
               </a:rPr>
-              <a:t>Expected Answer</a:t>
+              <a:t>3. Volcanic Landforms</a:t>
             </a:r>
             <a:endParaRPr lang="en-US" sz="3600" dirty="0"/>
           </a:p>
@@ -17713,8 +18758,47 @@
         </p:nvSpPr>
         <p:spPr>
           <a:xfrm>
-            <a:off x="5349240" y="1783080"/>
-            <a:ext cx="6522415" cy="4663440"/>
+            <a:off x="1691640" y="1737360"/>
+            <a:ext cx="10180015" cy="457200"/>
+          </a:xfrm>
+          <a:prstGeom prst="rect">
+            <a:avLst/>
+          </a:prstGeom>
+          <a:noFill/>
+          <a:ln/>
+        </p:spPr>
+        <p:txBody>
+          <a:bodyPr wrap="square" lIns="0" tIns="0" rIns="0" bIns="0" rtlCol="0" anchor="ctr"/>
+          <a:lstStyle/>
+          <a:p>
+            <a:pPr algn="l" indent="0" marL="0">
+              <a:buNone/>
+            </a:pPr>
+            <a:r>
+              <a:rPr lang="en-US" sz="3200" b="1" dirty="0">
+                <a:solidFill>
+                  <a:srgbClr val="990011"/>
+                </a:solidFill>
+                <a:latin typeface="Times New Roman" pitchFamily="34" charset="0"/>
+                <a:ea typeface="Times New Roman" pitchFamily="34" charset="-122"/>
+                <a:cs typeface="Times New Roman" pitchFamily="34" charset="-120"/>
+              </a:rPr>
+              <a:t>B) Other Volcanic Landforms</a:t>
+            </a:r>
+            <a:endParaRPr lang="en-US" sz="3200" dirty="0"/>
+          </a:p>
+        </p:txBody>
+      </p:sp>
+      <p:sp>
+        <p:nvSpPr>
+          <p:cNvPr id="6" name="Text 3"/>
+          <p:cNvSpPr/>
+          <p:nvPr/>
+        </p:nvSpPr>
+        <p:spPr>
+          <a:xfrm>
+            <a:off x="1691640" y="2240280"/>
+            <a:ext cx="10180015" cy="4206240"/>
           </a:xfrm>
           <a:prstGeom prst="rect">
             <a:avLst/>
@@ -17733,7 +18817,7 @@
               <a:buNone/>
             </a:pPr>
             <a:r>
-              <a:rPr lang="en-US" sz="4000" dirty="0">
+              <a:rPr lang="en-US" sz="4000" b="1" dirty="0">
                 <a:solidFill>
                   <a:srgbClr val="111111"/>
                 </a:solidFill>
@@ -17741,7 +18825,61 @@
                 <a:ea typeface="Times New Roman" pitchFamily="34" charset="-122"/>
                 <a:cs typeface="Times New Roman" pitchFamily="34" charset="-120"/>
               </a:rPr>
-              <a:t>It is built of alternating layers of ash and lava.</a:t>
+              <a:t>Crater lakes: </a:t>
+            </a:r>
+            <a:pPr algn="l" indent="0" marL="0">
+              <a:spcAft>
+                <a:spcPts val="800"/>
+              </a:spcAft>
+              <a:buNone/>
+            </a:pPr>
+            <a:r>
+              <a:rPr lang="en-US" sz="4000" dirty="0">
+                <a:solidFill>
+                  <a:srgbClr val="111111"/>
+                </a:solidFill>
+                <a:latin typeface="Times New Roman" pitchFamily="34" charset="0"/>
+                <a:ea typeface="Times New Roman" pitchFamily="34" charset="-122"/>
+                <a:cs typeface="Times New Roman" pitchFamily="34" charset="-120"/>
+              </a:rPr>
+              <a:t>Rain fills craters to form lakes, like Lake Nyos and Lake Barombi Mbo in Cameroon.</a:t>
+            </a:r>
+            <a:endParaRPr lang="en-US" sz="4000" dirty="0"/>
+          </a:p>
+          <a:p>
+            <a:pPr algn="l" indent="0" marL="0">
+              <a:spcAft>
+                <a:spcPts val="800"/>
+              </a:spcAft>
+              <a:buNone/>
+            </a:pPr>
+            <a:r>
+              <a:rPr lang="en-US" sz="4000" b="1" dirty="0">
+                <a:solidFill>
+                  <a:srgbClr val="111111"/>
+                </a:solidFill>
+                <a:latin typeface="Times New Roman" pitchFamily="34" charset="0"/>
+                <a:ea typeface="Times New Roman" pitchFamily="34" charset="-122"/>
+                <a:cs typeface="Times New Roman" pitchFamily="34" charset="-120"/>
+              </a:rPr>
+              <a:t>Caldera: </a:t>
+            </a:r>
+            <a:pPr algn="l" indent="0" marL="0">
+              <a:spcAft>
+                <a:spcPts val="800"/>
+              </a:spcAft>
+              <a:buNone/>
+            </a:pPr>
+            <a:r>
+              <a:rPr lang="en-US" sz="4000" dirty="0">
+                <a:solidFill>
+                  <a:srgbClr val="111111"/>
+                </a:solidFill>
+                <a:latin typeface="Times New Roman" pitchFamily="34" charset="0"/>
+                <a:ea typeface="Times New Roman" pitchFamily="34" charset="-122"/>
+                <a:cs typeface="Times New Roman" pitchFamily="34" charset="-120"/>
+              </a:rPr>
+              <a:t>A very large basin, several kilometres wide, formed when the top of a volcano collapses after a huge eruption.</a:t>
             </a:r>
             <a:endParaRPr lang="en-US" sz="4000" dirty="0"/>
           </a:p>
@@ -17960,7 +19098,7 @@
                 <a:ea typeface="Times New Roman" pitchFamily="34" charset="-122"/>
                 <a:cs typeface="Times New Roman" pitchFamily="34" charset="-120"/>
               </a:rPr>
-              <a:t>Mount Cameroon is about 4,040 m high, the highest mountain in West and Central Africa. Recent eruptions: 1959, 1982, 1999 and 2000.</a:t>
+              <a:t>Magma is molten rock below the surface; lava is molten rock that has reached the surface.</a:t>
             </a:r>
             <a:endParaRPr lang="en-US" sz="4000" dirty="0"/>
           </a:p>
@@ -18072,7 +19210,7 @@
                 <a:ea typeface="Calibri" pitchFamily="34" charset="-122"/>
                 <a:cs typeface="Calibri" pitchFamily="34" charset="-120"/>
               </a:rPr>
-              <a:t>REMEDIATION</a:t>
+              <a:t>FORMATIVE EVALUATION</a:t>
             </a:r>
             <a:endParaRPr lang="en-US" sz="1400" dirty="0"/>
           </a:p>
@@ -18095,7 +19233,7 @@
         <p:spPr>
           <a:xfrm>
             <a:off x="0" y="658368"/>
-            <a:ext cx="3840480" cy="5833872"/>
+            <a:ext cx="5120640" cy="5833872"/>
           </a:xfrm>
           <a:prstGeom prst="rect">
             <a:avLst/>
@@ -18110,8 +19248,8 @@
         </p:nvSpPr>
         <p:spPr>
           <a:xfrm>
-            <a:off x="4069080" y="1005840"/>
-            <a:ext cx="7802575" cy="731520"/>
+            <a:off x="5349240" y="1005840"/>
+            <a:ext cx="6522415" cy="731520"/>
           </a:xfrm>
           <a:prstGeom prst="rect">
             <a:avLst/>
@@ -18137,7 +19275,7 @@
                 <a:ea typeface="Times New Roman" pitchFamily="34" charset="-122"/>
                 <a:cs typeface="Times New Roman" pitchFamily="34" charset="-120"/>
               </a:rPr>
-              <a:t>Remediation</a:t>
+              <a:t>Evaluation 1</a:t>
             </a:r>
             <a:endParaRPr lang="en-US" sz="3600" dirty="0"/>
           </a:p>
@@ -18151,8 +19289,8 @@
         </p:nvSpPr>
         <p:spPr>
           <a:xfrm>
-            <a:off x="4069080" y="1783080"/>
-            <a:ext cx="7802575" cy="4663440"/>
+            <a:off x="5349240" y="1783080"/>
+            <a:ext cx="6522415" cy="4663440"/>
           </a:xfrm>
           <a:prstGeom prst="rect">
             <a:avLst/>
@@ -18171,7 +19309,7 @@
               <a:buNone/>
             </a:pPr>
             <a:r>
-              <a:rPr lang="en-US" sz="4000" b="1" dirty="0">
+              <a:rPr lang="en-US" sz="4000" dirty="0">
                 <a:solidFill>
                   <a:srgbClr val="111111"/>
                 </a:solidFill>
@@ -18179,73 +19317,7 @@
                 <a:ea typeface="Times New Roman" pitchFamily="34" charset="-122"/>
                 <a:cs typeface="Times New Roman" pitchFamily="34" charset="-120"/>
               </a:rPr>
-              <a:t>Fill in the blanks:</a:t>
-            </a:r>
-            <a:endParaRPr lang="en-US" sz="4000" dirty="0"/>
-          </a:p>
-          <a:p>
-            <a:pPr algn="l" marL="342900" indent="-342900">
-              <a:spcAft>
-                <a:spcPts val="800"/>
-              </a:spcAft>
-              <a:buSzPct val="100000"/>
-              <a:buFont typeface="+mj-lt"/>
-              <a:buAutoNum type="arabicPeriod" startAt="1"/>
-            </a:pPr>
-            <a:r>
-              <a:rPr lang="en-US" sz="4000" dirty="0">
-                <a:solidFill>
-                  <a:srgbClr val="111111"/>
-                </a:solidFill>
-                <a:latin typeface="Times New Roman" pitchFamily="34" charset="0"/>
-                <a:ea typeface="Times New Roman" pitchFamily="34" charset="-122"/>
-                <a:cs typeface="Times New Roman" pitchFamily="34" charset="-120"/>
-              </a:rPr>
-              <a:t>Magma on the surface is ______.</a:t>
-            </a:r>
-            <a:endParaRPr lang="en-US" sz="4000" dirty="0"/>
-          </a:p>
-          <a:p>
-            <a:pPr algn="l" marL="342900" indent="-342900">
-              <a:spcAft>
-                <a:spcPts val="800"/>
-              </a:spcAft>
-              <a:buSzPct val="100000"/>
-              <a:buFont typeface="+mj-lt"/>
-              <a:buAutoNum type="arabicPeriod" startAt="1"/>
-            </a:pPr>
-            <a:r>
-              <a:rPr lang="en-US" sz="4000" dirty="0">
-                <a:solidFill>
-                  <a:srgbClr val="111111"/>
-                </a:solidFill>
-                <a:latin typeface="Times New Roman" pitchFamily="34" charset="0"/>
-                <a:ea typeface="Times New Roman" pitchFamily="34" charset="-122"/>
-                <a:cs typeface="Times New Roman" pitchFamily="34" charset="-120"/>
-              </a:rPr>
-              <a:t>A huge hollow after a collapse is a ______.</a:t>
-            </a:r>
-            <a:endParaRPr lang="en-US" sz="4000" dirty="0"/>
-          </a:p>
-          <a:p>
-            <a:pPr algn="l" marL="342900" indent="-342900">
-              <a:spcAft>
-                <a:spcPts val="800"/>
-              </a:spcAft>
-              <a:buSzPct val="100000"/>
-              <a:buFont typeface="+mj-lt"/>
-              <a:buAutoNum type="arabicPeriod" startAt="1"/>
-            </a:pPr>
-            <a:r>
-              <a:rPr lang="en-US" sz="4000" dirty="0">
-                <a:solidFill>
-                  <a:srgbClr val="111111"/>
-                </a:solidFill>
-                <a:latin typeface="Times New Roman" pitchFamily="34" charset="0"/>
-                <a:ea typeface="Times New Roman" pitchFamily="34" charset="-122"/>
-                <a:cs typeface="Times New Roman" pitchFamily="34" charset="-120"/>
-              </a:rPr>
-              <a:t>Runny lava forms ______ volcanoes with gentle slopes.</a:t>
+              <a:t>Distinguish an active volcano from an extinct volcano with one example each.</a:t>
             </a:r>
             <a:endParaRPr lang="en-US" sz="4000" dirty="0"/>
           </a:p>
@@ -18357,7 +19429,7 @@
                 <a:ea typeface="Calibri" pitchFamily="34" charset="-122"/>
                 <a:cs typeface="Calibri" pitchFamily="34" charset="-120"/>
               </a:rPr>
-              <a:t>HOMEWORK</a:t>
+              <a:t>FORMATIVE EVALUATION</a:t>
             </a:r>
             <a:endParaRPr lang="en-US" sz="1400" dirty="0"/>
           </a:p>
@@ -18422,7 +19494,7 @@
                 <a:ea typeface="Times New Roman" pitchFamily="34" charset="-122"/>
                 <a:cs typeface="Times New Roman" pitchFamily="34" charset="-120"/>
               </a:rPr>
-              <a:t>Homework</a:t>
+              <a:t>Expected Answer</a:t>
             </a:r>
             <a:endParaRPr lang="en-US" sz="3600" dirty="0"/>
           </a:p>
@@ -18464,7 +19536,7 @@
                 <a:ea typeface="Times New Roman" pitchFamily="34" charset="-122"/>
                 <a:cs typeface="Times New Roman" pitchFamily="34" charset="-120"/>
               </a:rPr>
-              <a:t>Ask an adult what people grow around Buea and Limbe, and why the soils are good.</a:t>
+              <a:t>An active volcano has erupted in recorded history (Mount Cameroon); an extinct one will not erupt again (Rhumsiki necks).</a:t>
             </a:r>
             <a:endParaRPr lang="en-US" sz="4000" dirty="0"/>
           </a:p>
@@ -18576,7 +19648,7 @@
                 <a:ea typeface="Calibri" pitchFamily="34" charset="-122"/>
                 <a:cs typeface="Calibri" pitchFamily="34" charset="-120"/>
               </a:rPr>
-              <a:t>NEXT LESSON</a:t>
+              <a:t>FORMATIVE EVALUATION</a:t>
             </a:r>
             <a:endParaRPr lang="en-US" sz="1400" dirty="0"/>
           </a:p>
@@ -18641,7 +19713,7 @@
                 <a:ea typeface="Times New Roman" pitchFamily="34" charset="-122"/>
                 <a:cs typeface="Times New Roman" pitchFamily="34" charset="-120"/>
               </a:rPr>
-              <a:t>Next Lesson</a:t>
+              <a:t>Evaluation 2</a:t>
             </a:r>
             <a:endParaRPr lang="en-US" sz="3600" dirty="0"/>
           </a:p>
@@ -18665,17 +19737,17 @@
           <a:ln/>
         </p:spPr>
         <p:txBody>
-          <a:bodyPr wrap="square" lIns="0" tIns="0" rIns="0" bIns="0" rtlCol="0" anchor="ctr"/>
-          <a:lstStyle/>
-          <a:p>
-            <a:pPr algn="ctr" indent="0" marL="0">
+          <a:bodyPr wrap="square" lIns="0" tIns="0" rIns="0" bIns="0" rtlCol="0" anchor="t"/>
+          <a:lstStyle/>
+          <a:p>
+            <a:pPr algn="l" indent="0" marL="0">
               <a:spcAft>
                 <a:spcPts val="800"/>
               </a:spcAft>
               <a:buNone/>
             </a:pPr>
             <a:r>
-              <a:rPr lang="en-US" sz="4000" b="1" dirty="0">
+              <a:rPr lang="en-US" sz="4000" dirty="0">
                 <a:solidFill>
                   <a:srgbClr val="111111"/>
                 </a:solidFill>
@@ -18683,27 +19755,7 @@
                 <a:ea typeface="Times New Roman" pitchFamily="34" charset="-122"/>
                 <a:cs typeface="Times New Roman" pitchFamily="34" charset="-120"/>
               </a:rPr>
-              <a:t>Our next lesson will be on:</a:t>
-            </a:r>
-            <a:endParaRPr lang="en-US" sz="4000" dirty="0"/>
-          </a:p>
-          <a:p>
-            <a:pPr algn="ctr" indent="0" marL="0">
-              <a:spcAft>
-                <a:spcPts val="800"/>
-              </a:spcAft>
-              <a:buNone/>
-            </a:pPr>
-            <a:r>
-              <a:rPr lang="en-US" sz="4000" b="1" dirty="0">
-                <a:solidFill>
-                  <a:srgbClr val="990011"/>
-                </a:solidFill>
-                <a:latin typeface="Times New Roman" pitchFamily="34" charset="0"/>
-                <a:ea typeface="Times New Roman" pitchFamily="34" charset="-122"/>
-                <a:cs typeface="Times New Roman" pitchFamily="34" charset="-120"/>
-              </a:rPr>
-              <a:t>Lesson 7: Volcanoes and Man</a:t>
+              <a:t>Why are shield volcanoes wide and composite cones steep?</a:t>
             </a:r>
             <a:endParaRPr lang="en-US" sz="4000" dirty="0"/>
           </a:p>
@@ -18815,22 +19867,46 @@
                 <a:ea typeface="Calibri" pitchFamily="34" charset="-122"/>
                 <a:cs typeface="Calibri" pitchFamily="34" charset="-120"/>
               </a:rPr>
-              <a:t>BILINGUAL GAME</a:t>
+              <a:t>FORMATIVE EVALUATION</a:t>
             </a:r>
             <a:endParaRPr lang="en-US" sz="1400" dirty="0"/>
           </a:p>
         </p:txBody>
       </p:sp>
-      <p:sp>
-        <p:nvSpPr>
-          <p:cNvPr id="3" name="Text 1"/>
+      <p:pic>
+        <p:nvPicPr>
+          <p:cNvPr id="3" name="Image 0" descr="/home/claude/f4/img/minesec_sheet.png">    </p:cNvPr>
+          <p:cNvPicPr>
+            <a:picLocks noChangeAspect="1"/>
+          </p:cNvPicPr>
+          <p:nvPr/>
+        </p:nvPicPr>
+        <p:blipFill>
+          <a:blip r:embed="rId1"/>
+          <a:stretch>
+            <a:fillRect/>
+          </a:stretch>
+        </p:blipFill>
+        <p:spPr>
+          <a:xfrm>
+            <a:off x="0" y="658368"/>
+            <a:ext cx="5120640" cy="5833872"/>
+          </a:xfrm>
+          <a:prstGeom prst="rect">
+            <a:avLst/>
+          </a:prstGeom>
+        </p:spPr>
+      </p:pic>
+      <p:sp>
+        <p:nvSpPr>
+          <p:cNvPr id="4" name="Text 1"/>
           <p:cNvSpPr/>
           <p:nvPr/>
         </p:nvSpPr>
         <p:spPr>
           <a:xfrm>
-            <a:off x="457200" y="1005840"/>
-            <a:ext cx="11277295" cy="731520"/>
+            <a:off x="5349240" y="1005840"/>
+            <a:ext cx="6522415" cy="731520"/>
           </a:xfrm>
           <a:prstGeom prst="rect">
             <a:avLst/>
@@ -18839,7 +19915,9 @@
           <a:ln/>
         </p:spPr>
         <p:txBody>
-          <a:bodyPr wrap="square" lIns="0" tIns="0" rIns="0" bIns="0" rtlCol="0" anchor="ctr"/>
+          <a:bodyPr wrap="square" lIns="0" tIns="0" rIns="0" bIns="0" rtlCol="0" anchor="ctr">
+            <a:normAutofit/>
+          </a:bodyPr>
           <a:lstStyle/>
           <a:p>
             <a:pPr algn="ctr" indent="0" marL="0">
@@ -18854,6 +19932,942 @@
                 <a:ea typeface="Times New Roman" pitchFamily="34" charset="-122"/>
                 <a:cs typeface="Times New Roman" pitchFamily="34" charset="-120"/>
               </a:rPr>
+              <a:t>Expected Answer</a:t>
+            </a:r>
+            <a:endParaRPr lang="en-US" sz="3600" dirty="0"/>
+          </a:p>
+        </p:txBody>
+      </p:sp>
+      <p:sp>
+        <p:nvSpPr>
+          <p:cNvPr id="5" name="Text 2"/>
+          <p:cNvSpPr/>
+          <p:nvPr/>
+        </p:nvSpPr>
+        <p:spPr>
+          <a:xfrm>
+            <a:off x="5349240" y="1783080"/>
+            <a:ext cx="6522415" cy="4663440"/>
+          </a:xfrm>
+          <a:prstGeom prst="rect">
+            <a:avLst/>
+          </a:prstGeom>
+          <a:noFill/>
+          <a:ln/>
+        </p:spPr>
+        <p:txBody>
+          <a:bodyPr wrap="square" lIns="0" tIns="0" rIns="0" bIns="0" rtlCol="0" anchor="t"/>
+          <a:lstStyle/>
+          <a:p>
+            <a:pPr algn="l" indent="0" marL="0">
+              <a:spcAft>
+                <a:spcPts val="800"/>
+              </a:spcAft>
+              <a:buNone/>
+            </a:pPr>
+            <a:r>
+              <a:rPr lang="en-US" sz="4000" dirty="0">
+                <a:solidFill>
+                  <a:srgbClr val="111111"/>
+                </a:solidFill>
+                <a:latin typeface="Times New Roman" pitchFamily="34" charset="0"/>
+                <a:ea typeface="Times New Roman" pitchFamily="34" charset="-122"/>
+                <a:cs typeface="Times New Roman" pitchFamily="34" charset="-120"/>
+              </a:rPr>
+              <a:t>Shield volcanoes are built by runny lava that flows far; composite cones are built by layers of lava and ash that pile up.</a:t>
+            </a:r>
+            <a:endParaRPr lang="en-US" sz="4000" dirty="0"/>
+          </a:p>
+        </p:txBody>
+      </p:sp>
+      <p:sp>
+        <p:nvSpPr>
+          <p:cNvPr id="25" name="Slide Number Placeholder 0"/>
+          <p:cNvSpPr>
+            <a:spLocks noGrp="1"/>
+          </p:cNvSpPr>
+          <p:nvPr>
+            <p:ph type="sldNum" sz="quarter" idx="4294967295"/>
+          </p:nvPr>
+        </p:nvSpPr>
+        <p:spPr>
+          <a:xfrm>
+            <a:off x="27432" y="91440"/>
+            <a:ext cx="585216" cy="475488"/>
+          </a:xfrm>
+          <a:prstGeom prst="rect">
+            <a:avLst/>
+          </a:prstGeom>
+          <a:extLst>
+            <a:ext uri="{C572A759-6A51-4108-AA02-DFA0A04FC94B}">
+              <ma14:wrappingTextBoxFlag xmlns:ma14="http://schemas.microsoft.com/office/mac/drawingml/2011/main" val="0"/>
+            </a:ext>
+          </a:extLst>
+        </p:spPr>
+        <p:txBody>
+          <a:bodyPr/>
+          <a:lstStyle>
+            <a:lvl1pPr>
+              <a:defRPr sz="2000">
+                <a:solidFill>
+                  <a:srgbClr val="FFFFFF"/>
+                </a:solidFill>
+                <a:latin typeface="Calibri"/>
+                <a:ea typeface="Calibri"/>
+                <a:cs typeface="Calibri"/>
+              </a:defRPr>
+            </a:lvl1pPr>
+          </a:lstStyle>
+          <a:p>
+            <a:pPr algn="ctr"/>
+            <a:fld id="{F7021451-1387-4CA6-816F-3879F97B5CBC}" type="slidenum">
+              <a:rPr b="1" lang="en-US"/>
+              <a:t>53</a:t>
+            </a:fld>
+            <a:endParaRPr lang="en-US"/>
+          </a:p>
+        </p:txBody>
+      </p:sp>
+    </p:spTree>
+  </p:cSld>
+  <p:clrMapOvr>
+    <a:masterClrMapping/>
+  </p:clrMapOvr>
+</p:sld>
+</file>
+
+<file path=ppt/slides/slide54.xml><?xml version="1.0" encoding="utf-8"?>
+<p:sld xmlns:a="http://schemas.openxmlformats.org/drawingml/2006/main" xmlns:r="http://schemas.openxmlformats.org/officeDocument/2006/relationships" xmlns:p="http://schemas.openxmlformats.org/presentationml/2006/main">
+  <p:cSld name="Slide 54">
+    <p:spTree>
+      <p:nvGrpSpPr>
+        <p:cNvPr id="1" name=""/>
+        <p:cNvGrpSpPr/>
+        <p:nvPr/>
+      </p:nvGrpSpPr>
+      <p:grpSpPr>
+        <a:xfrm>
+          <a:off x="0" y="0"/>
+          <a:ext cx="0" cy="0"/>
+          <a:chOff x="0" y="0"/>
+          <a:chExt cx="0" cy="0"/>
+        </a:xfrm>
+      </p:grpSpPr>
+      <p:sp>
+        <p:nvSpPr>
+          <p:cNvPr id="2" name="Text 0"/>
+          <p:cNvSpPr/>
+          <p:nvPr/>
+        </p:nvSpPr>
+        <p:spPr>
+          <a:xfrm>
+            <a:off x="457200" y="713232"/>
+            <a:ext cx="11368735" cy="274320"/>
+          </a:xfrm>
+          <a:prstGeom prst="rect">
+            <a:avLst/>
+          </a:prstGeom>
+          <a:noFill/>
+          <a:ln/>
+        </p:spPr>
+        <p:txBody>
+          <a:bodyPr wrap="square" lIns="0" tIns="0" rIns="0" bIns="0" rtlCol="0" anchor="ctr"/>
+          <a:lstStyle/>
+          <a:p>
+            <a:pPr algn="r" indent="0" marL="0">
+              <a:buNone/>
+            </a:pPr>
+            <a:r>
+              <a:rPr lang="en-US" sz="1400" b="1" dirty="0">
+                <a:solidFill>
+                  <a:srgbClr val="1C3F6E"/>
+                </a:solidFill>
+                <a:latin typeface="Calibri" pitchFamily="34" charset="0"/>
+                <a:ea typeface="Calibri" pitchFamily="34" charset="-122"/>
+                <a:cs typeface="Calibri" pitchFamily="34" charset="-120"/>
+              </a:rPr>
+              <a:t>REMEDIATION</a:t>
+            </a:r>
+            <a:endParaRPr lang="en-US" sz="1400" dirty="0"/>
+          </a:p>
+        </p:txBody>
+      </p:sp>
+      <p:pic>
+        <p:nvPicPr>
+          <p:cNvPr id="3" name="Image 0" descr="/home/claude/f4/img/minesec_sheet.png">    </p:cNvPr>
+          <p:cNvPicPr>
+            <a:picLocks noChangeAspect="1"/>
+          </p:cNvPicPr>
+          <p:nvPr/>
+        </p:nvPicPr>
+        <p:blipFill>
+          <a:blip r:embed="rId1"/>
+          <a:stretch>
+            <a:fillRect/>
+          </a:stretch>
+        </p:blipFill>
+        <p:spPr>
+          <a:xfrm>
+            <a:off x="0" y="658368"/>
+            <a:ext cx="3840480" cy="5833872"/>
+          </a:xfrm>
+          <a:prstGeom prst="rect">
+            <a:avLst/>
+          </a:prstGeom>
+        </p:spPr>
+      </p:pic>
+      <p:sp>
+        <p:nvSpPr>
+          <p:cNvPr id="4" name="Text 1"/>
+          <p:cNvSpPr/>
+          <p:nvPr/>
+        </p:nvSpPr>
+        <p:spPr>
+          <a:xfrm>
+            <a:off x="4069080" y="1005840"/>
+            <a:ext cx="7802575" cy="731520"/>
+          </a:xfrm>
+          <a:prstGeom prst="rect">
+            <a:avLst/>
+          </a:prstGeom>
+          <a:noFill/>
+          <a:ln/>
+        </p:spPr>
+        <p:txBody>
+          <a:bodyPr wrap="square" lIns="0" tIns="0" rIns="0" bIns="0" rtlCol="0" anchor="ctr">
+            <a:normAutofit/>
+          </a:bodyPr>
+          <a:lstStyle/>
+          <a:p>
+            <a:pPr algn="ctr" indent="0" marL="0">
+              <a:buNone/>
+            </a:pPr>
+            <a:r>
+              <a:rPr lang="en-US" sz="3600" b="1" dirty="0">
+                <a:solidFill>
+                  <a:srgbClr val="990011"/>
+                </a:solidFill>
+                <a:latin typeface="Times New Roman" pitchFamily="34" charset="0"/>
+                <a:ea typeface="Times New Roman" pitchFamily="34" charset="-122"/>
+                <a:cs typeface="Times New Roman" pitchFamily="34" charset="-120"/>
+              </a:rPr>
+              <a:t>Remediation</a:t>
+            </a:r>
+            <a:endParaRPr lang="en-US" sz="3600" dirty="0"/>
+          </a:p>
+        </p:txBody>
+      </p:sp>
+      <p:sp>
+        <p:nvSpPr>
+          <p:cNvPr id="5" name="Text 2"/>
+          <p:cNvSpPr/>
+          <p:nvPr/>
+        </p:nvSpPr>
+        <p:spPr>
+          <a:xfrm>
+            <a:off x="4069080" y="1783080"/>
+            <a:ext cx="7802575" cy="4663440"/>
+          </a:xfrm>
+          <a:prstGeom prst="rect">
+            <a:avLst/>
+          </a:prstGeom>
+          <a:noFill/>
+          <a:ln/>
+        </p:spPr>
+        <p:txBody>
+          <a:bodyPr wrap="square" lIns="0" tIns="0" rIns="0" bIns="0" rtlCol="0" anchor="t"/>
+          <a:lstStyle/>
+          <a:p>
+            <a:pPr algn="l" indent="0" marL="0">
+              <a:spcAft>
+                <a:spcPts val="800"/>
+              </a:spcAft>
+              <a:buNone/>
+            </a:pPr>
+            <a:r>
+              <a:rPr lang="en-US" sz="4000" b="1" dirty="0">
+                <a:solidFill>
+                  <a:srgbClr val="111111"/>
+                </a:solidFill>
+                <a:latin typeface="Times New Roman" pitchFamily="34" charset="0"/>
+                <a:ea typeface="Times New Roman" pitchFamily="34" charset="-122"/>
+                <a:cs typeface="Times New Roman" pitchFamily="34" charset="-120"/>
+              </a:rPr>
+              <a:t>Fill in the blanks:</a:t>
+            </a:r>
+            <a:endParaRPr lang="en-US" sz="4000" dirty="0"/>
+          </a:p>
+          <a:p>
+            <a:pPr algn="l" marL="342900" indent="-342900">
+              <a:spcAft>
+                <a:spcPts val="800"/>
+              </a:spcAft>
+              <a:buSzPct val="100000"/>
+              <a:buFont typeface="+mj-lt"/>
+              <a:buAutoNum type="arabicPeriod" startAt="1"/>
+            </a:pPr>
+            <a:r>
+              <a:rPr lang="en-US" sz="4000" dirty="0">
+                <a:solidFill>
+                  <a:srgbClr val="111111"/>
+                </a:solidFill>
+                <a:latin typeface="Times New Roman" pitchFamily="34" charset="0"/>
+                <a:ea typeface="Times New Roman" pitchFamily="34" charset="-122"/>
+                <a:cs typeface="Times New Roman" pitchFamily="34" charset="-120"/>
+              </a:rPr>
+              <a:t>Molten rock below the surface is ______.</a:t>
+            </a:r>
+            <a:endParaRPr lang="en-US" sz="4000" dirty="0"/>
+          </a:p>
+          <a:p>
+            <a:pPr algn="l" marL="342900" indent="-342900">
+              <a:spcAft>
+                <a:spcPts val="800"/>
+              </a:spcAft>
+              <a:buSzPct val="100000"/>
+              <a:buFont typeface="+mj-lt"/>
+              <a:buAutoNum type="arabicPeriod" startAt="1"/>
+            </a:pPr>
+            <a:r>
+              <a:rPr lang="en-US" sz="4000" dirty="0">
+                <a:solidFill>
+                  <a:srgbClr val="111111"/>
+                </a:solidFill>
+                <a:latin typeface="Times New Roman" pitchFamily="34" charset="0"/>
+                <a:ea typeface="Times New Roman" pitchFamily="34" charset="-122"/>
+                <a:cs typeface="Times New Roman" pitchFamily="34" charset="-120"/>
+              </a:rPr>
+              <a:t>Kilimanjaro is a ______ volcano.</a:t>
+            </a:r>
+            <a:endParaRPr lang="en-US" sz="4000" dirty="0"/>
+          </a:p>
+          <a:p>
+            <a:pPr algn="l" marL="342900" indent="-342900">
+              <a:spcAft>
+                <a:spcPts val="800"/>
+              </a:spcAft>
+              <a:buSzPct val="100000"/>
+              <a:buFont typeface="+mj-lt"/>
+              <a:buAutoNum type="arabicPeriod" startAt="1"/>
+            </a:pPr>
+            <a:r>
+              <a:rPr lang="en-US" sz="4000" dirty="0">
+                <a:solidFill>
+                  <a:srgbClr val="111111"/>
+                </a:solidFill>
+                <a:latin typeface="Times New Roman" pitchFamily="34" charset="0"/>
+                <a:ea typeface="Times New Roman" pitchFamily="34" charset="-122"/>
+                <a:cs typeface="Times New Roman" pitchFamily="34" charset="-120"/>
+              </a:rPr>
+              <a:t>A very large collapsed crater is a ______.</a:t>
+            </a:r>
+            <a:endParaRPr lang="en-US" sz="4000" dirty="0"/>
+          </a:p>
+        </p:txBody>
+      </p:sp>
+      <p:sp>
+        <p:nvSpPr>
+          <p:cNvPr id="25" name="Slide Number Placeholder 0"/>
+          <p:cNvSpPr>
+            <a:spLocks noGrp="1"/>
+          </p:cNvSpPr>
+          <p:nvPr>
+            <p:ph type="sldNum" sz="quarter" idx="4294967295"/>
+          </p:nvPr>
+        </p:nvSpPr>
+        <p:spPr>
+          <a:xfrm>
+            <a:off x="27432" y="91440"/>
+            <a:ext cx="585216" cy="475488"/>
+          </a:xfrm>
+          <a:prstGeom prst="rect">
+            <a:avLst/>
+          </a:prstGeom>
+          <a:extLst>
+            <a:ext uri="{C572A759-6A51-4108-AA02-DFA0A04FC94B}">
+              <ma14:wrappingTextBoxFlag xmlns:ma14="http://schemas.microsoft.com/office/mac/drawingml/2011/main" val="0"/>
+            </a:ext>
+          </a:extLst>
+        </p:spPr>
+        <p:txBody>
+          <a:bodyPr/>
+          <a:lstStyle>
+            <a:lvl1pPr>
+              <a:defRPr sz="2000">
+                <a:solidFill>
+                  <a:srgbClr val="FFFFFF"/>
+                </a:solidFill>
+                <a:latin typeface="Calibri"/>
+                <a:ea typeface="Calibri"/>
+                <a:cs typeface="Calibri"/>
+              </a:defRPr>
+            </a:lvl1pPr>
+          </a:lstStyle>
+          <a:p>
+            <a:pPr algn="ctr"/>
+            <a:fld id="{F7021451-1387-4CA6-816F-3879F97B5CBC}" type="slidenum">
+              <a:rPr b="1" lang="en-US"/>
+              <a:t>54</a:t>
+            </a:fld>
+            <a:endParaRPr lang="en-US"/>
+          </a:p>
+        </p:txBody>
+      </p:sp>
+    </p:spTree>
+  </p:cSld>
+  <p:clrMapOvr>
+    <a:masterClrMapping/>
+  </p:clrMapOvr>
+</p:sld>
+</file>
+
+<file path=ppt/slides/slide55.xml><?xml version="1.0" encoding="utf-8"?>
+<p:sld xmlns:a="http://schemas.openxmlformats.org/drawingml/2006/main" xmlns:r="http://schemas.openxmlformats.org/officeDocument/2006/relationships" xmlns:p="http://schemas.openxmlformats.org/presentationml/2006/main">
+  <p:cSld name="Slide 55">
+    <p:spTree>
+      <p:nvGrpSpPr>
+        <p:cNvPr id="1" name=""/>
+        <p:cNvGrpSpPr/>
+        <p:nvPr/>
+      </p:nvGrpSpPr>
+      <p:grpSpPr>
+        <a:xfrm>
+          <a:off x="0" y="0"/>
+          <a:ext cx="0" cy="0"/>
+          <a:chOff x="0" y="0"/>
+          <a:chExt cx="0" cy="0"/>
+        </a:xfrm>
+      </p:grpSpPr>
+      <p:sp>
+        <p:nvSpPr>
+          <p:cNvPr id="2" name="Text 0"/>
+          <p:cNvSpPr/>
+          <p:nvPr/>
+        </p:nvSpPr>
+        <p:spPr>
+          <a:xfrm>
+            <a:off x="457200" y="713232"/>
+            <a:ext cx="11368735" cy="274320"/>
+          </a:xfrm>
+          <a:prstGeom prst="rect">
+            <a:avLst/>
+          </a:prstGeom>
+          <a:noFill/>
+          <a:ln/>
+        </p:spPr>
+        <p:txBody>
+          <a:bodyPr wrap="square" lIns="0" tIns="0" rIns="0" bIns="0" rtlCol="0" anchor="ctr"/>
+          <a:lstStyle/>
+          <a:p>
+            <a:pPr algn="r" indent="0" marL="0">
+              <a:buNone/>
+            </a:pPr>
+            <a:r>
+              <a:rPr lang="en-US" sz="1400" b="1" dirty="0">
+                <a:solidFill>
+                  <a:srgbClr val="1C3F6E"/>
+                </a:solidFill>
+                <a:latin typeface="Calibri" pitchFamily="34" charset="0"/>
+                <a:ea typeface="Calibri" pitchFamily="34" charset="-122"/>
+                <a:cs typeface="Calibri" pitchFamily="34" charset="-120"/>
+              </a:rPr>
+              <a:t>HOMEWORK</a:t>
+            </a:r>
+            <a:endParaRPr lang="en-US" sz="1400" dirty="0"/>
+          </a:p>
+        </p:txBody>
+      </p:sp>
+      <p:pic>
+        <p:nvPicPr>
+          <p:cNvPr id="3" name="Image 0" descr="/home/claude/f4/img/minesec_sheet.png">    </p:cNvPr>
+          <p:cNvPicPr>
+            <a:picLocks noChangeAspect="1"/>
+          </p:cNvPicPr>
+          <p:nvPr/>
+        </p:nvPicPr>
+        <p:blipFill>
+          <a:blip r:embed="rId1"/>
+          <a:stretch>
+            <a:fillRect/>
+          </a:stretch>
+        </p:blipFill>
+        <p:spPr>
+          <a:xfrm>
+            <a:off x="0" y="658368"/>
+            <a:ext cx="5120640" cy="5833872"/>
+          </a:xfrm>
+          <a:prstGeom prst="rect">
+            <a:avLst/>
+          </a:prstGeom>
+        </p:spPr>
+      </p:pic>
+      <p:sp>
+        <p:nvSpPr>
+          <p:cNvPr id="4" name="Text 1"/>
+          <p:cNvSpPr/>
+          <p:nvPr/>
+        </p:nvSpPr>
+        <p:spPr>
+          <a:xfrm>
+            <a:off x="5349240" y="1005840"/>
+            <a:ext cx="6522415" cy="731520"/>
+          </a:xfrm>
+          <a:prstGeom prst="rect">
+            <a:avLst/>
+          </a:prstGeom>
+          <a:noFill/>
+          <a:ln/>
+        </p:spPr>
+        <p:txBody>
+          <a:bodyPr wrap="square" lIns="0" tIns="0" rIns="0" bIns="0" rtlCol="0" anchor="ctr">
+            <a:normAutofit/>
+          </a:bodyPr>
+          <a:lstStyle/>
+          <a:p>
+            <a:pPr algn="ctr" indent="0" marL="0">
+              <a:buNone/>
+            </a:pPr>
+            <a:r>
+              <a:rPr lang="en-US" sz="3600" b="1" dirty="0">
+                <a:solidFill>
+                  <a:srgbClr val="990011"/>
+                </a:solidFill>
+                <a:latin typeface="Times New Roman" pitchFamily="34" charset="0"/>
+                <a:ea typeface="Times New Roman" pitchFamily="34" charset="-122"/>
+                <a:cs typeface="Times New Roman" pitchFamily="34" charset="-120"/>
+              </a:rPr>
+              <a:t>Homework</a:t>
+            </a:r>
+            <a:endParaRPr lang="en-US" sz="3600" dirty="0"/>
+          </a:p>
+        </p:txBody>
+      </p:sp>
+      <p:sp>
+        <p:nvSpPr>
+          <p:cNvPr id="5" name="Text 2"/>
+          <p:cNvSpPr/>
+          <p:nvPr/>
+        </p:nvSpPr>
+        <p:spPr>
+          <a:xfrm>
+            <a:off x="5349240" y="1783080"/>
+            <a:ext cx="6522415" cy="4663440"/>
+          </a:xfrm>
+          <a:prstGeom prst="rect">
+            <a:avLst/>
+          </a:prstGeom>
+          <a:noFill/>
+          <a:ln/>
+        </p:spPr>
+        <p:txBody>
+          <a:bodyPr wrap="square" lIns="0" tIns="0" rIns="0" bIns="0" rtlCol="0" anchor="t"/>
+          <a:lstStyle/>
+          <a:p>
+            <a:pPr algn="l" indent="0" marL="0">
+              <a:spcAft>
+                <a:spcPts val="800"/>
+              </a:spcAft>
+              <a:buNone/>
+            </a:pPr>
+            <a:r>
+              <a:rPr lang="en-US" sz="4000" dirty="0">
+                <a:solidFill>
+                  <a:srgbClr val="111111"/>
+                </a:solidFill>
+                <a:latin typeface="Times New Roman" pitchFamily="34" charset="0"/>
+                <a:ea typeface="Times New Roman" pitchFamily="34" charset="-122"/>
+                <a:cs typeface="Times New Roman" pitchFamily="34" charset="-120"/>
+              </a:rPr>
+              <a:t>Give one benefit of volcanoes to man.</a:t>
+            </a:r>
+            <a:endParaRPr lang="en-US" sz="4000" dirty="0"/>
+          </a:p>
+        </p:txBody>
+      </p:sp>
+      <p:sp>
+        <p:nvSpPr>
+          <p:cNvPr id="25" name="Slide Number Placeholder 0"/>
+          <p:cNvSpPr>
+            <a:spLocks noGrp="1"/>
+          </p:cNvSpPr>
+          <p:nvPr>
+            <p:ph type="sldNum" sz="quarter" idx="4294967295"/>
+          </p:nvPr>
+        </p:nvSpPr>
+        <p:spPr>
+          <a:xfrm>
+            <a:off x="27432" y="91440"/>
+            <a:ext cx="585216" cy="475488"/>
+          </a:xfrm>
+          <a:prstGeom prst="rect">
+            <a:avLst/>
+          </a:prstGeom>
+          <a:extLst>
+            <a:ext uri="{C572A759-6A51-4108-AA02-DFA0A04FC94B}">
+              <ma14:wrappingTextBoxFlag xmlns:ma14="http://schemas.microsoft.com/office/mac/drawingml/2011/main" val="0"/>
+            </a:ext>
+          </a:extLst>
+        </p:spPr>
+        <p:txBody>
+          <a:bodyPr/>
+          <a:lstStyle>
+            <a:lvl1pPr>
+              <a:defRPr sz="2000">
+                <a:solidFill>
+                  <a:srgbClr val="FFFFFF"/>
+                </a:solidFill>
+                <a:latin typeface="Calibri"/>
+                <a:ea typeface="Calibri"/>
+                <a:cs typeface="Calibri"/>
+              </a:defRPr>
+            </a:lvl1pPr>
+          </a:lstStyle>
+          <a:p>
+            <a:pPr algn="ctr"/>
+            <a:fld id="{F7021451-1387-4CA6-816F-3879F97B5CBC}" type="slidenum">
+              <a:rPr b="1" lang="en-US"/>
+              <a:t>55</a:t>
+            </a:fld>
+            <a:endParaRPr lang="en-US"/>
+          </a:p>
+        </p:txBody>
+      </p:sp>
+    </p:spTree>
+  </p:cSld>
+  <p:clrMapOvr>
+    <a:masterClrMapping/>
+  </p:clrMapOvr>
+</p:sld>
+</file>
+
+<file path=ppt/slides/slide56.xml><?xml version="1.0" encoding="utf-8"?>
+<p:sld xmlns:a="http://schemas.openxmlformats.org/drawingml/2006/main" xmlns:r="http://schemas.openxmlformats.org/officeDocument/2006/relationships" xmlns:p="http://schemas.openxmlformats.org/presentationml/2006/main">
+  <p:cSld name="Slide 56">
+    <p:spTree>
+      <p:nvGrpSpPr>
+        <p:cNvPr id="1" name=""/>
+        <p:cNvGrpSpPr/>
+        <p:nvPr/>
+      </p:nvGrpSpPr>
+      <p:grpSpPr>
+        <a:xfrm>
+          <a:off x="0" y="0"/>
+          <a:ext cx="0" cy="0"/>
+          <a:chOff x="0" y="0"/>
+          <a:chExt cx="0" cy="0"/>
+        </a:xfrm>
+      </p:grpSpPr>
+      <p:sp>
+        <p:nvSpPr>
+          <p:cNvPr id="2" name="Text 0"/>
+          <p:cNvSpPr/>
+          <p:nvPr/>
+        </p:nvSpPr>
+        <p:spPr>
+          <a:xfrm>
+            <a:off x="457200" y="713232"/>
+            <a:ext cx="11368735" cy="274320"/>
+          </a:xfrm>
+          <a:prstGeom prst="rect">
+            <a:avLst/>
+          </a:prstGeom>
+          <a:noFill/>
+          <a:ln/>
+        </p:spPr>
+        <p:txBody>
+          <a:bodyPr wrap="square" lIns="0" tIns="0" rIns="0" bIns="0" rtlCol="0" anchor="ctr"/>
+          <a:lstStyle/>
+          <a:p>
+            <a:pPr algn="r" indent="0" marL="0">
+              <a:buNone/>
+            </a:pPr>
+            <a:r>
+              <a:rPr lang="en-US" sz="1400" b="1" dirty="0">
+                <a:solidFill>
+                  <a:srgbClr val="1C3F6E"/>
+                </a:solidFill>
+                <a:latin typeface="Calibri" pitchFamily="34" charset="0"/>
+                <a:ea typeface="Calibri" pitchFamily="34" charset="-122"/>
+                <a:cs typeface="Calibri" pitchFamily="34" charset="-120"/>
+              </a:rPr>
+              <a:t>NEXT LESSON</a:t>
+            </a:r>
+            <a:endParaRPr lang="en-US" sz="1400" dirty="0"/>
+          </a:p>
+        </p:txBody>
+      </p:sp>
+      <p:pic>
+        <p:nvPicPr>
+          <p:cNvPr id="3" name="Image 0" descr="/home/claude/f4/img/minesec_sheet.png">    </p:cNvPr>
+          <p:cNvPicPr>
+            <a:picLocks noChangeAspect="1"/>
+          </p:cNvPicPr>
+          <p:nvPr/>
+        </p:nvPicPr>
+        <p:blipFill>
+          <a:blip r:embed="rId1"/>
+          <a:stretch>
+            <a:fillRect/>
+          </a:stretch>
+        </p:blipFill>
+        <p:spPr>
+          <a:xfrm>
+            <a:off x="0" y="658368"/>
+            <a:ext cx="5120640" cy="5833872"/>
+          </a:xfrm>
+          <a:prstGeom prst="rect">
+            <a:avLst/>
+          </a:prstGeom>
+        </p:spPr>
+      </p:pic>
+      <p:sp>
+        <p:nvSpPr>
+          <p:cNvPr id="4" name="Text 1"/>
+          <p:cNvSpPr/>
+          <p:nvPr/>
+        </p:nvSpPr>
+        <p:spPr>
+          <a:xfrm>
+            <a:off x="5349240" y="1005840"/>
+            <a:ext cx="6522415" cy="731520"/>
+          </a:xfrm>
+          <a:prstGeom prst="rect">
+            <a:avLst/>
+          </a:prstGeom>
+          <a:noFill/>
+          <a:ln/>
+        </p:spPr>
+        <p:txBody>
+          <a:bodyPr wrap="square" lIns="0" tIns="0" rIns="0" bIns="0" rtlCol="0" anchor="ctr">
+            <a:normAutofit/>
+          </a:bodyPr>
+          <a:lstStyle/>
+          <a:p>
+            <a:pPr algn="ctr" indent="0" marL="0">
+              <a:buNone/>
+            </a:pPr>
+            <a:r>
+              <a:rPr lang="en-US" sz="3600" b="1" dirty="0">
+                <a:solidFill>
+                  <a:srgbClr val="990011"/>
+                </a:solidFill>
+                <a:latin typeface="Times New Roman" pitchFamily="34" charset="0"/>
+                <a:ea typeface="Times New Roman" pitchFamily="34" charset="-122"/>
+                <a:cs typeface="Times New Roman" pitchFamily="34" charset="-120"/>
+              </a:rPr>
+              <a:t>Next Lesson</a:t>
+            </a:r>
+            <a:endParaRPr lang="en-US" sz="3600" dirty="0"/>
+          </a:p>
+        </p:txBody>
+      </p:sp>
+      <p:sp>
+        <p:nvSpPr>
+          <p:cNvPr id="5" name="Text 2"/>
+          <p:cNvSpPr/>
+          <p:nvPr/>
+        </p:nvSpPr>
+        <p:spPr>
+          <a:xfrm>
+            <a:off x="5349240" y="1783080"/>
+            <a:ext cx="6522415" cy="4663440"/>
+          </a:xfrm>
+          <a:prstGeom prst="rect">
+            <a:avLst/>
+          </a:prstGeom>
+          <a:noFill/>
+          <a:ln/>
+        </p:spPr>
+        <p:txBody>
+          <a:bodyPr wrap="square" lIns="0" tIns="0" rIns="0" bIns="0" rtlCol="0" anchor="ctr"/>
+          <a:lstStyle/>
+          <a:p>
+            <a:pPr algn="ctr" indent="0" marL="0">
+              <a:spcAft>
+                <a:spcPts val="800"/>
+              </a:spcAft>
+              <a:buNone/>
+            </a:pPr>
+            <a:r>
+              <a:rPr lang="en-US" sz="4000" b="1" dirty="0">
+                <a:solidFill>
+                  <a:srgbClr val="111111"/>
+                </a:solidFill>
+                <a:latin typeface="Times New Roman" pitchFamily="34" charset="0"/>
+                <a:ea typeface="Times New Roman" pitchFamily="34" charset="-122"/>
+                <a:cs typeface="Times New Roman" pitchFamily="34" charset="-120"/>
+              </a:rPr>
+              <a:t>Our next lesson will be on:</a:t>
+            </a:r>
+            <a:endParaRPr lang="en-US" sz="4000" dirty="0"/>
+          </a:p>
+          <a:p>
+            <a:pPr algn="ctr" indent="0" marL="0">
+              <a:spcAft>
+                <a:spcPts val="800"/>
+              </a:spcAft>
+              <a:buNone/>
+            </a:pPr>
+            <a:r>
+              <a:rPr lang="en-US" sz="4000" b="1" dirty="0">
+                <a:solidFill>
+                  <a:srgbClr val="990011"/>
+                </a:solidFill>
+                <a:latin typeface="Times New Roman" pitchFamily="34" charset="0"/>
+                <a:ea typeface="Times New Roman" pitchFamily="34" charset="-122"/>
+                <a:cs typeface="Times New Roman" pitchFamily="34" charset="-120"/>
+              </a:rPr>
+              <a:t>Lesson 7: Volcanoes and Man</a:t>
+            </a:r>
+            <a:endParaRPr lang="en-US" sz="4000" dirty="0"/>
+          </a:p>
+        </p:txBody>
+      </p:sp>
+      <p:sp>
+        <p:nvSpPr>
+          <p:cNvPr id="25" name="Slide Number Placeholder 0"/>
+          <p:cNvSpPr>
+            <a:spLocks noGrp="1"/>
+          </p:cNvSpPr>
+          <p:nvPr>
+            <p:ph type="sldNum" sz="quarter" idx="4294967295"/>
+          </p:nvPr>
+        </p:nvSpPr>
+        <p:spPr>
+          <a:xfrm>
+            <a:off x="27432" y="91440"/>
+            <a:ext cx="585216" cy="475488"/>
+          </a:xfrm>
+          <a:prstGeom prst="rect">
+            <a:avLst/>
+          </a:prstGeom>
+          <a:extLst>
+            <a:ext uri="{C572A759-6A51-4108-AA02-DFA0A04FC94B}">
+              <ma14:wrappingTextBoxFlag xmlns:ma14="http://schemas.microsoft.com/office/mac/drawingml/2011/main" val="0"/>
+            </a:ext>
+          </a:extLst>
+        </p:spPr>
+        <p:txBody>
+          <a:bodyPr/>
+          <a:lstStyle>
+            <a:lvl1pPr>
+              <a:defRPr sz="2000">
+                <a:solidFill>
+                  <a:srgbClr val="FFFFFF"/>
+                </a:solidFill>
+                <a:latin typeface="Calibri"/>
+                <a:ea typeface="Calibri"/>
+                <a:cs typeface="Calibri"/>
+              </a:defRPr>
+            </a:lvl1pPr>
+          </a:lstStyle>
+          <a:p>
+            <a:pPr algn="ctr"/>
+            <a:fld id="{F7021451-1387-4CA6-816F-3879F97B5CBC}" type="slidenum">
+              <a:rPr b="1" lang="en-US"/>
+              <a:t>56</a:t>
+            </a:fld>
+            <a:endParaRPr lang="en-US"/>
+          </a:p>
+        </p:txBody>
+      </p:sp>
+    </p:spTree>
+  </p:cSld>
+  <p:clrMapOvr>
+    <a:masterClrMapping/>
+  </p:clrMapOvr>
+</p:sld>
+</file>
+
+<file path=ppt/slides/slide57.xml><?xml version="1.0" encoding="utf-8"?>
+<p:sld xmlns:a="http://schemas.openxmlformats.org/drawingml/2006/main" xmlns:r="http://schemas.openxmlformats.org/officeDocument/2006/relationships" xmlns:p="http://schemas.openxmlformats.org/presentationml/2006/main">
+  <p:cSld name="Slide 57">
+    <p:spTree>
+      <p:nvGrpSpPr>
+        <p:cNvPr id="1" name=""/>
+        <p:cNvGrpSpPr/>
+        <p:nvPr/>
+      </p:nvGrpSpPr>
+      <p:grpSpPr>
+        <a:xfrm>
+          <a:off x="0" y="0"/>
+          <a:ext cx="0" cy="0"/>
+          <a:chOff x="0" y="0"/>
+          <a:chExt cx="0" cy="0"/>
+        </a:xfrm>
+      </p:grpSpPr>
+      <p:sp>
+        <p:nvSpPr>
+          <p:cNvPr id="2" name="Text 0"/>
+          <p:cNvSpPr/>
+          <p:nvPr/>
+        </p:nvSpPr>
+        <p:spPr>
+          <a:xfrm>
+            <a:off x="457200" y="713232"/>
+            <a:ext cx="11368735" cy="274320"/>
+          </a:xfrm>
+          <a:prstGeom prst="rect">
+            <a:avLst/>
+          </a:prstGeom>
+          <a:noFill/>
+          <a:ln/>
+        </p:spPr>
+        <p:txBody>
+          <a:bodyPr wrap="square" lIns="0" tIns="0" rIns="0" bIns="0" rtlCol="0" anchor="ctr"/>
+          <a:lstStyle/>
+          <a:p>
+            <a:pPr algn="r" indent="0" marL="0">
+              <a:buNone/>
+            </a:pPr>
+            <a:r>
+              <a:rPr lang="en-US" sz="1400" b="1" dirty="0">
+                <a:solidFill>
+                  <a:srgbClr val="1C3F6E"/>
+                </a:solidFill>
+                <a:latin typeface="Calibri" pitchFamily="34" charset="0"/>
+                <a:ea typeface="Calibri" pitchFamily="34" charset="-122"/>
+                <a:cs typeface="Calibri" pitchFamily="34" charset="-120"/>
+              </a:rPr>
+              <a:t>BILINGUAL GAME</a:t>
+            </a:r>
+            <a:endParaRPr lang="en-US" sz="1400" dirty="0"/>
+          </a:p>
+        </p:txBody>
+      </p:sp>
+      <p:sp>
+        <p:nvSpPr>
+          <p:cNvPr id="3" name="Text 1"/>
+          <p:cNvSpPr/>
+          <p:nvPr/>
+        </p:nvSpPr>
+        <p:spPr>
+          <a:xfrm>
+            <a:off x="457200" y="1005840"/>
+            <a:ext cx="11277295" cy="731520"/>
+          </a:xfrm>
+          <a:prstGeom prst="rect">
+            <a:avLst/>
+          </a:prstGeom>
+          <a:noFill/>
+          <a:ln/>
+        </p:spPr>
+        <p:txBody>
+          <a:bodyPr wrap="square" lIns="0" tIns="0" rIns="0" bIns="0" rtlCol="0" anchor="ctr"/>
+          <a:lstStyle/>
+          <a:p>
+            <a:pPr algn="ctr" indent="0" marL="0">
+              <a:buNone/>
+            </a:pPr>
+            <a:r>
+              <a:rPr lang="en-US" sz="3600" b="1" dirty="0">
+                <a:solidFill>
+                  <a:srgbClr val="990011"/>
+                </a:solidFill>
+                <a:latin typeface="Times New Roman" pitchFamily="34" charset="0"/>
+                <a:ea typeface="Times New Roman" pitchFamily="34" charset="-122"/>
+                <a:cs typeface="Times New Roman" pitchFamily="34" charset="-120"/>
+              </a:rPr>
               <a:t>Bilingual Game (Jeu Bilingue)</a:t>
             </a:r>
             <a:endParaRPr lang="en-US" sz="3600" dirty="0"/>
@@ -18862,7 +20876,7 @@
       </p:sp>
       <p:graphicFrame>
         <p:nvGraphicFramePr>
-          <p:cNvPr id="54" name="Table 0"/>
+          <p:cNvPr id="58" name="Table 0"/>
           <p:cNvGraphicFramePr>
             <a:graphicFrameLocks noGrp="1"/>
           </p:cNvGraphicFramePr>
@@ -19456,7 +21470,7 @@
                           <a:ea typeface="Calibri" pitchFamily="34" charset="-122"/>
                           <a:cs typeface="Calibri" pitchFamily="34" charset="-120"/>
                         </a:rPr>
-                        <a:t>Crater</a:t>
+                        <a:t>Eruption</a:t>
                       </a:r>
                       <a:endParaRPr lang="en-US" sz="2200" dirty="0">
                         <a:latin typeface="Calibri" charset="0"/>
@@ -19524,7 +21538,7 @@
                           <a:ea typeface="Calibri" pitchFamily="34" charset="-122"/>
                           <a:cs typeface="Calibri" pitchFamily="34" charset="-120"/>
                         </a:rPr>
-                        <a:t>Le cratère</a:t>
+                        <a:t>L'éruption</a:t>
                       </a:r>
                       <a:endParaRPr lang="en-US" sz="2200" dirty="0">
                         <a:latin typeface="Calibri" charset="0"/>
@@ -19594,7 +21608,7 @@
                           <a:ea typeface="Calibri" pitchFamily="34" charset="-122"/>
                           <a:cs typeface="Calibri" pitchFamily="34" charset="-120"/>
                         </a:rPr>
-                        <a:t>Caldera</a:t>
+                        <a:t>Crater</a:t>
                       </a:r>
                       <a:endParaRPr lang="en-US" sz="2200" dirty="0">
                         <a:latin typeface="Calibri" charset="0"/>
@@ -19662,7 +21676,7 @@
                           <a:ea typeface="Calibri" pitchFamily="34" charset="-122"/>
                           <a:cs typeface="Calibri" pitchFamily="34" charset="-120"/>
                         </a:rPr>
-                        <a:t>La caldeira</a:t>
+                        <a:t>Le cratère</a:t>
                       </a:r>
                       <a:endParaRPr lang="en-US" sz="2200" dirty="0">
                         <a:latin typeface="Calibri" charset="0"/>
@@ -19732,7 +21746,7 @@
                           <a:ea typeface="Calibri" pitchFamily="34" charset="-122"/>
                           <a:cs typeface="Calibri" pitchFamily="34" charset="-120"/>
                         </a:rPr>
-                        <a:t>Cone</a:t>
+                        <a:t>Extinct volcano</a:t>
                       </a:r>
                       <a:endParaRPr lang="en-US" sz="2200" dirty="0">
                         <a:latin typeface="Calibri" charset="0"/>
@@ -19800,7 +21814,7 @@
                           <a:ea typeface="Calibri" pitchFamily="34" charset="-122"/>
                           <a:cs typeface="Calibri" pitchFamily="34" charset="-120"/>
                         </a:rPr>
-                        <a:t>Le cône</a:t>
+                        <a:t>Le volcan éteint</a:t>
                       </a:r>
                       <a:endParaRPr lang="en-US" sz="2200" dirty="0">
                         <a:latin typeface="Calibri" charset="0"/>
@@ -19898,7 +21912,7 @@
             <a:pPr algn="ctr"/>
             <a:fld id="{F7021451-1387-4CA6-816F-3879F97B5CBC}" type="slidenum">
               <a:rPr b="1" lang="en-US"/>
-              <a:t>53</a:t>
+              <a:t>57</a:t>
             </a:fld>
             <a:endParaRPr lang="en-US"/>
           </a:p>
@@ -19912,9 +21926,9 @@
 </p:sld>
 </file>
 
-<file path=ppt/slides/slide54.xml><?xml version="1.0" encoding="utf-8"?>
+<file path=ppt/slides/slide58.xml><?xml version="1.0" encoding="utf-8"?>
 <p:sld xmlns:a="http://schemas.openxmlformats.org/drawingml/2006/main" xmlns:r="http://schemas.openxmlformats.org/officeDocument/2006/relationships" xmlns:p="http://schemas.openxmlformats.org/presentationml/2006/main">
-  <p:cSld name="Slide 54">
+  <p:cSld name="Slide 58">
     <p:spTree>
       <p:nvGrpSpPr>
         <p:cNvPr id="1" name=""/>
@@ -20009,7 +22023,7 @@
       </p:sp>
       <p:graphicFrame>
         <p:nvGraphicFramePr>
-          <p:cNvPr id="55" name="Table 0"/>
+          <p:cNvPr id="59" name="Table 0"/>
           <p:cNvGraphicFramePr>
             <a:graphicFrameLocks noGrp="1"/>
           </p:cNvGraphicFramePr>
@@ -20395,7 +22409,7 @@
                           <a:ea typeface="Calibri" pitchFamily="34" charset="-122"/>
                           <a:cs typeface="Calibri" pitchFamily="34" charset="-120"/>
                         </a:rPr>
-                        <a:t>Explain the process of volcanism. Describe the products of volcanoes. Explain the different types of volcanic cones and depressions.</a:t>
+                        <a:t>Define volcanism, magma and lava. Distinguish active, dormant and extinct volcanoes. Describe the products of an eruption. Explain the formation of volcanic cones and other landforms.</a:t>
                       </a:r>
                       <a:endParaRPr lang="en-US" sz="1600" dirty="0">
                         <a:latin typeface="Calibri" charset="0"/>
@@ -20533,7 +22547,7 @@
                           <a:ea typeface="Calibri" pitchFamily="34" charset="-122"/>
                           <a:cs typeface="Calibri" pitchFamily="34" charset="-120"/>
                         </a:rPr>
-                        <a:t>Learners are able to identify volcanic landforms and explain why they differ.</a:t>
+                        <a:t>Learners are able to classify volcanoes and explain the landforms built by different volcanic materials, with Cameroonian examples.</a:t>
                       </a:r>
                       <a:endParaRPr lang="en-US" sz="1600" dirty="0">
                         <a:latin typeface="Calibri" charset="0"/>
@@ -20631,7 +22645,7 @@
             <a:pPr algn="ctr"/>
             <a:fld id="{F7021451-1387-4CA6-816F-3879F97B5CBC}" type="slidenum">
               <a:rPr b="1" lang="en-US"/>
-              <a:t>54</a:t>
+              <a:t>58</a:t>
             </a:fld>
             <a:endParaRPr lang="en-US"/>
           </a:p>
@@ -20645,9 +22659,9 @@
 </p:sld>
 </file>
 
-<file path=ppt/slides/slide55.xml><?xml version="1.0" encoding="utf-8"?>
+<file path=ppt/slides/slide59.xml><?xml version="1.0" encoding="utf-8"?>
 <p:sld xmlns:a="http://schemas.openxmlformats.org/drawingml/2006/main" xmlns:r="http://schemas.openxmlformats.org/officeDocument/2006/relationships" xmlns:p="http://schemas.openxmlformats.org/presentationml/2006/main">
-  <p:cSld name="Slide 55">
+  <p:cSld name="Slide 59">
     <p:spTree>
       <p:nvGrpSpPr>
         <p:cNvPr id="1" name=""/>
@@ -20742,7 +22756,7 @@
       </p:sp>
       <p:graphicFrame>
         <p:nvGraphicFramePr>
-          <p:cNvPr id="56" name="Table 0"/>
+          <p:cNvPr id="60" name="Table 0"/>
           <p:cNvGraphicFramePr>
             <a:graphicFrameLocks noGrp="1"/>
           </p:cNvGraphicFramePr>
@@ -20852,7 +22866,7 @@
                           <a:ea typeface="Calibri" pitchFamily="34" charset="-122"/>
                           <a:cs typeface="Calibri" pitchFamily="34" charset="-120"/>
                         </a:rPr>
-                        <a:t>Meaning, Process and Cycle; Products of Volcanoes; Volcanic Landforms; Plateaux and Depressions.</a:t>
+                        <a:t>DEFINITIONS; The Life Cycle of a Volcano; Products of a Volcanic Eruption; Volcanic Cones; Other Volcanic Landforms.</a:t>
                       </a:r>
                       <a:endParaRPr lang="en-US" sz="1600" dirty="0">
                         <a:latin typeface="Calibri" charset="0"/>
@@ -21128,7 +23142,7 @@
                           <a:ea typeface="Calibri" pitchFamily="34" charset="-122"/>
                           <a:cs typeface="Calibri" pitchFamily="34" charset="-120"/>
                         </a:rPr>
-                        <a:t>Ask an adult what people grow around Buea and Limbe, and why the soils are good.</a:t>
+                        <a:t>Give one benefit of volcanoes to man.</a:t>
                       </a:r>
                       <a:endParaRPr lang="en-US" sz="1600" dirty="0">
                         <a:latin typeface="Calibri" charset="0"/>
@@ -21502,657 +23516,7 @@
             <a:pPr algn="ctr"/>
             <a:fld id="{F7021451-1387-4CA6-816F-3879F97B5CBC}" type="slidenum">
               <a:rPr b="1" lang="en-US"/>
-              <a:t>55</a:t>
-            </a:fld>
-            <a:endParaRPr lang="en-US"/>
-          </a:p>
-        </p:txBody>
-      </p:sp>
-    </p:spTree>
-  </p:cSld>
-  <p:clrMapOvr>
-    <a:masterClrMapping/>
-  </p:clrMapOvr>
-</p:sld>
-</file>
-
-<file path=ppt/slides/slide56.xml><?xml version="1.0" encoding="utf-8"?>
-<p:sld xmlns:a="http://schemas.openxmlformats.org/drawingml/2006/main" xmlns:r="http://schemas.openxmlformats.org/officeDocument/2006/relationships" xmlns:p="http://schemas.openxmlformats.org/presentationml/2006/main">
-  <p:cSld name="Slide 56">
-    <p:spTree>
-      <p:nvGrpSpPr>
-        <p:cNvPr id="1" name=""/>
-        <p:cNvGrpSpPr/>
-        <p:nvPr/>
-      </p:nvGrpSpPr>
-      <p:grpSpPr>
-        <a:xfrm>
-          <a:off x="0" y="0"/>
-          <a:ext cx="0" cy="0"/>
-          <a:chOff x="0" y="0"/>
-          <a:chExt cx="0" cy="0"/>
-        </a:xfrm>
-      </p:grpSpPr>
-      <p:sp>
-        <p:nvSpPr>
-          <p:cNvPr id="2" name="Text 0"/>
-          <p:cNvSpPr/>
-          <p:nvPr/>
-        </p:nvSpPr>
-        <p:spPr>
-          <a:xfrm>
-            <a:off x="457200" y="713232"/>
-            <a:ext cx="11368735" cy="274320"/>
-          </a:xfrm>
-          <a:prstGeom prst="rect">
-            <a:avLst/>
-          </a:prstGeom>
-          <a:noFill/>
-          <a:ln/>
-        </p:spPr>
-        <p:txBody>
-          <a:bodyPr wrap="square" lIns="0" tIns="0" rIns="0" bIns="0" rtlCol="0" anchor="ctr"/>
-          <a:lstStyle/>
-          <a:p>
-            <a:pPr algn="r" indent="0" marL="0">
-              <a:buNone/>
-            </a:pPr>
-            <a:r>
-              <a:rPr lang="en-US" sz="1400" b="1" dirty="0">
-                <a:solidFill>
-                  <a:srgbClr val="1C3F6E"/>
-                </a:solidFill>
-                <a:latin typeface="Calibri" pitchFamily="34" charset="0"/>
-                <a:ea typeface="Calibri" pitchFamily="34" charset="-122"/>
-                <a:cs typeface="Calibri" pitchFamily="34" charset="-120"/>
-              </a:rPr>
-              <a:t>TEACHER'S NOTE</a:t>
-            </a:r>
-            <a:endParaRPr lang="en-US" sz="1400" dirty="0"/>
-          </a:p>
-        </p:txBody>
-      </p:sp>
-      <p:pic>
-        <p:nvPicPr>
-          <p:cNvPr id="3" name="Image 0" descr="/home/claude/f4/img/minesec_sheet.png">    </p:cNvPr>
-          <p:cNvPicPr>
-            <a:picLocks noChangeAspect="1"/>
-          </p:cNvPicPr>
-          <p:nvPr/>
-        </p:nvPicPr>
-        <p:blipFill>
-          <a:blip r:embed="rId1"/>
-          <a:stretch>
-            <a:fillRect/>
-          </a:stretch>
-        </p:blipFill>
-        <p:spPr>
-          <a:xfrm>
-            <a:off x="0" y="658368"/>
-            <a:ext cx="2468880" cy="5833872"/>
-          </a:xfrm>
-          <a:prstGeom prst="rect">
-            <a:avLst/>
-          </a:prstGeom>
-        </p:spPr>
-      </p:pic>
-      <p:sp>
-        <p:nvSpPr>
-          <p:cNvPr id="4" name="Text 1"/>
-          <p:cNvSpPr/>
-          <p:nvPr/>
-        </p:nvSpPr>
-        <p:spPr>
-          <a:xfrm>
-            <a:off x="2697480" y="1005840"/>
-            <a:ext cx="9174175" cy="731520"/>
-          </a:xfrm>
-          <a:prstGeom prst="rect">
-            <a:avLst/>
-          </a:prstGeom>
-          <a:noFill/>
-          <a:ln/>
-        </p:spPr>
-        <p:txBody>
-          <a:bodyPr wrap="square" lIns="0" tIns="0" rIns="0" bIns="0" rtlCol="0" anchor="ctr">
-            <a:normAutofit/>
-          </a:bodyPr>
-          <a:lstStyle/>
-          <a:p>
-            <a:pPr algn="ctr" indent="0" marL="0">
-              <a:buNone/>
-            </a:pPr>
-            <a:r>
-              <a:rPr lang="en-US" sz="3600" b="1" dirty="0">
-                <a:solidFill>
-                  <a:srgbClr val="990011"/>
-                </a:solidFill>
-                <a:latin typeface="Times New Roman" pitchFamily="34" charset="0"/>
-                <a:ea typeface="Times New Roman" pitchFamily="34" charset="-122"/>
-                <a:cs typeface="Times New Roman" pitchFamily="34" charset="-120"/>
-              </a:rPr>
-              <a:t>Teacher's Note</a:t>
-            </a:r>
-            <a:endParaRPr lang="en-US" sz="3600" dirty="0"/>
-          </a:p>
-        </p:txBody>
-      </p:sp>
-      <p:sp>
-        <p:nvSpPr>
-          <p:cNvPr id="5" name="Text 2"/>
-          <p:cNvSpPr/>
-          <p:nvPr/>
-        </p:nvSpPr>
-        <p:spPr>
-          <a:xfrm>
-            <a:off x="2697480" y="1783080"/>
-            <a:ext cx="9174175" cy="4663440"/>
-          </a:xfrm>
-          <a:prstGeom prst="rect">
-            <a:avLst/>
-          </a:prstGeom>
-          <a:noFill/>
-          <a:ln/>
-        </p:spPr>
-        <p:txBody>
-          <a:bodyPr wrap="square" lIns="0" tIns="0" rIns="0" bIns="0" rtlCol="0" anchor="t"/>
-          <a:lstStyle/>
-          <a:p>
-            <a:pPr algn="l" marL="342900" indent="-342900">
-              <a:spcAft>
-                <a:spcPts val="800"/>
-              </a:spcAft>
-              <a:buSzPct val="100000"/>
-              <a:buChar char="•"/>
-            </a:pPr>
-            <a:r>
-              <a:rPr lang="en-US" sz="2000" dirty="0">
-                <a:solidFill>
-                  <a:srgbClr val="111111"/>
-                </a:solidFill>
-                <a:latin typeface="Calibri" pitchFamily="34" charset="0"/>
-                <a:ea typeface="Calibri" pitchFamily="34" charset="-122"/>
-                <a:cs typeface="Calibri" pitchFamily="34" charset="-120"/>
-              </a:rPr>
-              <a:t>Timing: Homework correction, plan, objectives 8 min | Recall, situation, action 10 min | 5 activities 30 min | Board summary (copying) 30 min | Evaluation, remediation 10 min | Homework, next lesson 5 min | Logbook 7 min</a:t>
-            </a:r>
-            <a:endParaRPr lang="en-US" sz="2000" dirty="0"/>
-          </a:p>
-          <a:p>
-            <a:pPr algn="l" marL="342900" indent="-342900">
-              <a:spcAft>
-                <a:spcPts val="800"/>
-              </a:spcAft>
-              <a:buSzPct val="100000"/>
-              <a:buChar char="•"/>
-            </a:pPr>
-            <a:r>
-              <a:rPr lang="en-US" sz="2000" dirty="0">
-                <a:solidFill>
-                  <a:srgbClr val="111111"/>
-                </a:solidFill>
-                <a:latin typeface="Calibri" pitchFamily="34" charset="0"/>
-                <a:ea typeface="Calibri" pitchFamily="34" charset="-122"/>
-                <a:cs typeface="Calibri" pitchFamily="34" charset="-120"/>
-              </a:rPr>
-              <a:t>Without the projector (Activity 1): draw a volcano and mark magma and lava.</a:t>
-            </a:r>
-            <a:endParaRPr lang="en-US" sz="2000" dirty="0"/>
-          </a:p>
-          <a:p>
-            <a:pPr algn="l" marL="342900" indent="-342900">
-              <a:spcAft>
-                <a:spcPts val="800"/>
-              </a:spcAft>
-              <a:buSzPct val="100000"/>
-              <a:buChar char="•"/>
-            </a:pPr>
-            <a:r>
-              <a:rPr lang="en-US" sz="2000" dirty="0">
-                <a:solidFill>
-                  <a:srgbClr val="111111"/>
-                </a:solidFill>
-                <a:latin typeface="Calibri" pitchFamily="34" charset="0"/>
-                <a:ea typeface="Calibri" pitchFamily="34" charset="-122"/>
-                <a:cs typeface="Calibri" pitchFamily="34" charset="-120"/>
-              </a:rPr>
-              <a:t>Without the projector (Activity 2): list solid, liquid and gas products.</a:t>
-            </a:r>
-            <a:endParaRPr lang="en-US" sz="2000" dirty="0"/>
-          </a:p>
-          <a:p>
-            <a:pPr algn="l" marL="342900" indent="-342900">
-              <a:spcAft>
-                <a:spcPts val="800"/>
-              </a:spcAft>
-              <a:buSzPct val="100000"/>
-              <a:buChar char="•"/>
-            </a:pPr>
-            <a:r>
-              <a:rPr lang="en-US" sz="2000" dirty="0">
-                <a:solidFill>
-                  <a:srgbClr val="111111"/>
-                </a:solidFill>
-                <a:latin typeface="Calibri" pitchFamily="34" charset="0"/>
-                <a:ea typeface="Calibri" pitchFamily="34" charset="-122"/>
-                <a:cs typeface="Calibri" pitchFamily="34" charset="-120"/>
-              </a:rPr>
-              <a:t>Without the projector (Activity 3): draw alternating layers of ash and lava.</a:t>
-            </a:r>
-            <a:endParaRPr lang="en-US" sz="2000" dirty="0"/>
-          </a:p>
-          <a:p>
-            <a:pPr algn="l" marL="342900" indent="-342900">
-              <a:spcAft>
-                <a:spcPts val="800"/>
-              </a:spcAft>
-              <a:buSzPct val="100000"/>
-              <a:buChar char="•"/>
-            </a:pPr>
-            <a:r>
-              <a:rPr lang="en-US" sz="2000" dirty="0">
-                <a:solidFill>
-                  <a:srgbClr val="111111"/>
-                </a:solidFill>
-                <a:latin typeface="Calibri" pitchFamily="34" charset="0"/>
-                <a:ea typeface="Calibri" pitchFamily="34" charset="-122"/>
-                <a:cs typeface="Calibri" pitchFamily="34" charset="-120"/>
-              </a:rPr>
-              <a:t>Without the projector (Activity 4): mention crater lakes of Cameroon (Barombi Mbo, Nyos).</a:t>
-            </a:r>
-            <a:endParaRPr lang="en-US" sz="2000" dirty="0"/>
-          </a:p>
-          <a:p>
-            <a:pPr algn="l" marL="342900" indent="-342900">
-              <a:spcAft>
-                <a:spcPts val="800"/>
-              </a:spcAft>
-              <a:buSzPct val="100000"/>
-              <a:buChar char="•"/>
-            </a:pPr>
-            <a:r>
-              <a:rPr lang="en-US" sz="2000" dirty="0">
-                <a:solidFill>
-                  <a:srgbClr val="111111"/>
-                </a:solidFill>
-                <a:latin typeface="Calibri" pitchFamily="34" charset="0"/>
-                <a:ea typeface="Calibri" pitchFamily="34" charset="-122"/>
-                <a:cs typeface="Calibri" pitchFamily="34" charset="-120"/>
-              </a:rPr>
-              <a:t>Without the projector (Activity 5): mention the basalt plateaux of the Western Highlands.</a:t>
-            </a:r>
-            <a:endParaRPr lang="en-US" sz="2000" dirty="0"/>
-          </a:p>
-        </p:txBody>
-      </p:sp>
-      <p:sp>
-        <p:nvSpPr>
-          <p:cNvPr id="25" name="Slide Number Placeholder 0"/>
-          <p:cNvSpPr>
-            <a:spLocks noGrp="1"/>
-          </p:cNvSpPr>
-          <p:nvPr>
-            <p:ph type="sldNum" sz="quarter" idx="4294967295"/>
-          </p:nvPr>
-        </p:nvSpPr>
-        <p:spPr>
-          <a:xfrm>
-            <a:off x="27432" y="91440"/>
-            <a:ext cx="585216" cy="475488"/>
-          </a:xfrm>
-          <a:prstGeom prst="rect">
-            <a:avLst/>
-          </a:prstGeom>
-          <a:extLst>
-            <a:ext uri="{C572A759-6A51-4108-AA02-DFA0A04FC94B}">
-              <ma14:wrappingTextBoxFlag xmlns:ma14="http://schemas.microsoft.com/office/mac/drawingml/2011/main" val="0"/>
-            </a:ext>
-          </a:extLst>
-        </p:spPr>
-        <p:txBody>
-          <a:bodyPr/>
-          <a:lstStyle>
-            <a:lvl1pPr>
-              <a:defRPr sz="2000">
-                <a:solidFill>
-                  <a:srgbClr val="FFFFFF"/>
-                </a:solidFill>
-                <a:latin typeface="Calibri"/>
-                <a:ea typeface="Calibri"/>
-                <a:cs typeface="Calibri"/>
-              </a:defRPr>
-            </a:lvl1pPr>
-          </a:lstStyle>
-          <a:p>
-            <a:pPr algn="ctr"/>
-            <a:fld id="{F7021451-1387-4CA6-816F-3879F97B5CBC}" type="slidenum">
-              <a:rPr b="1" lang="en-US"/>
-              <a:t>56</a:t>
-            </a:fld>
-            <a:endParaRPr lang="en-US"/>
-          </a:p>
-        </p:txBody>
-      </p:sp>
-    </p:spTree>
-  </p:cSld>
-  <p:clrMapOvr>
-    <a:masterClrMapping/>
-  </p:clrMapOvr>
-</p:sld>
-</file>
-
-<file path=ppt/slides/slide57.xml><?xml version="1.0" encoding="utf-8"?>
-<p:sld xmlns:a="http://schemas.openxmlformats.org/drawingml/2006/main" xmlns:r="http://schemas.openxmlformats.org/officeDocument/2006/relationships" xmlns:p="http://schemas.openxmlformats.org/presentationml/2006/main">
-  <p:cSld name="Slide 57">
-    <p:spTree>
-      <p:nvGrpSpPr>
-        <p:cNvPr id="1" name=""/>
-        <p:cNvGrpSpPr/>
-        <p:nvPr/>
-      </p:nvGrpSpPr>
-      <p:grpSpPr>
-        <a:xfrm>
-          <a:off x="0" y="0"/>
-          <a:ext cx="0" cy="0"/>
-          <a:chOff x="0" y="0"/>
-          <a:chExt cx="0" cy="0"/>
-        </a:xfrm>
-      </p:grpSpPr>
-      <p:sp>
-        <p:nvSpPr>
-          <p:cNvPr id="2" name="Text 0"/>
-          <p:cNvSpPr/>
-          <p:nvPr/>
-        </p:nvSpPr>
-        <p:spPr>
-          <a:xfrm>
-            <a:off x="457200" y="713232"/>
-            <a:ext cx="11368735" cy="274320"/>
-          </a:xfrm>
-          <a:prstGeom prst="rect">
-            <a:avLst/>
-          </a:prstGeom>
-          <a:noFill/>
-          <a:ln/>
-        </p:spPr>
-        <p:txBody>
-          <a:bodyPr wrap="square" lIns="0" tIns="0" rIns="0" bIns="0" rtlCol="0" anchor="ctr"/>
-          <a:lstStyle/>
-          <a:p>
-            <a:pPr algn="r" indent="0" marL="0">
-              <a:buNone/>
-            </a:pPr>
-            <a:r>
-              <a:rPr lang="en-US" sz="1400" b="1" dirty="0">
-                <a:solidFill>
-                  <a:srgbClr val="1C3F6E"/>
-                </a:solidFill>
-                <a:latin typeface="Calibri" pitchFamily="34" charset="0"/>
-                <a:ea typeface="Calibri" pitchFamily="34" charset="-122"/>
-                <a:cs typeface="Calibri" pitchFamily="34" charset="-120"/>
-              </a:rPr>
-              <a:t>REFERENCES</a:t>
-            </a:r>
-            <a:endParaRPr lang="en-US" sz="1400" dirty="0"/>
-          </a:p>
-        </p:txBody>
-      </p:sp>
-      <p:pic>
-        <p:nvPicPr>
-          <p:cNvPr id="3" name="Image 0" descr="/home/claude/f4/img/minesec_sheet.png">    </p:cNvPr>
-          <p:cNvPicPr>
-            <a:picLocks noChangeAspect="1"/>
-          </p:cNvPicPr>
-          <p:nvPr/>
-        </p:nvPicPr>
-        <p:blipFill>
-          <a:blip r:embed="rId1"/>
-          <a:stretch>
-            <a:fillRect/>
-          </a:stretch>
-        </p:blipFill>
-        <p:spPr>
-          <a:xfrm>
-            <a:off x="0" y="658368"/>
-            <a:ext cx="3840480" cy="5833872"/>
-          </a:xfrm>
-          <a:prstGeom prst="rect">
-            <a:avLst/>
-          </a:prstGeom>
-        </p:spPr>
-      </p:pic>
-      <p:sp>
-        <p:nvSpPr>
-          <p:cNvPr id="4" name="Text 1"/>
-          <p:cNvSpPr/>
-          <p:nvPr/>
-        </p:nvSpPr>
-        <p:spPr>
-          <a:xfrm>
-            <a:off x="4069080" y="1005840"/>
-            <a:ext cx="7802575" cy="731520"/>
-          </a:xfrm>
-          <a:prstGeom prst="rect">
-            <a:avLst/>
-          </a:prstGeom>
-          <a:noFill/>
-          <a:ln/>
-        </p:spPr>
-        <p:txBody>
-          <a:bodyPr wrap="square" lIns="0" tIns="0" rIns="0" bIns="0" rtlCol="0" anchor="ctr">
-            <a:normAutofit/>
-          </a:bodyPr>
-          <a:lstStyle/>
-          <a:p>
-            <a:pPr algn="ctr" indent="0" marL="0">
-              <a:buNone/>
-            </a:pPr>
-            <a:r>
-              <a:rPr lang="en-US" sz="3600" b="1" dirty="0">
-                <a:solidFill>
-                  <a:srgbClr val="990011"/>
-                </a:solidFill>
-                <a:latin typeface="Times New Roman" pitchFamily="34" charset="0"/>
-                <a:ea typeface="Times New Roman" pitchFamily="34" charset="-122"/>
-                <a:cs typeface="Times New Roman" pitchFamily="34" charset="-120"/>
-              </a:rPr>
-              <a:t>References</a:t>
-            </a:r>
-            <a:endParaRPr lang="en-US" sz="3600" dirty="0"/>
-          </a:p>
-        </p:txBody>
-      </p:sp>
-      <p:sp>
-        <p:nvSpPr>
-          <p:cNvPr id="5" name="Text 2"/>
-          <p:cNvSpPr/>
-          <p:nvPr/>
-        </p:nvSpPr>
-        <p:spPr>
-          <a:xfrm>
-            <a:off x="4069080" y="1783080"/>
-            <a:ext cx="7802575" cy="4663440"/>
-          </a:xfrm>
-          <a:prstGeom prst="rect">
-            <a:avLst/>
-          </a:prstGeom>
-          <a:noFill/>
-          <a:ln/>
-        </p:spPr>
-        <p:txBody>
-          <a:bodyPr wrap="square" lIns="0" tIns="0" rIns="0" bIns="0" rtlCol="0" anchor="t"/>
-          <a:lstStyle/>
-          <a:p>
-            <a:pPr algn="l" marL="342900" indent="-342900">
-              <a:spcAft>
-                <a:spcPts val="800"/>
-              </a:spcAft>
-              <a:buSzPct val="100000"/>
-              <a:buChar char="•"/>
-            </a:pPr>
-            <a:r>
-              <a:rPr lang="en-US" sz="1800" dirty="0">
-                <a:solidFill>
-                  <a:srgbClr val="111111"/>
-                </a:solidFill>
-                <a:latin typeface="Calibri" pitchFamily="34" charset="0"/>
-                <a:ea typeface="Calibri" pitchFamily="34" charset="-122"/>
-                <a:cs typeface="Calibri" pitchFamily="34" charset="-120"/>
-              </a:rPr>
-              <a:t>National Geography Syllabus, MINESEC/IGE/IP-SS, 2019 — Module 2 (Geomorphology).</a:t>
-            </a:r>
-            <a:endParaRPr lang="en-US" sz="1800" dirty="0"/>
-          </a:p>
-          <a:p>
-            <a:pPr algn="l" marL="342900" indent="-342900">
-              <a:spcAft>
-                <a:spcPts val="800"/>
-              </a:spcAft>
-              <a:buSzPct val="100000"/>
-              <a:buChar char="•"/>
-            </a:pPr>
-            <a:r>
-              <a:rPr lang="en-US" sz="1800" dirty="0">
-                <a:solidFill>
-                  <a:srgbClr val="111111"/>
-                </a:solidFill>
-                <a:latin typeface="Calibri" pitchFamily="34" charset="0"/>
-                <a:ea typeface="Calibri" pitchFamily="34" charset="-122"/>
-                <a:cs typeface="Calibri" pitchFamily="34" charset="-120"/>
-              </a:rPr>
-              <a:t>Photo, Activity 1: “Pahoehoe Lava Flow” by graysky., CC BY-NC-SA 2.0, via Flickr (https://www.flickr.com/photos/20021588@N00/540223861)</a:t>
-            </a:r>
-            <a:endParaRPr lang="en-US" sz="1800" dirty="0"/>
-          </a:p>
-          <a:p>
-            <a:pPr algn="l" marL="342900" indent="-342900">
-              <a:spcAft>
-                <a:spcPts val="800"/>
-              </a:spcAft>
-              <a:buSzPct val="100000"/>
-              <a:buChar char="•"/>
-            </a:pPr>
-            <a:r>
-              <a:rPr lang="en-US" sz="1800" dirty="0">
-                <a:solidFill>
-                  <a:srgbClr val="111111"/>
-                </a:solidFill>
-                <a:latin typeface="Calibri" pitchFamily="34" charset="0"/>
-                <a:ea typeface="Calibri" pitchFamily="34" charset="-122"/>
-                <a:cs typeface="Calibri" pitchFamily="34" charset="-120"/>
-              </a:rPr>
-              <a:t>Photo, Activity 3: “Mayon Volcano, Albay, Luzon, Philippines” by Ray in Manila, CC BY 2.0, via Flickr (https://www.flickr.com/photos/21186555@N07/20591774278)</a:t>
-            </a:r>
-            <a:endParaRPr lang="en-US" sz="1800" dirty="0"/>
-          </a:p>
-          <a:p>
-            <a:pPr algn="l" marL="342900" indent="-342900">
-              <a:spcAft>
-                <a:spcPts val="800"/>
-              </a:spcAft>
-              <a:buSzPct val="100000"/>
-              <a:buChar char="•"/>
-            </a:pPr>
-            <a:r>
-              <a:rPr lang="en-US" sz="1800" dirty="0">
-                <a:solidFill>
-                  <a:srgbClr val="111111"/>
-                </a:solidFill>
-                <a:latin typeface="Calibri" pitchFamily="34" charset="0"/>
-                <a:ea typeface="Calibri" pitchFamily="34" charset="-122"/>
-                <a:cs typeface="Calibri" pitchFamily="34" charset="-120"/>
-              </a:rPr>
-              <a:t>Photo, Activity 4: “Taal Lake and Volcano, Tagaytay, Philippines” by Ray in Manila, CC BY 2.0, via Flickr (https://www.flickr.com/photos/21186555@N07/28260012661)</a:t>
-            </a:r>
-            <a:endParaRPr lang="en-US" sz="1800" dirty="0"/>
-          </a:p>
-          <a:p>
-            <a:pPr algn="l" marL="342900" indent="-342900">
-              <a:spcAft>
-                <a:spcPts val="800"/>
-              </a:spcAft>
-              <a:buSzPct val="100000"/>
-              <a:buChar char="•"/>
-            </a:pPr>
-            <a:r>
-              <a:rPr lang="en-US" sz="1800" dirty="0">
-                <a:solidFill>
-                  <a:srgbClr val="111111"/>
-                </a:solidFill>
-                <a:latin typeface="Calibri" pitchFamily="34" charset="0"/>
-                <a:ea typeface="Calibri" pitchFamily="34" charset="-122"/>
-                <a:cs typeface="Calibri" pitchFamily="34" charset="-120"/>
-              </a:rPr>
-              <a:t>Photo, Activity 5: “Snapshot, Daguoye Columnar Basalt, Penghu, Taiwan, 隨拍, 池東大菓葉玄武岩, 大菓葉柱狀” by bryan..., CC BY-SA 2.0, via Flickr (https://www.flickr.com/photos/91049143@N00/52316527525)</a:t>
-            </a:r>
-            <a:endParaRPr lang="en-US" sz="1800" dirty="0"/>
-          </a:p>
-          <a:p>
-            <a:pPr algn="l" marL="342900" indent="-342900">
-              <a:spcAft>
-                <a:spcPts val="800"/>
-              </a:spcAft>
-              <a:buSzPct val="100000"/>
-              <a:buChar char="•"/>
-            </a:pPr>
-            <a:r>
-              <a:rPr lang="en-US" sz="1800" dirty="0">
-                <a:solidFill>
-                  <a:srgbClr val="111111"/>
-                </a:solidFill>
-                <a:latin typeface="Calibri" pitchFamily="34" charset="0"/>
-                <a:ea typeface="Calibri" pitchFamily="34" charset="-122"/>
-                <a:cs typeface="Calibri" pitchFamily="34" charset="-120"/>
-              </a:rPr>
-              <a:t>Diagrams and animations: drawn for this lesson (Geography Department).</a:t>
-            </a:r>
-            <a:endParaRPr lang="en-US" sz="1800" dirty="0"/>
-          </a:p>
-        </p:txBody>
-      </p:sp>
-      <p:sp>
-        <p:nvSpPr>
-          <p:cNvPr id="25" name="Slide Number Placeholder 0"/>
-          <p:cNvSpPr>
-            <a:spLocks noGrp="1"/>
-          </p:cNvSpPr>
-          <p:nvPr>
-            <p:ph type="sldNum" sz="quarter" idx="4294967295"/>
-          </p:nvPr>
-        </p:nvSpPr>
-        <p:spPr>
-          <a:xfrm>
-            <a:off x="27432" y="91440"/>
-            <a:ext cx="585216" cy="475488"/>
-          </a:xfrm>
-          <a:prstGeom prst="rect">
-            <a:avLst/>
-          </a:prstGeom>
-          <a:extLst>
-            <a:ext uri="{C572A759-6A51-4108-AA02-DFA0A04FC94B}">
-              <ma14:wrappingTextBoxFlag xmlns:ma14="http://schemas.microsoft.com/office/mac/drawingml/2011/main" val="0"/>
-            </a:ext>
-          </a:extLst>
-        </p:spPr>
-        <p:txBody>
-          <a:bodyPr/>
-          <a:lstStyle>
-            <a:lvl1pPr>
-              <a:defRPr sz="2000">
-                <a:solidFill>
-                  <a:srgbClr val="FFFFFF"/>
-                </a:solidFill>
-                <a:latin typeface="Calibri"/>
-                <a:ea typeface="Calibri"/>
-                <a:cs typeface="Calibri"/>
-              </a:defRPr>
-            </a:lvl1pPr>
-          </a:lstStyle>
-          <a:p>
-            <a:pPr algn="ctr"/>
-            <a:fld id="{F7021451-1387-4CA6-816F-3879F97B5CBC}" type="slidenum">
-              <a:rPr b="1" lang="en-US"/>
-              <a:t>57</a:t>
+              <a:t>59</a:t>
             </a:fld>
             <a:endParaRPr lang="en-US"/>
           </a:p>
@@ -22497,6 +23861,960 @@
 </p:sld>
 </file>
 
+<file path=ppt/slides/slide60.xml><?xml version="1.0" encoding="utf-8"?>
+<p:sld xmlns:a="http://schemas.openxmlformats.org/drawingml/2006/main" xmlns:r="http://schemas.openxmlformats.org/officeDocument/2006/relationships" xmlns:p="http://schemas.openxmlformats.org/presentationml/2006/main">
+  <p:cSld name="Slide 60">
+    <p:spTree>
+      <p:nvGrpSpPr>
+        <p:cNvPr id="1" name=""/>
+        <p:cNvGrpSpPr/>
+        <p:nvPr/>
+      </p:nvGrpSpPr>
+      <p:grpSpPr>
+        <a:xfrm>
+          <a:off x="0" y="0"/>
+          <a:ext cx="0" cy="0"/>
+          <a:chOff x="0" y="0"/>
+          <a:chExt cx="0" cy="0"/>
+        </a:xfrm>
+      </p:grpSpPr>
+      <p:sp>
+        <p:nvSpPr>
+          <p:cNvPr id="2" name="Text 0"/>
+          <p:cNvSpPr/>
+          <p:nvPr/>
+        </p:nvSpPr>
+        <p:spPr>
+          <a:xfrm>
+            <a:off x="457200" y="713232"/>
+            <a:ext cx="11368735" cy="274320"/>
+          </a:xfrm>
+          <a:prstGeom prst="rect">
+            <a:avLst/>
+          </a:prstGeom>
+          <a:noFill/>
+          <a:ln/>
+        </p:spPr>
+        <p:txBody>
+          <a:bodyPr wrap="square" lIns="0" tIns="0" rIns="0" bIns="0" rtlCol="0" anchor="ctr"/>
+          <a:lstStyle/>
+          <a:p>
+            <a:pPr algn="r" indent="0" marL="0">
+              <a:buNone/>
+            </a:pPr>
+            <a:r>
+              <a:rPr lang="en-US" sz="1400" b="1" dirty="0">
+                <a:solidFill>
+                  <a:srgbClr val="1C3F6E"/>
+                </a:solidFill>
+                <a:latin typeface="Calibri" pitchFamily="34" charset="0"/>
+                <a:ea typeface="Calibri" pitchFamily="34" charset="-122"/>
+                <a:cs typeface="Calibri" pitchFamily="34" charset="-120"/>
+              </a:rPr>
+              <a:t>TEACHER'S NOTE</a:t>
+            </a:r>
+            <a:endParaRPr lang="en-US" sz="1400" dirty="0"/>
+          </a:p>
+        </p:txBody>
+      </p:sp>
+      <p:pic>
+        <p:nvPicPr>
+          <p:cNvPr id="3" name="Image 0" descr="/home/claude/f4/img/minesec_sheet.png">    </p:cNvPr>
+          <p:cNvPicPr>
+            <a:picLocks noChangeAspect="1"/>
+          </p:cNvPicPr>
+          <p:nvPr/>
+        </p:nvPicPr>
+        <p:blipFill>
+          <a:blip r:embed="rId1"/>
+          <a:stretch>
+            <a:fillRect/>
+          </a:stretch>
+        </p:blipFill>
+        <p:spPr>
+          <a:xfrm>
+            <a:off x="0" y="658368"/>
+            <a:ext cx="3840480" cy="5833872"/>
+          </a:xfrm>
+          <a:prstGeom prst="rect">
+            <a:avLst/>
+          </a:prstGeom>
+        </p:spPr>
+      </p:pic>
+      <p:sp>
+        <p:nvSpPr>
+          <p:cNvPr id="4" name="Text 1"/>
+          <p:cNvSpPr/>
+          <p:nvPr/>
+        </p:nvSpPr>
+        <p:spPr>
+          <a:xfrm>
+            <a:off x="4069080" y="1005840"/>
+            <a:ext cx="7802575" cy="731520"/>
+          </a:xfrm>
+          <a:prstGeom prst="rect">
+            <a:avLst/>
+          </a:prstGeom>
+          <a:noFill/>
+          <a:ln/>
+        </p:spPr>
+        <p:txBody>
+          <a:bodyPr wrap="square" lIns="0" tIns="0" rIns="0" bIns="0" rtlCol="0" anchor="ctr">
+            <a:normAutofit/>
+          </a:bodyPr>
+          <a:lstStyle/>
+          <a:p>
+            <a:pPr algn="ctr" indent="0" marL="0">
+              <a:buNone/>
+            </a:pPr>
+            <a:r>
+              <a:rPr lang="en-US" sz="3600" b="1" dirty="0">
+                <a:solidFill>
+                  <a:srgbClr val="990011"/>
+                </a:solidFill>
+                <a:latin typeface="Times New Roman" pitchFamily="34" charset="0"/>
+                <a:ea typeface="Times New Roman" pitchFamily="34" charset="-122"/>
+                <a:cs typeface="Times New Roman" pitchFamily="34" charset="-120"/>
+              </a:rPr>
+              <a:t>Teacher's Note</a:t>
+            </a:r>
+            <a:endParaRPr lang="en-US" sz="3600" dirty="0"/>
+          </a:p>
+        </p:txBody>
+      </p:sp>
+      <p:sp>
+        <p:nvSpPr>
+          <p:cNvPr id="5" name="Text 2"/>
+          <p:cNvSpPr/>
+          <p:nvPr/>
+        </p:nvSpPr>
+        <p:spPr>
+          <a:xfrm>
+            <a:off x="4069080" y="1783080"/>
+            <a:ext cx="7802575" cy="4663440"/>
+          </a:xfrm>
+          <a:prstGeom prst="rect">
+            <a:avLst/>
+          </a:prstGeom>
+          <a:noFill/>
+          <a:ln/>
+        </p:spPr>
+        <p:txBody>
+          <a:bodyPr wrap="square" lIns="0" tIns="0" rIns="0" bIns="0" rtlCol="0" anchor="t"/>
+          <a:lstStyle/>
+          <a:p>
+            <a:pPr algn="l" marL="342900" indent="-342900">
+              <a:spcAft>
+                <a:spcPts val="800"/>
+              </a:spcAft>
+              <a:buSzPct val="100000"/>
+              <a:buChar char="•"/>
+            </a:pPr>
+            <a:r>
+              <a:rPr lang="en-US" sz="2000" dirty="0">
+                <a:solidFill>
+                  <a:srgbClr val="111111"/>
+                </a:solidFill>
+                <a:latin typeface="Calibri" pitchFamily="34" charset="0"/>
+                <a:ea typeface="Calibri" pitchFamily="34" charset="-122"/>
+                <a:cs typeface="Calibri" pitchFamily="34" charset="-120"/>
+              </a:rPr>
+              <a:t>Timing: Homework correction, plan, objectives 8 min | Recall, situation, action 10 min | 5 activities 30 min | Board summary (copying) 30 min | Evaluation, remediation 10 min | Homework, next lesson 5 min | Logbook 7 min</a:t>
+            </a:r>
+            <a:endParaRPr lang="en-US" sz="2000" dirty="0"/>
+          </a:p>
+          <a:p>
+            <a:pPr algn="l" marL="342900" indent="-342900">
+              <a:spcAft>
+                <a:spcPts val="800"/>
+              </a:spcAft>
+              <a:buSzPct val="100000"/>
+              <a:buChar char="•"/>
+            </a:pPr>
+            <a:r>
+              <a:rPr lang="en-US" sz="2000" dirty="0">
+                <a:solidFill>
+                  <a:srgbClr val="111111"/>
+                </a:solidFill>
+                <a:latin typeface="Calibri" pitchFamily="34" charset="0"/>
+                <a:ea typeface="Calibri" pitchFamily="34" charset="-122"/>
+                <a:cs typeface="Calibri" pitchFamily="34" charset="-120"/>
+              </a:rPr>
+              <a:t>Without the projector (Activity 1): draw a volcano with its vent.</a:t>
+            </a:r>
+            <a:endParaRPr lang="en-US" sz="2000" dirty="0"/>
+          </a:p>
+          <a:p>
+            <a:pPr algn="l" marL="342900" indent="-342900">
+              <a:spcAft>
+                <a:spcPts val="800"/>
+              </a:spcAft>
+              <a:buSzPct val="100000"/>
+              <a:buChar char="•"/>
+            </a:pPr>
+            <a:r>
+              <a:rPr lang="en-US" sz="2000" dirty="0">
+                <a:solidFill>
+                  <a:srgbClr val="111111"/>
+                </a:solidFill>
+                <a:latin typeface="Calibri" pitchFamily="34" charset="0"/>
+                <a:ea typeface="Calibri" pitchFamily="34" charset="-122"/>
+                <a:cs typeface="Calibri" pitchFamily="34" charset="-120"/>
+              </a:rPr>
+              <a:t>Without the projector (Activity 2): list eruptions of Mount Cameroon.</a:t>
+            </a:r>
+            <a:endParaRPr lang="en-US" sz="2000" dirty="0"/>
+          </a:p>
+          <a:p>
+            <a:pPr algn="l" marL="342900" indent="-342900">
+              <a:spcAft>
+                <a:spcPts val="800"/>
+              </a:spcAft>
+              <a:buSzPct val="100000"/>
+              <a:buChar char="•"/>
+            </a:pPr>
+            <a:r>
+              <a:rPr lang="en-US" sz="2000" dirty="0">
+                <a:solidFill>
+                  <a:srgbClr val="111111"/>
+                </a:solidFill>
+                <a:latin typeface="Calibri" pitchFamily="34" charset="0"/>
+                <a:ea typeface="Calibri" pitchFamily="34" charset="-122"/>
+                <a:cs typeface="Calibri" pitchFamily="34" charset="-120"/>
+              </a:rPr>
+              <a:t>Without the projector (Activity 3): describe the peaks of Rhumsiki.</a:t>
+            </a:r>
+            <a:endParaRPr lang="en-US" sz="2000" dirty="0"/>
+          </a:p>
+          <a:p>
+            <a:pPr algn="l" marL="342900" indent="-342900">
+              <a:spcAft>
+                <a:spcPts val="800"/>
+              </a:spcAft>
+              <a:buSzPct val="100000"/>
+              <a:buChar char="•"/>
+            </a:pPr>
+            <a:r>
+              <a:rPr lang="en-US" sz="2000" dirty="0">
+                <a:solidFill>
+                  <a:srgbClr val="111111"/>
+                </a:solidFill>
+                <a:latin typeface="Calibri" pitchFamily="34" charset="0"/>
+                <a:ea typeface="Calibri" pitchFamily="34" charset="-122"/>
+                <a:cs typeface="Calibri" pitchFamily="34" charset="-120"/>
+              </a:rPr>
+              <a:t>Without the projector (Activity 4): compare water and thick porridge.</a:t>
+            </a:r>
+            <a:endParaRPr lang="en-US" sz="2000" dirty="0"/>
+          </a:p>
+          <a:p>
+            <a:pPr algn="l" marL="342900" indent="-342900">
+              <a:spcAft>
+                <a:spcPts val="800"/>
+              </a:spcAft>
+              <a:buSzPct val="100000"/>
+              <a:buChar char="•"/>
+            </a:pPr>
+            <a:r>
+              <a:rPr lang="en-US" sz="2000" dirty="0">
+                <a:solidFill>
+                  <a:srgbClr val="111111"/>
+                </a:solidFill>
+                <a:latin typeface="Calibri" pitchFamily="34" charset="0"/>
+                <a:ea typeface="Calibri" pitchFamily="34" charset="-122"/>
+                <a:cs typeface="Calibri" pitchFamily="34" charset="-120"/>
+              </a:rPr>
+              <a:t>Without the projector (Activity 5): draw a crater and a caldera.</a:t>
+            </a:r>
+            <a:endParaRPr lang="en-US" sz="2000" dirty="0"/>
+          </a:p>
+        </p:txBody>
+      </p:sp>
+      <p:sp>
+        <p:nvSpPr>
+          <p:cNvPr id="25" name="Slide Number Placeholder 0"/>
+          <p:cNvSpPr>
+            <a:spLocks noGrp="1"/>
+          </p:cNvSpPr>
+          <p:nvPr>
+            <p:ph type="sldNum" sz="quarter" idx="4294967295"/>
+          </p:nvPr>
+        </p:nvSpPr>
+        <p:spPr>
+          <a:xfrm>
+            <a:off x="27432" y="91440"/>
+            <a:ext cx="585216" cy="475488"/>
+          </a:xfrm>
+          <a:prstGeom prst="rect">
+            <a:avLst/>
+          </a:prstGeom>
+          <a:extLst>
+            <a:ext uri="{C572A759-6A51-4108-AA02-DFA0A04FC94B}">
+              <ma14:wrappingTextBoxFlag xmlns:ma14="http://schemas.microsoft.com/office/mac/drawingml/2011/main" val="0"/>
+            </a:ext>
+          </a:extLst>
+        </p:spPr>
+        <p:txBody>
+          <a:bodyPr/>
+          <a:lstStyle>
+            <a:lvl1pPr>
+              <a:defRPr sz="2000">
+                <a:solidFill>
+                  <a:srgbClr val="FFFFFF"/>
+                </a:solidFill>
+                <a:latin typeface="Calibri"/>
+                <a:ea typeface="Calibri"/>
+                <a:cs typeface="Calibri"/>
+              </a:defRPr>
+            </a:lvl1pPr>
+          </a:lstStyle>
+          <a:p>
+            <a:pPr algn="ctr"/>
+            <a:fld id="{F7021451-1387-4CA6-816F-3879F97B5CBC}" type="slidenum">
+              <a:rPr b="1" lang="en-US"/>
+              <a:t>60</a:t>
+            </a:fld>
+            <a:endParaRPr lang="en-US"/>
+          </a:p>
+        </p:txBody>
+      </p:sp>
+    </p:spTree>
+  </p:cSld>
+  <p:clrMapOvr>
+    <a:masterClrMapping/>
+  </p:clrMapOvr>
+</p:sld>
+</file>
+
+<file path=ppt/slides/slide61.xml><?xml version="1.0" encoding="utf-8"?>
+<p:sld xmlns:a="http://schemas.openxmlformats.org/drawingml/2006/main" xmlns:r="http://schemas.openxmlformats.org/officeDocument/2006/relationships" xmlns:p="http://schemas.openxmlformats.org/presentationml/2006/main">
+  <p:cSld name="Slide 61">
+    <p:spTree>
+      <p:nvGrpSpPr>
+        <p:cNvPr id="1" name=""/>
+        <p:cNvGrpSpPr/>
+        <p:nvPr/>
+      </p:nvGrpSpPr>
+      <p:grpSpPr>
+        <a:xfrm>
+          <a:off x="0" y="0"/>
+          <a:ext cx="0" cy="0"/>
+          <a:chOff x="0" y="0"/>
+          <a:chExt cx="0" cy="0"/>
+        </a:xfrm>
+      </p:grpSpPr>
+      <p:sp>
+        <p:nvSpPr>
+          <p:cNvPr id="2" name="Text 0"/>
+          <p:cNvSpPr/>
+          <p:nvPr/>
+        </p:nvSpPr>
+        <p:spPr>
+          <a:xfrm>
+            <a:off x="457200" y="713232"/>
+            <a:ext cx="11368735" cy="274320"/>
+          </a:xfrm>
+          <a:prstGeom prst="rect">
+            <a:avLst/>
+          </a:prstGeom>
+          <a:noFill/>
+          <a:ln/>
+        </p:spPr>
+        <p:txBody>
+          <a:bodyPr wrap="square" lIns="0" tIns="0" rIns="0" bIns="0" rtlCol="0" anchor="ctr"/>
+          <a:lstStyle/>
+          <a:p>
+            <a:pPr algn="r" indent="0" marL="0">
+              <a:buNone/>
+            </a:pPr>
+            <a:r>
+              <a:rPr lang="en-US" sz="1400" b="1" dirty="0">
+                <a:solidFill>
+                  <a:srgbClr val="1C3F6E"/>
+                </a:solidFill>
+                <a:latin typeface="Calibri" pitchFamily="34" charset="0"/>
+                <a:ea typeface="Calibri" pitchFamily="34" charset="-122"/>
+                <a:cs typeface="Calibri" pitchFamily="34" charset="-120"/>
+              </a:rPr>
+              <a:t>REFERENCES</a:t>
+            </a:r>
+            <a:endParaRPr lang="en-US" sz="1400" dirty="0"/>
+          </a:p>
+        </p:txBody>
+      </p:sp>
+      <p:pic>
+        <p:nvPicPr>
+          <p:cNvPr id="3" name="Image 0" descr="/home/claude/f4/img/minesec_sheet.png">    </p:cNvPr>
+          <p:cNvPicPr>
+            <a:picLocks noChangeAspect="1"/>
+          </p:cNvPicPr>
+          <p:nvPr/>
+        </p:nvPicPr>
+        <p:blipFill>
+          <a:blip r:embed="rId1"/>
+          <a:stretch>
+            <a:fillRect/>
+          </a:stretch>
+        </p:blipFill>
+        <p:spPr>
+          <a:xfrm>
+            <a:off x="0" y="658368"/>
+            <a:ext cx="2468880" cy="5833872"/>
+          </a:xfrm>
+          <a:prstGeom prst="rect">
+            <a:avLst/>
+          </a:prstGeom>
+        </p:spPr>
+      </p:pic>
+      <p:sp>
+        <p:nvSpPr>
+          <p:cNvPr id="4" name="Text 1"/>
+          <p:cNvSpPr/>
+          <p:nvPr/>
+        </p:nvSpPr>
+        <p:spPr>
+          <a:xfrm>
+            <a:off x="2697480" y="1005840"/>
+            <a:ext cx="9174175" cy="731520"/>
+          </a:xfrm>
+          <a:prstGeom prst="rect">
+            <a:avLst/>
+          </a:prstGeom>
+          <a:noFill/>
+          <a:ln/>
+        </p:spPr>
+        <p:txBody>
+          <a:bodyPr wrap="square" lIns="0" tIns="0" rIns="0" bIns="0" rtlCol="0" anchor="ctr">
+            <a:normAutofit/>
+          </a:bodyPr>
+          <a:lstStyle/>
+          <a:p>
+            <a:pPr algn="ctr" indent="0" marL="0">
+              <a:buNone/>
+            </a:pPr>
+            <a:r>
+              <a:rPr lang="en-US" sz="3600" b="1" dirty="0">
+                <a:solidFill>
+                  <a:srgbClr val="990011"/>
+                </a:solidFill>
+                <a:latin typeface="Times New Roman" pitchFamily="34" charset="0"/>
+                <a:ea typeface="Times New Roman" pitchFamily="34" charset="-122"/>
+                <a:cs typeface="Times New Roman" pitchFamily="34" charset="-120"/>
+              </a:rPr>
+              <a:t>References</a:t>
+            </a:r>
+            <a:endParaRPr lang="en-US" sz="3600" dirty="0"/>
+          </a:p>
+        </p:txBody>
+      </p:sp>
+      <p:sp>
+        <p:nvSpPr>
+          <p:cNvPr id="5" name="Text 2"/>
+          <p:cNvSpPr/>
+          <p:nvPr/>
+        </p:nvSpPr>
+        <p:spPr>
+          <a:xfrm>
+            <a:off x="2697480" y="1783080"/>
+            <a:ext cx="9174175" cy="4663440"/>
+          </a:xfrm>
+          <a:prstGeom prst="rect">
+            <a:avLst/>
+          </a:prstGeom>
+          <a:noFill/>
+          <a:ln/>
+        </p:spPr>
+        <p:txBody>
+          <a:bodyPr wrap="square" lIns="0" tIns="0" rIns="0" bIns="0" rtlCol="0" anchor="t"/>
+          <a:lstStyle/>
+          <a:p>
+            <a:pPr algn="l" marL="342900" indent="-342900">
+              <a:spcAft>
+                <a:spcPts val="800"/>
+              </a:spcAft>
+              <a:buSzPct val="100000"/>
+              <a:buChar char="•"/>
+            </a:pPr>
+            <a:r>
+              <a:rPr lang="en-US" sz="1800" dirty="0">
+                <a:solidFill>
+                  <a:srgbClr val="111111"/>
+                </a:solidFill>
+                <a:latin typeface="Calibri" pitchFamily="34" charset="0"/>
+                <a:ea typeface="Calibri" pitchFamily="34" charset="-122"/>
+                <a:cs typeface="Calibri" pitchFamily="34" charset="-120"/>
+              </a:rPr>
+              <a:t>Geography Syllabus for Sixth Forms (Lower and Upper Sixth), MINESEC, 2019 — Module 2 (Geomorphology).</a:t>
+            </a:r>
+            <a:endParaRPr lang="en-US" sz="1800" dirty="0"/>
+          </a:p>
+          <a:p>
+            <a:pPr algn="l" marL="342900" indent="-342900">
+              <a:spcAft>
+                <a:spcPts val="800"/>
+              </a:spcAft>
+              <a:buSzPct val="100000"/>
+              <a:buChar char="•"/>
+            </a:pPr>
+            <a:r>
+              <a:rPr lang="en-US" sz="1800" dirty="0">
+                <a:solidFill>
+                  <a:srgbClr val="111111"/>
+                </a:solidFill>
+                <a:latin typeface="Calibri" pitchFamily="34" charset="0"/>
+                <a:ea typeface="Calibri" pitchFamily="34" charset="-122"/>
+                <a:cs typeface="Calibri" pitchFamily="34" charset="-120"/>
+              </a:rPr>
+              <a:t>Teacher's course notes: Mr KAMDEM E., Geomorphology (LSA), GBHS Garoua, 2026.</a:t>
+            </a:r>
+            <a:endParaRPr lang="en-US" sz="1800" dirty="0"/>
+          </a:p>
+          <a:p>
+            <a:pPr algn="l" marL="342900" indent="-342900">
+              <a:spcAft>
+                <a:spcPts val="800"/>
+              </a:spcAft>
+              <a:buSzPct val="100000"/>
+              <a:buChar char="•"/>
+            </a:pPr>
+            <a:r>
+              <a:rPr lang="en-US" sz="1800" dirty="0">
+                <a:solidFill>
+                  <a:srgbClr val="111111"/>
+                </a:solidFill>
+                <a:latin typeface="Calibri" pitchFamily="34" charset="0"/>
+                <a:ea typeface="Calibri" pitchFamily="34" charset="-122"/>
+                <a:cs typeface="Calibri" pitchFamily="34" charset="-120"/>
+              </a:rPr>
+              <a:t>Photo, Activity 2: “Mount Cameroon” by John &amp; Mel Kots, CC BY-NC-ND 2.0, via Flickr (https://www.flickr.com/photos/26745817@N00/2347261849)</a:t>
+            </a:r>
+            <a:endParaRPr lang="en-US" sz="1800" dirty="0"/>
+          </a:p>
+          <a:p>
+            <a:pPr algn="l" marL="342900" indent="-342900">
+              <a:spcAft>
+                <a:spcPts val="800"/>
+              </a:spcAft>
+              <a:buSzPct val="100000"/>
+              <a:buChar char="•"/>
+            </a:pPr>
+            <a:r>
+              <a:rPr lang="en-US" sz="1800" dirty="0">
+                <a:solidFill>
+                  <a:srgbClr val="111111"/>
+                </a:solidFill>
+                <a:latin typeface="Calibri" pitchFamily="34" charset="0"/>
+                <a:ea typeface="Calibri" pitchFamily="34" charset="-122"/>
+                <a:cs typeface="Calibri" pitchFamily="34" charset="-120"/>
+              </a:rPr>
+              <a:t>Photo, Activity 3: “Rhumsiki peak, North Cameroon” by krishna.naudin, CC BY-SA 2.0, via Flickr (https://www.flickr.com/photos/141297921@N05/25989204581)</a:t>
+            </a:r>
+            <a:endParaRPr lang="en-US" sz="1800" dirty="0"/>
+          </a:p>
+          <a:p>
+            <a:pPr algn="l" marL="342900" indent="-342900">
+              <a:spcAft>
+                <a:spcPts val="800"/>
+              </a:spcAft>
+              <a:buSzPct val="100000"/>
+              <a:buChar char="•"/>
+            </a:pPr>
+            <a:r>
+              <a:rPr lang="en-US" sz="1800" dirty="0">
+                <a:solidFill>
+                  <a:srgbClr val="111111"/>
+                </a:solidFill>
+                <a:latin typeface="Calibri" pitchFamily="34" charset="0"/>
+                <a:ea typeface="Calibri" pitchFamily="34" charset="-122"/>
+                <a:cs typeface="Calibri" pitchFamily="34" charset="-120"/>
+              </a:rPr>
+              <a:t>Photo, Activity 4: “Pahoehoe Lava Flow” by graysky., CC BY-NC-SA 2.0, via Flickr (https://www.flickr.com/photos/20021588@N00/540223861)</a:t>
+            </a:r>
+            <a:endParaRPr lang="en-US" sz="1800" dirty="0"/>
+          </a:p>
+          <a:p>
+            <a:pPr algn="l" marL="342900" indent="-342900">
+              <a:spcAft>
+                <a:spcPts val="800"/>
+              </a:spcAft>
+              <a:buSzPct val="100000"/>
+              <a:buChar char="•"/>
+            </a:pPr>
+            <a:r>
+              <a:rPr lang="en-US" sz="1800" dirty="0">
+                <a:solidFill>
+                  <a:srgbClr val="111111"/>
+                </a:solidFill>
+                <a:latin typeface="Calibri" pitchFamily="34" charset="0"/>
+                <a:ea typeface="Calibri" pitchFamily="34" charset="-122"/>
+                <a:cs typeface="Calibri" pitchFamily="34" charset="-120"/>
+              </a:rPr>
+              <a:t>Photo, Activity 5: “Taal Lake and Volcano, Tagaytay, Philippines” by Ray in Manila, CC BY 2.0, via Flickr (https://www.flickr.com/photos/21186555@N07/28260012661)</a:t>
+            </a:r>
+            <a:endParaRPr lang="en-US" sz="1800" dirty="0"/>
+          </a:p>
+          <a:p>
+            <a:pPr algn="l" marL="342900" indent="-342900">
+              <a:spcAft>
+                <a:spcPts val="800"/>
+              </a:spcAft>
+              <a:buSzPct val="100000"/>
+              <a:buChar char="•"/>
+            </a:pPr>
+            <a:r>
+              <a:rPr lang="en-US" sz="1800" dirty="0">
+                <a:solidFill>
+                  <a:srgbClr val="111111"/>
+                </a:solidFill>
+                <a:latin typeface="Calibri" pitchFamily="34" charset="0"/>
+                <a:ea typeface="Calibri" pitchFamily="34" charset="-122"/>
+                <a:cs typeface="Calibri" pitchFamily="34" charset="-120"/>
+              </a:rPr>
+              <a:t>Photo, board summary (Dormant volcano): “Kilimanjaro” by ian 1602, CC BY-NC 2.0, via Flickr (https://www.flickr.com/photos/98181641@N00/2179855841)</a:t>
+            </a:r>
+            <a:endParaRPr lang="en-US" sz="1800" dirty="0"/>
+          </a:p>
+        </p:txBody>
+      </p:sp>
+      <p:sp>
+        <p:nvSpPr>
+          <p:cNvPr id="25" name="Slide Number Placeholder 0"/>
+          <p:cNvSpPr>
+            <a:spLocks noGrp="1"/>
+          </p:cNvSpPr>
+          <p:nvPr>
+            <p:ph type="sldNum" sz="quarter" idx="4294967295"/>
+          </p:nvPr>
+        </p:nvSpPr>
+        <p:spPr>
+          <a:xfrm>
+            <a:off x="27432" y="91440"/>
+            <a:ext cx="585216" cy="475488"/>
+          </a:xfrm>
+          <a:prstGeom prst="rect">
+            <a:avLst/>
+          </a:prstGeom>
+          <a:extLst>
+            <a:ext uri="{C572A759-6A51-4108-AA02-DFA0A04FC94B}">
+              <ma14:wrappingTextBoxFlag xmlns:ma14="http://schemas.microsoft.com/office/mac/drawingml/2011/main" val="0"/>
+            </a:ext>
+          </a:extLst>
+        </p:spPr>
+        <p:txBody>
+          <a:bodyPr/>
+          <a:lstStyle>
+            <a:lvl1pPr>
+              <a:defRPr sz="2000">
+                <a:solidFill>
+                  <a:srgbClr val="FFFFFF"/>
+                </a:solidFill>
+                <a:latin typeface="Calibri"/>
+                <a:ea typeface="Calibri"/>
+                <a:cs typeface="Calibri"/>
+              </a:defRPr>
+            </a:lvl1pPr>
+          </a:lstStyle>
+          <a:p>
+            <a:pPr algn="ctr"/>
+            <a:fld id="{F7021451-1387-4CA6-816F-3879F97B5CBC}" type="slidenum">
+              <a:rPr b="1" lang="en-US"/>
+              <a:t>61</a:t>
+            </a:fld>
+            <a:endParaRPr lang="en-US"/>
+          </a:p>
+        </p:txBody>
+      </p:sp>
+    </p:spTree>
+  </p:cSld>
+  <p:clrMapOvr>
+    <a:masterClrMapping/>
+  </p:clrMapOvr>
+</p:sld>
+</file>
+
+<file path=ppt/slides/slide62.xml><?xml version="1.0" encoding="utf-8"?>
+<p:sld xmlns:a="http://schemas.openxmlformats.org/drawingml/2006/main" xmlns:r="http://schemas.openxmlformats.org/officeDocument/2006/relationships" xmlns:p="http://schemas.openxmlformats.org/presentationml/2006/main">
+  <p:cSld name="Slide 62">
+    <p:spTree>
+      <p:nvGrpSpPr>
+        <p:cNvPr id="1" name=""/>
+        <p:cNvGrpSpPr/>
+        <p:nvPr/>
+      </p:nvGrpSpPr>
+      <p:grpSpPr>
+        <a:xfrm>
+          <a:off x="0" y="0"/>
+          <a:ext cx="0" cy="0"/>
+          <a:chOff x="0" y="0"/>
+          <a:chExt cx="0" cy="0"/>
+        </a:xfrm>
+      </p:grpSpPr>
+      <p:sp>
+        <p:nvSpPr>
+          <p:cNvPr id="2" name="Text 0"/>
+          <p:cNvSpPr/>
+          <p:nvPr/>
+        </p:nvSpPr>
+        <p:spPr>
+          <a:xfrm>
+            <a:off x="457200" y="713232"/>
+            <a:ext cx="11368735" cy="274320"/>
+          </a:xfrm>
+          <a:prstGeom prst="rect">
+            <a:avLst/>
+          </a:prstGeom>
+          <a:noFill/>
+          <a:ln/>
+        </p:spPr>
+        <p:txBody>
+          <a:bodyPr wrap="square" lIns="0" tIns="0" rIns="0" bIns="0" rtlCol="0" anchor="ctr"/>
+          <a:lstStyle/>
+          <a:p>
+            <a:pPr algn="r" indent="0" marL="0">
+              <a:buNone/>
+            </a:pPr>
+            <a:r>
+              <a:rPr lang="en-US" sz="1400" b="1" dirty="0">
+                <a:solidFill>
+                  <a:srgbClr val="1C3F6E"/>
+                </a:solidFill>
+                <a:latin typeface="Calibri" pitchFamily="34" charset="0"/>
+                <a:ea typeface="Calibri" pitchFamily="34" charset="-122"/>
+                <a:cs typeface="Calibri" pitchFamily="34" charset="-120"/>
+              </a:rPr>
+              <a:t>REFERENCES</a:t>
+            </a:r>
+            <a:endParaRPr lang="en-US" sz="1400" dirty="0"/>
+          </a:p>
+        </p:txBody>
+      </p:sp>
+      <p:pic>
+        <p:nvPicPr>
+          <p:cNvPr id="3" name="Image 0" descr="/home/claude/f4/img/minesec_sheet.png">    </p:cNvPr>
+          <p:cNvPicPr>
+            <a:picLocks noChangeAspect="1"/>
+          </p:cNvPicPr>
+          <p:nvPr/>
+        </p:nvPicPr>
+        <p:blipFill>
+          <a:blip r:embed="rId1"/>
+          <a:stretch>
+            <a:fillRect/>
+          </a:stretch>
+        </p:blipFill>
+        <p:spPr>
+          <a:xfrm>
+            <a:off x="0" y="658368"/>
+            <a:ext cx="5120640" cy="5833872"/>
+          </a:xfrm>
+          <a:prstGeom prst="rect">
+            <a:avLst/>
+          </a:prstGeom>
+        </p:spPr>
+      </p:pic>
+      <p:sp>
+        <p:nvSpPr>
+          <p:cNvPr id="4" name="Text 1"/>
+          <p:cNvSpPr/>
+          <p:nvPr/>
+        </p:nvSpPr>
+        <p:spPr>
+          <a:xfrm>
+            <a:off x="5349240" y="1005840"/>
+            <a:ext cx="6522415" cy="731520"/>
+          </a:xfrm>
+          <a:prstGeom prst="rect">
+            <a:avLst/>
+          </a:prstGeom>
+          <a:noFill/>
+          <a:ln/>
+        </p:spPr>
+        <p:txBody>
+          <a:bodyPr wrap="square" lIns="0" tIns="0" rIns="0" bIns="0" rtlCol="0" anchor="ctr">
+            <a:normAutofit/>
+          </a:bodyPr>
+          <a:lstStyle/>
+          <a:p>
+            <a:pPr algn="ctr" indent="0" marL="0">
+              <a:buNone/>
+            </a:pPr>
+            <a:r>
+              <a:rPr lang="en-US" sz="3600" b="1" dirty="0">
+                <a:solidFill>
+                  <a:srgbClr val="990011"/>
+                </a:solidFill>
+                <a:latin typeface="Times New Roman" pitchFamily="34" charset="0"/>
+                <a:ea typeface="Times New Roman" pitchFamily="34" charset="-122"/>
+                <a:cs typeface="Times New Roman" pitchFamily="34" charset="-120"/>
+              </a:rPr>
+              <a:t>References (continued)</a:t>
+            </a:r>
+            <a:endParaRPr lang="en-US" sz="3600" dirty="0"/>
+          </a:p>
+        </p:txBody>
+      </p:sp>
+      <p:sp>
+        <p:nvSpPr>
+          <p:cNvPr id="5" name="Text 2"/>
+          <p:cNvSpPr/>
+          <p:nvPr/>
+        </p:nvSpPr>
+        <p:spPr>
+          <a:xfrm>
+            <a:off x="5349240" y="1783080"/>
+            <a:ext cx="6522415" cy="4663440"/>
+          </a:xfrm>
+          <a:prstGeom prst="rect">
+            <a:avLst/>
+          </a:prstGeom>
+          <a:noFill/>
+          <a:ln/>
+        </p:spPr>
+        <p:txBody>
+          <a:bodyPr wrap="square" lIns="0" tIns="0" rIns="0" bIns="0" rtlCol="0" anchor="t"/>
+          <a:lstStyle/>
+          <a:p>
+            <a:pPr algn="l" marL="342900" indent="-342900">
+              <a:spcAft>
+                <a:spcPts val="800"/>
+              </a:spcAft>
+              <a:buSzPct val="100000"/>
+              <a:buChar char="•"/>
+            </a:pPr>
+            <a:r>
+              <a:rPr lang="en-US" sz="1800" dirty="0">
+                <a:solidFill>
+                  <a:srgbClr val="111111"/>
+                </a:solidFill>
+                <a:latin typeface="Calibri" pitchFamily="34" charset="0"/>
+                <a:ea typeface="Calibri" pitchFamily="34" charset="-122"/>
+                <a:cs typeface="Calibri" pitchFamily="34" charset="-120"/>
+              </a:rPr>
+              <a:t>Photo, board summary (Shield (basic lava) cones): “Fire and Stars” by howardignatius, CC BY-NC-ND 2.0, via Flickr (https://www.flickr.com/photos/25659032@N07/39966052052)</a:t>
+            </a:r>
+            <a:endParaRPr lang="en-US" sz="1800" dirty="0"/>
+          </a:p>
+          <a:p>
+            <a:pPr algn="l" marL="342900" indent="-342900">
+              <a:spcAft>
+                <a:spcPts val="800"/>
+              </a:spcAft>
+              <a:buSzPct val="100000"/>
+              <a:buChar char="•"/>
+            </a:pPr>
+            <a:r>
+              <a:rPr lang="en-US" sz="1800" dirty="0">
+                <a:solidFill>
+                  <a:srgbClr val="111111"/>
+                </a:solidFill>
+                <a:latin typeface="Calibri" pitchFamily="34" charset="0"/>
+                <a:ea typeface="Calibri" pitchFamily="34" charset="-122"/>
+                <a:cs typeface="Calibri" pitchFamily="34" charset="-120"/>
+              </a:rPr>
+              <a:t>Photo, board summary (Composite cones (stratovolcanoes)): “Mayon Volcano, Albay, Luzon, Philippines” by Ray in Manila, CC BY 2.0, via Flickr (https://www.flickr.com/photos/21186555@N07/20591774278)</a:t>
+            </a:r>
+            <a:endParaRPr lang="en-US" sz="1800" dirty="0"/>
+          </a:p>
+          <a:p>
+            <a:pPr algn="l" marL="342900" indent="-342900">
+              <a:spcAft>
+                <a:spcPts val="800"/>
+              </a:spcAft>
+              <a:buSzPct val="100000"/>
+              <a:buChar char="•"/>
+            </a:pPr>
+            <a:r>
+              <a:rPr lang="en-US" sz="1800" dirty="0">
+                <a:solidFill>
+                  <a:srgbClr val="111111"/>
+                </a:solidFill>
+                <a:latin typeface="Calibri" pitchFamily="34" charset="0"/>
+                <a:ea typeface="Calibri" pitchFamily="34" charset="-122"/>
+                <a:cs typeface="Calibri" pitchFamily="34" charset="-120"/>
+              </a:rPr>
+              <a:t>Photo, board summary (Lava plateau): “Snapshot, Daguoye Columnar Basalt, Penghu, Taiwan, 隨拍, 池東大菓葉玄武岩, 大菓葉柱狀” by bryan..., CC BY-SA 2.0, via Flickr (https://www.flickr.com/photos/91049143@N00/52316527525)</a:t>
+            </a:r>
+            <a:endParaRPr lang="en-US" sz="1800" dirty="0"/>
+          </a:p>
+          <a:p>
+            <a:pPr algn="l" marL="342900" indent="-342900">
+              <a:spcAft>
+                <a:spcPts val="800"/>
+              </a:spcAft>
+              <a:buSzPct val="100000"/>
+              <a:buChar char="•"/>
+            </a:pPr>
+            <a:r>
+              <a:rPr lang="en-US" sz="1800" dirty="0">
+                <a:solidFill>
+                  <a:srgbClr val="111111"/>
+                </a:solidFill>
+                <a:latin typeface="Calibri" pitchFamily="34" charset="0"/>
+                <a:ea typeface="Calibri" pitchFamily="34" charset="-122"/>
+                <a:cs typeface="Calibri" pitchFamily="34" charset="-120"/>
+              </a:rPr>
+              <a:t>Diagrams and animations: drawn for this lesson (Geography Department).</a:t>
+            </a:r>
+            <a:endParaRPr lang="en-US" sz="1800" dirty="0"/>
+          </a:p>
+        </p:txBody>
+      </p:sp>
+      <p:sp>
+        <p:nvSpPr>
+          <p:cNvPr id="25" name="Slide Number Placeholder 0"/>
+          <p:cNvSpPr>
+            <a:spLocks noGrp="1"/>
+          </p:cNvSpPr>
+          <p:nvPr>
+            <p:ph type="sldNum" sz="quarter" idx="4294967295"/>
+          </p:nvPr>
+        </p:nvSpPr>
+        <p:spPr>
+          <a:xfrm>
+            <a:off x="27432" y="91440"/>
+            <a:ext cx="585216" cy="475488"/>
+          </a:xfrm>
+          <a:prstGeom prst="rect">
+            <a:avLst/>
+          </a:prstGeom>
+          <a:extLst>
+            <a:ext uri="{C572A759-6A51-4108-AA02-DFA0A04FC94B}">
+              <ma14:wrappingTextBoxFlag xmlns:ma14="http://schemas.microsoft.com/office/mac/drawingml/2011/main" val="0"/>
+            </a:ext>
+          </a:extLst>
+        </p:spPr>
+        <p:txBody>
+          <a:bodyPr/>
+          <a:lstStyle>
+            <a:lvl1pPr>
+              <a:defRPr sz="2000">
+                <a:solidFill>
+                  <a:srgbClr val="FFFFFF"/>
+                </a:solidFill>
+                <a:latin typeface="Calibri"/>
+                <a:ea typeface="Calibri"/>
+                <a:cs typeface="Calibri"/>
+              </a:defRPr>
+            </a:lvl1pPr>
+          </a:lstStyle>
+          <a:p>
+            <a:pPr algn="ctr"/>
+            <a:fld id="{F7021451-1387-4CA6-816F-3879F97B5CBC}" type="slidenum">
+              <a:rPr b="1" lang="en-US"/>
+              <a:t>62</a:t>
+            </a:fld>
+            <a:endParaRPr lang="en-US"/>
+          </a:p>
+        </p:txBody>
+      </p:sp>
+    </p:spTree>
+  </p:cSld>
+  <p:clrMapOvr>
+    <a:masterClrMapping/>
+  </p:clrMapOvr>
+</p:sld>
+</file>
+
 <file path=ppt/slides/slide7.xml><?xml version="1.0" encoding="utf-8"?>
 <p:sld xmlns:a="http://schemas.openxmlformats.org/drawingml/2006/main" xmlns:r="http://schemas.openxmlformats.org/officeDocument/2006/relationships" xmlns:p="http://schemas.openxmlformats.org/presentationml/2006/main">
   <p:cSld name="Slide 7">
@@ -22676,7 +24994,7 @@
                 <a:ea typeface="Times New Roman" pitchFamily="34" charset="-122"/>
                 <a:cs typeface="Times New Roman" pitchFamily="34" charset="-120"/>
               </a:rPr>
-              <a:t>Explain the process of volcanism.</a:t>
+              <a:t>Define volcanism, magma and lava.</a:t>
             </a:r>
             <a:endParaRPr lang="en-US" sz="4000" dirty="0"/>
           </a:p>
@@ -22698,7 +25016,7 @@
                 <a:ea typeface="Times New Roman" pitchFamily="34" charset="-122"/>
                 <a:cs typeface="Times New Roman" pitchFamily="34" charset="-120"/>
               </a:rPr>
-              <a:t>Describe the products of volcanoes.</a:t>
+              <a:t>Distinguish active, dormant and extinct volcanoes.</a:t>
             </a:r>
             <a:endParaRPr lang="en-US" sz="4000" dirty="0"/>
           </a:p>
@@ -22720,7 +25038,7 @@
                 <a:ea typeface="Times New Roman" pitchFamily="34" charset="-122"/>
                 <a:cs typeface="Times New Roman" pitchFamily="34" charset="-120"/>
               </a:rPr>
-              <a:t>Explain the different types of volcanic cones and depressions.</a:t>
+              <a:t>Describe the products of an eruption.</a:t>
             </a:r>
             <a:endParaRPr lang="en-US" sz="4000" dirty="0"/>
           </a:p>
@@ -22832,7 +25150,7 @@
                 <a:ea typeface="Calibri" pitchFamily="34" charset="-122"/>
                 <a:cs typeface="Calibri" pitchFamily="34" charset="-120"/>
               </a:rPr>
-              <a:t>PREVIOUS KNOWLEDGE</a:t>
+              <a:t>OBJECTIVES</a:t>
             </a:r>
             <a:endParaRPr lang="en-US" sz="1400" dirty="0"/>
           </a:p>
@@ -22897,7 +25215,7 @@
                 <a:ea typeface="Times New Roman" pitchFamily="34" charset="-122"/>
                 <a:cs typeface="Times New Roman" pitchFamily="34" charset="-120"/>
               </a:rPr>
-              <a:t>Previous Knowledge</a:t>
+              <a:t>Objectives (continued)</a:t>
             </a:r>
             <a:endParaRPr lang="en-US" sz="3600" dirty="0"/>
           </a:p>
@@ -22929,7 +25247,8 @@
                 <a:spcPts val="800"/>
               </a:spcAft>
               <a:buSzPct val="100000"/>
-              <a:buChar char="•"/>
+              <a:buFont typeface="+mj-lt"/>
+              <a:buAutoNum type="arabicPeriod" startAt="1"/>
             </a:pPr>
             <a:r>
               <a:rPr lang="en-US" sz="4000" dirty="0">
@@ -22940,28 +25259,7 @@
                 <a:ea typeface="Times New Roman" pitchFamily="34" charset="-122"/>
                 <a:cs typeface="Times New Roman" pitchFamily="34" charset="-120"/>
               </a:rPr>
-              <a:t>Magma rises at plate margins and hot spots.</a:t>
-            </a:r>
-            <a:endParaRPr lang="en-US" sz="4000" dirty="0"/>
-          </a:p>
-          <a:p>
-            <a:pPr algn="l" marL="342900" indent="-342900">
-              <a:spcAft>
-                <a:spcPts val="800"/>
-              </a:spcAft>
-              <a:buSzPct val="100000"/>
-              <a:buChar char="•"/>
-            </a:pPr>
-            <a:r>
-              <a:rPr lang="en-US" sz="4000" dirty="0">
-                <a:solidFill>
-                  <a:srgbClr val="111111"/>
-                </a:solidFill>
-                <a:latin typeface="Times New Roman" pitchFamily="34" charset="0"/>
-                <a:ea typeface="Times New Roman" pitchFamily="34" charset="-122"/>
-                <a:cs typeface="Times New Roman" pitchFamily="34" charset="-120"/>
-              </a:rPr>
-              <a:t>Mount Cameroon is an active volcano.</a:t>
+              <a:t>Explain the formation of volcanic cones and other landforms.</a:t>
             </a:r>
             <a:endParaRPr lang="en-US" sz="4000" dirty="0"/>
           </a:p>
@@ -23073,7 +25371,7 @@
                 <a:ea typeface="Calibri" pitchFamily="34" charset="-122"/>
                 <a:cs typeface="Calibri" pitchFamily="34" charset="-120"/>
               </a:rPr>
-              <a:t>REAL-LIFE SITUATION</a:t>
+              <a:t>PREVIOUS KNOWLEDGE</a:t>
             </a:r>
             <a:endParaRPr lang="en-US" sz="1400" dirty="0"/>
           </a:p>
@@ -23096,7 +25394,7 @@
         <p:spPr>
           <a:xfrm>
             <a:off x="0" y="658368"/>
-            <a:ext cx="3840480" cy="5833872"/>
+            <a:ext cx="5120640" cy="5833872"/>
           </a:xfrm>
           <a:prstGeom prst="rect">
             <a:avLst/>
@@ -23111,8 +25409,8 @@
         </p:nvSpPr>
         <p:spPr>
           <a:xfrm>
-            <a:off x="4069080" y="1005840"/>
-            <a:ext cx="7802575" cy="731520"/>
+            <a:off x="5349240" y="1005840"/>
+            <a:ext cx="6522415" cy="731520"/>
           </a:xfrm>
           <a:prstGeom prst="rect">
             <a:avLst/>
@@ -23138,7 +25436,7 @@
                 <a:ea typeface="Times New Roman" pitchFamily="34" charset="-122"/>
                 <a:cs typeface="Times New Roman" pitchFamily="34" charset="-120"/>
               </a:rPr>
-              <a:t>Situation in Real Life</a:t>
+              <a:t>Previous Knowledge</a:t>
             </a:r>
             <a:endParaRPr lang="en-US" sz="3600" dirty="0"/>
           </a:p>
@@ -23152,8 +25450,8 @@
         </p:nvSpPr>
         <p:spPr>
           <a:xfrm>
-            <a:off x="4069080" y="1783080"/>
-            <a:ext cx="7802575" cy="4663440"/>
+            <a:off x="5349240" y="1783080"/>
+            <a:ext cx="6522415" cy="4663440"/>
           </a:xfrm>
           <a:prstGeom prst="rect">
             <a:avLst/>
@@ -23165,11 +25463,12 @@
           <a:bodyPr wrap="square" lIns="0" tIns="0" rIns="0" bIns="0" rtlCol="0" anchor="t"/>
           <a:lstStyle/>
           <a:p>
-            <a:pPr algn="l" indent="0" marL="0">
+            <a:pPr algn="l" marL="342900" indent="-342900">
               <a:spcAft>
                 <a:spcPts val="800"/>
               </a:spcAft>
-              <a:buNone/>
+              <a:buSzPct val="100000"/>
+              <a:buChar char="•"/>
             </a:pPr>
             <a:r>
               <a:rPr lang="en-US" sz="4000" dirty="0">
@@ -23180,7 +25479,49 @@
                 <a:ea typeface="Times New Roman" pitchFamily="34" charset="-122"/>
                 <a:cs typeface="Times New Roman" pitchFamily="34" charset="-120"/>
               </a:rPr>
-              <a:t>In 2000, lava from Mount Cameroon flowed towards the road near Bakingili. Some visitors are surprised that the mountain has gentle slopes, while pictures of Mount Fuji show a steep cone.</a:t>
+              <a:t>Magma rises at weak zones of the crust.</a:t>
+            </a:r>
+            <a:endParaRPr lang="en-US" sz="4000" dirty="0"/>
+          </a:p>
+          <a:p>
+            <a:pPr algn="l" marL="342900" indent="-342900">
+              <a:spcAft>
+                <a:spcPts val="800"/>
+              </a:spcAft>
+              <a:buSzPct val="100000"/>
+              <a:buChar char="•"/>
+            </a:pPr>
+            <a:r>
+              <a:rPr lang="en-US" sz="4000" dirty="0">
+                <a:solidFill>
+                  <a:srgbClr val="111111"/>
+                </a:solidFill>
+                <a:latin typeface="Times New Roman" pitchFamily="34" charset="0"/>
+                <a:ea typeface="Times New Roman" pitchFamily="34" charset="-122"/>
+                <a:cs typeface="Times New Roman" pitchFamily="34" charset="-120"/>
+              </a:rPr>
+              <a:t>Mount Cameroon is on the Cameroon Volcanic Line.</a:t>
+            </a:r>
+            <a:endParaRPr lang="en-US" sz="4000" dirty="0"/>
+          </a:p>
+          <a:p>
+            <a:pPr algn="l" marL="342900" indent="-342900">
+              <a:spcAft>
+                <a:spcPts val="800"/>
+              </a:spcAft>
+              <a:buSzPct val="100000"/>
+              <a:buChar char="•"/>
+            </a:pPr>
+            <a:r>
+              <a:rPr lang="en-US" sz="4000" dirty="0">
+                <a:solidFill>
+                  <a:srgbClr val="111111"/>
+                </a:solidFill>
+                <a:latin typeface="Times New Roman" pitchFamily="34" charset="0"/>
+                <a:ea typeface="Times New Roman" pitchFamily="34" charset="-122"/>
+                <a:cs typeface="Times New Roman" pitchFamily="34" charset="-120"/>
+              </a:rPr>
+              <a:t>Shield volcanoes have gentle slopes.</a:t>
             </a:r>
             <a:endParaRPr lang="en-US" sz="4000" dirty="0"/>
           </a:p>

--- a/lecons/LSA/Geomorphology/08_LSA_GEOMO_L06_Volcanism.pptx
+++ b/lecons/LSA/Geomorphology/08_LSA_GEOMO_L06_Volcanism.pptx
@@ -67,9 +67,12 @@
     <p:sldId id="315" r:id="rId61"/>
     <p:sldId id="316" r:id="rId62"/>
     <p:sldId id="317" r:id="rId63"/>
+    <p:sldId id="318" r:id="rId64"/>
+    <p:sldId id="319" r:id="rId65"/>
+    <p:sldId id="320" r:id="rId66"/>
   </p:sldIdLst>
   <p:notesMasterIdLst>
-    <p:notesMasterId r:id="rId64"/>
+    <p:notesMasterId r:id="rId67"/>
   </p:notesMasterIdLst>
   <p:sldSz cx="12192000" cy="6858000"/>
   <p:notesSz cx="6858000" cy="12192000"/>
@@ -3115,7 +3118,7 @@
           <a:p>
             <a:r>
               <a:rPr lang="en-US" dirty="0"/>
-              <a:t>Let us copy the definitions. The key terms of this lesson are defined as follows. On this slide we have Volcanism (vulcanicity) and Magma. Write each point on a new line, with the key term first, and explain it in your own words when we revise. When you finish, we go to the next slide.</a:t>
+              <a:t>Let us copy the definitions. The key terms of this lesson are defined as follows. On this slide we have Volcanicity and Magma. Write each point on a new line, with the key term first, and explain it in your own words when we revise. When you finish, we go to the next slide.</a:t>
             </a:r>
             <a:endParaRPr lang="en-US" dirty="0"/>
           </a:p>
@@ -3203,7 +3206,7 @@
           <a:p>
             <a:r>
               <a:rPr lang="en-US" dirty="0"/>
-              <a:t>We continue with the definitions. On this slide we have Lava and Pyroclasts. Write each point on a new line, with the key term first, and explain it in your own words when we revise.</a:t>
+              <a:t>We continue with the definitions. On this slide we have Lava and Cone. Write each point on a new line, with the key term first, and explain it in your own words when we revise.</a:t>
             </a:r>
             <a:endParaRPr lang="en-US" dirty="0"/>
           </a:p>
@@ -3291,7 +3294,7 @@
           <a:p>
             <a:r>
               <a:rPr lang="en-US" dirty="0"/>
-              <a:t>Let us copy The Life Cycle of a Volcano. Volcanoes are classified by their activity as follows. Copy the point on Active volcano on the left, then draw the diagram on the right: the life cycle of a volcano. Give it a title and label it clearly.</a:t>
+              <a:t>Let us copy Meaning and Process of Volcanism. Volcanism is explained as follows. Copy the point on Meaning: write the key term first, then its explanation.</a:t>
             </a:r>
             <a:endParaRPr lang="en-US" dirty="0"/>
           </a:p>
@@ -3379,7 +3382,7 @@
           <a:p>
             <a:r>
               <a:rPr lang="en-US" dirty="0"/>
-              <a:t>Copy the point on Dormant volcano on the left, then draw the diagram on the right: kilimanjaro. Give it a title and label it clearly.</a:t>
+              <a:t>Copy the point on Process on the left, then draw the diagram on the right: the life cycle of a volcano. Give it a title and label it clearly.</a:t>
             </a:r>
             <a:endParaRPr lang="en-US" dirty="0"/>
           </a:p>
@@ -3555,7 +3558,7 @@
           <a:p>
             <a:r>
               <a:rPr lang="en-US" dirty="0"/>
-              <a:t>Copy the point on Extinct volcano on the left, then draw the diagram on the right: volcanic necks near Rhumsiki. Give it a title and label it clearly.</a:t>
+              <a:t>Let us copy Stages in the Life Cycle of a Volcano. A volcano passes through the following stages. Copy the point on Active volcano on the left, then draw the diagram on the right: mount Cameroon. Give it a title and label it clearly.</a:t>
             </a:r>
             <a:endParaRPr lang="en-US" dirty="0"/>
           </a:p>
@@ -3643,7 +3646,7 @@
           <a:p>
             <a:r>
               <a:rPr lang="en-US" dirty="0"/>
-              <a:t>Let us copy Products of a Volcanic Eruption. An eruption releases the following products. On this slide we have Lava. Write each point on a new line, with the key term first, and explain it in your own words when we revise.</a:t>
+              <a:t>Copy the point on Dormant volcano on the left, then draw the diagram on the right: kilimanjaro. Give it a title and label it clearly.</a:t>
             </a:r>
             <a:endParaRPr lang="en-US" dirty="0"/>
           </a:p>
@@ -3731,7 +3734,7 @@
           <a:p>
             <a:r>
               <a:rPr lang="en-US" dirty="0"/>
-              <a:t>Copy the point on Pyroclastic materials on the left, then draw the diagram on the right: products of an eruption. Give it a title and label it clearly.</a:t>
+              <a:t>Copy the point on Extinct volcano on the left, then draw the diagram on the right: volcanic necks at Rhumsiki. Give it a title and label it clearly.</a:t>
             </a:r>
             <a:endParaRPr lang="en-US" dirty="0"/>
           </a:p>
@@ -3819,7 +3822,7 @@
           <a:p>
             <a:r>
               <a:rPr lang="en-US" dirty="0"/>
-              <a:t>We continue with Products of a Volcanic Eruption. On this slide we have Gases. Write each point on a new line, with the key term first, and explain it in your own words when we revise.</a:t>
+              <a:t>Let us copy Products of Volcanic Eruptions. An eruption releases the following products. Copy the point on Lava: write the key term first, then its explanation.</a:t>
             </a:r>
             <a:endParaRPr lang="en-US" dirty="0"/>
           </a:p>
@@ -3907,7 +3910,7 @@
           <a:p>
             <a:r>
               <a:rPr lang="en-US" dirty="0"/>
-              <a:t>Let us copy Volcanic Cones. The main types of volcanic cones are the following. Copy the point on Shield (basic lava) cones on the left, then draw the diagram on the right: a shield volcano. Give it a title and label it clearly.</a:t>
+              <a:t>Copy the point on Pyroclasts on the left, then draw the diagram on the right: the products of an eruption. Give it a title and label it clearly.</a:t>
             </a:r>
             <a:endParaRPr lang="en-US" dirty="0"/>
           </a:p>
@@ -3995,7 +3998,7 @@
           <a:p>
             <a:r>
               <a:rPr lang="en-US" dirty="0"/>
-              <a:t>We continue with Volcanic Cones. On this slide we have Acid lava domes and Ash and cinder cones. Write each point on a new line, with the key term first, and explain it in your own words when we revise.</a:t>
+              <a:t>We continue with Products of Volcanic Eruptions. Copy the point on Gases: write the key term first, then its explanation.</a:t>
             </a:r>
             <a:endParaRPr lang="en-US" dirty="0"/>
           </a:p>
@@ -4083,7 +4086,7 @@
           <a:p>
             <a:r>
               <a:rPr lang="en-US" dirty="0"/>
-              <a:t>Copy the point on Composite cones (stratovolcanoes) on the left, then draw the diagram on the right: a composite cone. Give it a title and label it clearly.</a:t>
+              <a:t>Let us copy Volcanic Cones. Different materials and eruptions build the following types of cones. Copy the point on Basic lava cones (shield volcanoes) on the left, then draw the diagram on the right: a shield volcano. Give it a title and label it clearly.</a:t>
             </a:r>
             <a:endParaRPr lang="en-US" dirty="0"/>
           </a:p>
@@ -4171,7 +4174,7 @@
           <a:p>
             <a:r>
               <a:rPr lang="en-US" dirty="0"/>
-              <a:t>Let us copy Other Volcanic Landforms. Other volcanic landforms are the following. Copy the point on Lava plateau on the left, then draw the diagram on the right: basalt columns. Give it a title and label it clearly.</a:t>
+              <a:t>We continue with Volcanic Cones. Copy the point on Acid lava cones (cumulo-domes): write the key term first, then its explanation.</a:t>
             </a:r>
             <a:endParaRPr lang="en-US" dirty="0"/>
           </a:p>
@@ -4259,7 +4262,7 @@
           <a:p>
             <a:r>
               <a:rPr lang="en-US" dirty="0"/>
-              <a:t>Copy the point on Crater on the left, then draw the diagram on the right: a crater. Give it a title and label it clearly.</a:t>
+              <a:t>We continue with Volcanic Cones. Copy the point on Ash and cinder cones: write the key term first, then its explanation.</a:t>
             </a:r>
             <a:endParaRPr lang="en-US" dirty="0"/>
           </a:p>
@@ -4347,7 +4350,7 @@
           <a:p>
             <a:r>
               <a:rPr lang="en-US" dirty="0"/>
-              <a:t>We continue with Other Volcanic Landforms. On this slide we have Crater lakes and Caldera. Write each point on a new line, with the key term first, and explain it in your own words when we revise.</a:t>
+              <a:t>Copy the point on Composite cones (strato-volcanoes) on the left, then draw the diagram on the right: a composite cone. Give it a title and label it clearly.</a:t>
             </a:r>
             <a:endParaRPr lang="en-US" dirty="0"/>
           </a:p>
@@ -4523,7 +4526,7 @@
           <a:p>
             <a:r>
               <a:rPr lang="en-US" dirty="0"/>
-              <a:t>Now let us check what you have understood. Question 1: Distinguish an active volcano from an extinct volcano with one example each. Answer in your exercise book.</a:t>
+              <a:t>Let us copy Lava Plateaux and Volcanic Depressions. Volcanism also forms the following landforms. Copy the point on Lava plateaux on the left, then draw the diagram on the right: basalt columns. Give it a title and label it clearly.</a:t>
             </a:r>
             <a:endParaRPr lang="en-US" dirty="0"/>
           </a:p>
@@ -4611,7 +4614,7 @@
           <a:p>
             <a:r>
               <a:rPr lang="en-US" dirty="0"/>
-              <a:t>The expected answer is: an active volcano has erupted in recorded history (Mount Cameroon); an extinct one will not erupt again (Rhumsiki necks). If you got it right, well done.</a:t>
+              <a:t>Copy the point on Craters and crater lakes on the left, then draw the diagram on the right: a crater. Give it a title and label it clearly.</a:t>
             </a:r>
             <a:endParaRPr lang="en-US" dirty="0"/>
           </a:p>
@@ -4699,7 +4702,7 @@
           <a:p>
             <a:r>
               <a:rPr lang="en-US" dirty="0"/>
-              <a:t>Now let us check what you have understood. Question 2: Why are shield volcanoes wide and composite cones steep? Answer in your exercise book.</a:t>
+              <a:t>We continue with Lava Plateaux and Volcanic Depressions. Copy the point on Calderas: write the key term first, then its explanation.</a:t>
             </a:r>
             <a:endParaRPr lang="en-US" dirty="0"/>
           </a:p>
@@ -4787,7 +4790,7 @@
           <a:p>
             <a:r>
               <a:rPr lang="en-US" dirty="0"/>
-              <a:t>The expected answer is: shield volcanoes are built by runny lava that flows far; composite cones are built by layers of lava and ash that pile up. If you got it right, well done.</a:t>
+              <a:t>Now let us check what you have understood. Question 1: Distinguish an active volcano from an extinct volcano with one example each. Answer in your exercise book.</a:t>
             </a:r>
             <a:endParaRPr lang="en-US" dirty="0"/>
           </a:p>
@@ -4875,7 +4878,7 @@
           <a:p>
             <a:r>
               <a:rPr lang="en-US" dirty="0"/>
-              <a:t>For those who need more practice, fill in the blanks in your exercise book. The answers are: number 1, magma; number 2, dormant; number 3, caldera.</a:t>
+              <a:t>The expected answer is: an active volcano has erupted in recorded history (Mount Cameroon); an extinct one will not erupt again (Rhumsiki necks). If you got it right, well done.</a:t>
             </a:r>
             <a:endParaRPr lang="en-US" dirty="0"/>
           </a:p>
@@ -4963,7 +4966,7 @@
           <a:p>
             <a:r>
               <a:rPr lang="en-US" dirty="0"/>
-              <a:t>For your homework: Give one benefit of volcanoes to man. We shall correct it at the beginning of our next lesson.</a:t>
+              <a:t>Now let us check what you have understood. Question 2: Why are shield volcanoes wide and composite cones steep? Answer in your exercise book.</a:t>
             </a:r>
             <a:endParaRPr lang="en-US" dirty="0"/>
           </a:p>
@@ -5051,7 +5054,7 @@
           <a:p>
             <a:r>
               <a:rPr lang="en-US" dirty="0"/>
-              <a:t>Our next lesson will be on Lesson 7: Volcanoes and Man. Thank you for your attention, and see you next time.</a:t>
+              <a:t>The expected answer is: shield volcanoes are built by runny lava that flows far; composite cones are built by layers of lava and ash that pile up. If you got it right, well done.</a:t>
             </a:r>
             <a:endParaRPr lang="en-US" dirty="0"/>
           </a:p>
@@ -5139,7 +5142,7 @@
           <a:p>
             <a:r>
               <a:rPr lang="en-US" dirty="0"/>
-              <a:t>Let us play the bilingual game. I say a word in English, and you give me the French word. Then we do the reverse.</a:t>
+              <a:t>For those who need more practice, fill in the blanks in your exercise book. The answers are: number 1, magma; number 2, dormant; number 3, caldera.</a:t>
             </a:r>
             <a:endParaRPr lang="en-US" dirty="0"/>
           </a:p>
@@ -5227,7 +5230,7 @@
           <a:p>
             <a:r>
               <a:rPr lang="en-US" dirty="0"/>
-              <a:t>I record this information in the official logbook of the class after the lesson.</a:t>
+              <a:t>For your homework: Give one benefit of volcanoes to man. We shall correct it at the beginning of our next lesson.</a:t>
             </a:r>
             <a:endParaRPr lang="en-US" dirty="0"/>
           </a:p>
@@ -5315,7 +5318,7 @@
           <a:p>
             <a:r>
               <a:rPr lang="en-US" dirty="0"/>
-              <a:t>I complete the second page of the logbook: the matter taught, the evaluation, the homework and the attendance.</a:t>
+              <a:t>Our next lesson will be on Lesson 7: Volcanoes and Man. Thank you for your attention, and see you next time.</a:t>
             </a:r>
             <a:endParaRPr lang="en-US" dirty="0"/>
           </a:p>
@@ -5491,7 +5494,7 @@
           <a:p>
             <a:r>
               <a:rPr lang="en-US" dirty="0"/>
-              <a:t>This slide is for me, the teacher: it gives the timing of the lesson and what to do if the projector is not available.</a:t>
+              <a:t>Let us play the bilingual game. I say a word in English, and you give me the French word. Then we do the reverse.</a:t>
             </a:r>
             <a:endParaRPr lang="en-US" dirty="0"/>
           </a:p>
@@ -5579,7 +5582,7 @@
           <a:p>
             <a:r>
               <a:rPr lang="en-US" dirty="0"/>
-              <a:t>Take your time to copy this part; we will continue together.</a:t>
+              <a:t>I record this information in the official logbook of the class after the lesson.</a:t>
             </a:r>
             <a:endParaRPr lang="en-US" dirty="0"/>
           </a:p>
@@ -5667,7 +5670,7 @@
           <a:p>
             <a:r>
               <a:rPr lang="en-US" dirty="0"/>
-              <a:t>These are the references and picture credits used to prepare this lesson.</a:t>
+              <a:t>I complete the second page of the logbook: the matter taught, the evaluation, the homework and the attendance.</a:t>
             </a:r>
             <a:endParaRPr lang="en-US" dirty="0"/>
           </a:p>
@@ -5691,6 +5694,270 @@
             <a:fld id="{F7021451-1387-4CA6-816F-3879F97B5CBC}" type="slidenum">
               <a:rPr lang="en-US"/>
               <a:t>62</a:t>
+            </a:fld>
+            <a:endParaRPr lang="en-US"/>
+          </a:p>
+        </p:txBody>
+      </p:sp>
+    </p:spTree>
+    <p:extLst>
+      <p:ext uri="{BB962C8B-B14F-4D97-AF65-F5344CB8AC3E}">
+        <p14:creationId xmlns:p14="http://schemas.microsoft.com/office/powerpoint/2010/main" val="1024086991"/>
+      </p:ext>
+    </p:extLst>
+  </p:cSld>
+  <p:clrMapOvr>
+    <a:masterClrMapping/>
+  </p:clrMapOvr>
+</p:notes>
+</file>
+
+<file path=ppt/notesSlides/notesSlide63.xml><?xml version="1.0" encoding="utf-8"?>
+<p:notes xmlns:a="http://schemas.openxmlformats.org/drawingml/2006/main" xmlns:r="http://schemas.openxmlformats.org/officeDocument/2006/relationships" xmlns:p="http://schemas.openxmlformats.org/presentationml/2006/main">
+  <p:cSld>
+    <p:spTree>
+      <p:nvGrpSpPr>
+        <p:cNvPr id="1" name=""/>
+        <p:cNvGrpSpPr/>
+        <p:nvPr/>
+      </p:nvGrpSpPr>
+      <p:grpSpPr>
+        <a:xfrm>
+          <a:off x="0" y="0"/>
+          <a:ext cx="0" cy="0"/>
+          <a:chOff x="0" y="0"/>
+          <a:chExt cx="0" cy="0"/>
+        </a:xfrm>
+      </p:grpSpPr>
+      <p:sp>
+        <p:nvSpPr>
+          <p:cNvPr id="2" name="Slide Image Placeholder 1"/>
+          <p:cNvSpPr>
+            <a:spLocks noGrp="1" noRot="1" noChangeAspect="1"/>
+          </p:cNvSpPr>
+          <p:nvPr>
+            <p:ph type="sldImg"/>
+          </p:nvPr>
+        </p:nvSpPr>
+        <p:spPr/>
+      </p:sp>
+      <p:sp>
+        <p:nvSpPr>
+          <p:cNvPr id="3" name="Notes Placeholder 2"/>
+          <p:cNvSpPr>
+            <a:spLocks noGrp="1"/>
+          </p:cNvSpPr>
+          <p:nvPr>
+            <p:ph type="body" idx="1"/>
+          </p:nvPr>
+        </p:nvSpPr>
+        <p:spPr/>
+        <p:txBody>
+          <a:bodyPr/>
+          <a:lstStyle/>
+          <a:p>
+            <a:r>
+              <a:rPr lang="en-US" dirty="0"/>
+              <a:t>This slide is for me, the teacher: it gives the timing of the lesson and what to do if the projector is not available.</a:t>
+            </a:r>
+            <a:endParaRPr lang="en-US" dirty="0"/>
+          </a:p>
+        </p:txBody>
+      </p:sp>
+      <p:sp>
+        <p:nvSpPr>
+          <p:cNvPr id="4" name="Slide Number Placeholder 3"/>
+          <p:cNvSpPr>
+            <a:spLocks noGrp="1"/>
+          </p:cNvSpPr>
+          <p:nvPr>
+            <p:ph type="sldNum" sz="quarter" idx="10"/>
+          </p:nvPr>
+        </p:nvSpPr>
+        <p:spPr/>
+        <p:txBody>
+          <a:bodyPr/>
+          <a:lstStyle/>
+          <a:p>
+            <a:fld id="{F7021451-1387-4CA6-816F-3879F97B5CBC}" type="slidenum">
+              <a:rPr lang="en-US"/>
+              <a:t>63</a:t>
+            </a:fld>
+            <a:endParaRPr lang="en-US"/>
+          </a:p>
+        </p:txBody>
+      </p:sp>
+    </p:spTree>
+    <p:extLst>
+      <p:ext uri="{BB962C8B-B14F-4D97-AF65-F5344CB8AC3E}">
+        <p14:creationId xmlns:p14="http://schemas.microsoft.com/office/powerpoint/2010/main" val="1024086991"/>
+      </p:ext>
+    </p:extLst>
+  </p:cSld>
+  <p:clrMapOvr>
+    <a:masterClrMapping/>
+  </p:clrMapOvr>
+</p:notes>
+</file>
+
+<file path=ppt/notesSlides/notesSlide64.xml><?xml version="1.0" encoding="utf-8"?>
+<p:notes xmlns:a="http://schemas.openxmlformats.org/drawingml/2006/main" xmlns:r="http://schemas.openxmlformats.org/officeDocument/2006/relationships" xmlns:p="http://schemas.openxmlformats.org/presentationml/2006/main">
+  <p:cSld>
+    <p:spTree>
+      <p:nvGrpSpPr>
+        <p:cNvPr id="1" name=""/>
+        <p:cNvGrpSpPr/>
+        <p:nvPr/>
+      </p:nvGrpSpPr>
+      <p:grpSpPr>
+        <a:xfrm>
+          <a:off x="0" y="0"/>
+          <a:ext cx="0" cy="0"/>
+          <a:chOff x="0" y="0"/>
+          <a:chExt cx="0" cy="0"/>
+        </a:xfrm>
+      </p:grpSpPr>
+      <p:sp>
+        <p:nvSpPr>
+          <p:cNvPr id="2" name="Slide Image Placeholder 1"/>
+          <p:cNvSpPr>
+            <a:spLocks noGrp="1" noRot="1" noChangeAspect="1"/>
+          </p:cNvSpPr>
+          <p:nvPr>
+            <p:ph type="sldImg"/>
+          </p:nvPr>
+        </p:nvSpPr>
+        <p:spPr/>
+      </p:sp>
+      <p:sp>
+        <p:nvSpPr>
+          <p:cNvPr id="3" name="Notes Placeholder 2"/>
+          <p:cNvSpPr>
+            <a:spLocks noGrp="1"/>
+          </p:cNvSpPr>
+          <p:nvPr>
+            <p:ph type="body" idx="1"/>
+          </p:nvPr>
+        </p:nvSpPr>
+        <p:spPr/>
+        <p:txBody>
+          <a:bodyPr/>
+          <a:lstStyle/>
+          <a:p>
+            <a:r>
+              <a:rPr lang="en-US" dirty="0"/>
+              <a:t>Take your time to copy this part; we will continue together.</a:t>
+            </a:r>
+            <a:endParaRPr lang="en-US" dirty="0"/>
+          </a:p>
+        </p:txBody>
+      </p:sp>
+      <p:sp>
+        <p:nvSpPr>
+          <p:cNvPr id="4" name="Slide Number Placeholder 3"/>
+          <p:cNvSpPr>
+            <a:spLocks noGrp="1"/>
+          </p:cNvSpPr>
+          <p:nvPr>
+            <p:ph type="sldNum" sz="quarter" idx="10"/>
+          </p:nvPr>
+        </p:nvSpPr>
+        <p:spPr/>
+        <p:txBody>
+          <a:bodyPr/>
+          <a:lstStyle/>
+          <a:p>
+            <a:fld id="{F7021451-1387-4CA6-816F-3879F97B5CBC}" type="slidenum">
+              <a:rPr lang="en-US"/>
+              <a:t>64</a:t>
+            </a:fld>
+            <a:endParaRPr lang="en-US"/>
+          </a:p>
+        </p:txBody>
+      </p:sp>
+    </p:spTree>
+    <p:extLst>
+      <p:ext uri="{BB962C8B-B14F-4D97-AF65-F5344CB8AC3E}">
+        <p14:creationId xmlns:p14="http://schemas.microsoft.com/office/powerpoint/2010/main" val="1024086991"/>
+      </p:ext>
+    </p:extLst>
+  </p:cSld>
+  <p:clrMapOvr>
+    <a:masterClrMapping/>
+  </p:clrMapOvr>
+</p:notes>
+</file>
+
+<file path=ppt/notesSlides/notesSlide65.xml><?xml version="1.0" encoding="utf-8"?>
+<p:notes xmlns:a="http://schemas.openxmlformats.org/drawingml/2006/main" xmlns:r="http://schemas.openxmlformats.org/officeDocument/2006/relationships" xmlns:p="http://schemas.openxmlformats.org/presentationml/2006/main">
+  <p:cSld>
+    <p:spTree>
+      <p:nvGrpSpPr>
+        <p:cNvPr id="1" name=""/>
+        <p:cNvGrpSpPr/>
+        <p:nvPr/>
+      </p:nvGrpSpPr>
+      <p:grpSpPr>
+        <a:xfrm>
+          <a:off x="0" y="0"/>
+          <a:ext cx="0" cy="0"/>
+          <a:chOff x="0" y="0"/>
+          <a:chExt cx="0" cy="0"/>
+        </a:xfrm>
+      </p:grpSpPr>
+      <p:sp>
+        <p:nvSpPr>
+          <p:cNvPr id="2" name="Slide Image Placeholder 1"/>
+          <p:cNvSpPr>
+            <a:spLocks noGrp="1" noRot="1" noChangeAspect="1"/>
+          </p:cNvSpPr>
+          <p:nvPr>
+            <p:ph type="sldImg"/>
+          </p:nvPr>
+        </p:nvSpPr>
+        <p:spPr/>
+      </p:sp>
+      <p:sp>
+        <p:nvSpPr>
+          <p:cNvPr id="3" name="Notes Placeholder 2"/>
+          <p:cNvSpPr>
+            <a:spLocks noGrp="1"/>
+          </p:cNvSpPr>
+          <p:nvPr>
+            <p:ph type="body" idx="1"/>
+          </p:nvPr>
+        </p:nvSpPr>
+        <p:spPr/>
+        <p:txBody>
+          <a:bodyPr/>
+          <a:lstStyle/>
+          <a:p>
+            <a:r>
+              <a:rPr lang="en-US" dirty="0"/>
+              <a:t>These are the references and picture credits used to prepare this lesson.</a:t>
+            </a:r>
+            <a:endParaRPr lang="en-US" dirty="0"/>
+          </a:p>
+        </p:txBody>
+      </p:sp>
+      <p:sp>
+        <p:nvSpPr>
+          <p:cNvPr id="4" name="Slide Number Placeholder 3"/>
+          <p:cNvSpPr>
+            <a:spLocks noGrp="1"/>
+          </p:cNvSpPr>
+          <p:nvPr>
+            <p:ph type="sldNum" sz="quarter" idx="10"/>
+          </p:nvPr>
+        </p:nvSpPr>
+        <p:spPr/>
+        <p:txBody>
+          <a:bodyPr/>
+          <a:lstStyle/>
+          <a:p>
+            <a:fld id="{F7021451-1387-4CA6-816F-3879F97B5CBC}" type="slidenum">
+              <a:rPr lang="en-US"/>
+              <a:t>65</a:t>
             </a:fld>
             <a:endParaRPr lang="en-US"/>
           </a:p>
@@ -14748,7 +15015,7 @@
                 <a:ea typeface="Times New Roman" pitchFamily="34" charset="-122"/>
                 <a:cs typeface="Times New Roman" pitchFamily="34" charset="-120"/>
               </a:rPr>
-              <a:t>Volcanism (vulcanicity): </a:t>
+              <a:t>Volcanicity: </a:t>
             </a:r>
             <a:pPr algn="l" indent="0" marL="0">
               <a:spcAft>
@@ -15058,7 +15325,7 @@
                 <a:ea typeface="Times New Roman" pitchFamily="34" charset="-122"/>
                 <a:cs typeface="Times New Roman" pitchFamily="34" charset="-120"/>
               </a:rPr>
-              <a:t>Pyroclasts: </a:t>
+              <a:t>Cone: </a:t>
             </a:r>
             <a:pPr algn="l" indent="0" marL="0">
               <a:spcAft>
@@ -15075,7 +15342,7 @@
                 <a:ea typeface="Times New Roman" pitchFamily="34" charset="-122"/>
                 <a:cs typeface="Times New Roman" pitchFamily="34" charset="-120"/>
               </a:rPr>
-              <a:t>They are solid fragments thrown out by an eruption, such as ash, cinders and bombs.</a:t>
+              <a:t>It is a hill or mountain built around a vent by the materials of eruptions.</a:t>
             </a:r>
             <a:endParaRPr lang="en-US" sz="4000" dirty="0"/>
           </a:p>
@@ -15193,129 +15460,9 @@
           </a:p>
         </p:txBody>
       </p:sp>
-      <p:sp>
-        <p:nvSpPr>
-          <p:cNvPr id="3" name="Text 1"/>
-          <p:cNvSpPr/>
-          <p:nvPr/>
-        </p:nvSpPr>
-        <p:spPr>
-          <a:xfrm>
-            <a:off x="365760" y="1005840"/>
-            <a:ext cx="11460175" cy="731520"/>
-          </a:xfrm>
-          <a:prstGeom prst="rect">
-            <a:avLst/>
-          </a:prstGeom>
-          <a:noFill/>
-          <a:ln/>
-        </p:spPr>
-        <p:txBody>
-          <a:bodyPr wrap="square" lIns="0" tIns="0" rIns="0" bIns="0" rtlCol="0" anchor="ctr">
-            <a:normAutofit/>
-          </a:bodyPr>
-          <a:lstStyle/>
-          <a:p>
-            <a:pPr algn="ctr" indent="0" marL="0">
-              <a:buNone/>
-            </a:pPr>
-            <a:r>
-              <a:rPr lang="en-US" sz="3600" b="1" dirty="0">
-                <a:solidFill>
-                  <a:srgbClr val="990011"/>
-                </a:solidFill>
-                <a:latin typeface="Times New Roman" pitchFamily="34" charset="0"/>
-                <a:ea typeface="Times New Roman" pitchFamily="34" charset="-122"/>
-                <a:cs typeface="Times New Roman" pitchFamily="34" charset="-120"/>
-              </a:rPr>
-              <a:t>1. The Life Cycle of a Volcano</a:t>
-            </a:r>
-            <a:endParaRPr lang="en-US" sz="3600" dirty="0"/>
-          </a:p>
-        </p:txBody>
-      </p:sp>
-      <p:sp>
-        <p:nvSpPr>
-          <p:cNvPr id="4" name="Text 2"/>
-          <p:cNvSpPr/>
-          <p:nvPr/>
-        </p:nvSpPr>
-        <p:spPr>
-          <a:xfrm>
-            <a:off x="365760" y="1783080"/>
-            <a:ext cx="4846320" cy="4617720"/>
-          </a:xfrm>
-          <a:prstGeom prst="rect">
-            <a:avLst/>
-          </a:prstGeom>
-          <a:noFill/>
-          <a:ln/>
-        </p:spPr>
-        <p:txBody>
-          <a:bodyPr wrap="square" lIns="0" tIns="0" rIns="0" bIns="0" rtlCol="0" anchor="t"/>
-          <a:lstStyle/>
-          <a:p>
-            <a:pPr algn="l" indent="0" marL="0">
-              <a:spcAft>
-                <a:spcPts val="800"/>
-              </a:spcAft>
-              <a:buNone/>
-            </a:pPr>
-            <a:r>
-              <a:rPr lang="en-US" sz="3200" i="1" dirty="0">
-                <a:solidFill>
-                  <a:srgbClr val="111111"/>
-                </a:solidFill>
-                <a:latin typeface="Times New Roman" pitchFamily="34" charset="0"/>
-                <a:ea typeface="Times New Roman" pitchFamily="34" charset="-122"/>
-                <a:cs typeface="Times New Roman" pitchFamily="34" charset="-120"/>
-              </a:rPr>
-              <a:t>Volcanoes are classified by their activity as follows:</a:t>
-            </a:r>
-            <a:endParaRPr lang="en-US" sz="3200" dirty="0"/>
-          </a:p>
-          <a:p>
-            <a:pPr algn="l" indent="0" marL="0">
-              <a:spcAft>
-                <a:spcPts val="800"/>
-              </a:spcAft>
-              <a:buNone/>
-            </a:pPr>
-            <a:r>
-              <a:rPr lang="en-US" sz="3200" b="1" dirty="0">
-                <a:solidFill>
-                  <a:srgbClr val="111111"/>
-                </a:solidFill>
-                <a:latin typeface="Times New Roman" pitchFamily="34" charset="0"/>
-                <a:ea typeface="Times New Roman" pitchFamily="34" charset="-122"/>
-                <a:cs typeface="Times New Roman" pitchFamily="34" charset="-120"/>
-              </a:rPr>
-              <a:t>Active volcano: </a:t>
-            </a:r>
-            <a:pPr algn="l" indent="0" marL="0">
-              <a:spcAft>
-                <a:spcPts val="800"/>
-              </a:spcAft>
-              <a:buNone/>
-            </a:pPr>
-            <a:r>
-              <a:rPr lang="en-US" sz="3200" dirty="0">
-                <a:solidFill>
-                  <a:srgbClr val="111111"/>
-                </a:solidFill>
-                <a:latin typeface="Times New Roman" pitchFamily="34" charset="0"/>
-                <a:ea typeface="Times New Roman" pitchFamily="34" charset="-122"/>
-                <a:cs typeface="Times New Roman" pitchFamily="34" charset="-120"/>
-              </a:rPr>
-              <a:t>It is erupting or has erupted in recorded history, like Mount Cameroon (1999, 2000 and small activity in 2012).</a:t>
-            </a:r>
-            <a:endParaRPr lang="en-US" sz="3200" dirty="0"/>
-          </a:p>
-        </p:txBody>
-      </p:sp>
       <p:pic>
         <p:nvPicPr>
-          <p:cNvPr id="5" name="Image 0" descr="/home/claude/f4/img/v2/geo2_volc_life.png">    </p:cNvPr>
+          <p:cNvPr id="3" name="Image 0" descr="/home/claude/f4/img/minesec_sheet.png">    </p:cNvPr>
           <p:cNvPicPr>
             <a:picLocks noChangeAspect="1"/>
           </p:cNvPicPr>
@@ -15329,8 +15476,8 @@
         </p:blipFill>
         <p:spPr>
           <a:xfrm>
-            <a:off x="5349240" y="2617506"/>
-            <a:ext cx="6659575" cy="2601397"/>
+            <a:off x="0" y="658368"/>
+            <a:ext cx="2468880" cy="5833872"/>
           </a:xfrm>
           <a:prstGeom prst="rect">
             <a:avLst/>
@@ -15339,14 +15486,14 @@
       </p:pic>
       <p:sp>
         <p:nvSpPr>
-          <p:cNvPr id="6" name="Text 3"/>
+          <p:cNvPr id="4" name="Text 1"/>
           <p:cNvSpPr/>
           <p:nvPr/>
         </p:nvSpPr>
         <p:spPr>
           <a:xfrm>
-            <a:off x="5349240" y="6089904"/>
-            <a:ext cx="6659575" cy="347472"/>
+            <a:off x="2697480" y="1005840"/>
+            <a:ext cx="9174175" cy="731520"/>
           </a:xfrm>
           <a:prstGeom prst="rect">
             <a:avLst/>
@@ -15355,24 +15502,105 @@
           <a:ln/>
         </p:spPr>
         <p:txBody>
-          <a:bodyPr wrap="square" lIns="0" tIns="0" rIns="0" bIns="0" rtlCol="0" anchor="ctr"/>
+          <a:bodyPr wrap="square" lIns="0" tIns="0" rIns="0" bIns="0" rtlCol="0" anchor="ctr">
+            <a:normAutofit/>
+          </a:bodyPr>
           <a:lstStyle/>
           <a:p>
             <a:pPr algn="ctr" indent="0" marL="0">
               <a:buNone/>
             </a:pPr>
             <a:r>
-              <a:rPr lang="en-US" sz="1600" i="1" dirty="0">
-                <a:solidFill>
-                  <a:srgbClr val="555555"/>
+              <a:rPr lang="en-US" sz="3600" b="1" dirty="0">
+                <a:solidFill>
+                  <a:srgbClr val="990011"/>
                 </a:solidFill>
                 <a:latin typeface="Times New Roman" pitchFamily="34" charset="0"/>
                 <a:ea typeface="Times New Roman" pitchFamily="34" charset="-122"/>
                 <a:cs typeface="Times New Roman" pitchFamily="34" charset="-120"/>
               </a:rPr>
-              <a:t>Illustration: the life cycle of a volcano</a:t>
-            </a:r>
-            <a:endParaRPr lang="en-US" sz="1600" dirty="0"/>
+              <a:t>1. Meaning and Process of Volcanism</a:t>
+            </a:r>
+            <a:endParaRPr lang="en-US" sz="3600" dirty="0"/>
+          </a:p>
+        </p:txBody>
+      </p:sp>
+      <p:sp>
+        <p:nvSpPr>
+          <p:cNvPr id="5" name="Text 2"/>
+          <p:cNvSpPr/>
+          <p:nvPr/>
+        </p:nvSpPr>
+        <p:spPr>
+          <a:xfrm>
+            <a:off x="2697480" y="1783080"/>
+            <a:ext cx="9174175" cy="4663440"/>
+          </a:xfrm>
+          <a:prstGeom prst="rect">
+            <a:avLst/>
+          </a:prstGeom>
+          <a:noFill/>
+          <a:ln/>
+        </p:spPr>
+        <p:txBody>
+          <a:bodyPr wrap="square" lIns="0" tIns="0" rIns="0" bIns="0" rtlCol="0" anchor="t"/>
+          <a:lstStyle/>
+          <a:p>
+            <a:pPr algn="l" indent="0" marL="0">
+              <a:spcAft>
+                <a:spcPts val="800"/>
+              </a:spcAft>
+              <a:buNone/>
+            </a:pPr>
+            <a:r>
+              <a:rPr lang="en-US" sz="4000" i="1" dirty="0">
+                <a:solidFill>
+                  <a:srgbClr val="111111"/>
+                </a:solidFill>
+                <a:latin typeface="Times New Roman" pitchFamily="34" charset="0"/>
+                <a:ea typeface="Times New Roman" pitchFamily="34" charset="-122"/>
+                <a:cs typeface="Times New Roman" pitchFamily="34" charset="-120"/>
+              </a:rPr>
+              <a:t>Volcanism is explained as follows:</a:t>
+            </a:r>
+            <a:endParaRPr lang="en-US" sz="4000" dirty="0"/>
+          </a:p>
+          <a:p>
+            <a:pPr algn="l" indent="0" marL="0">
+              <a:spcAft>
+                <a:spcPts val="800"/>
+              </a:spcAft>
+              <a:buNone/>
+            </a:pPr>
+            <a:r>
+              <a:rPr lang="en-US" sz="4000" b="1" dirty="0">
+                <a:solidFill>
+                  <a:srgbClr val="111111"/>
+                </a:solidFill>
+                <a:latin typeface="Times New Roman" pitchFamily="34" charset="0"/>
+                <a:ea typeface="Times New Roman" pitchFamily="34" charset="-122"/>
+                <a:cs typeface="Times New Roman" pitchFamily="34" charset="-120"/>
+              </a:rPr>
+              <a:t>Meaning: </a:t>
+            </a:r>
+            <a:pPr algn="l" indent="0" marL="0">
+              <a:spcAft>
+                <a:spcPts val="800"/>
+              </a:spcAft>
+              <a:buNone/>
+            </a:pPr>
+            <a:r>
+              <a:rPr lang="en-US" sz="4000" dirty="0">
+                <a:solidFill>
+                  <a:srgbClr val="111111"/>
+                </a:solidFill>
+                <a:latin typeface="Times New Roman" pitchFamily="34" charset="0"/>
+                <a:ea typeface="Times New Roman" pitchFamily="34" charset="-122"/>
+                <a:cs typeface="Times New Roman" pitchFamily="34" charset="-120"/>
+              </a:rPr>
+              <a:t>Volcanism is the movement of molten rock and gases from inside the Earth towards the surface. It includes eruptions at the surface (extrusive activity) and the cooling of magma inside the crust (intrusive activity).</a:t>
+            </a:r>
+            <a:endParaRPr lang="en-US" sz="4000" dirty="0"/>
           </a:p>
         </p:txBody>
       </p:sp>
@@ -15523,7 +15751,7 @@
                 <a:ea typeface="Times New Roman" pitchFamily="34" charset="-122"/>
                 <a:cs typeface="Times New Roman" pitchFamily="34" charset="-120"/>
               </a:rPr>
-              <a:t>1. The Life Cycle of a Volcano</a:t>
+              <a:t>1. Meaning and Process of Volcanism</a:t>
             </a:r>
             <a:endParaRPr lang="en-US" sz="3600" dirty="0"/>
           </a:p>
@@ -15538,7 +15766,7 @@
         <p:spPr>
           <a:xfrm>
             <a:off x="365760" y="1783080"/>
-            <a:ext cx="4846320" cy="4617720"/>
+            <a:ext cx="6035040" cy="4617720"/>
           </a:xfrm>
           <a:prstGeom prst="rect">
             <a:avLst/>
@@ -15557,7 +15785,7 @@
               <a:buNone/>
             </a:pPr>
             <a:r>
-              <a:rPr lang="en-US" sz="3600" b="1" dirty="0">
+              <a:rPr lang="en-US" sz="3200" b="1" dirty="0">
                 <a:solidFill>
                   <a:srgbClr val="111111"/>
                 </a:solidFill>
@@ -15565,7 +15793,7 @@
                 <a:ea typeface="Times New Roman" pitchFamily="34" charset="-122"/>
                 <a:cs typeface="Times New Roman" pitchFamily="34" charset="-120"/>
               </a:rPr>
-              <a:t>Dormant volcano: </a:t>
+              <a:t>Process: </a:t>
             </a:r>
             <a:pPr algn="l" indent="0" marL="0">
               <a:spcAft>
@@ -15574,7 +15802,7 @@
               <a:buNone/>
             </a:pPr>
             <a:r>
-              <a:rPr lang="en-US" sz="3600" dirty="0">
+              <a:rPr lang="en-US" sz="3200" dirty="0">
                 <a:solidFill>
                   <a:srgbClr val="111111"/>
                 </a:solidFill>
@@ -15582,15 +15810,15 @@
                 <a:ea typeface="Times New Roman" pitchFamily="34" charset="-122"/>
                 <a:cs typeface="Times New Roman" pitchFamily="34" charset="-120"/>
               </a:rPr>
-              <a:t>It has not erupted for a long time but may erupt again, like Kilimanjaro and Mount Fuji.</a:t>
-            </a:r>
-            <a:endParaRPr lang="en-US" sz="3600" dirty="0"/>
+              <a:t>Magma forms where rocks of the mantle or crust melt, at plate margins or hot spots, and it rises because it is lighter than the rocks around it. It collects in a magma chamber, and when the pressure of the gases is high enough, it forces its way up through a vent and erupts.</a:t>
+            </a:r>
+            <a:endParaRPr lang="en-US" sz="3200" dirty="0"/>
           </a:p>
         </p:txBody>
       </p:sp>
       <p:pic>
         <p:nvPicPr>
-          <p:cNvPr id="5" name="Image 0" descr="/home/claude/f4/img/v2/f2t_kilimanjaro.jpg">    </p:cNvPr>
+          <p:cNvPr id="5" name="Image 0" descr="/home/claude/f4/img/v2/geo2_volc_life.png">    </p:cNvPr>
           <p:cNvPicPr>
             <a:picLocks noChangeAspect="1"/>
           </p:cNvPicPr>
@@ -15604,8 +15832,8 @@
         </p:blipFill>
         <p:spPr>
           <a:xfrm>
-            <a:off x="5349240" y="2071212"/>
-            <a:ext cx="6659575" cy="3693983"/>
+            <a:off x="6537960" y="2849678"/>
+            <a:ext cx="5470855" cy="2137053"/>
           </a:xfrm>
           <a:prstGeom prst="rect">
             <a:avLst/>
@@ -15620,8 +15848,8 @@
         </p:nvSpPr>
         <p:spPr>
           <a:xfrm>
-            <a:off x="5349240" y="6089904"/>
-            <a:ext cx="6659575" cy="347472"/>
+            <a:off x="6537960" y="6089904"/>
+            <a:ext cx="5470855" cy="347472"/>
           </a:xfrm>
           <a:prstGeom prst="rect">
             <a:avLst/>
@@ -15645,7 +15873,7 @@
                 <a:ea typeface="Times New Roman" pitchFamily="34" charset="-122"/>
                 <a:cs typeface="Times New Roman" pitchFamily="34" charset="-120"/>
               </a:rPr>
-              <a:t>Illustration: Kilimanjaro</a:t>
+              <a:t>Illustration: the life cycle of a volcano</a:t>
             </a:r>
             <a:endParaRPr lang="en-US" sz="1600" dirty="0"/>
           </a:p>
@@ -16037,7 +16265,7 @@
                 <a:ea typeface="Times New Roman" pitchFamily="34" charset="-122"/>
                 <a:cs typeface="Times New Roman" pitchFamily="34" charset="-120"/>
               </a:rPr>
-              <a:t>1. The Life Cycle of a Volcano</a:t>
+              <a:t>2. Stages in the Life Cycle of a Volcano</a:t>
             </a:r>
             <a:endParaRPr lang="en-US" sz="3600" dirty="0"/>
           </a:p>
@@ -16052,7 +16280,7 @@
         <p:spPr>
           <a:xfrm>
             <a:off x="365760" y="1783080"/>
-            <a:ext cx="4846320" cy="4617720"/>
+            <a:ext cx="6035040" cy="4617720"/>
           </a:xfrm>
           <a:prstGeom prst="rect">
             <a:avLst/>
@@ -16071,7 +16299,7 @@
               <a:buNone/>
             </a:pPr>
             <a:r>
-              <a:rPr lang="en-US" sz="3600" b="1" dirty="0">
+              <a:rPr lang="en-US" sz="3200" i="1" dirty="0">
                 <a:solidFill>
                   <a:srgbClr val="111111"/>
                 </a:solidFill>
@@ -16079,8 +16307,11 @@
                 <a:ea typeface="Times New Roman" pitchFamily="34" charset="-122"/>
                 <a:cs typeface="Times New Roman" pitchFamily="34" charset="-120"/>
               </a:rPr>
-              <a:t>Extinct volcano: </a:t>
-            </a:r>
+              <a:t>A volcano passes through the following stages:</a:t>
+            </a:r>
+            <a:endParaRPr lang="en-US" sz="3200" dirty="0"/>
+          </a:p>
+          <a:p>
             <a:pPr algn="l" indent="0" marL="0">
               <a:spcAft>
                 <a:spcPts val="800"/>
@@ -16088,7 +16319,7 @@
               <a:buNone/>
             </a:pPr>
             <a:r>
-              <a:rPr lang="en-US" sz="3600" dirty="0">
+              <a:rPr lang="en-US" sz="3200" b="1" dirty="0">
                 <a:solidFill>
                   <a:srgbClr val="111111"/>
                 </a:solidFill>
@@ -16096,15 +16327,32 @@
                 <a:ea typeface="Times New Roman" pitchFamily="34" charset="-122"/>
                 <a:cs typeface="Times New Roman" pitchFamily="34" charset="-120"/>
               </a:rPr>
-              <a:t>It has not erupted for thousands or millions of years and will not erupt again, like the volcanic necks of Rhumsiki.</a:t>
-            </a:r>
-            <a:endParaRPr lang="en-US" sz="3600" dirty="0"/>
+              <a:t>Active volcano: </a:t>
+            </a:r>
+            <a:pPr algn="l" indent="0" marL="0">
+              <a:spcAft>
+                <a:spcPts val="800"/>
+              </a:spcAft>
+              <a:buNone/>
+            </a:pPr>
+            <a:r>
+              <a:rPr lang="en-US" sz="3200" dirty="0">
+                <a:solidFill>
+                  <a:srgbClr val="111111"/>
+                </a:solidFill>
+                <a:latin typeface="Times New Roman" pitchFamily="34" charset="0"/>
+                <a:ea typeface="Times New Roman" pitchFamily="34" charset="-122"/>
+                <a:cs typeface="Times New Roman" pitchFamily="34" charset="-120"/>
+              </a:rPr>
+              <a:t>An active volcano is erupting or has erupted in recorded history and shows signs of activity. Mount Cameroon, which erupted in 1999 and 2000, is the most active volcano of West Africa.</a:t>
+            </a:r>
+            <a:endParaRPr lang="en-US" sz="3200" dirty="0"/>
           </a:p>
         </p:txBody>
       </p:sp>
       <p:pic>
         <p:nvPicPr>
-          <p:cNvPr id="5" name="Image 0" descr="/home/claude/f4/img/v2/lsa_mandara.jpg">    </p:cNvPr>
+          <p:cNvPr id="5" name="Image 0" descr="/home/claude/f4/img/v2/lsa_mtcameroon.jpg">    </p:cNvPr>
           <p:cNvPicPr>
             <a:picLocks noChangeAspect="1"/>
           </p:cNvPicPr>
@@ -16118,8 +16366,8 @@
         </p:blipFill>
         <p:spPr>
           <a:xfrm>
-            <a:off x="5349240" y="3040233"/>
-            <a:ext cx="6659575" cy="1755943"/>
+            <a:off x="6537960" y="2400897"/>
+            <a:ext cx="5470855" cy="3034615"/>
           </a:xfrm>
           <a:prstGeom prst="rect">
             <a:avLst/>
@@ -16134,8 +16382,8 @@
         </p:nvSpPr>
         <p:spPr>
           <a:xfrm>
-            <a:off x="5349240" y="6089904"/>
-            <a:ext cx="6659575" cy="347472"/>
+            <a:off x="6537960" y="6089904"/>
+            <a:ext cx="5470855" cy="347472"/>
           </a:xfrm>
           <a:prstGeom prst="rect">
             <a:avLst/>
@@ -16159,7 +16407,7 @@
                 <a:ea typeface="Times New Roman" pitchFamily="34" charset="-122"/>
                 <a:cs typeface="Times New Roman" pitchFamily="34" charset="-120"/>
               </a:rPr>
-              <a:t>Illustration: volcanic necks near Rhumsiki</a:t>
+              <a:t>Illustration: Mount Cameroon</a:t>
             </a:r>
             <a:endParaRPr lang="en-US" sz="1600" dirty="0"/>
           </a:p>
@@ -16277,9 +16525,109 @@
           </a:p>
         </p:txBody>
       </p:sp>
+      <p:sp>
+        <p:nvSpPr>
+          <p:cNvPr id="3" name="Text 1"/>
+          <p:cNvSpPr/>
+          <p:nvPr/>
+        </p:nvSpPr>
+        <p:spPr>
+          <a:xfrm>
+            <a:off x="365760" y="1005840"/>
+            <a:ext cx="11460175" cy="731520"/>
+          </a:xfrm>
+          <a:prstGeom prst="rect">
+            <a:avLst/>
+          </a:prstGeom>
+          <a:noFill/>
+          <a:ln/>
+        </p:spPr>
+        <p:txBody>
+          <a:bodyPr wrap="square" lIns="0" tIns="0" rIns="0" bIns="0" rtlCol="0" anchor="ctr">
+            <a:normAutofit/>
+          </a:bodyPr>
+          <a:lstStyle/>
+          <a:p>
+            <a:pPr algn="ctr" indent="0" marL="0">
+              <a:buNone/>
+            </a:pPr>
+            <a:r>
+              <a:rPr lang="en-US" sz="3600" b="1" dirty="0">
+                <a:solidFill>
+                  <a:srgbClr val="990011"/>
+                </a:solidFill>
+                <a:latin typeface="Times New Roman" pitchFamily="34" charset="0"/>
+                <a:ea typeface="Times New Roman" pitchFamily="34" charset="-122"/>
+                <a:cs typeface="Times New Roman" pitchFamily="34" charset="-120"/>
+              </a:rPr>
+              <a:t>2. Stages in the Life Cycle of a Volcano</a:t>
+            </a:r>
+            <a:endParaRPr lang="en-US" sz="3600" dirty="0"/>
+          </a:p>
+        </p:txBody>
+      </p:sp>
+      <p:sp>
+        <p:nvSpPr>
+          <p:cNvPr id="4" name="Text 2"/>
+          <p:cNvSpPr/>
+          <p:nvPr/>
+        </p:nvSpPr>
+        <p:spPr>
+          <a:xfrm>
+            <a:off x="365760" y="1783080"/>
+            <a:ext cx="6035040" cy="4617720"/>
+          </a:xfrm>
+          <a:prstGeom prst="rect">
+            <a:avLst/>
+          </a:prstGeom>
+          <a:noFill/>
+          <a:ln/>
+        </p:spPr>
+        <p:txBody>
+          <a:bodyPr wrap="square" lIns="0" tIns="0" rIns="0" bIns="0" rtlCol="0" anchor="t"/>
+          <a:lstStyle/>
+          <a:p>
+            <a:pPr algn="l" indent="0" marL="0">
+              <a:spcAft>
+                <a:spcPts val="800"/>
+              </a:spcAft>
+              <a:buNone/>
+            </a:pPr>
+            <a:r>
+              <a:rPr lang="en-US" sz="3600" b="1" dirty="0">
+                <a:solidFill>
+                  <a:srgbClr val="111111"/>
+                </a:solidFill>
+                <a:latin typeface="Times New Roman" pitchFamily="34" charset="0"/>
+                <a:ea typeface="Times New Roman" pitchFamily="34" charset="-122"/>
+                <a:cs typeface="Times New Roman" pitchFamily="34" charset="-120"/>
+              </a:rPr>
+              <a:t>Dormant volcano: </a:t>
+            </a:r>
+            <a:pPr algn="l" indent="0" marL="0">
+              <a:spcAft>
+                <a:spcPts val="800"/>
+              </a:spcAft>
+              <a:buNone/>
+            </a:pPr>
+            <a:r>
+              <a:rPr lang="en-US" sz="3600" dirty="0">
+                <a:solidFill>
+                  <a:srgbClr val="111111"/>
+                </a:solidFill>
+                <a:latin typeface="Times New Roman" pitchFamily="34" charset="0"/>
+                <a:ea typeface="Times New Roman" pitchFamily="34" charset="-122"/>
+                <a:cs typeface="Times New Roman" pitchFamily="34" charset="-120"/>
+              </a:rPr>
+              <a:t>A dormant volcano has not erupted for a long time but may erupt again, because magma is still present below it. Kilimanjaro and Mount Fuji are examples.</a:t>
+            </a:r>
+            <a:endParaRPr lang="en-US" sz="3600" dirty="0"/>
+          </a:p>
+        </p:txBody>
+      </p:sp>
       <p:pic>
         <p:nvPicPr>
-          <p:cNvPr id="3" name="Image 0" descr="/home/claude/f4/img/minesec_sheet.png">    </p:cNvPr>
+          <p:cNvPr id="5" name="Image 0" descr="/home/claude/f4/img/v2/f2t_kilimanjaro.jpg">    </p:cNvPr>
           <p:cNvPicPr>
             <a:picLocks noChangeAspect="1"/>
           </p:cNvPicPr>
@@ -16293,8 +16641,8 @@
         </p:blipFill>
         <p:spPr>
           <a:xfrm>
-            <a:off x="0" y="658368"/>
-            <a:ext cx="1463040" cy="5833872"/>
+            <a:off x="6537960" y="2400897"/>
+            <a:ext cx="5470855" cy="3034615"/>
           </a:xfrm>
           <a:prstGeom prst="rect">
             <a:avLst/>
@@ -16303,14 +16651,14 @@
       </p:pic>
       <p:sp>
         <p:nvSpPr>
-          <p:cNvPr id="4" name="Text 1"/>
+          <p:cNvPr id="6" name="Text 3"/>
           <p:cNvSpPr/>
           <p:nvPr/>
         </p:nvSpPr>
         <p:spPr>
           <a:xfrm>
-            <a:off x="1691640" y="1005840"/>
-            <a:ext cx="10180015" cy="731520"/>
+            <a:off x="6537960" y="6089904"/>
+            <a:ext cx="5470855" cy="347472"/>
           </a:xfrm>
           <a:prstGeom prst="rect">
             <a:avLst/>
@@ -16319,130 +16667,24 @@
           <a:ln/>
         </p:spPr>
         <p:txBody>
-          <a:bodyPr wrap="square" lIns="0" tIns="0" rIns="0" bIns="0" rtlCol="0" anchor="ctr">
-            <a:normAutofit/>
-          </a:bodyPr>
+          <a:bodyPr wrap="square" lIns="0" tIns="0" rIns="0" bIns="0" rtlCol="0" anchor="ctr"/>
           <a:lstStyle/>
           <a:p>
             <a:pPr algn="ctr" indent="0" marL="0">
               <a:buNone/>
             </a:pPr>
             <a:r>
-              <a:rPr lang="en-US" sz="3600" b="1" dirty="0">
-                <a:solidFill>
-                  <a:srgbClr val="990011"/>
+              <a:rPr lang="en-US" sz="1600" i="1" dirty="0">
+                <a:solidFill>
+                  <a:srgbClr val="555555"/>
                 </a:solidFill>
                 <a:latin typeface="Times New Roman" pitchFamily="34" charset="0"/>
                 <a:ea typeface="Times New Roman" pitchFamily="34" charset="-122"/>
                 <a:cs typeface="Times New Roman" pitchFamily="34" charset="-120"/>
               </a:rPr>
-              <a:t>2. Products of a Volcanic Eruption</a:t>
-            </a:r>
-            <a:endParaRPr lang="en-US" sz="3600" dirty="0"/>
-          </a:p>
-        </p:txBody>
-      </p:sp>
-      <p:sp>
-        <p:nvSpPr>
-          <p:cNvPr id="5" name="Text 2"/>
-          <p:cNvSpPr/>
-          <p:nvPr/>
-        </p:nvSpPr>
-        <p:spPr>
-          <a:xfrm>
-            <a:off x="1691640" y="1783080"/>
-            <a:ext cx="10180015" cy="4663440"/>
-          </a:xfrm>
-          <a:prstGeom prst="rect">
-            <a:avLst/>
-          </a:prstGeom>
-          <a:noFill/>
-          <a:ln/>
-        </p:spPr>
-        <p:txBody>
-          <a:bodyPr wrap="square" lIns="0" tIns="0" rIns="0" bIns="0" rtlCol="0" anchor="t"/>
-          <a:lstStyle/>
-          <a:p>
-            <a:pPr algn="l" indent="0" marL="0">
-              <a:spcAft>
-                <a:spcPts val="800"/>
-              </a:spcAft>
-              <a:buNone/>
-            </a:pPr>
-            <a:r>
-              <a:rPr lang="en-US" sz="4000" i="1" dirty="0">
-                <a:solidFill>
-                  <a:srgbClr val="111111"/>
-                </a:solidFill>
-                <a:latin typeface="Times New Roman" pitchFamily="34" charset="0"/>
-                <a:ea typeface="Times New Roman" pitchFamily="34" charset="-122"/>
-                <a:cs typeface="Times New Roman" pitchFamily="34" charset="-120"/>
-              </a:rPr>
-              <a:t>An eruption releases the following products:</a:t>
-            </a:r>
-            <a:endParaRPr lang="en-US" sz="4000" dirty="0"/>
-          </a:p>
-          <a:p>
-            <a:pPr algn="l" indent="0" marL="0">
-              <a:spcAft>
-                <a:spcPts val="800"/>
-              </a:spcAft>
-              <a:buNone/>
-            </a:pPr>
-            <a:r>
-              <a:rPr lang="en-US" sz="4000" b="1" dirty="0">
-                <a:solidFill>
-                  <a:srgbClr val="111111"/>
-                </a:solidFill>
-                <a:latin typeface="Times New Roman" pitchFamily="34" charset="0"/>
-                <a:ea typeface="Times New Roman" pitchFamily="34" charset="-122"/>
-                <a:cs typeface="Times New Roman" pitchFamily="34" charset="-120"/>
-              </a:rPr>
-              <a:t>Lava:</a:t>
-            </a:r>
-            <a:endParaRPr lang="en-US" sz="4000" dirty="0"/>
-          </a:p>
-          <a:p>
-            <a:pPr algn="l" marL="342900" indent="-342900">
-              <a:spcAft>
-                <a:spcPts val="800"/>
-              </a:spcAft>
-              <a:buSzPct val="100000"/>
-              <a:buChar char="•"/>
-            </a:pPr>
-            <a:r>
-              <a:rPr lang="en-US" sz="4000" dirty="0">
-                <a:solidFill>
-                  <a:srgbClr val="111111"/>
-                </a:solidFill>
-                <a:latin typeface="Times New Roman" pitchFamily="34" charset="0"/>
-                <a:ea typeface="Times New Roman" pitchFamily="34" charset="-122"/>
-                <a:cs typeface="Times New Roman" pitchFamily="34" charset="-120"/>
-              </a:rPr>
-              <a:t>Basic lava: runny, low in silica, flows far (basalt).</a:t>
-            </a:r>
-            <a:endParaRPr lang="en-US" sz="4000" dirty="0"/>
-          </a:p>
-          <a:p>
-            <a:pPr algn="l" marL="342900" indent="-342900">
-              <a:spcAft>
-                <a:spcPts val="800"/>
-              </a:spcAft>
-              <a:buSzPct val="100000"/>
-              <a:buChar char="•"/>
-            </a:pPr>
-            <a:r>
-              <a:rPr lang="en-US" sz="4000" dirty="0">
-                <a:solidFill>
-                  <a:srgbClr val="111111"/>
-                </a:solidFill>
-                <a:latin typeface="Times New Roman" pitchFamily="34" charset="0"/>
-                <a:ea typeface="Times New Roman" pitchFamily="34" charset="-122"/>
-                <a:cs typeface="Times New Roman" pitchFamily="34" charset="-120"/>
-              </a:rPr>
-              <a:t>Acid lava: thick and sticky, rich in silica, stays near the vent.</a:t>
-            </a:r>
-            <a:endParaRPr lang="en-US" sz="4000" dirty="0"/>
+              <a:t>Illustration: Kilimanjaro</a:t>
+            </a:r>
+            <a:endParaRPr lang="en-US" sz="1600" dirty="0"/>
           </a:p>
         </p:txBody>
       </p:sp>
@@ -16593,7 +16835,7 @@
                 <a:ea typeface="Times New Roman" pitchFamily="34" charset="-122"/>
                 <a:cs typeface="Times New Roman" pitchFamily="34" charset="-120"/>
               </a:rPr>
-              <a:t>2. Products of a Volcanic Eruption</a:t>
+              <a:t>2. Stages in the Life Cycle of a Volcano</a:t>
             </a:r>
             <a:endParaRPr lang="en-US" sz="3600" dirty="0"/>
           </a:p>
@@ -16608,7 +16850,7 @@
         <p:spPr>
           <a:xfrm>
             <a:off x="365760" y="1783080"/>
-            <a:ext cx="4846320" cy="4617720"/>
+            <a:ext cx="6035040" cy="4617720"/>
           </a:xfrm>
           <a:prstGeom prst="rect">
             <a:avLst/>
@@ -16627,7 +16869,7 @@
               <a:buNone/>
             </a:pPr>
             <a:r>
-              <a:rPr lang="en-US" sz="3600" b="1" dirty="0">
+              <a:rPr lang="en-US" sz="3400" b="1" dirty="0">
                 <a:solidFill>
                   <a:srgbClr val="111111"/>
                 </a:solidFill>
@@ -16635,7 +16877,7 @@
                 <a:ea typeface="Times New Roman" pitchFamily="34" charset="-122"/>
                 <a:cs typeface="Times New Roman" pitchFamily="34" charset="-120"/>
               </a:rPr>
-              <a:t>Pyroclastic materials: </a:t>
+              <a:t>Extinct volcano: </a:t>
             </a:r>
             <a:pPr algn="l" indent="0" marL="0">
               <a:spcAft>
@@ -16644,7 +16886,7 @@
               <a:buNone/>
             </a:pPr>
             <a:r>
-              <a:rPr lang="en-US" sz="3600" dirty="0">
+              <a:rPr lang="en-US" sz="3400" dirty="0">
                 <a:solidFill>
                   <a:srgbClr val="111111"/>
                 </a:solidFill>
@@ -16652,15 +16894,15 @@
                 <a:ea typeface="Times New Roman" pitchFamily="34" charset="-122"/>
                 <a:cs typeface="Times New Roman" pitchFamily="34" charset="-120"/>
               </a:rPr>
-              <a:t>Fine ash, small stones (cinders or lapilli) and large volcanic bombs are blown into the air.</a:t>
-            </a:r>
-            <a:endParaRPr lang="en-US" sz="3600" dirty="0"/>
+              <a:t>An extinct volcano has not erupted for thousands or millions of years and has no more magma supply. Erosion wears it down, leaving hard plugs such as the volcanic necks of Rhumsiki in the Mandara Mountains.</a:t>
+            </a:r>
+            <a:endParaRPr lang="en-US" sz="3400" dirty="0"/>
           </a:p>
         </p:txBody>
       </p:sp>
       <p:pic>
         <p:nvPicPr>
-          <p:cNvPr id="5" name="Image 0" descr="/home/claude/f4/img/v2/geo2_products.png">    </p:cNvPr>
+          <p:cNvPr id="5" name="Image 0" descr="/home/claude/f4/img/v2/lsa_mandara.jpg">    </p:cNvPr>
           <p:cNvPicPr>
             <a:picLocks noChangeAspect="1"/>
           </p:cNvPicPr>
@@ -16674,8 +16916,8 @@
         </p:blipFill>
         <p:spPr>
           <a:xfrm>
-            <a:off x="5349240" y="2617506"/>
-            <a:ext cx="6659575" cy="2601397"/>
+            <a:off x="6537960" y="3196949"/>
+            <a:ext cx="5470855" cy="1442511"/>
           </a:xfrm>
           <a:prstGeom prst="rect">
             <a:avLst/>
@@ -16690,8 +16932,8 @@
         </p:nvSpPr>
         <p:spPr>
           <a:xfrm>
-            <a:off x="5349240" y="6089904"/>
-            <a:ext cx="6659575" cy="347472"/>
+            <a:off x="6537960" y="6089904"/>
+            <a:ext cx="5470855" cy="347472"/>
           </a:xfrm>
           <a:prstGeom prst="rect">
             <a:avLst/>
@@ -16715,7 +16957,7 @@
                 <a:ea typeface="Times New Roman" pitchFamily="34" charset="-122"/>
                 <a:cs typeface="Times New Roman" pitchFamily="34" charset="-120"/>
               </a:rPr>
-              <a:t>Illustration: products of an eruption</a:t>
+              <a:t>Illustration: volcanic necks at Rhumsiki</a:t>
             </a:r>
             <a:endParaRPr lang="en-US" sz="1600" dirty="0"/>
           </a:p>
@@ -16850,7 +17092,7 @@
         <p:spPr>
           <a:xfrm>
             <a:off x="0" y="658368"/>
-            <a:ext cx="5120640" cy="5833872"/>
+            <a:ext cx="1463040" cy="5833872"/>
           </a:xfrm>
           <a:prstGeom prst="rect">
             <a:avLst/>
@@ -16865,8 +17107,8 @@
         </p:nvSpPr>
         <p:spPr>
           <a:xfrm>
-            <a:off x="5349240" y="1005840"/>
-            <a:ext cx="6522415" cy="731520"/>
+            <a:off x="1691640" y="1005840"/>
+            <a:ext cx="10180015" cy="731520"/>
           </a:xfrm>
           <a:prstGeom prst="rect">
             <a:avLst/>
@@ -16892,7 +17134,7 @@
                 <a:ea typeface="Times New Roman" pitchFamily="34" charset="-122"/>
                 <a:cs typeface="Times New Roman" pitchFamily="34" charset="-120"/>
               </a:rPr>
-              <a:t>2. Products of a Volcanic Eruption</a:t>
+              <a:t>3. Products of Volcanic Eruptions</a:t>
             </a:r>
             <a:endParaRPr lang="en-US" sz="3600" dirty="0"/>
           </a:p>
@@ -16906,8 +17148,8 @@
         </p:nvSpPr>
         <p:spPr>
           <a:xfrm>
-            <a:off x="5349240" y="1783080"/>
-            <a:ext cx="6522415" cy="4663440"/>
+            <a:off x="1691640" y="1783080"/>
+            <a:ext cx="10180015" cy="4663440"/>
           </a:xfrm>
           <a:prstGeom prst="rect">
             <a:avLst/>
@@ -16926,7 +17168,7 @@
               <a:buNone/>
             </a:pPr>
             <a:r>
-              <a:rPr lang="en-US" sz="4000" b="1" dirty="0">
+              <a:rPr lang="en-US" sz="4000" i="1" dirty="0">
                 <a:solidFill>
                   <a:srgbClr val="111111"/>
                 </a:solidFill>
@@ -16934,8 +17176,11 @@
                 <a:ea typeface="Times New Roman" pitchFamily="34" charset="-122"/>
                 <a:cs typeface="Times New Roman" pitchFamily="34" charset="-120"/>
               </a:rPr>
-              <a:t>Gases: </a:t>
-            </a:r>
+              <a:t>An eruption releases the following products:</a:t>
+            </a:r>
+            <a:endParaRPr lang="en-US" sz="4000" dirty="0"/>
+          </a:p>
+          <a:p>
             <a:pPr algn="l" indent="0" marL="0">
               <a:spcAft>
                 <a:spcPts val="800"/>
@@ -16943,7 +17188,7 @@
               <a:buNone/>
             </a:pPr>
             <a:r>
-              <a:rPr lang="en-US" sz="4000" dirty="0">
+              <a:rPr lang="en-US" sz="4000" b="1" dirty="0">
                 <a:solidFill>
                   <a:srgbClr val="111111"/>
                 </a:solidFill>
@@ -16951,7 +17196,24 @@
                 <a:ea typeface="Times New Roman" pitchFamily="34" charset="-122"/>
                 <a:cs typeface="Times New Roman" pitchFamily="34" charset="-120"/>
               </a:rPr>
-              <a:t>Mostly water vapour, with carbon dioxide and sulphur dioxide.</a:t>
+              <a:t>Lava: </a:t>
+            </a:r>
+            <a:pPr algn="l" indent="0" marL="0">
+              <a:spcAft>
+                <a:spcPts val="800"/>
+              </a:spcAft>
+              <a:buNone/>
+            </a:pPr>
+            <a:r>
+              <a:rPr lang="en-US" sz="4000" dirty="0">
+                <a:solidFill>
+                  <a:srgbClr val="111111"/>
+                </a:solidFill>
+                <a:latin typeface="Times New Roman" pitchFamily="34" charset="0"/>
+                <a:ea typeface="Times New Roman" pitchFamily="34" charset="-122"/>
+                <a:cs typeface="Times New Roman" pitchFamily="34" charset="-120"/>
+              </a:rPr>
+              <a:t>Basic lava is low in silica, very hot and runny, so it flows far before cooling into basalt. Acid lava is rich in silica, thick and sticky, so it cools quickly near the vent and blocks it, causing explosions.</a:t>
             </a:r>
             <a:endParaRPr lang="en-US" sz="4000" dirty="0"/>
           </a:p>
@@ -17104,7 +17366,7 @@
                 <a:ea typeface="Times New Roman" pitchFamily="34" charset="-122"/>
                 <a:cs typeface="Times New Roman" pitchFamily="34" charset="-120"/>
               </a:rPr>
-              <a:t>3. Volcanic Landforms</a:t>
+              <a:t>3. Products of Volcanic Eruptions</a:t>
             </a:r>
             <a:endParaRPr lang="en-US" sz="3600" dirty="0"/>
           </a:p>
@@ -17118,49 +17380,8 @@
         </p:nvSpPr>
         <p:spPr>
           <a:xfrm>
-            <a:off x="365760" y="1737360"/>
-            <a:ext cx="5120640" cy="457200"/>
-          </a:xfrm>
-          <a:prstGeom prst="rect">
-            <a:avLst/>
-          </a:prstGeom>
-          <a:noFill/>
-          <a:ln/>
-        </p:spPr>
-        <p:txBody>
-          <a:bodyPr wrap="square" lIns="0" tIns="0" rIns="0" bIns="0" rtlCol="0" anchor="ctr">
-            <a:normAutofit/>
-          </a:bodyPr>
-          <a:lstStyle/>
-          <a:p>
-            <a:pPr algn="l" indent="0" marL="0">
-              <a:buNone/>
-            </a:pPr>
-            <a:r>
-              <a:rPr lang="en-US" sz="3000" b="1" dirty="0">
-                <a:solidFill>
-                  <a:srgbClr val="990011"/>
-                </a:solidFill>
-                <a:latin typeface="Times New Roman" pitchFamily="34" charset="0"/>
-                <a:ea typeface="Times New Roman" pitchFamily="34" charset="-122"/>
-                <a:cs typeface="Times New Roman" pitchFamily="34" charset="-120"/>
-              </a:rPr>
-              <a:t>A) Volcanic Cones</a:t>
-            </a:r>
-            <a:endParaRPr lang="en-US" sz="3000" dirty="0"/>
-          </a:p>
-        </p:txBody>
-      </p:sp>
-      <p:sp>
-        <p:nvSpPr>
-          <p:cNvPr id="5" name="Text 3"/>
-          <p:cNvSpPr/>
-          <p:nvPr/>
-        </p:nvSpPr>
-        <p:spPr>
-          <a:xfrm>
-            <a:off x="365760" y="2240280"/>
-            <a:ext cx="4846320" cy="4160520"/>
+            <a:off x="365760" y="1783080"/>
+            <a:ext cx="6035040" cy="4617720"/>
           </a:xfrm>
           <a:prstGeom prst="rect">
             <a:avLst/>
@@ -17179,7 +17400,7 @@
               <a:buNone/>
             </a:pPr>
             <a:r>
-              <a:rPr lang="en-US" sz="3200" i="1" dirty="0">
+              <a:rPr lang="en-US" sz="3600" b="1" dirty="0">
                 <a:solidFill>
                   <a:srgbClr val="111111"/>
                 </a:solidFill>
@@ -17187,11 +17408,8 @@
                 <a:ea typeface="Times New Roman" pitchFamily="34" charset="-122"/>
                 <a:cs typeface="Times New Roman" pitchFamily="34" charset="-120"/>
               </a:rPr>
-              <a:t>The main types of volcanic cones are the following:</a:t>
-            </a:r>
-            <a:endParaRPr lang="en-US" sz="3200" dirty="0"/>
-          </a:p>
-          <a:p>
+              <a:t>Pyroclasts: </a:t>
+            </a:r>
             <a:pPr algn="l" indent="0" marL="0">
               <a:spcAft>
                 <a:spcPts val="800"/>
@@ -17199,7 +17417,7 @@
               <a:buNone/>
             </a:pPr>
             <a:r>
-              <a:rPr lang="en-US" sz="3200" b="1" dirty="0">
+              <a:rPr lang="en-US" sz="3600" dirty="0">
                 <a:solidFill>
                   <a:srgbClr val="111111"/>
                 </a:solidFill>
@@ -17207,32 +17425,15 @@
                 <a:ea typeface="Times New Roman" pitchFamily="34" charset="-122"/>
                 <a:cs typeface="Times New Roman" pitchFamily="34" charset="-120"/>
               </a:rPr>
-              <a:t>Shield (basic lava) cones: </a:t>
-            </a:r>
-            <a:pPr algn="l" indent="0" marL="0">
-              <a:spcAft>
-                <a:spcPts val="800"/>
-              </a:spcAft>
-              <a:buNone/>
-            </a:pPr>
-            <a:r>
-              <a:rPr lang="en-US" sz="3200" dirty="0">
-                <a:solidFill>
-                  <a:srgbClr val="111111"/>
-                </a:solidFill>
-                <a:latin typeface="Times New Roman" pitchFamily="34" charset="0"/>
-                <a:ea typeface="Times New Roman" pitchFamily="34" charset="-122"/>
-                <a:cs typeface="Times New Roman" pitchFamily="34" charset="-120"/>
-              </a:rPr>
-              <a:t>Runny lava builds very wide volcanoes with gentle slopes, like Mauna Loa in Hawaii.</a:t>
-            </a:r>
-            <a:endParaRPr lang="en-US" sz="3200" dirty="0"/>
+              <a:t>Explosions throw out solid fragments of all sizes: fine ash, small stones called cinders or lapilli, and large blocks and bombs. The ash can be carried by winds over thousands of kilometres.</a:t>
+            </a:r>
+            <a:endParaRPr lang="en-US" sz="3600" dirty="0"/>
           </a:p>
         </p:txBody>
       </p:sp>
       <p:pic>
         <p:nvPicPr>
-          <p:cNvPr id="6" name="Image 0" descr="/home/claude/f4/img/v2/lsa_shield.jpg">    </p:cNvPr>
+          <p:cNvPr id="5" name="Image 0" descr="/home/claude/f4/img/v2/geo2_products.png">    </p:cNvPr>
           <p:cNvPicPr>
             <a:picLocks noChangeAspect="1"/>
           </p:cNvPicPr>
@@ -17246,8 +17447,8 @@
         </p:blipFill>
         <p:spPr>
           <a:xfrm>
-            <a:off x="5349240" y="2071212"/>
-            <a:ext cx="6659575" cy="3693983"/>
+            <a:off x="6537960" y="2849678"/>
+            <a:ext cx="5470855" cy="2137053"/>
           </a:xfrm>
           <a:prstGeom prst="rect">
             <a:avLst/>
@@ -17256,14 +17457,14 @@
       </p:pic>
       <p:sp>
         <p:nvSpPr>
-          <p:cNvPr id="7" name="Text 4"/>
+          <p:cNvPr id="6" name="Text 3"/>
           <p:cNvSpPr/>
           <p:nvPr/>
         </p:nvSpPr>
         <p:spPr>
           <a:xfrm>
-            <a:off x="5349240" y="6089904"/>
-            <a:ext cx="6659575" cy="347472"/>
+            <a:off x="6537960" y="6089904"/>
+            <a:ext cx="5470855" cy="347472"/>
           </a:xfrm>
           <a:prstGeom prst="rect">
             <a:avLst/>
@@ -17287,7 +17488,7 @@
                 <a:ea typeface="Times New Roman" pitchFamily="34" charset="-122"/>
                 <a:cs typeface="Times New Roman" pitchFamily="34" charset="-120"/>
               </a:rPr>
-              <a:t>Illustration: a shield volcano</a:t>
+              <a:t>Illustration: the products of an eruption</a:t>
             </a:r>
             <a:endParaRPr lang="en-US" sz="1600" dirty="0"/>
           </a:p>
@@ -17422,7 +17623,7 @@
         <p:spPr>
           <a:xfrm>
             <a:off x="0" y="658368"/>
-            <a:ext cx="3840480" cy="5833872"/>
+            <a:ext cx="5120640" cy="5833872"/>
           </a:xfrm>
           <a:prstGeom prst="rect">
             <a:avLst/>
@@ -17437,8 +17638,8 @@
         </p:nvSpPr>
         <p:spPr>
           <a:xfrm>
-            <a:off x="4069080" y="1005840"/>
-            <a:ext cx="7802575" cy="731520"/>
+            <a:off x="5349240" y="1005840"/>
+            <a:ext cx="6522415" cy="731520"/>
           </a:xfrm>
           <a:prstGeom prst="rect">
             <a:avLst/>
@@ -17464,7 +17665,7 @@
                 <a:ea typeface="Times New Roman" pitchFamily="34" charset="-122"/>
                 <a:cs typeface="Times New Roman" pitchFamily="34" charset="-120"/>
               </a:rPr>
-              <a:t>3. Volcanic Landforms</a:t>
+              <a:t>3. Products of Volcanic Eruptions</a:t>
             </a:r>
             <a:endParaRPr lang="en-US" sz="3600" dirty="0"/>
           </a:p>
@@ -17478,47 +17679,8 @@
         </p:nvSpPr>
         <p:spPr>
           <a:xfrm>
-            <a:off x="4069080" y="1737360"/>
-            <a:ext cx="7802575" cy="457200"/>
-          </a:xfrm>
-          <a:prstGeom prst="rect">
-            <a:avLst/>
-          </a:prstGeom>
-          <a:noFill/>
-          <a:ln/>
-        </p:spPr>
-        <p:txBody>
-          <a:bodyPr wrap="square" lIns="0" tIns="0" rIns="0" bIns="0" rtlCol="0" anchor="ctr"/>
-          <a:lstStyle/>
-          <a:p>
-            <a:pPr algn="l" indent="0" marL="0">
-              <a:buNone/>
-            </a:pPr>
-            <a:r>
-              <a:rPr lang="en-US" sz="3200" b="1" dirty="0">
-                <a:solidFill>
-                  <a:srgbClr val="990011"/>
-                </a:solidFill>
-                <a:latin typeface="Times New Roman" pitchFamily="34" charset="0"/>
-                <a:ea typeface="Times New Roman" pitchFamily="34" charset="-122"/>
-                <a:cs typeface="Times New Roman" pitchFamily="34" charset="-120"/>
-              </a:rPr>
-              <a:t>A) Volcanic Cones</a:t>
-            </a:r>
-            <a:endParaRPr lang="en-US" sz="3200" dirty="0"/>
-          </a:p>
-        </p:txBody>
-      </p:sp>
-      <p:sp>
-        <p:nvSpPr>
-          <p:cNvPr id="6" name="Text 3"/>
-          <p:cNvSpPr/>
-          <p:nvPr/>
-        </p:nvSpPr>
-        <p:spPr>
-          <a:xfrm>
-            <a:off x="4069080" y="2240280"/>
-            <a:ext cx="7802575" cy="4206240"/>
+            <a:off x="5349240" y="1783080"/>
+            <a:ext cx="6522415" cy="4663440"/>
           </a:xfrm>
           <a:prstGeom prst="rect">
             <a:avLst/>
@@ -17545,7 +17707,7 @@
                 <a:ea typeface="Times New Roman" pitchFamily="34" charset="-122"/>
                 <a:cs typeface="Times New Roman" pitchFamily="34" charset="-120"/>
               </a:rPr>
-              <a:t>Acid lava domes: </a:t>
+              <a:t>Gases: </a:t>
             </a:r>
             <a:pPr algn="l" indent="0" marL="0">
               <a:spcAft>
@@ -17562,44 +17724,7 @@
                 <a:ea typeface="Times New Roman" pitchFamily="34" charset="-122"/>
                 <a:cs typeface="Times New Roman" pitchFamily="34" charset="-120"/>
               </a:rPr>
-              <a:t>Sticky lava piles up near the vent and forms steep domes.</a:t>
-            </a:r>
-            <a:endParaRPr lang="en-US" sz="4000" dirty="0"/>
-          </a:p>
-          <a:p>
-            <a:pPr algn="l" indent="0" marL="0">
-              <a:spcAft>
-                <a:spcPts val="800"/>
-              </a:spcAft>
-              <a:buNone/>
-            </a:pPr>
-            <a:r>
-              <a:rPr lang="en-US" sz="4000" b="1" dirty="0">
-                <a:solidFill>
-                  <a:srgbClr val="111111"/>
-                </a:solidFill>
-                <a:latin typeface="Times New Roman" pitchFamily="34" charset="0"/>
-                <a:ea typeface="Times New Roman" pitchFamily="34" charset="-122"/>
-                <a:cs typeface="Times New Roman" pitchFamily="34" charset="-120"/>
-              </a:rPr>
-              <a:t>Ash and cinder cones: </a:t>
-            </a:r>
-            <a:pPr algn="l" indent="0" marL="0">
-              <a:spcAft>
-                <a:spcPts val="800"/>
-              </a:spcAft>
-              <a:buNone/>
-            </a:pPr>
-            <a:r>
-              <a:rPr lang="en-US" sz="4000" dirty="0">
-                <a:solidFill>
-                  <a:srgbClr val="111111"/>
-                </a:solidFill>
-                <a:latin typeface="Times New Roman" pitchFamily="34" charset="0"/>
-                <a:ea typeface="Times New Roman" pitchFamily="34" charset="-122"/>
-                <a:cs typeface="Times New Roman" pitchFamily="34" charset="-120"/>
-              </a:rPr>
-              <a:t>Explosive eruptions of pyroclasts build steep but small cones.</a:t>
+              <a:t>Volcanic gases are mostly water vapour, with carbon dioxide, sulphur dioxide and hydrogen sulphide. Their pressure drives the eruption, and some are poisonous.</a:t>
             </a:r>
             <a:endParaRPr lang="en-US" sz="4000" dirty="0"/>
           </a:p>
@@ -17752,7 +17877,7 @@
                 <a:ea typeface="Times New Roman" pitchFamily="34" charset="-122"/>
                 <a:cs typeface="Times New Roman" pitchFamily="34" charset="-120"/>
               </a:rPr>
-              <a:t>3. Volcanic Landforms</a:t>
+              <a:t>4. Volcanic Landforms</a:t>
             </a:r>
             <a:endParaRPr lang="en-US" sz="3600" dirty="0"/>
           </a:p>
@@ -17767,7 +17892,7 @@
         <p:spPr>
           <a:xfrm>
             <a:off x="365760" y="1737360"/>
-            <a:ext cx="5120640" cy="457200"/>
+            <a:ext cx="6035040" cy="457200"/>
           </a:xfrm>
           <a:prstGeom prst="rect">
             <a:avLst/>
@@ -17808,7 +17933,7 @@
         <p:spPr>
           <a:xfrm>
             <a:off x="365760" y="2240280"/>
-            <a:ext cx="4846320" cy="4160520"/>
+            <a:ext cx="6035040" cy="4160520"/>
           </a:xfrm>
           <a:prstGeom prst="rect">
             <a:avLst/>
@@ -17827,7 +17952,7 @@
               <a:buNone/>
             </a:pPr>
             <a:r>
-              <a:rPr lang="en-US" sz="3600" b="1" dirty="0">
+              <a:rPr lang="en-US" sz="3000" i="1" dirty="0">
                 <a:solidFill>
                   <a:srgbClr val="111111"/>
                 </a:solidFill>
@@ -17835,8 +17960,11 @@
                 <a:ea typeface="Times New Roman" pitchFamily="34" charset="-122"/>
                 <a:cs typeface="Times New Roman" pitchFamily="34" charset="-120"/>
               </a:rPr>
-              <a:t>Composite cones (stratovolcanoes): </a:t>
-            </a:r>
+              <a:t>Different materials and eruptions build the following types of cones:</a:t>
+            </a:r>
+            <a:endParaRPr lang="en-US" sz="3000" dirty="0"/>
+          </a:p>
+          <a:p>
             <a:pPr algn="l" indent="0" marL="0">
               <a:spcAft>
                 <a:spcPts val="800"/>
@@ -17844,7 +17972,7 @@
               <a:buNone/>
             </a:pPr>
             <a:r>
-              <a:rPr lang="en-US" sz="3600" dirty="0">
+              <a:rPr lang="en-US" sz="3000" b="1" dirty="0">
                 <a:solidFill>
                   <a:srgbClr val="111111"/>
                 </a:solidFill>
@@ -17852,15 +17980,32 @@
                 <a:ea typeface="Times New Roman" pitchFamily="34" charset="-122"/>
                 <a:cs typeface="Times New Roman" pitchFamily="34" charset="-120"/>
               </a:rPr>
-              <a:t>Alternate layers of lava and ash build tall, steep cones, like Mount Cameroon (4,095 m) and Mount Fuji.</a:t>
-            </a:r>
-            <a:endParaRPr lang="en-US" sz="3600" dirty="0"/>
+              <a:t>Basic lava cones (shield volcanoes): </a:t>
+            </a:r>
+            <a:pPr algn="l" indent="0" marL="0">
+              <a:spcAft>
+                <a:spcPts val="800"/>
+              </a:spcAft>
+              <a:buNone/>
+            </a:pPr>
+            <a:r>
+              <a:rPr lang="en-US" sz="3000" dirty="0">
+                <a:solidFill>
+                  <a:srgbClr val="111111"/>
+                </a:solidFill>
+                <a:latin typeface="Times New Roman" pitchFamily="34" charset="0"/>
+                <a:ea typeface="Times New Roman" pitchFamily="34" charset="-122"/>
+                <a:cs typeface="Times New Roman" pitchFamily="34" charset="-120"/>
+              </a:rPr>
+              <a:t>Runny basic lava flows far before it solidifies, so it builds very wide volcanoes with gentle slopes. Mauna Loa in Hawaii is the largest example.</a:t>
+            </a:r>
+            <a:endParaRPr lang="en-US" sz="3000" dirty="0"/>
           </a:p>
         </p:txBody>
       </p:sp>
       <p:pic>
         <p:nvPicPr>
-          <p:cNvPr id="6" name="Image 0" descr="/home/claude/f4/img/v2/lsa_mayon.jpg">    </p:cNvPr>
+          <p:cNvPr id="6" name="Image 0" descr="/home/claude/f4/img/v2/lsa_shield.jpg">    </p:cNvPr>
           <p:cNvPicPr>
             <a:picLocks noChangeAspect="1"/>
           </p:cNvPicPr>
@@ -17874,8 +18019,8 @@
         </p:blipFill>
         <p:spPr>
           <a:xfrm>
-            <a:off x="5349240" y="2071212"/>
-            <a:ext cx="6659575" cy="3693983"/>
+            <a:off x="6537960" y="2400897"/>
+            <a:ext cx="5470855" cy="3034615"/>
           </a:xfrm>
           <a:prstGeom prst="rect">
             <a:avLst/>
@@ -17890,8 +18035,8 @@
         </p:nvSpPr>
         <p:spPr>
           <a:xfrm>
-            <a:off x="5349240" y="6089904"/>
-            <a:ext cx="6659575" cy="347472"/>
+            <a:off x="6537960" y="6089904"/>
+            <a:ext cx="5470855" cy="347472"/>
           </a:xfrm>
           <a:prstGeom prst="rect">
             <a:avLst/>
@@ -17915,7 +18060,7 @@
                 <a:ea typeface="Times New Roman" pitchFamily="34" charset="-122"/>
                 <a:cs typeface="Times New Roman" pitchFamily="34" charset="-120"/>
               </a:rPr>
-              <a:t>Illustration: a composite cone</a:t>
+              <a:t>Illustration: a shield volcano</a:t>
             </a:r>
             <a:endParaRPr lang="en-US" sz="1600" dirty="0"/>
           </a:p>
@@ -18033,170 +18178,9 @@
           </a:p>
         </p:txBody>
       </p:sp>
-      <p:sp>
-        <p:nvSpPr>
-          <p:cNvPr id="3" name="Text 1"/>
-          <p:cNvSpPr/>
-          <p:nvPr/>
-        </p:nvSpPr>
-        <p:spPr>
-          <a:xfrm>
-            <a:off x="365760" y="1005840"/>
-            <a:ext cx="11460175" cy="731520"/>
-          </a:xfrm>
-          <a:prstGeom prst="rect">
-            <a:avLst/>
-          </a:prstGeom>
-          <a:noFill/>
-          <a:ln/>
-        </p:spPr>
-        <p:txBody>
-          <a:bodyPr wrap="square" lIns="0" tIns="0" rIns="0" bIns="0" rtlCol="0" anchor="ctr">
-            <a:normAutofit/>
-          </a:bodyPr>
-          <a:lstStyle/>
-          <a:p>
-            <a:pPr algn="ctr" indent="0" marL="0">
-              <a:buNone/>
-            </a:pPr>
-            <a:r>
-              <a:rPr lang="en-US" sz="3600" b="1" dirty="0">
-                <a:solidFill>
-                  <a:srgbClr val="990011"/>
-                </a:solidFill>
-                <a:latin typeface="Times New Roman" pitchFamily="34" charset="0"/>
-                <a:ea typeface="Times New Roman" pitchFamily="34" charset="-122"/>
-                <a:cs typeface="Times New Roman" pitchFamily="34" charset="-120"/>
-              </a:rPr>
-              <a:t>3. Volcanic Landforms</a:t>
-            </a:r>
-            <a:endParaRPr lang="en-US" sz="3600" dirty="0"/>
-          </a:p>
-        </p:txBody>
-      </p:sp>
-      <p:sp>
-        <p:nvSpPr>
-          <p:cNvPr id="4" name="Text 2"/>
-          <p:cNvSpPr/>
-          <p:nvPr/>
-        </p:nvSpPr>
-        <p:spPr>
-          <a:xfrm>
-            <a:off x="365760" y="1737360"/>
-            <a:ext cx="5120640" cy="457200"/>
-          </a:xfrm>
-          <a:prstGeom prst="rect">
-            <a:avLst/>
-          </a:prstGeom>
-          <a:noFill/>
-          <a:ln/>
-        </p:spPr>
-        <p:txBody>
-          <a:bodyPr wrap="square" lIns="0" tIns="0" rIns="0" bIns="0" rtlCol="0" anchor="ctr">
-            <a:normAutofit/>
-          </a:bodyPr>
-          <a:lstStyle/>
-          <a:p>
-            <a:pPr algn="l" indent="0" marL="0">
-              <a:buNone/>
-            </a:pPr>
-            <a:r>
-              <a:rPr lang="en-US" sz="3000" b="1" dirty="0">
-                <a:solidFill>
-                  <a:srgbClr val="990011"/>
-                </a:solidFill>
-                <a:latin typeface="Times New Roman" pitchFamily="34" charset="0"/>
-                <a:ea typeface="Times New Roman" pitchFamily="34" charset="-122"/>
-                <a:cs typeface="Times New Roman" pitchFamily="34" charset="-120"/>
-              </a:rPr>
-              <a:t>B) Other Volcanic Landforms</a:t>
-            </a:r>
-            <a:endParaRPr lang="en-US" sz="3000" dirty="0"/>
-          </a:p>
-        </p:txBody>
-      </p:sp>
-      <p:sp>
-        <p:nvSpPr>
-          <p:cNvPr id="5" name="Text 3"/>
-          <p:cNvSpPr/>
-          <p:nvPr/>
-        </p:nvSpPr>
-        <p:spPr>
-          <a:xfrm>
-            <a:off x="365760" y="2240280"/>
-            <a:ext cx="4846320" cy="4160520"/>
-          </a:xfrm>
-          <a:prstGeom prst="rect">
-            <a:avLst/>
-          </a:prstGeom>
-          <a:noFill/>
-          <a:ln/>
-        </p:spPr>
-        <p:txBody>
-          <a:bodyPr wrap="square" lIns="0" tIns="0" rIns="0" bIns="0" rtlCol="0" anchor="t"/>
-          <a:lstStyle/>
-          <a:p>
-            <a:pPr algn="l" indent="0" marL="0">
-              <a:spcAft>
-                <a:spcPts val="800"/>
-              </a:spcAft>
-              <a:buNone/>
-            </a:pPr>
-            <a:r>
-              <a:rPr lang="en-US" sz="3400" i="1" dirty="0">
-                <a:solidFill>
-                  <a:srgbClr val="111111"/>
-                </a:solidFill>
-                <a:latin typeface="Times New Roman" pitchFamily="34" charset="0"/>
-                <a:ea typeface="Times New Roman" pitchFamily="34" charset="-122"/>
-                <a:cs typeface="Times New Roman" pitchFamily="34" charset="-120"/>
-              </a:rPr>
-              <a:t>Other volcanic landforms are the following:</a:t>
-            </a:r>
-            <a:endParaRPr lang="en-US" sz="3400" dirty="0"/>
-          </a:p>
-          <a:p>
-            <a:pPr algn="l" indent="0" marL="0">
-              <a:spcAft>
-                <a:spcPts val="800"/>
-              </a:spcAft>
-              <a:buNone/>
-            </a:pPr>
-            <a:r>
-              <a:rPr lang="en-US" sz="3400" b="1" dirty="0">
-                <a:solidFill>
-                  <a:srgbClr val="111111"/>
-                </a:solidFill>
-                <a:latin typeface="Times New Roman" pitchFamily="34" charset="0"/>
-                <a:ea typeface="Times New Roman" pitchFamily="34" charset="-122"/>
-                <a:cs typeface="Times New Roman" pitchFamily="34" charset="-120"/>
-              </a:rPr>
-              <a:t>Lava plateau: </a:t>
-            </a:r>
-            <a:pPr algn="l" indent="0" marL="0">
-              <a:spcAft>
-                <a:spcPts val="800"/>
-              </a:spcAft>
-              <a:buNone/>
-            </a:pPr>
-            <a:r>
-              <a:rPr lang="en-US" sz="3400" dirty="0">
-                <a:solidFill>
-                  <a:srgbClr val="111111"/>
-                </a:solidFill>
-                <a:latin typeface="Times New Roman" pitchFamily="34" charset="0"/>
-                <a:ea typeface="Times New Roman" pitchFamily="34" charset="-122"/>
-                <a:cs typeface="Times New Roman" pitchFamily="34" charset="-120"/>
-              </a:rPr>
-              <a:t>Very runny lava erupts from long fissures and covers huge areas, like the Deccan Plateau of India.</a:t>
-            </a:r>
-            <a:endParaRPr lang="en-US" sz="3400" dirty="0"/>
-          </a:p>
-        </p:txBody>
-      </p:sp>
       <p:pic>
         <p:nvPicPr>
-          <p:cNvPr id="6" name="Image 0" descr="/home/claude/f4/img/v2/lsa_basalt.jpg">    </p:cNvPr>
+          <p:cNvPr id="3" name="Image 0" descr="/home/claude/f4/img/minesec_sheet.png">    </p:cNvPr>
           <p:cNvPicPr>
             <a:picLocks noChangeAspect="1"/>
           </p:cNvPicPr>
@@ -18210,8 +18194,8 @@
         </p:blipFill>
         <p:spPr>
           <a:xfrm>
-            <a:off x="5349240" y="2071212"/>
-            <a:ext cx="6659575" cy="3693983"/>
+            <a:off x="0" y="658368"/>
+            <a:ext cx="3840480" cy="5833872"/>
           </a:xfrm>
           <a:prstGeom prst="rect">
             <a:avLst/>
@@ -18220,14 +18204,14 @@
       </p:pic>
       <p:sp>
         <p:nvSpPr>
-          <p:cNvPr id="7" name="Text 4"/>
+          <p:cNvPr id="4" name="Text 1"/>
           <p:cNvSpPr/>
           <p:nvPr/>
         </p:nvSpPr>
         <p:spPr>
           <a:xfrm>
-            <a:off x="5349240" y="6089904"/>
-            <a:ext cx="6659575" cy="347472"/>
+            <a:off x="4069080" y="1005840"/>
+            <a:ext cx="7802575" cy="731520"/>
           </a:xfrm>
           <a:prstGeom prst="rect">
             <a:avLst/>
@@ -18236,24 +18220,124 @@
           <a:ln/>
         </p:spPr>
         <p:txBody>
-          <a:bodyPr wrap="square" lIns="0" tIns="0" rIns="0" bIns="0" rtlCol="0" anchor="ctr"/>
+          <a:bodyPr wrap="square" lIns="0" tIns="0" rIns="0" bIns="0" rtlCol="0" anchor="ctr">
+            <a:normAutofit/>
+          </a:bodyPr>
           <a:lstStyle/>
           <a:p>
             <a:pPr algn="ctr" indent="0" marL="0">
               <a:buNone/>
             </a:pPr>
             <a:r>
-              <a:rPr lang="en-US" sz="1600" i="1" dirty="0">
-                <a:solidFill>
-                  <a:srgbClr val="555555"/>
+              <a:rPr lang="en-US" sz="3600" b="1" dirty="0">
+                <a:solidFill>
+                  <a:srgbClr val="990011"/>
                 </a:solidFill>
                 <a:latin typeface="Times New Roman" pitchFamily="34" charset="0"/>
                 <a:ea typeface="Times New Roman" pitchFamily="34" charset="-122"/>
                 <a:cs typeface="Times New Roman" pitchFamily="34" charset="-120"/>
               </a:rPr>
-              <a:t>Illustration: basalt columns</a:t>
-            </a:r>
-            <a:endParaRPr lang="en-US" sz="1600" dirty="0"/>
+              <a:t>4. Volcanic Landforms</a:t>
+            </a:r>
+            <a:endParaRPr lang="en-US" sz="3600" dirty="0"/>
+          </a:p>
+        </p:txBody>
+      </p:sp>
+      <p:sp>
+        <p:nvSpPr>
+          <p:cNvPr id="5" name="Text 2"/>
+          <p:cNvSpPr/>
+          <p:nvPr/>
+        </p:nvSpPr>
+        <p:spPr>
+          <a:xfrm>
+            <a:off x="4069080" y="1737360"/>
+            <a:ext cx="7802575" cy="457200"/>
+          </a:xfrm>
+          <a:prstGeom prst="rect">
+            <a:avLst/>
+          </a:prstGeom>
+          <a:noFill/>
+          <a:ln/>
+        </p:spPr>
+        <p:txBody>
+          <a:bodyPr wrap="square" lIns="0" tIns="0" rIns="0" bIns="0" rtlCol="0" anchor="ctr"/>
+          <a:lstStyle/>
+          <a:p>
+            <a:pPr algn="l" indent="0" marL="0">
+              <a:buNone/>
+            </a:pPr>
+            <a:r>
+              <a:rPr lang="en-US" sz="3200" b="1" dirty="0">
+                <a:solidFill>
+                  <a:srgbClr val="990011"/>
+                </a:solidFill>
+                <a:latin typeface="Times New Roman" pitchFamily="34" charset="0"/>
+                <a:ea typeface="Times New Roman" pitchFamily="34" charset="-122"/>
+                <a:cs typeface="Times New Roman" pitchFamily="34" charset="-120"/>
+              </a:rPr>
+              <a:t>A) Volcanic Cones</a:t>
+            </a:r>
+            <a:endParaRPr lang="en-US" sz="3200" dirty="0"/>
+          </a:p>
+        </p:txBody>
+      </p:sp>
+      <p:sp>
+        <p:nvSpPr>
+          <p:cNvPr id="6" name="Text 3"/>
+          <p:cNvSpPr/>
+          <p:nvPr/>
+        </p:nvSpPr>
+        <p:spPr>
+          <a:xfrm>
+            <a:off x="4069080" y="2240280"/>
+            <a:ext cx="7802575" cy="4206240"/>
+          </a:xfrm>
+          <a:prstGeom prst="rect">
+            <a:avLst/>
+          </a:prstGeom>
+          <a:noFill/>
+          <a:ln/>
+        </p:spPr>
+        <p:txBody>
+          <a:bodyPr wrap="square" lIns="0" tIns="0" rIns="0" bIns="0" rtlCol="0" anchor="t"/>
+          <a:lstStyle/>
+          <a:p>
+            <a:pPr algn="l" indent="0" marL="0">
+              <a:spcAft>
+                <a:spcPts val="800"/>
+              </a:spcAft>
+              <a:buNone/>
+            </a:pPr>
+            <a:r>
+              <a:rPr lang="en-US" sz="4000" b="1" dirty="0">
+                <a:solidFill>
+                  <a:srgbClr val="111111"/>
+                </a:solidFill>
+                <a:latin typeface="Times New Roman" pitchFamily="34" charset="0"/>
+                <a:ea typeface="Times New Roman" pitchFamily="34" charset="-122"/>
+                <a:cs typeface="Times New Roman" pitchFamily="34" charset="-120"/>
+              </a:rPr>
+              <a:t>Acid lava cones (cumulo-domes): </a:t>
+            </a:r>
+            <a:pPr algn="l" indent="0" marL="0">
+              <a:spcAft>
+                <a:spcPts val="800"/>
+              </a:spcAft>
+              <a:buNone/>
+            </a:pPr>
+            <a:r>
+              <a:rPr lang="en-US" sz="4000" dirty="0">
+                <a:solidFill>
+                  <a:srgbClr val="111111"/>
+                </a:solidFill>
+                <a:latin typeface="Times New Roman" pitchFamily="34" charset="0"/>
+                <a:ea typeface="Times New Roman" pitchFamily="34" charset="-122"/>
+                <a:cs typeface="Times New Roman" pitchFamily="34" charset="-120"/>
+              </a:rPr>
+              <a:t>Sticky acid lava cannot flow far and piles up around the vent. It forms small, steep-sided domes, like the domes of the Puy region in France.</a:t>
+            </a:r>
+            <a:endParaRPr lang="en-US" sz="4000" dirty="0"/>
           </a:p>
         </p:txBody>
       </p:sp>
@@ -18369,150 +18453,9 @@
           </a:p>
         </p:txBody>
       </p:sp>
-      <p:sp>
-        <p:nvSpPr>
-          <p:cNvPr id="3" name="Text 1"/>
-          <p:cNvSpPr/>
-          <p:nvPr/>
-        </p:nvSpPr>
-        <p:spPr>
-          <a:xfrm>
-            <a:off x="365760" y="1005840"/>
-            <a:ext cx="11460175" cy="731520"/>
-          </a:xfrm>
-          <a:prstGeom prst="rect">
-            <a:avLst/>
-          </a:prstGeom>
-          <a:noFill/>
-          <a:ln/>
-        </p:spPr>
-        <p:txBody>
-          <a:bodyPr wrap="square" lIns="0" tIns="0" rIns="0" bIns="0" rtlCol="0" anchor="ctr">
-            <a:normAutofit/>
-          </a:bodyPr>
-          <a:lstStyle/>
-          <a:p>
-            <a:pPr algn="ctr" indent="0" marL="0">
-              <a:buNone/>
-            </a:pPr>
-            <a:r>
-              <a:rPr lang="en-US" sz="3600" b="1" dirty="0">
-                <a:solidFill>
-                  <a:srgbClr val="990011"/>
-                </a:solidFill>
-                <a:latin typeface="Times New Roman" pitchFamily="34" charset="0"/>
-                <a:ea typeface="Times New Roman" pitchFamily="34" charset="-122"/>
-                <a:cs typeface="Times New Roman" pitchFamily="34" charset="-120"/>
-              </a:rPr>
-              <a:t>3. Volcanic Landforms</a:t>
-            </a:r>
-            <a:endParaRPr lang="en-US" sz="3600" dirty="0"/>
-          </a:p>
-        </p:txBody>
-      </p:sp>
-      <p:sp>
-        <p:nvSpPr>
-          <p:cNvPr id="4" name="Text 2"/>
-          <p:cNvSpPr/>
-          <p:nvPr/>
-        </p:nvSpPr>
-        <p:spPr>
-          <a:xfrm>
-            <a:off x="365760" y="1737360"/>
-            <a:ext cx="5120640" cy="457200"/>
-          </a:xfrm>
-          <a:prstGeom prst="rect">
-            <a:avLst/>
-          </a:prstGeom>
-          <a:noFill/>
-          <a:ln/>
-        </p:spPr>
-        <p:txBody>
-          <a:bodyPr wrap="square" lIns="0" tIns="0" rIns="0" bIns="0" rtlCol="0" anchor="ctr">
-            <a:normAutofit/>
-          </a:bodyPr>
-          <a:lstStyle/>
-          <a:p>
-            <a:pPr algn="l" indent="0" marL="0">
-              <a:buNone/>
-            </a:pPr>
-            <a:r>
-              <a:rPr lang="en-US" sz="3000" b="1" dirty="0">
-                <a:solidFill>
-                  <a:srgbClr val="990011"/>
-                </a:solidFill>
-                <a:latin typeface="Times New Roman" pitchFamily="34" charset="0"/>
-                <a:ea typeface="Times New Roman" pitchFamily="34" charset="-122"/>
-                <a:cs typeface="Times New Roman" pitchFamily="34" charset="-120"/>
-              </a:rPr>
-              <a:t>B) Other Volcanic Landforms</a:t>
-            </a:r>
-            <a:endParaRPr lang="en-US" sz="3000" dirty="0"/>
-          </a:p>
-        </p:txBody>
-      </p:sp>
-      <p:sp>
-        <p:nvSpPr>
-          <p:cNvPr id="5" name="Text 3"/>
-          <p:cNvSpPr/>
-          <p:nvPr/>
-        </p:nvSpPr>
-        <p:spPr>
-          <a:xfrm>
-            <a:off x="365760" y="2240280"/>
-            <a:ext cx="4846320" cy="4160520"/>
-          </a:xfrm>
-          <a:prstGeom prst="rect">
-            <a:avLst/>
-          </a:prstGeom>
-          <a:noFill/>
-          <a:ln/>
-        </p:spPr>
-        <p:txBody>
-          <a:bodyPr wrap="square" lIns="0" tIns="0" rIns="0" bIns="0" rtlCol="0" anchor="t"/>
-          <a:lstStyle/>
-          <a:p>
-            <a:pPr algn="l" indent="0" marL="0">
-              <a:spcAft>
-                <a:spcPts val="800"/>
-              </a:spcAft>
-              <a:buNone/>
-            </a:pPr>
-            <a:r>
-              <a:rPr lang="en-US" sz="3600" b="1" dirty="0">
-                <a:solidFill>
-                  <a:srgbClr val="111111"/>
-                </a:solidFill>
-                <a:latin typeface="Times New Roman" pitchFamily="34" charset="0"/>
-                <a:ea typeface="Times New Roman" pitchFamily="34" charset="-122"/>
-                <a:cs typeface="Times New Roman" pitchFamily="34" charset="-120"/>
-              </a:rPr>
-              <a:t>Crater: </a:t>
-            </a:r>
-            <a:pPr algn="l" indent="0" marL="0">
-              <a:spcAft>
-                <a:spcPts val="800"/>
-              </a:spcAft>
-              <a:buNone/>
-            </a:pPr>
-            <a:r>
-              <a:rPr lang="en-US" sz="3600" dirty="0">
-                <a:solidFill>
-                  <a:srgbClr val="111111"/>
-                </a:solidFill>
-                <a:latin typeface="Times New Roman" pitchFamily="34" charset="0"/>
-                <a:ea typeface="Times New Roman" pitchFamily="34" charset="-122"/>
-                <a:cs typeface="Times New Roman" pitchFamily="34" charset="-120"/>
-              </a:rPr>
-              <a:t>A bowl-shaped depression at the top of the vent, usually less than 1 km wide.</a:t>
-            </a:r>
-            <a:endParaRPr lang="en-US" sz="3600" dirty="0"/>
-          </a:p>
-        </p:txBody>
-      </p:sp>
       <p:pic>
         <p:nvPicPr>
-          <p:cNvPr id="6" name="Image 0" descr="/home/claude/f4/img/v2/f4_crater.jpg">    </p:cNvPr>
+          <p:cNvPr id="3" name="Image 0" descr="/home/claude/f4/img/minesec_sheet.png">    </p:cNvPr>
           <p:cNvPicPr>
             <a:picLocks noChangeAspect="1"/>
           </p:cNvPicPr>
@@ -18526,8 +18469,8 @@
         </p:blipFill>
         <p:spPr>
           <a:xfrm>
-            <a:off x="5349240" y="2071212"/>
-            <a:ext cx="6659575" cy="3693983"/>
+            <a:off x="0" y="658368"/>
+            <a:ext cx="3840480" cy="5833872"/>
           </a:xfrm>
           <a:prstGeom prst="rect">
             <a:avLst/>
@@ -18536,14 +18479,14 @@
       </p:pic>
       <p:sp>
         <p:nvSpPr>
-          <p:cNvPr id="7" name="Text 4"/>
+          <p:cNvPr id="4" name="Text 1"/>
           <p:cNvSpPr/>
           <p:nvPr/>
         </p:nvSpPr>
         <p:spPr>
           <a:xfrm>
-            <a:off x="5349240" y="6089904"/>
-            <a:ext cx="6659575" cy="347472"/>
+            <a:off x="4069080" y="1005840"/>
+            <a:ext cx="7802575" cy="731520"/>
           </a:xfrm>
           <a:prstGeom prst="rect">
             <a:avLst/>
@@ -18552,24 +18495,124 @@
           <a:ln/>
         </p:spPr>
         <p:txBody>
-          <a:bodyPr wrap="square" lIns="0" tIns="0" rIns="0" bIns="0" rtlCol="0" anchor="ctr"/>
+          <a:bodyPr wrap="square" lIns="0" tIns="0" rIns="0" bIns="0" rtlCol="0" anchor="ctr">
+            <a:normAutofit/>
+          </a:bodyPr>
           <a:lstStyle/>
           <a:p>
             <a:pPr algn="ctr" indent="0" marL="0">
               <a:buNone/>
             </a:pPr>
             <a:r>
-              <a:rPr lang="en-US" sz="1600" i="1" dirty="0">
-                <a:solidFill>
-                  <a:srgbClr val="555555"/>
+              <a:rPr lang="en-US" sz="3600" b="1" dirty="0">
+                <a:solidFill>
+                  <a:srgbClr val="990011"/>
                 </a:solidFill>
                 <a:latin typeface="Times New Roman" pitchFamily="34" charset="0"/>
                 <a:ea typeface="Times New Roman" pitchFamily="34" charset="-122"/>
                 <a:cs typeface="Times New Roman" pitchFamily="34" charset="-120"/>
               </a:rPr>
-              <a:t>Illustration: a crater</a:t>
-            </a:r>
-            <a:endParaRPr lang="en-US" sz="1600" dirty="0"/>
+              <a:t>4. Volcanic Landforms</a:t>
+            </a:r>
+            <a:endParaRPr lang="en-US" sz="3600" dirty="0"/>
+          </a:p>
+        </p:txBody>
+      </p:sp>
+      <p:sp>
+        <p:nvSpPr>
+          <p:cNvPr id="5" name="Text 2"/>
+          <p:cNvSpPr/>
+          <p:nvPr/>
+        </p:nvSpPr>
+        <p:spPr>
+          <a:xfrm>
+            <a:off x="4069080" y="1737360"/>
+            <a:ext cx="7802575" cy="457200"/>
+          </a:xfrm>
+          <a:prstGeom prst="rect">
+            <a:avLst/>
+          </a:prstGeom>
+          <a:noFill/>
+          <a:ln/>
+        </p:spPr>
+        <p:txBody>
+          <a:bodyPr wrap="square" lIns="0" tIns="0" rIns="0" bIns="0" rtlCol="0" anchor="ctr"/>
+          <a:lstStyle/>
+          <a:p>
+            <a:pPr algn="l" indent="0" marL="0">
+              <a:buNone/>
+            </a:pPr>
+            <a:r>
+              <a:rPr lang="en-US" sz="3200" b="1" dirty="0">
+                <a:solidFill>
+                  <a:srgbClr val="990011"/>
+                </a:solidFill>
+                <a:latin typeface="Times New Roman" pitchFamily="34" charset="0"/>
+                <a:ea typeface="Times New Roman" pitchFamily="34" charset="-122"/>
+                <a:cs typeface="Times New Roman" pitchFamily="34" charset="-120"/>
+              </a:rPr>
+              <a:t>A) Volcanic Cones</a:t>
+            </a:r>
+            <a:endParaRPr lang="en-US" sz="3200" dirty="0"/>
+          </a:p>
+        </p:txBody>
+      </p:sp>
+      <p:sp>
+        <p:nvSpPr>
+          <p:cNvPr id="6" name="Text 3"/>
+          <p:cNvSpPr/>
+          <p:nvPr/>
+        </p:nvSpPr>
+        <p:spPr>
+          <a:xfrm>
+            <a:off x="4069080" y="2240280"/>
+            <a:ext cx="7802575" cy="4206240"/>
+          </a:xfrm>
+          <a:prstGeom prst="rect">
+            <a:avLst/>
+          </a:prstGeom>
+          <a:noFill/>
+          <a:ln/>
+        </p:spPr>
+        <p:txBody>
+          <a:bodyPr wrap="square" lIns="0" tIns="0" rIns="0" bIns="0" rtlCol="0" anchor="t"/>
+          <a:lstStyle/>
+          <a:p>
+            <a:pPr algn="l" indent="0" marL="0">
+              <a:spcAft>
+                <a:spcPts val="800"/>
+              </a:spcAft>
+              <a:buNone/>
+            </a:pPr>
+            <a:r>
+              <a:rPr lang="en-US" sz="4000" b="1" dirty="0">
+                <a:solidFill>
+                  <a:srgbClr val="111111"/>
+                </a:solidFill>
+                <a:latin typeface="Times New Roman" pitchFamily="34" charset="0"/>
+                <a:ea typeface="Times New Roman" pitchFamily="34" charset="-122"/>
+                <a:cs typeface="Times New Roman" pitchFamily="34" charset="-120"/>
+              </a:rPr>
+              <a:t>Ash and cinder cones: </a:t>
+            </a:r>
+            <a:pPr algn="l" indent="0" marL="0">
+              <a:spcAft>
+                <a:spcPts val="800"/>
+              </a:spcAft>
+              <a:buNone/>
+            </a:pPr>
+            <a:r>
+              <a:rPr lang="en-US" sz="4000" dirty="0">
+                <a:solidFill>
+                  <a:srgbClr val="111111"/>
+                </a:solidFill>
+                <a:latin typeface="Times New Roman" pitchFamily="34" charset="0"/>
+                <a:ea typeface="Times New Roman" pitchFamily="34" charset="-122"/>
+                <a:cs typeface="Times New Roman" pitchFamily="34" charset="-120"/>
+              </a:rPr>
+              <a:t>Explosive eruptions throw out ash and cinders, which fall around the vent. They build small, steep cones with a crater at the top, like Paricutin in Mexico.</a:t>
+            </a:r>
+            <a:endParaRPr lang="en-US" sz="4000" dirty="0"/>
           </a:p>
         </p:txBody>
       </p:sp>
@@ -18685,9 +18728,150 @@
           </a:p>
         </p:txBody>
       </p:sp>
+      <p:sp>
+        <p:nvSpPr>
+          <p:cNvPr id="3" name="Text 1"/>
+          <p:cNvSpPr/>
+          <p:nvPr/>
+        </p:nvSpPr>
+        <p:spPr>
+          <a:xfrm>
+            <a:off x="365760" y="1005840"/>
+            <a:ext cx="11460175" cy="731520"/>
+          </a:xfrm>
+          <a:prstGeom prst="rect">
+            <a:avLst/>
+          </a:prstGeom>
+          <a:noFill/>
+          <a:ln/>
+        </p:spPr>
+        <p:txBody>
+          <a:bodyPr wrap="square" lIns="0" tIns="0" rIns="0" bIns="0" rtlCol="0" anchor="ctr">
+            <a:normAutofit/>
+          </a:bodyPr>
+          <a:lstStyle/>
+          <a:p>
+            <a:pPr algn="ctr" indent="0" marL="0">
+              <a:buNone/>
+            </a:pPr>
+            <a:r>
+              <a:rPr lang="en-US" sz="3600" b="1" dirty="0">
+                <a:solidFill>
+                  <a:srgbClr val="990011"/>
+                </a:solidFill>
+                <a:latin typeface="Times New Roman" pitchFamily="34" charset="0"/>
+                <a:ea typeface="Times New Roman" pitchFamily="34" charset="-122"/>
+                <a:cs typeface="Times New Roman" pitchFamily="34" charset="-120"/>
+              </a:rPr>
+              <a:t>4. Volcanic Landforms</a:t>
+            </a:r>
+            <a:endParaRPr lang="en-US" sz="3600" dirty="0"/>
+          </a:p>
+        </p:txBody>
+      </p:sp>
+      <p:sp>
+        <p:nvSpPr>
+          <p:cNvPr id="4" name="Text 2"/>
+          <p:cNvSpPr/>
+          <p:nvPr/>
+        </p:nvSpPr>
+        <p:spPr>
+          <a:xfrm>
+            <a:off x="365760" y="1737360"/>
+            <a:ext cx="6035040" cy="457200"/>
+          </a:xfrm>
+          <a:prstGeom prst="rect">
+            <a:avLst/>
+          </a:prstGeom>
+          <a:noFill/>
+          <a:ln/>
+        </p:spPr>
+        <p:txBody>
+          <a:bodyPr wrap="square" lIns="0" tIns="0" rIns="0" bIns="0" rtlCol="0" anchor="ctr">
+            <a:normAutofit/>
+          </a:bodyPr>
+          <a:lstStyle/>
+          <a:p>
+            <a:pPr algn="l" indent="0" marL="0">
+              <a:buNone/>
+            </a:pPr>
+            <a:r>
+              <a:rPr lang="en-US" sz="3000" b="1" dirty="0">
+                <a:solidFill>
+                  <a:srgbClr val="990011"/>
+                </a:solidFill>
+                <a:latin typeface="Times New Roman" pitchFamily="34" charset="0"/>
+                <a:ea typeface="Times New Roman" pitchFamily="34" charset="-122"/>
+                <a:cs typeface="Times New Roman" pitchFamily="34" charset="-120"/>
+              </a:rPr>
+              <a:t>A) Volcanic Cones</a:t>
+            </a:r>
+            <a:endParaRPr lang="en-US" sz="3000" dirty="0"/>
+          </a:p>
+        </p:txBody>
+      </p:sp>
+      <p:sp>
+        <p:nvSpPr>
+          <p:cNvPr id="5" name="Text 3"/>
+          <p:cNvSpPr/>
+          <p:nvPr/>
+        </p:nvSpPr>
+        <p:spPr>
+          <a:xfrm>
+            <a:off x="365760" y="2240280"/>
+            <a:ext cx="6035040" cy="4160520"/>
+          </a:xfrm>
+          <a:prstGeom prst="rect">
+            <a:avLst/>
+          </a:prstGeom>
+          <a:noFill/>
+          <a:ln/>
+        </p:spPr>
+        <p:txBody>
+          <a:bodyPr wrap="square" lIns="0" tIns="0" rIns="0" bIns="0" rtlCol="0" anchor="t"/>
+          <a:lstStyle/>
+          <a:p>
+            <a:pPr algn="l" indent="0" marL="0">
+              <a:spcAft>
+                <a:spcPts val="800"/>
+              </a:spcAft>
+              <a:buNone/>
+            </a:pPr>
+            <a:r>
+              <a:rPr lang="en-US" sz="3200" b="1" dirty="0">
+                <a:solidFill>
+                  <a:srgbClr val="111111"/>
+                </a:solidFill>
+                <a:latin typeface="Times New Roman" pitchFamily="34" charset="0"/>
+                <a:ea typeface="Times New Roman" pitchFamily="34" charset="-122"/>
+                <a:cs typeface="Times New Roman" pitchFamily="34" charset="-120"/>
+              </a:rPr>
+              <a:t>Composite cones (strato-volcanoes): </a:t>
+            </a:r>
+            <a:pPr algn="l" indent="0" marL="0">
+              <a:spcAft>
+                <a:spcPts val="800"/>
+              </a:spcAft>
+              <a:buNone/>
+            </a:pPr>
+            <a:r>
+              <a:rPr lang="en-US" sz="3200" dirty="0">
+                <a:solidFill>
+                  <a:srgbClr val="111111"/>
+                </a:solidFill>
+                <a:latin typeface="Times New Roman" pitchFamily="34" charset="0"/>
+                <a:ea typeface="Times New Roman" pitchFamily="34" charset="-122"/>
+                <a:cs typeface="Times New Roman" pitchFamily="34" charset="-120"/>
+              </a:rPr>
+              <a:t>Alternating eruptions of lava and pyroclasts build layers, and the lava binds the ash together. They form tall, steep, symmetrical cones, like Mount Cameroon (4,095 m) and Mount Fuji.</a:t>
+            </a:r>
+            <a:endParaRPr lang="en-US" sz="3200" dirty="0"/>
+          </a:p>
+        </p:txBody>
+      </p:sp>
       <p:pic>
         <p:nvPicPr>
-          <p:cNvPr id="3" name="Image 0" descr="/home/claude/f4/img/minesec_sheet.png">    </p:cNvPr>
+          <p:cNvPr id="6" name="Image 0" descr="/home/claude/f4/img/v2/lsa_mayon.jpg">    </p:cNvPr>
           <p:cNvPicPr>
             <a:picLocks noChangeAspect="1"/>
           </p:cNvPicPr>
@@ -18701,8 +18885,8 @@
         </p:blipFill>
         <p:spPr>
           <a:xfrm>
-            <a:off x="0" y="658368"/>
-            <a:ext cx="1463040" cy="5833872"/>
+            <a:off x="6537960" y="2400897"/>
+            <a:ext cx="5470855" cy="3034615"/>
           </a:xfrm>
           <a:prstGeom prst="rect">
             <a:avLst/>
@@ -18711,14 +18895,14 @@
       </p:pic>
       <p:sp>
         <p:nvSpPr>
-          <p:cNvPr id="4" name="Text 1"/>
+          <p:cNvPr id="7" name="Text 4"/>
           <p:cNvSpPr/>
           <p:nvPr/>
         </p:nvSpPr>
         <p:spPr>
           <a:xfrm>
-            <a:off x="1691640" y="1005840"/>
-            <a:ext cx="10180015" cy="731520"/>
+            <a:off x="6537960" y="6089904"/>
+            <a:ext cx="5470855" cy="347472"/>
           </a:xfrm>
           <a:prstGeom prst="rect">
             <a:avLst/>
@@ -18727,161 +18911,24 @@
           <a:ln/>
         </p:spPr>
         <p:txBody>
-          <a:bodyPr wrap="square" lIns="0" tIns="0" rIns="0" bIns="0" rtlCol="0" anchor="ctr">
-            <a:normAutofit/>
-          </a:bodyPr>
+          <a:bodyPr wrap="square" lIns="0" tIns="0" rIns="0" bIns="0" rtlCol="0" anchor="ctr"/>
           <a:lstStyle/>
           <a:p>
             <a:pPr algn="ctr" indent="0" marL="0">
               <a:buNone/>
             </a:pPr>
             <a:r>
-              <a:rPr lang="en-US" sz="3600" b="1" dirty="0">
-                <a:solidFill>
-                  <a:srgbClr val="990011"/>
+              <a:rPr lang="en-US" sz="1600" i="1" dirty="0">
+                <a:solidFill>
+                  <a:srgbClr val="555555"/>
                 </a:solidFill>
                 <a:latin typeface="Times New Roman" pitchFamily="34" charset="0"/>
                 <a:ea typeface="Times New Roman" pitchFamily="34" charset="-122"/>
                 <a:cs typeface="Times New Roman" pitchFamily="34" charset="-120"/>
               </a:rPr>
-              <a:t>3. Volcanic Landforms</a:t>
-            </a:r>
-            <a:endParaRPr lang="en-US" sz="3600" dirty="0"/>
-          </a:p>
-        </p:txBody>
-      </p:sp>
-      <p:sp>
-        <p:nvSpPr>
-          <p:cNvPr id="5" name="Text 2"/>
-          <p:cNvSpPr/>
-          <p:nvPr/>
-        </p:nvSpPr>
-        <p:spPr>
-          <a:xfrm>
-            <a:off x="1691640" y="1737360"/>
-            <a:ext cx="10180015" cy="457200"/>
-          </a:xfrm>
-          <a:prstGeom prst="rect">
-            <a:avLst/>
-          </a:prstGeom>
-          <a:noFill/>
-          <a:ln/>
-        </p:spPr>
-        <p:txBody>
-          <a:bodyPr wrap="square" lIns="0" tIns="0" rIns="0" bIns="0" rtlCol="0" anchor="ctr"/>
-          <a:lstStyle/>
-          <a:p>
-            <a:pPr algn="l" indent="0" marL="0">
-              <a:buNone/>
-            </a:pPr>
-            <a:r>
-              <a:rPr lang="en-US" sz="3200" b="1" dirty="0">
-                <a:solidFill>
-                  <a:srgbClr val="990011"/>
-                </a:solidFill>
-                <a:latin typeface="Times New Roman" pitchFamily="34" charset="0"/>
-                <a:ea typeface="Times New Roman" pitchFamily="34" charset="-122"/>
-                <a:cs typeface="Times New Roman" pitchFamily="34" charset="-120"/>
-              </a:rPr>
-              <a:t>B) Other Volcanic Landforms</a:t>
-            </a:r>
-            <a:endParaRPr lang="en-US" sz="3200" dirty="0"/>
-          </a:p>
-        </p:txBody>
-      </p:sp>
-      <p:sp>
-        <p:nvSpPr>
-          <p:cNvPr id="6" name="Text 3"/>
-          <p:cNvSpPr/>
-          <p:nvPr/>
-        </p:nvSpPr>
-        <p:spPr>
-          <a:xfrm>
-            <a:off x="1691640" y="2240280"/>
-            <a:ext cx="10180015" cy="4206240"/>
-          </a:xfrm>
-          <a:prstGeom prst="rect">
-            <a:avLst/>
-          </a:prstGeom>
-          <a:noFill/>
-          <a:ln/>
-        </p:spPr>
-        <p:txBody>
-          <a:bodyPr wrap="square" lIns="0" tIns="0" rIns="0" bIns="0" rtlCol="0" anchor="t"/>
-          <a:lstStyle/>
-          <a:p>
-            <a:pPr algn="l" indent="0" marL="0">
-              <a:spcAft>
-                <a:spcPts val="800"/>
-              </a:spcAft>
-              <a:buNone/>
-            </a:pPr>
-            <a:r>
-              <a:rPr lang="en-US" sz="4000" b="1" dirty="0">
-                <a:solidFill>
-                  <a:srgbClr val="111111"/>
-                </a:solidFill>
-                <a:latin typeface="Times New Roman" pitchFamily="34" charset="0"/>
-                <a:ea typeface="Times New Roman" pitchFamily="34" charset="-122"/>
-                <a:cs typeface="Times New Roman" pitchFamily="34" charset="-120"/>
-              </a:rPr>
-              <a:t>Crater lakes: </a:t>
-            </a:r>
-            <a:pPr algn="l" indent="0" marL="0">
-              <a:spcAft>
-                <a:spcPts val="800"/>
-              </a:spcAft>
-              <a:buNone/>
-            </a:pPr>
-            <a:r>
-              <a:rPr lang="en-US" sz="4000" dirty="0">
-                <a:solidFill>
-                  <a:srgbClr val="111111"/>
-                </a:solidFill>
-                <a:latin typeface="Times New Roman" pitchFamily="34" charset="0"/>
-                <a:ea typeface="Times New Roman" pitchFamily="34" charset="-122"/>
-                <a:cs typeface="Times New Roman" pitchFamily="34" charset="-120"/>
-              </a:rPr>
-              <a:t>Rain fills craters to form lakes, like Lake Nyos and Lake Barombi Mbo in Cameroon.</a:t>
-            </a:r>
-            <a:endParaRPr lang="en-US" sz="4000" dirty="0"/>
-          </a:p>
-          <a:p>
-            <a:pPr algn="l" indent="0" marL="0">
-              <a:spcAft>
-                <a:spcPts val="800"/>
-              </a:spcAft>
-              <a:buNone/>
-            </a:pPr>
-            <a:r>
-              <a:rPr lang="en-US" sz="4000" b="1" dirty="0">
-                <a:solidFill>
-                  <a:srgbClr val="111111"/>
-                </a:solidFill>
-                <a:latin typeface="Times New Roman" pitchFamily="34" charset="0"/>
-                <a:ea typeface="Times New Roman" pitchFamily="34" charset="-122"/>
-                <a:cs typeface="Times New Roman" pitchFamily="34" charset="-120"/>
-              </a:rPr>
-              <a:t>Caldera: </a:t>
-            </a:r>
-            <a:pPr algn="l" indent="0" marL="0">
-              <a:spcAft>
-                <a:spcPts val="800"/>
-              </a:spcAft>
-              <a:buNone/>
-            </a:pPr>
-            <a:r>
-              <a:rPr lang="en-US" sz="4000" dirty="0">
-                <a:solidFill>
-                  <a:srgbClr val="111111"/>
-                </a:solidFill>
-                <a:latin typeface="Times New Roman" pitchFamily="34" charset="0"/>
-                <a:ea typeface="Times New Roman" pitchFamily="34" charset="-122"/>
-                <a:cs typeface="Times New Roman" pitchFamily="34" charset="-120"/>
-              </a:rPr>
-              <a:t>A very large basin, several kilometres wide, formed when the top of a volcano collapses after a huge eruption.</a:t>
-            </a:r>
-            <a:endParaRPr lang="en-US" sz="4000" dirty="0"/>
+              <a:t>Illustration: a composite cone</a:t>
+            </a:r>
+            <a:endParaRPr lang="en-US" sz="1600" dirty="0"/>
           </a:p>
         </p:txBody>
       </p:sp>
@@ -19210,15 +19257,176 @@
                 <a:ea typeface="Calibri" pitchFamily="34" charset="-122"/>
                 <a:cs typeface="Calibri" pitchFamily="34" charset="-120"/>
               </a:rPr>
-              <a:t>FORMATIVE EVALUATION</a:t>
+              <a:t>BOARD SUMMARY</a:t>
             </a:r>
             <a:endParaRPr lang="en-US" sz="1400" dirty="0"/>
+          </a:p>
+        </p:txBody>
+      </p:sp>
+      <p:sp>
+        <p:nvSpPr>
+          <p:cNvPr id="3" name="Text 1"/>
+          <p:cNvSpPr/>
+          <p:nvPr/>
+        </p:nvSpPr>
+        <p:spPr>
+          <a:xfrm>
+            <a:off x="365760" y="1005840"/>
+            <a:ext cx="11460175" cy="731520"/>
+          </a:xfrm>
+          <a:prstGeom prst="rect">
+            <a:avLst/>
+          </a:prstGeom>
+          <a:noFill/>
+          <a:ln/>
+        </p:spPr>
+        <p:txBody>
+          <a:bodyPr wrap="square" lIns="0" tIns="0" rIns="0" bIns="0" rtlCol="0" anchor="ctr">
+            <a:normAutofit/>
+          </a:bodyPr>
+          <a:lstStyle/>
+          <a:p>
+            <a:pPr algn="ctr" indent="0" marL="0">
+              <a:buNone/>
+            </a:pPr>
+            <a:r>
+              <a:rPr lang="en-US" sz="3600" b="1" dirty="0">
+                <a:solidFill>
+                  <a:srgbClr val="990011"/>
+                </a:solidFill>
+                <a:latin typeface="Times New Roman" pitchFamily="34" charset="0"/>
+                <a:ea typeface="Times New Roman" pitchFamily="34" charset="-122"/>
+                <a:cs typeface="Times New Roman" pitchFamily="34" charset="-120"/>
+              </a:rPr>
+              <a:t>4. Volcanic Landforms</a:t>
+            </a:r>
+            <a:endParaRPr lang="en-US" sz="3600" dirty="0"/>
+          </a:p>
+        </p:txBody>
+      </p:sp>
+      <p:sp>
+        <p:nvSpPr>
+          <p:cNvPr id="4" name="Text 2"/>
+          <p:cNvSpPr/>
+          <p:nvPr/>
+        </p:nvSpPr>
+        <p:spPr>
+          <a:xfrm>
+            <a:off x="365760" y="1737360"/>
+            <a:ext cx="6035040" cy="457200"/>
+          </a:xfrm>
+          <a:prstGeom prst="rect">
+            <a:avLst/>
+          </a:prstGeom>
+          <a:noFill/>
+          <a:ln/>
+        </p:spPr>
+        <p:txBody>
+          <a:bodyPr wrap="square" lIns="0" tIns="0" rIns="0" bIns="0" rtlCol="0" anchor="ctr">
+            <a:normAutofit/>
+          </a:bodyPr>
+          <a:lstStyle/>
+          <a:p>
+            <a:pPr algn="l" indent="0" marL="0">
+              <a:buNone/>
+            </a:pPr>
+            <a:r>
+              <a:rPr lang="en-US" sz="3000" b="1" dirty="0">
+                <a:solidFill>
+                  <a:srgbClr val="990011"/>
+                </a:solidFill>
+                <a:latin typeface="Times New Roman" pitchFamily="34" charset="0"/>
+                <a:ea typeface="Times New Roman" pitchFamily="34" charset="-122"/>
+                <a:cs typeface="Times New Roman" pitchFamily="34" charset="-120"/>
+              </a:rPr>
+              <a:t>B) Lava Plateaux and Volcanic Depressions</a:t>
+            </a:r>
+            <a:endParaRPr lang="en-US" sz="3000" dirty="0"/>
+          </a:p>
+        </p:txBody>
+      </p:sp>
+      <p:sp>
+        <p:nvSpPr>
+          <p:cNvPr id="5" name="Text 3"/>
+          <p:cNvSpPr/>
+          <p:nvPr/>
+        </p:nvSpPr>
+        <p:spPr>
+          <a:xfrm>
+            <a:off x="365760" y="2240280"/>
+            <a:ext cx="6035040" cy="4160520"/>
+          </a:xfrm>
+          <a:prstGeom prst="rect">
+            <a:avLst/>
+          </a:prstGeom>
+          <a:noFill/>
+          <a:ln/>
+        </p:spPr>
+        <p:txBody>
+          <a:bodyPr wrap="square" lIns="0" tIns="0" rIns="0" bIns="0" rtlCol="0" anchor="t"/>
+          <a:lstStyle/>
+          <a:p>
+            <a:pPr algn="l" indent="0" marL="0">
+              <a:spcAft>
+                <a:spcPts val="800"/>
+              </a:spcAft>
+              <a:buNone/>
+            </a:pPr>
+            <a:r>
+              <a:rPr lang="en-US" sz="2800" i="1" dirty="0">
+                <a:solidFill>
+                  <a:srgbClr val="111111"/>
+                </a:solidFill>
+                <a:latin typeface="Times New Roman" pitchFamily="34" charset="0"/>
+                <a:ea typeface="Times New Roman" pitchFamily="34" charset="-122"/>
+                <a:cs typeface="Times New Roman" pitchFamily="34" charset="-120"/>
+              </a:rPr>
+              <a:t>Volcanism also forms the following landforms:</a:t>
+            </a:r>
+            <a:endParaRPr lang="en-US" sz="2800" dirty="0"/>
+          </a:p>
+          <a:p>
+            <a:pPr algn="l" indent="0" marL="0">
+              <a:spcAft>
+                <a:spcPts val="800"/>
+              </a:spcAft>
+              <a:buNone/>
+            </a:pPr>
+            <a:r>
+              <a:rPr lang="en-US" sz="2800" b="1" dirty="0">
+                <a:solidFill>
+                  <a:srgbClr val="111111"/>
+                </a:solidFill>
+                <a:latin typeface="Times New Roman" pitchFamily="34" charset="0"/>
+                <a:ea typeface="Times New Roman" pitchFamily="34" charset="-122"/>
+                <a:cs typeface="Times New Roman" pitchFamily="34" charset="-120"/>
+              </a:rPr>
+              <a:t>Lava plateaux: </a:t>
+            </a:r>
+            <a:pPr algn="l" indent="0" marL="0">
+              <a:spcAft>
+                <a:spcPts val="800"/>
+              </a:spcAft>
+              <a:buNone/>
+            </a:pPr>
+            <a:r>
+              <a:rPr lang="en-US" sz="2800" dirty="0">
+                <a:solidFill>
+                  <a:srgbClr val="111111"/>
+                </a:solidFill>
+                <a:latin typeface="Times New Roman" pitchFamily="34" charset="0"/>
+                <a:ea typeface="Times New Roman" pitchFamily="34" charset="-122"/>
+                <a:cs typeface="Times New Roman" pitchFamily="34" charset="-120"/>
+              </a:rPr>
+              <a:t>Very runny basic lava erupts from long fissures, spreads in thin sheets and covers huge areas, layer upon layer. The Deccan Plateau of India and the Adamawa basalts in Cameroon were formed in this way.</a:t>
+            </a:r>
+            <a:endParaRPr lang="en-US" sz="2800" dirty="0"/>
           </a:p>
         </p:txBody>
       </p:sp>
       <p:pic>
         <p:nvPicPr>
-          <p:cNvPr id="3" name="Image 0" descr="/home/claude/f4/img/minesec_sheet.png">    </p:cNvPr>
+          <p:cNvPr id="6" name="Image 0" descr="/home/claude/f4/img/v2/lsa_basalt.jpg">    </p:cNvPr>
           <p:cNvPicPr>
             <a:picLocks noChangeAspect="1"/>
           </p:cNvPicPr>
@@ -19232,8 +19440,8 @@
         </p:blipFill>
         <p:spPr>
           <a:xfrm>
-            <a:off x="0" y="658368"/>
-            <a:ext cx="5120640" cy="5833872"/>
+            <a:off x="6537960" y="2400897"/>
+            <a:ext cx="5470855" cy="3034615"/>
           </a:xfrm>
           <a:prstGeom prst="rect">
             <a:avLst/>
@@ -19242,14 +19450,14 @@
       </p:pic>
       <p:sp>
         <p:nvSpPr>
-          <p:cNvPr id="4" name="Text 1"/>
+          <p:cNvPr id="7" name="Text 4"/>
           <p:cNvSpPr/>
           <p:nvPr/>
         </p:nvSpPr>
         <p:spPr>
           <a:xfrm>
-            <a:off x="5349240" y="1005840"/>
-            <a:ext cx="6522415" cy="731520"/>
+            <a:off x="6537960" y="6089904"/>
+            <a:ext cx="5470855" cy="347472"/>
           </a:xfrm>
           <a:prstGeom prst="rect">
             <a:avLst/>
@@ -19258,68 +19466,24 @@
           <a:ln/>
         </p:spPr>
         <p:txBody>
-          <a:bodyPr wrap="square" lIns="0" tIns="0" rIns="0" bIns="0" rtlCol="0" anchor="ctr">
-            <a:normAutofit/>
-          </a:bodyPr>
+          <a:bodyPr wrap="square" lIns="0" tIns="0" rIns="0" bIns="0" rtlCol="0" anchor="ctr"/>
           <a:lstStyle/>
           <a:p>
             <a:pPr algn="ctr" indent="0" marL="0">
               <a:buNone/>
             </a:pPr>
             <a:r>
-              <a:rPr lang="en-US" sz="3600" b="1" dirty="0">
-                <a:solidFill>
-                  <a:srgbClr val="990011"/>
+              <a:rPr lang="en-US" sz="1600" i="1" dirty="0">
+                <a:solidFill>
+                  <a:srgbClr val="555555"/>
                 </a:solidFill>
                 <a:latin typeface="Times New Roman" pitchFamily="34" charset="0"/>
                 <a:ea typeface="Times New Roman" pitchFamily="34" charset="-122"/>
                 <a:cs typeface="Times New Roman" pitchFamily="34" charset="-120"/>
               </a:rPr>
-              <a:t>Evaluation 1</a:t>
-            </a:r>
-            <a:endParaRPr lang="en-US" sz="3600" dirty="0"/>
-          </a:p>
-        </p:txBody>
-      </p:sp>
-      <p:sp>
-        <p:nvSpPr>
-          <p:cNvPr id="5" name="Text 2"/>
-          <p:cNvSpPr/>
-          <p:nvPr/>
-        </p:nvSpPr>
-        <p:spPr>
-          <a:xfrm>
-            <a:off x="5349240" y="1783080"/>
-            <a:ext cx="6522415" cy="4663440"/>
-          </a:xfrm>
-          <a:prstGeom prst="rect">
-            <a:avLst/>
-          </a:prstGeom>
-          <a:noFill/>
-          <a:ln/>
-        </p:spPr>
-        <p:txBody>
-          <a:bodyPr wrap="square" lIns="0" tIns="0" rIns="0" bIns="0" rtlCol="0" anchor="t"/>
-          <a:lstStyle/>
-          <a:p>
-            <a:pPr algn="l" indent="0" marL="0">
-              <a:spcAft>
-                <a:spcPts val="800"/>
-              </a:spcAft>
-              <a:buNone/>
-            </a:pPr>
-            <a:r>
-              <a:rPr lang="en-US" sz="4000" dirty="0">
-                <a:solidFill>
-                  <a:srgbClr val="111111"/>
-                </a:solidFill>
-                <a:latin typeface="Times New Roman" pitchFamily="34" charset="0"/>
-                <a:ea typeface="Times New Roman" pitchFamily="34" charset="-122"/>
-                <a:cs typeface="Times New Roman" pitchFamily="34" charset="-120"/>
-              </a:rPr>
-              <a:t>Distinguish an active volcano from an extinct volcano with one example each.</a:t>
-            </a:r>
-            <a:endParaRPr lang="en-US" sz="4000" dirty="0"/>
+              <a:t>Illustration: basalt columns</a:t>
+            </a:r>
+            <a:endParaRPr lang="en-US" sz="1600" dirty="0"/>
           </a:p>
         </p:txBody>
       </p:sp>
@@ -19429,15 +19593,156 @@
                 <a:ea typeface="Calibri" pitchFamily="34" charset="-122"/>
                 <a:cs typeface="Calibri" pitchFamily="34" charset="-120"/>
               </a:rPr>
-              <a:t>FORMATIVE EVALUATION</a:t>
+              <a:t>BOARD SUMMARY</a:t>
             </a:r>
             <a:endParaRPr lang="en-US" sz="1400" dirty="0"/>
+          </a:p>
+        </p:txBody>
+      </p:sp>
+      <p:sp>
+        <p:nvSpPr>
+          <p:cNvPr id="3" name="Text 1"/>
+          <p:cNvSpPr/>
+          <p:nvPr/>
+        </p:nvSpPr>
+        <p:spPr>
+          <a:xfrm>
+            <a:off x="365760" y="1005840"/>
+            <a:ext cx="11460175" cy="731520"/>
+          </a:xfrm>
+          <a:prstGeom prst="rect">
+            <a:avLst/>
+          </a:prstGeom>
+          <a:noFill/>
+          <a:ln/>
+        </p:spPr>
+        <p:txBody>
+          <a:bodyPr wrap="square" lIns="0" tIns="0" rIns="0" bIns="0" rtlCol="0" anchor="ctr">
+            <a:normAutofit/>
+          </a:bodyPr>
+          <a:lstStyle/>
+          <a:p>
+            <a:pPr algn="ctr" indent="0" marL="0">
+              <a:buNone/>
+            </a:pPr>
+            <a:r>
+              <a:rPr lang="en-US" sz="3600" b="1" dirty="0">
+                <a:solidFill>
+                  <a:srgbClr val="990011"/>
+                </a:solidFill>
+                <a:latin typeface="Times New Roman" pitchFamily="34" charset="0"/>
+                <a:ea typeface="Times New Roman" pitchFamily="34" charset="-122"/>
+                <a:cs typeface="Times New Roman" pitchFamily="34" charset="-120"/>
+              </a:rPr>
+              <a:t>4. Volcanic Landforms</a:t>
+            </a:r>
+            <a:endParaRPr lang="en-US" sz="3600" dirty="0"/>
+          </a:p>
+        </p:txBody>
+      </p:sp>
+      <p:sp>
+        <p:nvSpPr>
+          <p:cNvPr id="4" name="Text 2"/>
+          <p:cNvSpPr/>
+          <p:nvPr/>
+        </p:nvSpPr>
+        <p:spPr>
+          <a:xfrm>
+            <a:off x="365760" y="1737360"/>
+            <a:ext cx="6035040" cy="457200"/>
+          </a:xfrm>
+          <a:prstGeom prst="rect">
+            <a:avLst/>
+          </a:prstGeom>
+          <a:noFill/>
+          <a:ln/>
+        </p:spPr>
+        <p:txBody>
+          <a:bodyPr wrap="square" lIns="0" tIns="0" rIns="0" bIns="0" rtlCol="0" anchor="ctr">
+            <a:normAutofit/>
+          </a:bodyPr>
+          <a:lstStyle/>
+          <a:p>
+            <a:pPr algn="l" indent="0" marL="0">
+              <a:buNone/>
+            </a:pPr>
+            <a:r>
+              <a:rPr lang="en-US" sz="3000" b="1" dirty="0">
+                <a:solidFill>
+                  <a:srgbClr val="990011"/>
+                </a:solidFill>
+                <a:latin typeface="Times New Roman" pitchFamily="34" charset="0"/>
+                <a:ea typeface="Times New Roman" pitchFamily="34" charset="-122"/>
+                <a:cs typeface="Times New Roman" pitchFamily="34" charset="-120"/>
+              </a:rPr>
+              <a:t>B) Lava Plateaux and Volcanic Depressions</a:t>
+            </a:r>
+            <a:endParaRPr lang="en-US" sz="3000" dirty="0"/>
+          </a:p>
+        </p:txBody>
+      </p:sp>
+      <p:sp>
+        <p:nvSpPr>
+          <p:cNvPr id="5" name="Text 3"/>
+          <p:cNvSpPr/>
+          <p:nvPr/>
+        </p:nvSpPr>
+        <p:spPr>
+          <a:xfrm>
+            <a:off x="365760" y="2240280"/>
+            <a:ext cx="6035040" cy="4160520"/>
+          </a:xfrm>
+          <a:prstGeom prst="rect">
+            <a:avLst/>
+          </a:prstGeom>
+          <a:noFill/>
+          <a:ln/>
+        </p:spPr>
+        <p:txBody>
+          <a:bodyPr wrap="square" lIns="0" tIns="0" rIns="0" bIns="0" rtlCol="0" anchor="t"/>
+          <a:lstStyle/>
+          <a:p>
+            <a:pPr algn="l" indent="0" marL="0">
+              <a:spcAft>
+                <a:spcPts val="800"/>
+              </a:spcAft>
+              <a:buNone/>
+            </a:pPr>
+            <a:r>
+              <a:rPr lang="en-US" sz="3200" b="1" dirty="0">
+                <a:solidFill>
+                  <a:srgbClr val="111111"/>
+                </a:solidFill>
+                <a:latin typeface="Times New Roman" pitchFamily="34" charset="0"/>
+                <a:ea typeface="Times New Roman" pitchFamily="34" charset="-122"/>
+                <a:cs typeface="Times New Roman" pitchFamily="34" charset="-120"/>
+              </a:rPr>
+              <a:t>Craters and crater lakes: </a:t>
+            </a:r>
+            <a:pPr algn="l" indent="0" marL="0">
+              <a:spcAft>
+                <a:spcPts val="800"/>
+              </a:spcAft>
+              <a:buNone/>
+            </a:pPr>
+            <a:r>
+              <a:rPr lang="en-US" sz="3200" dirty="0">
+                <a:solidFill>
+                  <a:srgbClr val="111111"/>
+                </a:solidFill>
+                <a:latin typeface="Times New Roman" pitchFamily="34" charset="0"/>
+                <a:ea typeface="Times New Roman" pitchFamily="34" charset="-122"/>
+                <a:cs typeface="Times New Roman" pitchFamily="34" charset="-120"/>
+              </a:rPr>
+              <a:t>A crater is a bowl-shaped depression at the top of a vent, usually less than 1 km wide. Rainwater can fill it to form a crater lake, like Lake Nyos and Lake Barombi Mbo in Cameroon.</a:t>
+            </a:r>
+            <a:endParaRPr lang="en-US" sz="3200" dirty="0"/>
           </a:p>
         </p:txBody>
       </p:sp>
       <p:pic>
         <p:nvPicPr>
-          <p:cNvPr id="3" name="Image 0" descr="/home/claude/f4/img/minesec_sheet.png">    </p:cNvPr>
+          <p:cNvPr id="6" name="Image 0" descr="/home/claude/f4/img/v2/f4_crater.jpg">    </p:cNvPr>
           <p:cNvPicPr>
             <a:picLocks noChangeAspect="1"/>
           </p:cNvPicPr>
@@ -19451,8 +19756,8 @@
         </p:blipFill>
         <p:spPr>
           <a:xfrm>
-            <a:off x="0" y="658368"/>
-            <a:ext cx="5120640" cy="5833872"/>
+            <a:off x="6537960" y="2400897"/>
+            <a:ext cx="5470855" cy="3034615"/>
           </a:xfrm>
           <a:prstGeom prst="rect">
             <a:avLst/>
@@ -19461,14 +19766,14 @@
       </p:pic>
       <p:sp>
         <p:nvSpPr>
-          <p:cNvPr id="4" name="Text 1"/>
+          <p:cNvPr id="7" name="Text 4"/>
           <p:cNvSpPr/>
           <p:nvPr/>
         </p:nvSpPr>
         <p:spPr>
           <a:xfrm>
-            <a:off x="5349240" y="1005840"/>
-            <a:ext cx="6522415" cy="731520"/>
+            <a:off x="6537960" y="6089904"/>
+            <a:ext cx="5470855" cy="347472"/>
           </a:xfrm>
           <a:prstGeom prst="rect">
             <a:avLst/>
@@ -19477,68 +19782,24 @@
           <a:ln/>
         </p:spPr>
         <p:txBody>
-          <a:bodyPr wrap="square" lIns="0" tIns="0" rIns="0" bIns="0" rtlCol="0" anchor="ctr">
-            <a:normAutofit/>
-          </a:bodyPr>
+          <a:bodyPr wrap="square" lIns="0" tIns="0" rIns="0" bIns="0" rtlCol="0" anchor="ctr"/>
           <a:lstStyle/>
           <a:p>
             <a:pPr algn="ctr" indent="0" marL="0">
               <a:buNone/>
             </a:pPr>
             <a:r>
-              <a:rPr lang="en-US" sz="3600" b="1" dirty="0">
-                <a:solidFill>
-                  <a:srgbClr val="990011"/>
+              <a:rPr lang="en-US" sz="1600" i="1" dirty="0">
+                <a:solidFill>
+                  <a:srgbClr val="555555"/>
                 </a:solidFill>
                 <a:latin typeface="Times New Roman" pitchFamily="34" charset="0"/>
                 <a:ea typeface="Times New Roman" pitchFamily="34" charset="-122"/>
                 <a:cs typeface="Times New Roman" pitchFamily="34" charset="-120"/>
               </a:rPr>
-              <a:t>Expected Answer</a:t>
-            </a:r>
-            <a:endParaRPr lang="en-US" sz="3600" dirty="0"/>
-          </a:p>
-        </p:txBody>
-      </p:sp>
-      <p:sp>
-        <p:nvSpPr>
-          <p:cNvPr id="5" name="Text 2"/>
-          <p:cNvSpPr/>
-          <p:nvPr/>
-        </p:nvSpPr>
-        <p:spPr>
-          <a:xfrm>
-            <a:off x="5349240" y="1783080"/>
-            <a:ext cx="6522415" cy="4663440"/>
-          </a:xfrm>
-          <a:prstGeom prst="rect">
-            <a:avLst/>
-          </a:prstGeom>
-          <a:noFill/>
-          <a:ln/>
-        </p:spPr>
-        <p:txBody>
-          <a:bodyPr wrap="square" lIns="0" tIns="0" rIns="0" bIns="0" rtlCol="0" anchor="t"/>
-          <a:lstStyle/>
-          <a:p>
-            <a:pPr algn="l" indent="0" marL="0">
-              <a:spcAft>
-                <a:spcPts val="800"/>
-              </a:spcAft>
-              <a:buNone/>
-            </a:pPr>
-            <a:r>
-              <a:rPr lang="en-US" sz="4000" dirty="0">
-                <a:solidFill>
-                  <a:srgbClr val="111111"/>
-                </a:solidFill>
-                <a:latin typeface="Times New Roman" pitchFamily="34" charset="0"/>
-                <a:ea typeface="Times New Roman" pitchFamily="34" charset="-122"/>
-                <a:cs typeface="Times New Roman" pitchFamily="34" charset="-120"/>
-              </a:rPr>
-              <a:t>An active volcano has erupted in recorded history (Mount Cameroon); an extinct one will not erupt again (Rhumsiki necks).</a:t>
-            </a:r>
-            <a:endParaRPr lang="en-US" sz="4000" dirty="0"/>
+              <a:t>Illustration: a crater</a:t>
+            </a:r>
+            <a:endParaRPr lang="en-US" sz="1600" dirty="0"/>
           </a:p>
         </p:txBody>
       </p:sp>
@@ -19648,7 +19909,7 @@
                 <a:ea typeface="Calibri" pitchFamily="34" charset="-122"/>
                 <a:cs typeface="Calibri" pitchFamily="34" charset="-120"/>
               </a:rPr>
-              <a:t>FORMATIVE EVALUATION</a:t>
+              <a:t>BOARD SUMMARY</a:t>
             </a:r>
             <a:endParaRPr lang="en-US" sz="1400" dirty="0"/>
           </a:p>
@@ -19671,7 +19932,7 @@
         <p:spPr>
           <a:xfrm>
             <a:off x="0" y="658368"/>
-            <a:ext cx="5120640" cy="5833872"/>
+            <a:ext cx="2468880" cy="5833872"/>
           </a:xfrm>
           <a:prstGeom prst="rect">
             <a:avLst/>
@@ -19686,8 +19947,8 @@
         </p:nvSpPr>
         <p:spPr>
           <a:xfrm>
-            <a:off x="5349240" y="1005840"/>
-            <a:ext cx="6522415" cy="731520"/>
+            <a:off x="2697480" y="1005840"/>
+            <a:ext cx="9174175" cy="731520"/>
           </a:xfrm>
           <a:prstGeom prst="rect">
             <a:avLst/>
@@ -19713,7 +19974,7 @@
                 <a:ea typeface="Times New Roman" pitchFamily="34" charset="-122"/>
                 <a:cs typeface="Times New Roman" pitchFamily="34" charset="-120"/>
               </a:rPr>
-              <a:t>Evaluation 2</a:t>
+              <a:t>4. Volcanic Landforms</a:t>
             </a:r>
             <a:endParaRPr lang="en-US" sz="3600" dirty="0"/>
           </a:p>
@@ -19727,8 +19988,47 @@
         </p:nvSpPr>
         <p:spPr>
           <a:xfrm>
-            <a:off x="5349240" y="1783080"/>
-            <a:ext cx="6522415" cy="4663440"/>
+            <a:off x="2697480" y="1737360"/>
+            <a:ext cx="9174175" cy="457200"/>
+          </a:xfrm>
+          <a:prstGeom prst="rect">
+            <a:avLst/>
+          </a:prstGeom>
+          <a:noFill/>
+          <a:ln/>
+        </p:spPr>
+        <p:txBody>
+          <a:bodyPr wrap="square" lIns="0" tIns="0" rIns="0" bIns="0" rtlCol="0" anchor="ctr"/>
+          <a:lstStyle/>
+          <a:p>
+            <a:pPr algn="l" indent="0" marL="0">
+              <a:buNone/>
+            </a:pPr>
+            <a:r>
+              <a:rPr lang="en-US" sz="3200" b="1" dirty="0">
+                <a:solidFill>
+                  <a:srgbClr val="990011"/>
+                </a:solidFill>
+                <a:latin typeface="Times New Roman" pitchFamily="34" charset="0"/>
+                <a:ea typeface="Times New Roman" pitchFamily="34" charset="-122"/>
+                <a:cs typeface="Times New Roman" pitchFamily="34" charset="-120"/>
+              </a:rPr>
+              <a:t>B) Lava Plateaux and Volcanic Depressions</a:t>
+            </a:r>
+            <a:endParaRPr lang="en-US" sz="3200" dirty="0"/>
+          </a:p>
+        </p:txBody>
+      </p:sp>
+      <p:sp>
+        <p:nvSpPr>
+          <p:cNvPr id="6" name="Text 3"/>
+          <p:cNvSpPr/>
+          <p:nvPr/>
+        </p:nvSpPr>
+        <p:spPr>
+          <a:xfrm>
+            <a:off x="2697480" y="2240280"/>
+            <a:ext cx="9174175" cy="4206240"/>
           </a:xfrm>
           <a:prstGeom prst="rect">
             <a:avLst/>
@@ -19747,7 +20047,7 @@
               <a:buNone/>
             </a:pPr>
             <a:r>
-              <a:rPr lang="en-US" sz="4000" dirty="0">
+              <a:rPr lang="en-US" sz="4000" b="1" dirty="0">
                 <a:solidFill>
                   <a:srgbClr val="111111"/>
                 </a:solidFill>
@@ -19755,7 +20055,24 @@
                 <a:ea typeface="Times New Roman" pitchFamily="34" charset="-122"/>
                 <a:cs typeface="Times New Roman" pitchFamily="34" charset="-120"/>
               </a:rPr>
-              <a:t>Why are shield volcanoes wide and composite cones steep?</a:t>
+              <a:t>Calderas: </a:t>
+            </a:r>
+            <a:pPr algn="l" indent="0" marL="0">
+              <a:spcAft>
+                <a:spcPts val="800"/>
+              </a:spcAft>
+              <a:buNone/>
+            </a:pPr>
+            <a:r>
+              <a:rPr lang="en-US" sz="4000" dirty="0">
+                <a:solidFill>
+                  <a:srgbClr val="111111"/>
+                </a:solidFill>
+                <a:latin typeface="Times New Roman" pitchFamily="34" charset="0"/>
+                <a:ea typeface="Times New Roman" pitchFamily="34" charset="-122"/>
+                <a:cs typeface="Times New Roman" pitchFamily="34" charset="-120"/>
+              </a:rPr>
+              <a:t>A caldera is a very large basin, several kilometres wide, formed when the top of a volcano collapses into its emptied magma chamber after a huge eruption. Crater Lake in the United States fills a caldera.</a:t>
             </a:r>
             <a:endParaRPr lang="en-US" sz="4000" dirty="0"/>
           </a:p>
@@ -19932,7 +20249,7 @@
                 <a:ea typeface="Times New Roman" pitchFamily="34" charset="-122"/>
                 <a:cs typeface="Times New Roman" pitchFamily="34" charset="-120"/>
               </a:rPr>
-              <a:t>Expected Answer</a:t>
+              <a:t>Evaluation 1</a:t>
             </a:r>
             <a:endParaRPr lang="en-US" sz="3600" dirty="0"/>
           </a:p>
@@ -19974,7 +20291,7 @@
                 <a:ea typeface="Times New Roman" pitchFamily="34" charset="-122"/>
                 <a:cs typeface="Times New Roman" pitchFamily="34" charset="-120"/>
               </a:rPr>
-              <a:t>Shield volcanoes are built by runny lava that flows far; composite cones are built by layers of lava and ash that pile up.</a:t>
+              <a:t>Distinguish an active volcano from an extinct volcano with one example each.</a:t>
             </a:r>
             <a:endParaRPr lang="en-US" sz="4000" dirty="0"/>
           </a:p>
@@ -20086,7 +20403,7 @@
                 <a:ea typeface="Calibri" pitchFamily="34" charset="-122"/>
                 <a:cs typeface="Calibri" pitchFamily="34" charset="-120"/>
               </a:rPr>
-              <a:t>REMEDIATION</a:t>
+              <a:t>FORMATIVE EVALUATION</a:t>
             </a:r>
             <a:endParaRPr lang="en-US" sz="1400" dirty="0"/>
           </a:p>
@@ -20109,7 +20426,7 @@
         <p:spPr>
           <a:xfrm>
             <a:off x="0" y="658368"/>
-            <a:ext cx="3840480" cy="5833872"/>
+            <a:ext cx="5120640" cy="5833872"/>
           </a:xfrm>
           <a:prstGeom prst="rect">
             <a:avLst/>
@@ -20124,8 +20441,8 @@
         </p:nvSpPr>
         <p:spPr>
           <a:xfrm>
-            <a:off x="4069080" y="1005840"/>
-            <a:ext cx="7802575" cy="731520"/>
+            <a:off x="5349240" y="1005840"/>
+            <a:ext cx="6522415" cy="731520"/>
           </a:xfrm>
           <a:prstGeom prst="rect">
             <a:avLst/>
@@ -20151,7 +20468,7 @@
                 <a:ea typeface="Times New Roman" pitchFamily="34" charset="-122"/>
                 <a:cs typeface="Times New Roman" pitchFamily="34" charset="-120"/>
               </a:rPr>
-              <a:t>Remediation</a:t>
+              <a:t>Expected Answer</a:t>
             </a:r>
             <a:endParaRPr lang="en-US" sz="3600" dirty="0"/>
           </a:p>
@@ -20165,8 +20482,8 @@
         </p:nvSpPr>
         <p:spPr>
           <a:xfrm>
-            <a:off x="4069080" y="1783080"/>
-            <a:ext cx="7802575" cy="4663440"/>
+            <a:off x="5349240" y="1783080"/>
+            <a:ext cx="6522415" cy="4663440"/>
           </a:xfrm>
           <a:prstGeom prst="rect">
             <a:avLst/>
@@ -20185,7 +20502,7 @@
               <a:buNone/>
             </a:pPr>
             <a:r>
-              <a:rPr lang="en-US" sz="4000" b="1" dirty="0">
+              <a:rPr lang="en-US" sz="4000" dirty="0">
                 <a:solidFill>
                   <a:srgbClr val="111111"/>
                 </a:solidFill>
@@ -20193,73 +20510,7 @@
                 <a:ea typeface="Times New Roman" pitchFamily="34" charset="-122"/>
                 <a:cs typeface="Times New Roman" pitchFamily="34" charset="-120"/>
               </a:rPr>
-              <a:t>Fill in the blanks:</a:t>
-            </a:r>
-            <a:endParaRPr lang="en-US" sz="4000" dirty="0"/>
-          </a:p>
-          <a:p>
-            <a:pPr algn="l" marL="342900" indent="-342900">
-              <a:spcAft>
-                <a:spcPts val="800"/>
-              </a:spcAft>
-              <a:buSzPct val="100000"/>
-              <a:buFont typeface="+mj-lt"/>
-              <a:buAutoNum type="arabicPeriod" startAt="1"/>
-            </a:pPr>
-            <a:r>
-              <a:rPr lang="en-US" sz="4000" dirty="0">
-                <a:solidFill>
-                  <a:srgbClr val="111111"/>
-                </a:solidFill>
-                <a:latin typeface="Times New Roman" pitchFamily="34" charset="0"/>
-                <a:ea typeface="Times New Roman" pitchFamily="34" charset="-122"/>
-                <a:cs typeface="Times New Roman" pitchFamily="34" charset="-120"/>
-              </a:rPr>
-              <a:t>Molten rock below the surface is ______.</a:t>
-            </a:r>
-            <a:endParaRPr lang="en-US" sz="4000" dirty="0"/>
-          </a:p>
-          <a:p>
-            <a:pPr algn="l" marL="342900" indent="-342900">
-              <a:spcAft>
-                <a:spcPts val="800"/>
-              </a:spcAft>
-              <a:buSzPct val="100000"/>
-              <a:buFont typeface="+mj-lt"/>
-              <a:buAutoNum type="arabicPeriod" startAt="1"/>
-            </a:pPr>
-            <a:r>
-              <a:rPr lang="en-US" sz="4000" dirty="0">
-                <a:solidFill>
-                  <a:srgbClr val="111111"/>
-                </a:solidFill>
-                <a:latin typeface="Times New Roman" pitchFamily="34" charset="0"/>
-                <a:ea typeface="Times New Roman" pitchFamily="34" charset="-122"/>
-                <a:cs typeface="Times New Roman" pitchFamily="34" charset="-120"/>
-              </a:rPr>
-              <a:t>Kilimanjaro is a ______ volcano.</a:t>
-            </a:r>
-            <a:endParaRPr lang="en-US" sz="4000" dirty="0"/>
-          </a:p>
-          <a:p>
-            <a:pPr algn="l" marL="342900" indent="-342900">
-              <a:spcAft>
-                <a:spcPts val="800"/>
-              </a:spcAft>
-              <a:buSzPct val="100000"/>
-              <a:buFont typeface="+mj-lt"/>
-              <a:buAutoNum type="arabicPeriod" startAt="1"/>
-            </a:pPr>
-            <a:r>
-              <a:rPr lang="en-US" sz="4000" dirty="0">
-                <a:solidFill>
-                  <a:srgbClr val="111111"/>
-                </a:solidFill>
-                <a:latin typeface="Times New Roman" pitchFamily="34" charset="0"/>
-                <a:ea typeface="Times New Roman" pitchFamily="34" charset="-122"/>
-                <a:cs typeface="Times New Roman" pitchFamily="34" charset="-120"/>
-              </a:rPr>
-              <a:t>A very large collapsed crater is a ______.</a:t>
+              <a:t>An active volcano has erupted in recorded history (Mount Cameroon); an extinct one will not erupt again (Rhumsiki necks).</a:t>
             </a:r>
             <a:endParaRPr lang="en-US" sz="4000" dirty="0"/>
           </a:p>
@@ -20371,7 +20622,7 @@
                 <a:ea typeface="Calibri" pitchFamily="34" charset="-122"/>
                 <a:cs typeface="Calibri" pitchFamily="34" charset="-120"/>
               </a:rPr>
-              <a:t>HOMEWORK</a:t>
+              <a:t>FORMATIVE EVALUATION</a:t>
             </a:r>
             <a:endParaRPr lang="en-US" sz="1400" dirty="0"/>
           </a:p>
@@ -20436,7 +20687,7 @@
                 <a:ea typeface="Times New Roman" pitchFamily="34" charset="-122"/>
                 <a:cs typeface="Times New Roman" pitchFamily="34" charset="-120"/>
               </a:rPr>
-              <a:t>Homework</a:t>
+              <a:t>Evaluation 2</a:t>
             </a:r>
             <a:endParaRPr lang="en-US" sz="3600" dirty="0"/>
           </a:p>
@@ -20478,7 +20729,7 @@
                 <a:ea typeface="Times New Roman" pitchFamily="34" charset="-122"/>
                 <a:cs typeface="Times New Roman" pitchFamily="34" charset="-120"/>
               </a:rPr>
-              <a:t>Give one benefit of volcanoes to man.</a:t>
+              <a:t>Why are shield volcanoes wide and composite cones steep?</a:t>
             </a:r>
             <a:endParaRPr lang="en-US" sz="4000" dirty="0"/>
           </a:p>
@@ -20590,7 +20841,7 @@
                 <a:ea typeface="Calibri" pitchFamily="34" charset="-122"/>
                 <a:cs typeface="Calibri" pitchFamily="34" charset="-120"/>
               </a:rPr>
-              <a:t>NEXT LESSON</a:t>
+              <a:t>FORMATIVE EVALUATION</a:t>
             </a:r>
             <a:endParaRPr lang="en-US" sz="1400" dirty="0"/>
           </a:p>
@@ -20655,7 +20906,7 @@
                 <a:ea typeface="Times New Roman" pitchFamily="34" charset="-122"/>
                 <a:cs typeface="Times New Roman" pitchFamily="34" charset="-120"/>
               </a:rPr>
-              <a:t>Next Lesson</a:t>
+              <a:t>Expected Answer</a:t>
             </a:r>
             <a:endParaRPr lang="en-US" sz="3600" dirty="0"/>
           </a:p>
@@ -20679,17 +20930,17 @@
           <a:ln/>
         </p:spPr>
         <p:txBody>
-          <a:bodyPr wrap="square" lIns="0" tIns="0" rIns="0" bIns="0" rtlCol="0" anchor="ctr"/>
-          <a:lstStyle/>
-          <a:p>
-            <a:pPr algn="ctr" indent="0" marL="0">
+          <a:bodyPr wrap="square" lIns="0" tIns="0" rIns="0" bIns="0" rtlCol="0" anchor="t"/>
+          <a:lstStyle/>
+          <a:p>
+            <a:pPr algn="l" indent="0" marL="0">
               <a:spcAft>
                 <a:spcPts val="800"/>
               </a:spcAft>
               <a:buNone/>
             </a:pPr>
             <a:r>
-              <a:rPr lang="en-US" sz="4000" b="1" dirty="0">
+              <a:rPr lang="en-US" sz="4000" dirty="0">
                 <a:solidFill>
                   <a:srgbClr val="111111"/>
                 </a:solidFill>
@@ -20697,27 +20948,7 @@
                 <a:ea typeface="Times New Roman" pitchFamily="34" charset="-122"/>
                 <a:cs typeface="Times New Roman" pitchFamily="34" charset="-120"/>
               </a:rPr>
-              <a:t>Our next lesson will be on:</a:t>
-            </a:r>
-            <a:endParaRPr lang="en-US" sz="4000" dirty="0"/>
-          </a:p>
-          <a:p>
-            <a:pPr algn="ctr" indent="0" marL="0">
-              <a:spcAft>
-                <a:spcPts val="800"/>
-              </a:spcAft>
-              <a:buNone/>
-            </a:pPr>
-            <a:r>
-              <a:rPr lang="en-US" sz="4000" b="1" dirty="0">
-                <a:solidFill>
-                  <a:srgbClr val="990011"/>
-                </a:solidFill>
-                <a:latin typeface="Times New Roman" pitchFamily="34" charset="0"/>
-                <a:ea typeface="Times New Roman" pitchFamily="34" charset="-122"/>
-                <a:cs typeface="Times New Roman" pitchFamily="34" charset="-120"/>
-              </a:rPr>
-              <a:t>Lesson 7: Volcanoes and Man</a:t>
+              <a:t>Shield volcanoes are built by runny lava that flows far; composite cones are built by layers of lava and ash that pile up.</a:t>
             </a:r>
             <a:endParaRPr lang="en-US" sz="4000" dirty="0"/>
           </a:p>
@@ -20829,22 +21060,46 @@
                 <a:ea typeface="Calibri" pitchFamily="34" charset="-122"/>
                 <a:cs typeface="Calibri" pitchFamily="34" charset="-120"/>
               </a:rPr>
-              <a:t>BILINGUAL GAME</a:t>
+              <a:t>REMEDIATION</a:t>
             </a:r>
             <a:endParaRPr lang="en-US" sz="1400" dirty="0"/>
           </a:p>
         </p:txBody>
       </p:sp>
-      <p:sp>
-        <p:nvSpPr>
-          <p:cNvPr id="3" name="Text 1"/>
+      <p:pic>
+        <p:nvPicPr>
+          <p:cNvPr id="3" name="Image 0" descr="/home/claude/f4/img/minesec_sheet.png">    </p:cNvPr>
+          <p:cNvPicPr>
+            <a:picLocks noChangeAspect="1"/>
+          </p:cNvPicPr>
+          <p:nvPr/>
+        </p:nvPicPr>
+        <p:blipFill>
+          <a:blip r:embed="rId1"/>
+          <a:stretch>
+            <a:fillRect/>
+          </a:stretch>
+        </p:blipFill>
+        <p:spPr>
+          <a:xfrm>
+            <a:off x="0" y="658368"/>
+            <a:ext cx="3840480" cy="5833872"/>
+          </a:xfrm>
+          <a:prstGeom prst="rect">
+            <a:avLst/>
+          </a:prstGeom>
+        </p:spPr>
+      </p:pic>
+      <p:sp>
+        <p:nvSpPr>
+          <p:cNvPr id="4" name="Text 1"/>
           <p:cNvSpPr/>
           <p:nvPr/>
         </p:nvSpPr>
         <p:spPr>
           <a:xfrm>
-            <a:off x="457200" y="1005840"/>
-            <a:ext cx="11277295" cy="731520"/>
+            <a:off x="4069080" y="1005840"/>
+            <a:ext cx="7802575" cy="731520"/>
           </a:xfrm>
           <a:prstGeom prst="rect">
             <a:avLst/>
@@ -20853,7 +21108,9 @@
           <a:ln/>
         </p:spPr>
         <p:txBody>
-          <a:bodyPr wrap="square" lIns="0" tIns="0" rIns="0" bIns="0" rtlCol="0" anchor="ctr"/>
+          <a:bodyPr wrap="square" lIns="0" tIns="0" rIns="0" bIns="0" rtlCol="0" anchor="ctr">
+            <a:normAutofit/>
+          </a:bodyPr>
           <a:lstStyle/>
           <a:p>
             <a:pPr algn="ctr" indent="0" marL="0">
@@ -20868,6 +21125,1054 @@
                 <a:ea typeface="Times New Roman" pitchFamily="34" charset="-122"/>
                 <a:cs typeface="Times New Roman" pitchFamily="34" charset="-120"/>
               </a:rPr>
+              <a:t>Remediation</a:t>
+            </a:r>
+            <a:endParaRPr lang="en-US" sz="3600" dirty="0"/>
+          </a:p>
+        </p:txBody>
+      </p:sp>
+      <p:sp>
+        <p:nvSpPr>
+          <p:cNvPr id="5" name="Text 2"/>
+          <p:cNvSpPr/>
+          <p:nvPr/>
+        </p:nvSpPr>
+        <p:spPr>
+          <a:xfrm>
+            <a:off x="4069080" y="1783080"/>
+            <a:ext cx="7802575" cy="4663440"/>
+          </a:xfrm>
+          <a:prstGeom prst="rect">
+            <a:avLst/>
+          </a:prstGeom>
+          <a:noFill/>
+          <a:ln/>
+        </p:spPr>
+        <p:txBody>
+          <a:bodyPr wrap="square" lIns="0" tIns="0" rIns="0" bIns="0" rtlCol="0" anchor="t"/>
+          <a:lstStyle/>
+          <a:p>
+            <a:pPr algn="l" indent="0" marL="0">
+              <a:spcAft>
+                <a:spcPts val="800"/>
+              </a:spcAft>
+              <a:buNone/>
+            </a:pPr>
+            <a:r>
+              <a:rPr lang="en-US" sz="4000" b="1" dirty="0">
+                <a:solidFill>
+                  <a:srgbClr val="111111"/>
+                </a:solidFill>
+                <a:latin typeface="Times New Roman" pitchFamily="34" charset="0"/>
+                <a:ea typeface="Times New Roman" pitchFamily="34" charset="-122"/>
+                <a:cs typeface="Times New Roman" pitchFamily="34" charset="-120"/>
+              </a:rPr>
+              <a:t>Fill in the blanks:</a:t>
+            </a:r>
+            <a:endParaRPr lang="en-US" sz="4000" dirty="0"/>
+          </a:p>
+          <a:p>
+            <a:pPr algn="l" marL="342900" indent="-342900">
+              <a:spcAft>
+                <a:spcPts val="800"/>
+              </a:spcAft>
+              <a:buSzPct val="100000"/>
+              <a:buFont typeface="+mj-lt"/>
+              <a:buAutoNum type="arabicPeriod" startAt="1"/>
+            </a:pPr>
+            <a:r>
+              <a:rPr lang="en-US" sz="4000" dirty="0">
+                <a:solidFill>
+                  <a:srgbClr val="111111"/>
+                </a:solidFill>
+                <a:latin typeface="Times New Roman" pitchFamily="34" charset="0"/>
+                <a:ea typeface="Times New Roman" pitchFamily="34" charset="-122"/>
+                <a:cs typeface="Times New Roman" pitchFamily="34" charset="-120"/>
+              </a:rPr>
+              <a:t>Molten rock below the surface is ______.</a:t>
+            </a:r>
+            <a:endParaRPr lang="en-US" sz="4000" dirty="0"/>
+          </a:p>
+          <a:p>
+            <a:pPr algn="l" marL="342900" indent="-342900">
+              <a:spcAft>
+                <a:spcPts val="800"/>
+              </a:spcAft>
+              <a:buSzPct val="100000"/>
+              <a:buFont typeface="+mj-lt"/>
+              <a:buAutoNum type="arabicPeriod" startAt="1"/>
+            </a:pPr>
+            <a:r>
+              <a:rPr lang="en-US" sz="4000" dirty="0">
+                <a:solidFill>
+                  <a:srgbClr val="111111"/>
+                </a:solidFill>
+                <a:latin typeface="Times New Roman" pitchFamily="34" charset="0"/>
+                <a:ea typeface="Times New Roman" pitchFamily="34" charset="-122"/>
+                <a:cs typeface="Times New Roman" pitchFamily="34" charset="-120"/>
+              </a:rPr>
+              <a:t>Kilimanjaro is a ______ volcano.</a:t>
+            </a:r>
+            <a:endParaRPr lang="en-US" sz="4000" dirty="0"/>
+          </a:p>
+          <a:p>
+            <a:pPr algn="l" marL="342900" indent="-342900">
+              <a:spcAft>
+                <a:spcPts val="800"/>
+              </a:spcAft>
+              <a:buSzPct val="100000"/>
+              <a:buFont typeface="+mj-lt"/>
+              <a:buAutoNum type="arabicPeriod" startAt="1"/>
+            </a:pPr>
+            <a:r>
+              <a:rPr lang="en-US" sz="4000" dirty="0">
+                <a:solidFill>
+                  <a:srgbClr val="111111"/>
+                </a:solidFill>
+                <a:latin typeface="Times New Roman" pitchFamily="34" charset="0"/>
+                <a:ea typeface="Times New Roman" pitchFamily="34" charset="-122"/>
+                <a:cs typeface="Times New Roman" pitchFamily="34" charset="-120"/>
+              </a:rPr>
+              <a:t>A very large collapsed crater is a ______.</a:t>
+            </a:r>
+            <a:endParaRPr lang="en-US" sz="4000" dirty="0"/>
+          </a:p>
+        </p:txBody>
+      </p:sp>
+      <p:sp>
+        <p:nvSpPr>
+          <p:cNvPr id="25" name="Slide Number Placeholder 0"/>
+          <p:cNvSpPr>
+            <a:spLocks noGrp="1"/>
+          </p:cNvSpPr>
+          <p:nvPr>
+            <p:ph type="sldNum" sz="quarter" idx="4294967295"/>
+          </p:nvPr>
+        </p:nvSpPr>
+        <p:spPr>
+          <a:xfrm>
+            <a:off x="27432" y="91440"/>
+            <a:ext cx="585216" cy="475488"/>
+          </a:xfrm>
+          <a:prstGeom prst="rect">
+            <a:avLst/>
+          </a:prstGeom>
+          <a:extLst>
+            <a:ext uri="{C572A759-6A51-4108-AA02-DFA0A04FC94B}">
+              <ma14:wrappingTextBoxFlag xmlns:ma14="http://schemas.microsoft.com/office/mac/drawingml/2011/main" val="0"/>
+            </a:ext>
+          </a:extLst>
+        </p:spPr>
+        <p:txBody>
+          <a:bodyPr/>
+          <a:lstStyle>
+            <a:lvl1pPr>
+              <a:defRPr sz="2000">
+                <a:solidFill>
+                  <a:srgbClr val="FFFFFF"/>
+                </a:solidFill>
+                <a:latin typeface="Calibri"/>
+                <a:ea typeface="Calibri"/>
+                <a:cs typeface="Calibri"/>
+              </a:defRPr>
+            </a:lvl1pPr>
+          </a:lstStyle>
+          <a:p>
+            <a:pPr algn="ctr"/>
+            <a:fld id="{F7021451-1387-4CA6-816F-3879F97B5CBC}" type="slidenum">
+              <a:rPr b="1" lang="en-US"/>
+              <a:t>57</a:t>
+            </a:fld>
+            <a:endParaRPr lang="en-US"/>
+          </a:p>
+        </p:txBody>
+      </p:sp>
+    </p:spTree>
+  </p:cSld>
+  <p:clrMapOvr>
+    <a:masterClrMapping/>
+  </p:clrMapOvr>
+</p:sld>
+</file>
+
+<file path=ppt/slides/slide58.xml><?xml version="1.0" encoding="utf-8"?>
+<p:sld xmlns:a="http://schemas.openxmlformats.org/drawingml/2006/main" xmlns:r="http://schemas.openxmlformats.org/officeDocument/2006/relationships" xmlns:p="http://schemas.openxmlformats.org/presentationml/2006/main">
+  <p:cSld name="Slide 58">
+    <p:spTree>
+      <p:nvGrpSpPr>
+        <p:cNvPr id="1" name=""/>
+        <p:cNvGrpSpPr/>
+        <p:nvPr/>
+      </p:nvGrpSpPr>
+      <p:grpSpPr>
+        <a:xfrm>
+          <a:off x="0" y="0"/>
+          <a:ext cx="0" cy="0"/>
+          <a:chOff x="0" y="0"/>
+          <a:chExt cx="0" cy="0"/>
+        </a:xfrm>
+      </p:grpSpPr>
+      <p:sp>
+        <p:nvSpPr>
+          <p:cNvPr id="2" name="Text 0"/>
+          <p:cNvSpPr/>
+          <p:nvPr/>
+        </p:nvSpPr>
+        <p:spPr>
+          <a:xfrm>
+            <a:off x="457200" y="713232"/>
+            <a:ext cx="11368735" cy="274320"/>
+          </a:xfrm>
+          <a:prstGeom prst="rect">
+            <a:avLst/>
+          </a:prstGeom>
+          <a:noFill/>
+          <a:ln/>
+        </p:spPr>
+        <p:txBody>
+          <a:bodyPr wrap="square" lIns="0" tIns="0" rIns="0" bIns="0" rtlCol="0" anchor="ctr"/>
+          <a:lstStyle/>
+          <a:p>
+            <a:pPr algn="r" indent="0" marL="0">
+              <a:buNone/>
+            </a:pPr>
+            <a:r>
+              <a:rPr lang="en-US" sz="1400" b="1" dirty="0">
+                <a:solidFill>
+                  <a:srgbClr val="1C3F6E"/>
+                </a:solidFill>
+                <a:latin typeface="Calibri" pitchFamily="34" charset="0"/>
+                <a:ea typeface="Calibri" pitchFamily="34" charset="-122"/>
+                <a:cs typeface="Calibri" pitchFamily="34" charset="-120"/>
+              </a:rPr>
+              <a:t>HOMEWORK</a:t>
+            </a:r>
+            <a:endParaRPr lang="en-US" sz="1400" dirty="0"/>
+          </a:p>
+        </p:txBody>
+      </p:sp>
+      <p:pic>
+        <p:nvPicPr>
+          <p:cNvPr id="3" name="Image 0" descr="/home/claude/f4/img/minesec_sheet.png">    </p:cNvPr>
+          <p:cNvPicPr>
+            <a:picLocks noChangeAspect="1"/>
+          </p:cNvPicPr>
+          <p:nvPr/>
+        </p:nvPicPr>
+        <p:blipFill>
+          <a:blip r:embed="rId1"/>
+          <a:stretch>
+            <a:fillRect/>
+          </a:stretch>
+        </p:blipFill>
+        <p:spPr>
+          <a:xfrm>
+            <a:off x="0" y="658368"/>
+            <a:ext cx="5120640" cy="5833872"/>
+          </a:xfrm>
+          <a:prstGeom prst="rect">
+            <a:avLst/>
+          </a:prstGeom>
+        </p:spPr>
+      </p:pic>
+      <p:sp>
+        <p:nvSpPr>
+          <p:cNvPr id="4" name="Text 1"/>
+          <p:cNvSpPr/>
+          <p:nvPr/>
+        </p:nvSpPr>
+        <p:spPr>
+          <a:xfrm>
+            <a:off x="5349240" y="1005840"/>
+            <a:ext cx="6522415" cy="731520"/>
+          </a:xfrm>
+          <a:prstGeom prst="rect">
+            <a:avLst/>
+          </a:prstGeom>
+          <a:noFill/>
+          <a:ln/>
+        </p:spPr>
+        <p:txBody>
+          <a:bodyPr wrap="square" lIns="0" tIns="0" rIns="0" bIns="0" rtlCol="0" anchor="ctr">
+            <a:normAutofit/>
+          </a:bodyPr>
+          <a:lstStyle/>
+          <a:p>
+            <a:pPr algn="ctr" indent="0" marL="0">
+              <a:buNone/>
+            </a:pPr>
+            <a:r>
+              <a:rPr lang="en-US" sz="3600" b="1" dirty="0">
+                <a:solidFill>
+                  <a:srgbClr val="990011"/>
+                </a:solidFill>
+                <a:latin typeface="Times New Roman" pitchFamily="34" charset="0"/>
+                <a:ea typeface="Times New Roman" pitchFamily="34" charset="-122"/>
+                <a:cs typeface="Times New Roman" pitchFamily="34" charset="-120"/>
+              </a:rPr>
+              <a:t>Homework</a:t>
+            </a:r>
+            <a:endParaRPr lang="en-US" sz="3600" dirty="0"/>
+          </a:p>
+        </p:txBody>
+      </p:sp>
+      <p:sp>
+        <p:nvSpPr>
+          <p:cNvPr id="5" name="Text 2"/>
+          <p:cNvSpPr/>
+          <p:nvPr/>
+        </p:nvSpPr>
+        <p:spPr>
+          <a:xfrm>
+            <a:off x="5349240" y="1783080"/>
+            <a:ext cx="6522415" cy="4663440"/>
+          </a:xfrm>
+          <a:prstGeom prst="rect">
+            <a:avLst/>
+          </a:prstGeom>
+          <a:noFill/>
+          <a:ln/>
+        </p:spPr>
+        <p:txBody>
+          <a:bodyPr wrap="square" lIns="0" tIns="0" rIns="0" bIns="0" rtlCol="0" anchor="t"/>
+          <a:lstStyle/>
+          <a:p>
+            <a:pPr algn="l" indent="0" marL="0">
+              <a:spcAft>
+                <a:spcPts val="800"/>
+              </a:spcAft>
+              <a:buNone/>
+            </a:pPr>
+            <a:r>
+              <a:rPr lang="en-US" sz="4000" dirty="0">
+                <a:solidFill>
+                  <a:srgbClr val="111111"/>
+                </a:solidFill>
+                <a:latin typeface="Times New Roman" pitchFamily="34" charset="0"/>
+                <a:ea typeface="Times New Roman" pitchFamily="34" charset="-122"/>
+                <a:cs typeface="Times New Roman" pitchFamily="34" charset="-120"/>
+              </a:rPr>
+              <a:t>Give one benefit of volcanoes to man.</a:t>
+            </a:r>
+            <a:endParaRPr lang="en-US" sz="4000" dirty="0"/>
+          </a:p>
+        </p:txBody>
+      </p:sp>
+      <p:sp>
+        <p:nvSpPr>
+          <p:cNvPr id="25" name="Slide Number Placeholder 0"/>
+          <p:cNvSpPr>
+            <a:spLocks noGrp="1"/>
+          </p:cNvSpPr>
+          <p:nvPr>
+            <p:ph type="sldNum" sz="quarter" idx="4294967295"/>
+          </p:nvPr>
+        </p:nvSpPr>
+        <p:spPr>
+          <a:xfrm>
+            <a:off x="27432" y="91440"/>
+            <a:ext cx="585216" cy="475488"/>
+          </a:xfrm>
+          <a:prstGeom prst="rect">
+            <a:avLst/>
+          </a:prstGeom>
+          <a:extLst>
+            <a:ext uri="{C572A759-6A51-4108-AA02-DFA0A04FC94B}">
+              <ma14:wrappingTextBoxFlag xmlns:ma14="http://schemas.microsoft.com/office/mac/drawingml/2011/main" val="0"/>
+            </a:ext>
+          </a:extLst>
+        </p:spPr>
+        <p:txBody>
+          <a:bodyPr/>
+          <a:lstStyle>
+            <a:lvl1pPr>
+              <a:defRPr sz="2000">
+                <a:solidFill>
+                  <a:srgbClr val="FFFFFF"/>
+                </a:solidFill>
+                <a:latin typeface="Calibri"/>
+                <a:ea typeface="Calibri"/>
+                <a:cs typeface="Calibri"/>
+              </a:defRPr>
+            </a:lvl1pPr>
+          </a:lstStyle>
+          <a:p>
+            <a:pPr algn="ctr"/>
+            <a:fld id="{F7021451-1387-4CA6-816F-3879F97B5CBC}" type="slidenum">
+              <a:rPr b="1" lang="en-US"/>
+              <a:t>58</a:t>
+            </a:fld>
+            <a:endParaRPr lang="en-US"/>
+          </a:p>
+        </p:txBody>
+      </p:sp>
+    </p:spTree>
+  </p:cSld>
+  <p:clrMapOvr>
+    <a:masterClrMapping/>
+  </p:clrMapOvr>
+</p:sld>
+</file>
+
+<file path=ppt/slides/slide59.xml><?xml version="1.0" encoding="utf-8"?>
+<p:sld xmlns:a="http://schemas.openxmlformats.org/drawingml/2006/main" xmlns:r="http://schemas.openxmlformats.org/officeDocument/2006/relationships" xmlns:p="http://schemas.openxmlformats.org/presentationml/2006/main">
+  <p:cSld name="Slide 59">
+    <p:spTree>
+      <p:nvGrpSpPr>
+        <p:cNvPr id="1" name=""/>
+        <p:cNvGrpSpPr/>
+        <p:nvPr/>
+      </p:nvGrpSpPr>
+      <p:grpSpPr>
+        <a:xfrm>
+          <a:off x="0" y="0"/>
+          <a:ext cx="0" cy="0"/>
+          <a:chOff x="0" y="0"/>
+          <a:chExt cx="0" cy="0"/>
+        </a:xfrm>
+      </p:grpSpPr>
+      <p:sp>
+        <p:nvSpPr>
+          <p:cNvPr id="2" name="Text 0"/>
+          <p:cNvSpPr/>
+          <p:nvPr/>
+        </p:nvSpPr>
+        <p:spPr>
+          <a:xfrm>
+            <a:off x="457200" y="713232"/>
+            <a:ext cx="11368735" cy="274320"/>
+          </a:xfrm>
+          <a:prstGeom prst="rect">
+            <a:avLst/>
+          </a:prstGeom>
+          <a:noFill/>
+          <a:ln/>
+        </p:spPr>
+        <p:txBody>
+          <a:bodyPr wrap="square" lIns="0" tIns="0" rIns="0" bIns="0" rtlCol="0" anchor="ctr"/>
+          <a:lstStyle/>
+          <a:p>
+            <a:pPr algn="r" indent="0" marL="0">
+              <a:buNone/>
+            </a:pPr>
+            <a:r>
+              <a:rPr lang="en-US" sz="1400" b="1" dirty="0">
+                <a:solidFill>
+                  <a:srgbClr val="1C3F6E"/>
+                </a:solidFill>
+                <a:latin typeface="Calibri" pitchFamily="34" charset="0"/>
+                <a:ea typeface="Calibri" pitchFamily="34" charset="-122"/>
+                <a:cs typeface="Calibri" pitchFamily="34" charset="-120"/>
+              </a:rPr>
+              <a:t>NEXT LESSON</a:t>
+            </a:r>
+            <a:endParaRPr lang="en-US" sz="1400" dirty="0"/>
+          </a:p>
+        </p:txBody>
+      </p:sp>
+      <p:pic>
+        <p:nvPicPr>
+          <p:cNvPr id="3" name="Image 0" descr="/home/claude/f4/img/minesec_sheet.png">    </p:cNvPr>
+          <p:cNvPicPr>
+            <a:picLocks noChangeAspect="1"/>
+          </p:cNvPicPr>
+          <p:nvPr/>
+        </p:nvPicPr>
+        <p:blipFill>
+          <a:blip r:embed="rId1"/>
+          <a:stretch>
+            <a:fillRect/>
+          </a:stretch>
+        </p:blipFill>
+        <p:spPr>
+          <a:xfrm>
+            <a:off x="0" y="658368"/>
+            <a:ext cx="5120640" cy="5833872"/>
+          </a:xfrm>
+          <a:prstGeom prst="rect">
+            <a:avLst/>
+          </a:prstGeom>
+        </p:spPr>
+      </p:pic>
+      <p:sp>
+        <p:nvSpPr>
+          <p:cNvPr id="4" name="Text 1"/>
+          <p:cNvSpPr/>
+          <p:nvPr/>
+        </p:nvSpPr>
+        <p:spPr>
+          <a:xfrm>
+            <a:off x="5349240" y="1005840"/>
+            <a:ext cx="6522415" cy="731520"/>
+          </a:xfrm>
+          <a:prstGeom prst="rect">
+            <a:avLst/>
+          </a:prstGeom>
+          <a:noFill/>
+          <a:ln/>
+        </p:spPr>
+        <p:txBody>
+          <a:bodyPr wrap="square" lIns="0" tIns="0" rIns="0" bIns="0" rtlCol="0" anchor="ctr">
+            <a:normAutofit/>
+          </a:bodyPr>
+          <a:lstStyle/>
+          <a:p>
+            <a:pPr algn="ctr" indent="0" marL="0">
+              <a:buNone/>
+            </a:pPr>
+            <a:r>
+              <a:rPr lang="en-US" sz="3600" b="1" dirty="0">
+                <a:solidFill>
+                  <a:srgbClr val="990011"/>
+                </a:solidFill>
+                <a:latin typeface="Times New Roman" pitchFamily="34" charset="0"/>
+                <a:ea typeface="Times New Roman" pitchFamily="34" charset="-122"/>
+                <a:cs typeface="Times New Roman" pitchFamily="34" charset="-120"/>
+              </a:rPr>
+              <a:t>Next Lesson</a:t>
+            </a:r>
+            <a:endParaRPr lang="en-US" sz="3600" dirty="0"/>
+          </a:p>
+        </p:txBody>
+      </p:sp>
+      <p:sp>
+        <p:nvSpPr>
+          <p:cNvPr id="5" name="Text 2"/>
+          <p:cNvSpPr/>
+          <p:nvPr/>
+        </p:nvSpPr>
+        <p:spPr>
+          <a:xfrm>
+            <a:off x="5349240" y="1783080"/>
+            <a:ext cx="6522415" cy="4663440"/>
+          </a:xfrm>
+          <a:prstGeom prst="rect">
+            <a:avLst/>
+          </a:prstGeom>
+          <a:noFill/>
+          <a:ln/>
+        </p:spPr>
+        <p:txBody>
+          <a:bodyPr wrap="square" lIns="0" tIns="0" rIns="0" bIns="0" rtlCol="0" anchor="ctr"/>
+          <a:lstStyle/>
+          <a:p>
+            <a:pPr algn="ctr" indent="0" marL="0">
+              <a:spcAft>
+                <a:spcPts val="800"/>
+              </a:spcAft>
+              <a:buNone/>
+            </a:pPr>
+            <a:r>
+              <a:rPr lang="en-US" sz="4000" b="1" dirty="0">
+                <a:solidFill>
+                  <a:srgbClr val="111111"/>
+                </a:solidFill>
+                <a:latin typeface="Times New Roman" pitchFamily="34" charset="0"/>
+                <a:ea typeface="Times New Roman" pitchFamily="34" charset="-122"/>
+                <a:cs typeface="Times New Roman" pitchFamily="34" charset="-120"/>
+              </a:rPr>
+              <a:t>Our next lesson will be on:</a:t>
+            </a:r>
+            <a:endParaRPr lang="en-US" sz="4000" dirty="0"/>
+          </a:p>
+          <a:p>
+            <a:pPr algn="ctr" indent="0" marL="0">
+              <a:spcAft>
+                <a:spcPts val="800"/>
+              </a:spcAft>
+              <a:buNone/>
+            </a:pPr>
+            <a:r>
+              <a:rPr lang="en-US" sz="4000" b="1" dirty="0">
+                <a:solidFill>
+                  <a:srgbClr val="990011"/>
+                </a:solidFill>
+                <a:latin typeface="Times New Roman" pitchFamily="34" charset="0"/>
+                <a:ea typeface="Times New Roman" pitchFamily="34" charset="-122"/>
+                <a:cs typeface="Times New Roman" pitchFamily="34" charset="-120"/>
+              </a:rPr>
+              <a:t>Lesson 7: Volcanoes and Man</a:t>
+            </a:r>
+            <a:endParaRPr lang="en-US" sz="4000" dirty="0"/>
+          </a:p>
+        </p:txBody>
+      </p:sp>
+      <p:sp>
+        <p:nvSpPr>
+          <p:cNvPr id="25" name="Slide Number Placeholder 0"/>
+          <p:cNvSpPr>
+            <a:spLocks noGrp="1"/>
+          </p:cNvSpPr>
+          <p:nvPr>
+            <p:ph type="sldNum" sz="quarter" idx="4294967295"/>
+          </p:nvPr>
+        </p:nvSpPr>
+        <p:spPr>
+          <a:xfrm>
+            <a:off x="27432" y="91440"/>
+            <a:ext cx="585216" cy="475488"/>
+          </a:xfrm>
+          <a:prstGeom prst="rect">
+            <a:avLst/>
+          </a:prstGeom>
+          <a:extLst>
+            <a:ext uri="{C572A759-6A51-4108-AA02-DFA0A04FC94B}">
+              <ma14:wrappingTextBoxFlag xmlns:ma14="http://schemas.microsoft.com/office/mac/drawingml/2011/main" val="0"/>
+            </a:ext>
+          </a:extLst>
+        </p:spPr>
+        <p:txBody>
+          <a:bodyPr/>
+          <a:lstStyle>
+            <a:lvl1pPr>
+              <a:defRPr sz="2000">
+                <a:solidFill>
+                  <a:srgbClr val="FFFFFF"/>
+                </a:solidFill>
+                <a:latin typeface="Calibri"/>
+                <a:ea typeface="Calibri"/>
+                <a:cs typeface="Calibri"/>
+              </a:defRPr>
+            </a:lvl1pPr>
+          </a:lstStyle>
+          <a:p>
+            <a:pPr algn="ctr"/>
+            <a:fld id="{F7021451-1387-4CA6-816F-3879F97B5CBC}" type="slidenum">
+              <a:rPr b="1" lang="en-US"/>
+              <a:t>59</a:t>
+            </a:fld>
+            <a:endParaRPr lang="en-US"/>
+          </a:p>
+        </p:txBody>
+      </p:sp>
+    </p:spTree>
+  </p:cSld>
+  <p:clrMapOvr>
+    <a:masterClrMapping/>
+  </p:clrMapOvr>
+</p:sld>
+</file>
+
+<file path=ppt/slides/slide6.xml><?xml version="1.0" encoding="utf-8"?>
+<p:sld xmlns:a="http://schemas.openxmlformats.org/drawingml/2006/main" xmlns:r="http://schemas.openxmlformats.org/officeDocument/2006/relationships" xmlns:p="http://schemas.openxmlformats.org/presentationml/2006/main">
+  <p:cSld name="Slide 6">
+    <p:spTree>
+      <p:nvGrpSpPr>
+        <p:cNvPr id="1" name=""/>
+        <p:cNvGrpSpPr/>
+        <p:nvPr/>
+      </p:nvGrpSpPr>
+      <p:grpSpPr>
+        <a:xfrm>
+          <a:off x="0" y="0"/>
+          <a:ext cx="0" cy="0"/>
+          <a:chOff x="0" y="0"/>
+          <a:chExt cx="0" cy="0"/>
+        </a:xfrm>
+      </p:grpSpPr>
+      <p:sp>
+        <p:nvSpPr>
+          <p:cNvPr id="2" name="Text 0"/>
+          <p:cNvSpPr/>
+          <p:nvPr/>
+        </p:nvSpPr>
+        <p:spPr>
+          <a:xfrm>
+            <a:off x="457200" y="713232"/>
+            <a:ext cx="11368735" cy="274320"/>
+          </a:xfrm>
+          <a:prstGeom prst="rect">
+            <a:avLst/>
+          </a:prstGeom>
+          <a:noFill/>
+          <a:ln/>
+        </p:spPr>
+        <p:txBody>
+          <a:bodyPr wrap="square" lIns="0" tIns="0" rIns="0" bIns="0" rtlCol="0" anchor="ctr"/>
+          <a:lstStyle/>
+          <a:p>
+            <a:pPr algn="r" indent="0" marL="0">
+              <a:buNone/>
+            </a:pPr>
+            <a:r>
+              <a:rPr lang="en-US" sz="1400" b="1" dirty="0">
+                <a:solidFill>
+                  <a:srgbClr val="1C3F6E"/>
+                </a:solidFill>
+                <a:latin typeface="Calibri" pitchFamily="34" charset="0"/>
+                <a:ea typeface="Calibri" pitchFamily="34" charset="-122"/>
+                <a:cs typeface="Calibri" pitchFamily="34" charset="-120"/>
+              </a:rPr>
+              <a:t>LESSON PLAN</a:t>
+            </a:r>
+            <a:endParaRPr lang="en-US" sz="1400" dirty="0"/>
+          </a:p>
+        </p:txBody>
+      </p:sp>
+      <p:pic>
+        <p:nvPicPr>
+          <p:cNvPr id="3" name="Image 0" descr="/home/claude/f4/img/minesec_sheet.png">    </p:cNvPr>
+          <p:cNvPicPr>
+            <a:picLocks noChangeAspect="1"/>
+          </p:cNvPicPr>
+          <p:nvPr/>
+        </p:nvPicPr>
+        <p:blipFill>
+          <a:blip r:embed="rId1"/>
+          <a:stretch>
+            <a:fillRect/>
+          </a:stretch>
+        </p:blipFill>
+        <p:spPr>
+          <a:xfrm>
+            <a:off x="0" y="658368"/>
+            <a:ext cx="2468880" cy="5833872"/>
+          </a:xfrm>
+          <a:prstGeom prst="rect">
+            <a:avLst/>
+          </a:prstGeom>
+        </p:spPr>
+      </p:pic>
+      <p:sp>
+        <p:nvSpPr>
+          <p:cNvPr id="4" name="Text 1"/>
+          <p:cNvSpPr/>
+          <p:nvPr/>
+        </p:nvSpPr>
+        <p:spPr>
+          <a:xfrm>
+            <a:off x="2697480" y="1005840"/>
+            <a:ext cx="9174175" cy="731520"/>
+          </a:xfrm>
+          <a:prstGeom prst="rect">
+            <a:avLst/>
+          </a:prstGeom>
+          <a:noFill/>
+          <a:ln/>
+        </p:spPr>
+        <p:txBody>
+          <a:bodyPr wrap="square" lIns="0" tIns="0" rIns="0" bIns="0" rtlCol="0" anchor="ctr">
+            <a:normAutofit/>
+          </a:bodyPr>
+          <a:lstStyle/>
+          <a:p>
+            <a:pPr algn="ctr" indent="0" marL="0">
+              <a:buNone/>
+            </a:pPr>
+            <a:r>
+              <a:rPr lang="en-US" sz="3600" b="1" dirty="0">
+                <a:solidFill>
+                  <a:srgbClr val="990011"/>
+                </a:solidFill>
+                <a:latin typeface="Times New Roman" pitchFamily="34" charset="0"/>
+                <a:ea typeface="Times New Roman" pitchFamily="34" charset="-122"/>
+                <a:cs typeface="Times New Roman" pitchFamily="34" charset="-120"/>
+              </a:rPr>
+              <a:t>Lesson Plan</a:t>
+            </a:r>
+            <a:endParaRPr lang="en-US" sz="3600" dirty="0"/>
+          </a:p>
+        </p:txBody>
+      </p:sp>
+      <p:sp>
+        <p:nvSpPr>
+          <p:cNvPr id="5" name="Text 2"/>
+          <p:cNvSpPr/>
+          <p:nvPr/>
+        </p:nvSpPr>
+        <p:spPr>
+          <a:xfrm>
+            <a:off x="2697480" y="1783080"/>
+            <a:ext cx="9174175" cy="4663440"/>
+          </a:xfrm>
+          <a:prstGeom prst="rect">
+            <a:avLst/>
+          </a:prstGeom>
+          <a:noFill/>
+          <a:ln/>
+        </p:spPr>
+        <p:txBody>
+          <a:bodyPr wrap="square" lIns="0" tIns="0" rIns="0" bIns="0" rtlCol="0" anchor="t"/>
+          <a:lstStyle/>
+          <a:p>
+            <a:pPr algn="l" marL="342900" indent="-342900">
+              <a:spcAft>
+                <a:spcPts val="800"/>
+              </a:spcAft>
+              <a:buSzPct val="100000"/>
+              <a:buFont typeface="+mj-lt"/>
+              <a:buAutoNum type="arabicPeriod" startAt="1"/>
+            </a:pPr>
+            <a:r>
+              <a:rPr lang="en-US" sz="4000" dirty="0">
+                <a:solidFill>
+                  <a:srgbClr val="111111"/>
+                </a:solidFill>
+                <a:latin typeface="Times New Roman" pitchFamily="34" charset="0"/>
+                <a:ea typeface="Times New Roman" pitchFamily="34" charset="-122"/>
+                <a:cs typeface="Times New Roman" pitchFamily="34" charset="-120"/>
+              </a:rPr>
+              <a:t>Correction of the homework</a:t>
+            </a:r>
+            <a:endParaRPr lang="en-US" sz="4000" dirty="0"/>
+          </a:p>
+          <a:p>
+            <a:pPr algn="l" marL="342900" indent="-342900">
+              <a:spcAft>
+                <a:spcPts val="800"/>
+              </a:spcAft>
+              <a:buSzPct val="100000"/>
+              <a:buFont typeface="+mj-lt"/>
+              <a:buAutoNum type="arabicPeriod" startAt="1"/>
+            </a:pPr>
+            <a:r>
+              <a:rPr lang="en-US" sz="4000" dirty="0">
+                <a:solidFill>
+                  <a:srgbClr val="111111"/>
+                </a:solidFill>
+                <a:latin typeface="Times New Roman" pitchFamily="34" charset="0"/>
+                <a:ea typeface="Times New Roman" pitchFamily="34" charset="-122"/>
+                <a:cs typeface="Times New Roman" pitchFamily="34" charset="-120"/>
+              </a:rPr>
+              <a:t>Objectives and recall</a:t>
+            </a:r>
+            <a:endParaRPr lang="en-US" sz="4000" dirty="0"/>
+          </a:p>
+          <a:p>
+            <a:pPr algn="l" marL="342900" indent="-342900">
+              <a:spcAft>
+                <a:spcPts val="800"/>
+              </a:spcAft>
+              <a:buSzPct val="100000"/>
+              <a:buFont typeface="+mj-lt"/>
+              <a:buAutoNum type="arabicPeriod" startAt="1"/>
+            </a:pPr>
+            <a:r>
+              <a:rPr lang="en-US" sz="4000" dirty="0">
+                <a:solidFill>
+                  <a:srgbClr val="111111"/>
+                </a:solidFill>
+                <a:latin typeface="Times New Roman" pitchFamily="34" charset="0"/>
+                <a:ea typeface="Times New Roman" pitchFamily="34" charset="-122"/>
+                <a:cs typeface="Times New Roman" pitchFamily="34" charset="-120"/>
+              </a:rPr>
+              <a:t>Real-life situation and action to take</a:t>
+            </a:r>
+            <a:endParaRPr lang="en-US" sz="4000" dirty="0"/>
+          </a:p>
+          <a:p>
+            <a:pPr algn="l" marL="342900" indent="-342900">
+              <a:spcAft>
+                <a:spcPts val="800"/>
+              </a:spcAft>
+              <a:buSzPct val="100000"/>
+              <a:buFont typeface="+mj-lt"/>
+              <a:buAutoNum type="arabicPeriod" startAt="1"/>
+            </a:pPr>
+            <a:r>
+              <a:rPr lang="en-US" sz="4000" dirty="0">
+                <a:solidFill>
+                  <a:srgbClr val="111111"/>
+                </a:solidFill>
+                <a:latin typeface="Times New Roman" pitchFamily="34" charset="0"/>
+                <a:ea typeface="Times New Roman" pitchFamily="34" charset="-122"/>
+                <a:cs typeface="Times New Roman" pitchFamily="34" charset="-120"/>
+              </a:rPr>
+              <a:t>Learning activities</a:t>
+            </a:r>
+            <a:endParaRPr lang="en-US" sz="4000" dirty="0"/>
+          </a:p>
+          <a:p>
+            <a:pPr algn="l" marL="342900" indent="-342900">
+              <a:spcAft>
+                <a:spcPts val="800"/>
+              </a:spcAft>
+              <a:buSzPct val="100000"/>
+              <a:buFont typeface="+mj-lt"/>
+              <a:buAutoNum type="arabicPeriod" startAt="1"/>
+            </a:pPr>
+            <a:r>
+              <a:rPr lang="en-US" sz="4000" dirty="0">
+                <a:solidFill>
+                  <a:srgbClr val="111111"/>
+                </a:solidFill>
+                <a:latin typeface="Times New Roman" pitchFamily="34" charset="0"/>
+                <a:ea typeface="Times New Roman" pitchFamily="34" charset="-122"/>
+                <a:cs typeface="Times New Roman" pitchFamily="34" charset="-120"/>
+              </a:rPr>
+              <a:t>Board summary</a:t>
+            </a:r>
+            <a:endParaRPr lang="en-US" sz="4000" dirty="0"/>
+          </a:p>
+          <a:p>
+            <a:pPr algn="l" marL="342900" indent="-342900">
+              <a:spcAft>
+                <a:spcPts val="800"/>
+              </a:spcAft>
+              <a:buSzPct val="100000"/>
+              <a:buFont typeface="+mj-lt"/>
+              <a:buAutoNum type="arabicPeriod" startAt="1"/>
+            </a:pPr>
+            <a:r>
+              <a:rPr lang="en-US" sz="4000" dirty="0">
+                <a:solidFill>
+                  <a:srgbClr val="111111"/>
+                </a:solidFill>
+                <a:latin typeface="Times New Roman" pitchFamily="34" charset="0"/>
+                <a:ea typeface="Times New Roman" pitchFamily="34" charset="-122"/>
+                <a:cs typeface="Times New Roman" pitchFamily="34" charset="-120"/>
+              </a:rPr>
+              <a:t>Evaluation, remediation and homework</a:t>
+            </a:r>
+            <a:endParaRPr lang="en-US" sz="4000" dirty="0"/>
+          </a:p>
+        </p:txBody>
+      </p:sp>
+      <p:sp>
+        <p:nvSpPr>
+          <p:cNvPr id="25" name="Slide Number Placeholder 0"/>
+          <p:cNvSpPr>
+            <a:spLocks noGrp="1"/>
+          </p:cNvSpPr>
+          <p:nvPr>
+            <p:ph type="sldNum" sz="quarter" idx="4294967295"/>
+          </p:nvPr>
+        </p:nvSpPr>
+        <p:spPr>
+          <a:xfrm>
+            <a:off x="27432" y="91440"/>
+            <a:ext cx="585216" cy="475488"/>
+          </a:xfrm>
+          <a:prstGeom prst="rect">
+            <a:avLst/>
+          </a:prstGeom>
+          <a:extLst>
+            <a:ext uri="{C572A759-6A51-4108-AA02-DFA0A04FC94B}">
+              <ma14:wrappingTextBoxFlag xmlns:ma14="http://schemas.microsoft.com/office/mac/drawingml/2011/main" val="0"/>
+            </a:ext>
+          </a:extLst>
+        </p:spPr>
+        <p:txBody>
+          <a:bodyPr/>
+          <a:lstStyle>
+            <a:lvl1pPr>
+              <a:defRPr sz="2000">
+                <a:solidFill>
+                  <a:srgbClr val="FFFFFF"/>
+                </a:solidFill>
+                <a:latin typeface="Calibri"/>
+                <a:ea typeface="Calibri"/>
+                <a:cs typeface="Calibri"/>
+              </a:defRPr>
+            </a:lvl1pPr>
+          </a:lstStyle>
+          <a:p>
+            <a:pPr algn="ctr"/>
+            <a:fld id="{F7021451-1387-4CA6-816F-3879F97B5CBC}" type="slidenum">
+              <a:rPr b="1" lang="en-US"/>
+              <a:t>6</a:t>
+            </a:fld>
+            <a:endParaRPr lang="en-US"/>
+          </a:p>
+        </p:txBody>
+      </p:sp>
+    </p:spTree>
+  </p:cSld>
+  <p:clrMapOvr>
+    <a:masterClrMapping/>
+  </p:clrMapOvr>
+</p:sld>
+</file>
+
+<file path=ppt/slides/slide60.xml><?xml version="1.0" encoding="utf-8"?>
+<p:sld xmlns:a="http://schemas.openxmlformats.org/drawingml/2006/main" xmlns:r="http://schemas.openxmlformats.org/officeDocument/2006/relationships" xmlns:p="http://schemas.openxmlformats.org/presentationml/2006/main">
+  <p:cSld name="Slide 60">
+    <p:spTree>
+      <p:nvGrpSpPr>
+        <p:cNvPr id="1" name=""/>
+        <p:cNvGrpSpPr/>
+        <p:nvPr/>
+      </p:nvGrpSpPr>
+      <p:grpSpPr>
+        <a:xfrm>
+          <a:off x="0" y="0"/>
+          <a:ext cx="0" cy="0"/>
+          <a:chOff x="0" y="0"/>
+          <a:chExt cx="0" cy="0"/>
+        </a:xfrm>
+      </p:grpSpPr>
+      <p:sp>
+        <p:nvSpPr>
+          <p:cNvPr id="2" name="Text 0"/>
+          <p:cNvSpPr/>
+          <p:nvPr/>
+        </p:nvSpPr>
+        <p:spPr>
+          <a:xfrm>
+            <a:off x="457200" y="713232"/>
+            <a:ext cx="11368735" cy="274320"/>
+          </a:xfrm>
+          <a:prstGeom prst="rect">
+            <a:avLst/>
+          </a:prstGeom>
+          <a:noFill/>
+          <a:ln/>
+        </p:spPr>
+        <p:txBody>
+          <a:bodyPr wrap="square" lIns="0" tIns="0" rIns="0" bIns="0" rtlCol="0" anchor="ctr"/>
+          <a:lstStyle/>
+          <a:p>
+            <a:pPr algn="r" indent="0" marL="0">
+              <a:buNone/>
+            </a:pPr>
+            <a:r>
+              <a:rPr lang="en-US" sz="1400" b="1" dirty="0">
+                <a:solidFill>
+                  <a:srgbClr val="1C3F6E"/>
+                </a:solidFill>
+                <a:latin typeface="Calibri" pitchFamily="34" charset="0"/>
+                <a:ea typeface="Calibri" pitchFamily="34" charset="-122"/>
+                <a:cs typeface="Calibri" pitchFamily="34" charset="-120"/>
+              </a:rPr>
+              <a:t>BILINGUAL GAME</a:t>
+            </a:r>
+            <a:endParaRPr lang="en-US" sz="1400" dirty="0"/>
+          </a:p>
+        </p:txBody>
+      </p:sp>
+      <p:sp>
+        <p:nvSpPr>
+          <p:cNvPr id="3" name="Text 1"/>
+          <p:cNvSpPr/>
+          <p:nvPr/>
+        </p:nvSpPr>
+        <p:spPr>
+          <a:xfrm>
+            <a:off x="457200" y="1005840"/>
+            <a:ext cx="11277295" cy="731520"/>
+          </a:xfrm>
+          <a:prstGeom prst="rect">
+            <a:avLst/>
+          </a:prstGeom>
+          <a:noFill/>
+          <a:ln/>
+        </p:spPr>
+        <p:txBody>
+          <a:bodyPr wrap="square" lIns="0" tIns="0" rIns="0" bIns="0" rtlCol="0" anchor="ctr"/>
+          <a:lstStyle/>
+          <a:p>
+            <a:pPr algn="ctr" indent="0" marL="0">
+              <a:buNone/>
+            </a:pPr>
+            <a:r>
+              <a:rPr lang="en-US" sz="3600" b="1" dirty="0">
+                <a:solidFill>
+                  <a:srgbClr val="990011"/>
+                </a:solidFill>
+                <a:latin typeface="Times New Roman" pitchFamily="34" charset="0"/>
+                <a:ea typeface="Times New Roman" pitchFamily="34" charset="-122"/>
+                <a:cs typeface="Times New Roman" pitchFamily="34" charset="-120"/>
+              </a:rPr>
               <a:t>Bilingual Game (Jeu Bilingue)</a:t>
             </a:r>
             <a:endParaRPr lang="en-US" sz="3600" dirty="0"/>
@@ -20876,7 +22181,7 @@
       </p:sp>
       <p:graphicFrame>
         <p:nvGraphicFramePr>
-          <p:cNvPr id="58" name="Table 0"/>
+          <p:cNvPr id="61" name="Table 0"/>
           <p:cNvGraphicFramePr>
             <a:graphicFrameLocks noGrp="1"/>
           </p:cNvGraphicFramePr>
@@ -21912,7 +23217,7 @@
             <a:pPr algn="ctr"/>
             <a:fld id="{F7021451-1387-4CA6-816F-3879F97B5CBC}" type="slidenum">
               <a:rPr b="1" lang="en-US"/>
-              <a:t>57</a:t>
+              <a:t>60</a:t>
             </a:fld>
             <a:endParaRPr lang="en-US"/>
           </a:p>
@@ -21926,9 +23231,9 @@
 </p:sld>
 </file>
 
-<file path=ppt/slides/slide58.xml><?xml version="1.0" encoding="utf-8"?>
+<file path=ppt/slides/slide61.xml><?xml version="1.0" encoding="utf-8"?>
 <p:sld xmlns:a="http://schemas.openxmlformats.org/drawingml/2006/main" xmlns:r="http://schemas.openxmlformats.org/officeDocument/2006/relationships" xmlns:p="http://schemas.openxmlformats.org/presentationml/2006/main">
-  <p:cSld name="Slide 58">
+  <p:cSld name="Slide 61">
     <p:spTree>
       <p:nvGrpSpPr>
         <p:cNvPr id="1" name=""/>
@@ -22023,7 +23328,7 @@
       </p:sp>
       <p:graphicFrame>
         <p:nvGraphicFramePr>
-          <p:cNvPr id="59" name="Table 0"/>
+          <p:cNvPr id="62" name="Table 0"/>
           <p:cNvGraphicFramePr>
             <a:graphicFrameLocks noGrp="1"/>
           </p:cNvGraphicFramePr>
@@ -22645,7 +23950,7 @@
             <a:pPr algn="ctr"/>
             <a:fld id="{F7021451-1387-4CA6-816F-3879F97B5CBC}" type="slidenum">
               <a:rPr b="1" lang="en-US"/>
-              <a:t>58</a:t>
+              <a:t>61</a:t>
             </a:fld>
             <a:endParaRPr lang="en-US"/>
           </a:p>
@@ -22659,9 +23964,9 @@
 </p:sld>
 </file>
 
-<file path=ppt/slides/slide59.xml><?xml version="1.0" encoding="utf-8"?>
+<file path=ppt/slides/slide62.xml><?xml version="1.0" encoding="utf-8"?>
 <p:sld xmlns:a="http://schemas.openxmlformats.org/drawingml/2006/main" xmlns:r="http://schemas.openxmlformats.org/officeDocument/2006/relationships" xmlns:p="http://schemas.openxmlformats.org/presentationml/2006/main">
-  <p:cSld name="Slide 59">
+  <p:cSld name="Slide 62">
     <p:spTree>
       <p:nvGrpSpPr>
         <p:cNvPr id="1" name=""/>
@@ -22756,7 +24061,7 @@
       </p:sp>
       <p:graphicFrame>
         <p:nvGraphicFramePr>
-          <p:cNvPr id="60" name="Table 0"/>
+          <p:cNvPr id="63" name="Table 0"/>
           <p:cNvGraphicFramePr>
             <a:graphicFrameLocks noGrp="1"/>
           </p:cNvGraphicFramePr>
@@ -22866,7 +24171,7 @@
                           <a:ea typeface="Calibri" pitchFamily="34" charset="-122"/>
                           <a:cs typeface="Calibri" pitchFamily="34" charset="-120"/>
                         </a:rPr>
-                        <a:t>DEFINITIONS; The Life Cycle of a Volcano; Products of a Volcanic Eruption; Volcanic Cones; Other Volcanic Landforms.</a:t>
+                        <a:t>DEFINITIONS; Meaning and Process of Volcanism; Stages in the Life Cycle of a Volcano; Products of Volcanic Eruptions; Volcanic Cones; Lava Plateaux and Volcanic Depressions.</a:t>
                       </a:r>
                       <a:endParaRPr lang="en-US" sz="1600" dirty="0">
                         <a:latin typeface="Calibri" charset="0"/>
@@ -23516,7 +24821,7 @@
             <a:pPr algn="ctr"/>
             <a:fld id="{F7021451-1387-4CA6-816F-3879F97B5CBC}" type="slidenum">
               <a:rPr b="1" lang="en-US"/>
-              <a:t>59</a:t>
+              <a:t>62</a:t>
             </a:fld>
             <a:endParaRPr lang="en-US"/>
           </a:p>
@@ -23530,9 +24835,9 @@
 </p:sld>
 </file>
 
-<file path=ppt/slides/slide6.xml><?xml version="1.0" encoding="utf-8"?>
+<file path=ppt/slides/slide63.xml><?xml version="1.0" encoding="utf-8"?>
 <p:sld xmlns:a="http://schemas.openxmlformats.org/drawingml/2006/main" xmlns:r="http://schemas.openxmlformats.org/officeDocument/2006/relationships" xmlns:p="http://schemas.openxmlformats.org/presentationml/2006/main">
-  <p:cSld name="Slide 6">
+  <p:cSld name="Slide 63">
     <p:spTree>
       <p:nvGrpSpPr>
         <p:cNvPr id="1" name=""/>
@@ -23580,7 +24885,7 @@
                 <a:ea typeface="Calibri" pitchFamily="34" charset="-122"/>
                 <a:cs typeface="Calibri" pitchFamily="34" charset="-120"/>
               </a:rPr>
-              <a:t>LESSON PLAN</a:t>
+              <a:t>TEACHER'S NOTE</a:t>
             </a:r>
             <a:endParaRPr lang="en-US" sz="1400" dirty="0"/>
           </a:p>
@@ -23603,7 +24908,7 @@
         <p:spPr>
           <a:xfrm>
             <a:off x="0" y="658368"/>
-            <a:ext cx="2468880" cy="5833872"/>
+            <a:ext cx="3840480" cy="5833872"/>
           </a:xfrm>
           <a:prstGeom prst="rect">
             <a:avLst/>
@@ -23618,8 +24923,8 @@
         </p:nvSpPr>
         <p:spPr>
           <a:xfrm>
-            <a:off x="2697480" y="1005840"/>
-            <a:ext cx="9174175" cy="731520"/>
+            <a:off x="4069080" y="1005840"/>
+            <a:ext cx="7802575" cy="731520"/>
           </a:xfrm>
           <a:prstGeom prst="rect">
             <a:avLst/>
@@ -23645,7 +24950,7 @@
                 <a:ea typeface="Times New Roman" pitchFamily="34" charset="-122"/>
                 <a:cs typeface="Times New Roman" pitchFamily="34" charset="-120"/>
               </a:rPr>
-              <a:t>Lesson Plan</a:t>
+              <a:t>Teacher's Note</a:t>
             </a:r>
             <a:endParaRPr lang="en-US" sz="3600" dirty="0"/>
           </a:p>
@@ -23659,8 +24964,8 @@
         </p:nvSpPr>
         <p:spPr>
           <a:xfrm>
-            <a:off x="2697480" y="1783080"/>
-            <a:ext cx="9174175" cy="4663440"/>
+            <a:off x="4069080" y="1783080"/>
+            <a:ext cx="7802575" cy="4663440"/>
           </a:xfrm>
           <a:prstGeom prst="rect">
             <a:avLst/>
@@ -23677,21 +24982,20 @@
                 <a:spcPts val="800"/>
               </a:spcAft>
               <a:buSzPct val="100000"/>
-              <a:buFont typeface="+mj-lt"/>
-              <a:buAutoNum type="arabicPeriod" startAt="1"/>
-            </a:pPr>
-            <a:r>
-              <a:rPr lang="en-US" sz="4000" dirty="0">
+              <a:buChar char="•"/>
+            </a:pPr>
+            <a:r>
+              <a:rPr lang="en-US" sz="2000" dirty="0">
                 <a:solidFill>
                   <a:srgbClr val="111111"/>
                 </a:solidFill>
-                <a:latin typeface="Times New Roman" pitchFamily="34" charset="0"/>
-                <a:ea typeface="Times New Roman" pitchFamily="34" charset="-122"/>
-                <a:cs typeface="Times New Roman" pitchFamily="34" charset="-120"/>
-              </a:rPr>
-              <a:t>Correction of the homework</a:t>
-            </a:r>
-            <a:endParaRPr lang="en-US" sz="4000" dirty="0"/>
+                <a:latin typeface="Calibri" pitchFamily="34" charset="0"/>
+                <a:ea typeface="Calibri" pitchFamily="34" charset="-122"/>
+                <a:cs typeface="Calibri" pitchFamily="34" charset="-120"/>
+              </a:rPr>
+              <a:t>Timing: Homework correction, plan, objectives 8 min | Recall, situation, action 10 min | 5 activities 30 min | Board summary (copying) 30 min | Evaluation, remediation 10 min | Homework, next lesson 5 min | Logbook 7 min</a:t>
+            </a:r>
+            <a:endParaRPr lang="en-US" sz="2000" dirty="0"/>
           </a:p>
           <a:p>
             <a:pPr algn="l" marL="342900" indent="-342900">
@@ -23699,21 +25003,20 @@
                 <a:spcPts val="800"/>
               </a:spcAft>
               <a:buSzPct val="100000"/>
-              <a:buFont typeface="+mj-lt"/>
-              <a:buAutoNum type="arabicPeriod" startAt="1"/>
-            </a:pPr>
-            <a:r>
-              <a:rPr lang="en-US" sz="4000" dirty="0">
+              <a:buChar char="•"/>
+            </a:pPr>
+            <a:r>
+              <a:rPr lang="en-US" sz="2000" dirty="0">
                 <a:solidFill>
                   <a:srgbClr val="111111"/>
                 </a:solidFill>
-                <a:latin typeface="Times New Roman" pitchFamily="34" charset="0"/>
-                <a:ea typeface="Times New Roman" pitchFamily="34" charset="-122"/>
-                <a:cs typeface="Times New Roman" pitchFamily="34" charset="-120"/>
-              </a:rPr>
-              <a:t>Objectives and recall</a:t>
-            </a:r>
-            <a:endParaRPr lang="en-US" sz="4000" dirty="0"/>
+                <a:latin typeface="Calibri" pitchFamily="34" charset="0"/>
+                <a:ea typeface="Calibri" pitchFamily="34" charset="-122"/>
+                <a:cs typeface="Calibri" pitchFamily="34" charset="-120"/>
+              </a:rPr>
+              <a:t>Without the projector (Activity 1): draw a volcano with its vent.</a:t>
+            </a:r>
+            <a:endParaRPr lang="en-US" sz="2000" dirty="0"/>
           </a:p>
           <a:p>
             <a:pPr algn="l" marL="342900" indent="-342900">
@@ -23721,21 +25024,20 @@
                 <a:spcPts val="800"/>
               </a:spcAft>
               <a:buSzPct val="100000"/>
-              <a:buFont typeface="+mj-lt"/>
-              <a:buAutoNum type="arabicPeriod" startAt="1"/>
-            </a:pPr>
-            <a:r>
-              <a:rPr lang="en-US" sz="4000" dirty="0">
+              <a:buChar char="•"/>
+            </a:pPr>
+            <a:r>
+              <a:rPr lang="en-US" sz="2000" dirty="0">
                 <a:solidFill>
                   <a:srgbClr val="111111"/>
                 </a:solidFill>
-                <a:latin typeface="Times New Roman" pitchFamily="34" charset="0"/>
-                <a:ea typeface="Times New Roman" pitchFamily="34" charset="-122"/>
-                <a:cs typeface="Times New Roman" pitchFamily="34" charset="-120"/>
-              </a:rPr>
-              <a:t>Real-life situation and action to take</a:t>
-            </a:r>
-            <a:endParaRPr lang="en-US" sz="4000" dirty="0"/>
+                <a:latin typeface="Calibri" pitchFamily="34" charset="0"/>
+                <a:ea typeface="Calibri" pitchFamily="34" charset="-122"/>
+                <a:cs typeface="Calibri" pitchFamily="34" charset="-120"/>
+              </a:rPr>
+              <a:t>Without the projector (Activity 2): list eruptions of Mount Cameroon.</a:t>
+            </a:r>
+            <a:endParaRPr lang="en-US" sz="2000" dirty="0"/>
           </a:p>
           <a:p>
             <a:pPr algn="l" marL="342900" indent="-342900">
@@ -23743,21 +25045,20 @@
                 <a:spcPts val="800"/>
               </a:spcAft>
               <a:buSzPct val="100000"/>
-              <a:buFont typeface="+mj-lt"/>
-              <a:buAutoNum type="arabicPeriod" startAt="1"/>
-            </a:pPr>
-            <a:r>
-              <a:rPr lang="en-US" sz="4000" dirty="0">
+              <a:buChar char="•"/>
+            </a:pPr>
+            <a:r>
+              <a:rPr lang="en-US" sz="2000" dirty="0">
                 <a:solidFill>
                   <a:srgbClr val="111111"/>
                 </a:solidFill>
-                <a:latin typeface="Times New Roman" pitchFamily="34" charset="0"/>
-                <a:ea typeface="Times New Roman" pitchFamily="34" charset="-122"/>
-                <a:cs typeface="Times New Roman" pitchFamily="34" charset="-120"/>
-              </a:rPr>
-              <a:t>Learning activities</a:t>
-            </a:r>
-            <a:endParaRPr lang="en-US" sz="4000" dirty="0"/>
+                <a:latin typeface="Calibri" pitchFamily="34" charset="0"/>
+                <a:ea typeface="Calibri" pitchFamily="34" charset="-122"/>
+                <a:cs typeface="Calibri" pitchFamily="34" charset="-120"/>
+              </a:rPr>
+              <a:t>Without the projector (Activity 3): describe the peaks of Rhumsiki.</a:t>
+            </a:r>
+            <a:endParaRPr lang="en-US" sz="2000" dirty="0"/>
           </a:p>
           <a:p>
             <a:pPr algn="l" marL="342900" indent="-342900">
@@ -23765,21 +25066,20 @@
                 <a:spcPts val="800"/>
               </a:spcAft>
               <a:buSzPct val="100000"/>
-              <a:buFont typeface="+mj-lt"/>
-              <a:buAutoNum type="arabicPeriod" startAt="1"/>
-            </a:pPr>
-            <a:r>
-              <a:rPr lang="en-US" sz="4000" dirty="0">
+              <a:buChar char="•"/>
+            </a:pPr>
+            <a:r>
+              <a:rPr lang="en-US" sz="2000" dirty="0">
                 <a:solidFill>
                   <a:srgbClr val="111111"/>
                 </a:solidFill>
-                <a:latin typeface="Times New Roman" pitchFamily="34" charset="0"/>
-                <a:ea typeface="Times New Roman" pitchFamily="34" charset="-122"/>
-                <a:cs typeface="Times New Roman" pitchFamily="34" charset="-120"/>
-              </a:rPr>
-              <a:t>Board summary</a:t>
-            </a:r>
-            <a:endParaRPr lang="en-US" sz="4000" dirty="0"/>
+                <a:latin typeface="Calibri" pitchFamily="34" charset="0"/>
+                <a:ea typeface="Calibri" pitchFamily="34" charset="-122"/>
+                <a:cs typeface="Calibri" pitchFamily="34" charset="-120"/>
+              </a:rPr>
+              <a:t>Without the projector (Activity 4): compare water and thick porridge.</a:t>
+            </a:r>
+            <a:endParaRPr lang="en-US" sz="2000" dirty="0"/>
           </a:p>
           <a:p>
             <a:pPr algn="l" marL="342900" indent="-342900">
@@ -23787,21 +25087,20 @@
                 <a:spcPts val="800"/>
               </a:spcAft>
               <a:buSzPct val="100000"/>
-              <a:buFont typeface="+mj-lt"/>
-              <a:buAutoNum type="arabicPeriod" startAt="1"/>
-            </a:pPr>
-            <a:r>
-              <a:rPr lang="en-US" sz="4000" dirty="0">
+              <a:buChar char="•"/>
+            </a:pPr>
+            <a:r>
+              <a:rPr lang="en-US" sz="2000" dirty="0">
                 <a:solidFill>
                   <a:srgbClr val="111111"/>
                 </a:solidFill>
-                <a:latin typeface="Times New Roman" pitchFamily="34" charset="0"/>
-                <a:ea typeface="Times New Roman" pitchFamily="34" charset="-122"/>
-                <a:cs typeface="Times New Roman" pitchFamily="34" charset="-120"/>
-              </a:rPr>
-              <a:t>Evaluation, remediation and homework</a:t>
-            </a:r>
-            <a:endParaRPr lang="en-US" sz="4000" dirty="0"/>
+                <a:latin typeface="Calibri" pitchFamily="34" charset="0"/>
+                <a:ea typeface="Calibri" pitchFamily="34" charset="-122"/>
+                <a:cs typeface="Calibri" pitchFamily="34" charset="-120"/>
+              </a:rPr>
+              <a:t>Without the projector (Activity 5): draw a crater and a caldera.</a:t>
+            </a:r>
+            <a:endParaRPr lang="en-US" sz="2000" dirty="0"/>
           </a:p>
         </p:txBody>
       </p:sp>
@@ -23847,7 +25146,7 @@
             <a:pPr algn="ctr"/>
             <a:fld id="{F7021451-1387-4CA6-816F-3879F97B5CBC}" type="slidenum">
               <a:rPr b="1" lang="en-US"/>
-              <a:t>6</a:t>
+              <a:t>63</a:t>
             </a:fld>
             <a:endParaRPr lang="en-US"/>
           </a:p>
@@ -23861,9 +25160,9 @@
 </p:sld>
 </file>
 
-<file path=ppt/slides/slide60.xml><?xml version="1.0" encoding="utf-8"?>
+<file path=ppt/slides/slide64.xml><?xml version="1.0" encoding="utf-8"?>
 <p:sld xmlns:a="http://schemas.openxmlformats.org/drawingml/2006/main" xmlns:r="http://schemas.openxmlformats.org/officeDocument/2006/relationships" xmlns:p="http://schemas.openxmlformats.org/presentationml/2006/main">
-  <p:cSld name="Slide 60">
+  <p:cSld name="Slide 64">
     <p:spTree>
       <p:nvGrpSpPr>
         <p:cNvPr id="1" name=""/>
@@ -23911,7 +25210,7 @@
                 <a:ea typeface="Calibri" pitchFamily="34" charset="-122"/>
                 <a:cs typeface="Calibri" pitchFamily="34" charset="-120"/>
               </a:rPr>
-              <a:t>TEACHER'S NOTE</a:t>
+              <a:t>REFERENCES</a:t>
             </a:r>
             <a:endParaRPr lang="en-US" sz="1400" dirty="0"/>
           </a:p>
@@ -23934,7 +25233,7 @@
         <p:spPr>
           <a:xfrm>
             <a:off x="0" y="658368"/>
-            <a:ext cx="3840480" cy="5833872"/>
+            <a:ext cx="2468880" cy="5833872"/>
           </a:xfrm>
           <a:prstGeom prst="rect">
             <a:avLst/>
@@ -23949,8 +25248,8 @@
         </p:nvSpPr>
         <p:spPr>
           <a:xfrm>
-            <a:off x="4069080" y="1005840"/>
-            <a:ext cx="7802575" cy="731520"/>
+            <a:off x="2697480" y="1005840"/>
+            <a:ext cx="9174175" cy="731520"/>
           </a:xfrm>
           <a:prstGeom prst="rect">
             <a:avLst/>
@@ -23976,7 +25275,7 @@
                 <a:ea typeface="Times New Roman" pitchFamily="34" charset="-122"/>
                 <a:cs typeface="Times New Roman" pitchFamily="34" charset="-120"/>
               </a:rPr>
-              <a:t>Teacher's Note</a:t>
+              <a:t>References</a:t>
             </a:r>
             <a:endParaRPr lang="en-US" sz="3600" dirty="0"/>
           </a:p>
@@ -23990,8 +25289,8 @@
         </p:nvSpPr>
         <p:spPr>
           <a:xfrm>
-            <a:off x="4069080" y="1783080"/>
-            <a:ext cx="7802575" cy="4663440"/>
+            <a:off x="2697480" y="1783080"/>
+            <a:ext cx="9174175" cy="4663440"/>
           </a:xfrm>
           <a:prstGeom prst="rect">
             <a:avLst/>
@@ -24011,7 +25310,7 @@
               <a:buChar char="•"/>
             </a:pPr>
             <a:r>
-              <a:rPr lang="en-US" sz="2000" dirty="0">
+              <a:rPr lang="en-US" sz="1800" dirty="0">
                 <a:solidFill>
                   <a:srgbClr val="111111"/>
                 </a:solidFill>
@@ -24019,9 +25318,9 @@
                 <a:ea typeface="Calibri" pitchFamily="34" charset="-122"/>
                 <a:cs typeface="Calibri" pitchFamily="34" charset="-120"/>
               </a:rPr>
-              <a:t>Timing: Homework correction, plan, objectives 8 min | Recall, situation, action 10 min | 5 activities 30 min | Board summary (copying) 30 min | Evaluation, remediation 10 min | Homework, next lesson 5 min | Logbook 7 min</a:t>
-            </a:r>
-            <a:endParaRPr lang="en-US" sz="2000" dirty="0"/>
+              <a:t>Geography Syllabus for Sixth Forms (Lower and Upper Sixth), MINESEC, 2019 — Module 2 (Geomorphology).</a:t>
+            </a:r>
+            <a:endParaRPr lang="en-US" sz="1800" dirty="0"/>
           </a:p>
           <a:p>
             <a:pPr algn="l" marL="342900" indent="-342900">
@@ -24032,7 +25331,7 @@
               <a:buChar char="•"/>
             </a:pPr>
             <a:r>
-              <a:rPr lang="en-US" sz="2000" dirty="0">
+              <a:rPr lang="en-US" sz="1800" dirty="0">
                 <a:solidFill>
                   <a:srgbClr val="111111"/>
                 </a:solidFill>
@@ -24040,9 +25339,9 @@
                 <a:ea typeface="Calibri" pitchFamily="34" charset="-122"/>
                 <a:cs typeface="Calibri" pitchFamily="34" charset="-120"/>
               </a:rPr>
-              <a:t>Without the projector (Activity 1): draw a volcano with its vent.</a:t>
-            </a:r>
-            <a:endParaRPr lang="en-US" sz="2000" dirty="0"/>
+              <a:t>Teacher's course notes: Mr KAMDEM E., Geomorphology (LSA), GBHS Garoua, 2026.</a:t>
+            </a:r>
+            <a:endParaRPr lang="en-US" sz="1800" dirty="0"/>
           </a:p>
           <a:p>
             <a:pPr algn="l" marL="342900" indent="-342900">
@@ -24053,7 +25352,7 @@
               <a:buChar char="•"/>
             </a:pPr>
             <a:r>
-              <a:rPr lang="en-US" sz="2000" dirty="0">
+              <a:rPr lang="en-US" sz="1800" dirty="0">
                 <a:solidFill>
                   <a:srgbClr val="111111"/>
                 </a:solidFill>
@@ -24061,9 +25360,9 @@
                 <a:ea typeface="Calibri" pitchFamily="34" charset="-122"/>
                 <a:cs typeface="Calibri" pitchFamily="34" charset="-120"/>
               </a:rPr>
-              <a:t>Without the projector (Activity 2): list eruptions of Mount Cameroon.</a:t>
-            </a:r>
-            <a:endParaRPr lang="en-US" sz="2000" dirty="0"/>
+              <a:t>Photo, Activity 2: “Mount Cameroon” by John &amp; Mel Kots, CC BY-NC-ND 2.0, via Flickr (https://www.flickr.com/photos/26745817@N00/2347261849)</a:t>
+            </a:r>
+            <a:endParaRPr lang="en-US" sz="1800" dirty="0"/>
           </a:p>
           <a:p>
             <a:pPr algn="l" marL="342900" indent="-342900">
@@ -24074,7 +25373,7 @@
               <a:buChar char="•"/>
             </a:pPr>
             <a:r>
-              <a:rPr lang="en-US" sz="2000" dirty="0">
+              <a:rPr lang="en-US" sz="1800" dirty="0">
                 <a:solidFill>
                   <a:srgbClr val="111111"/>
                 </a:solidFill>
@@ -24082,9 +25381,9 @@
                 <a:ea typeface="Calibri" pitchFamily="34" charset="-122"/>
                 <a:cs typeface="Calibri" pitchFamily="34" charset="-120"/>
               </a:rPr>
-              <a:t>Without the projector (Activity 3): describe the peaks of Rhumsiki.</a:t>
-            </a:r>
-            <a:endParaRPr lang="en-US" sz="2000" dirty="0"/>
+              <a:t>Photo, Activity 3: “Rhumsiki peak, North Cameroon” by krishna.naudin, CC BY-SA 2.0, via Flickr (https://www.flickr.com/photos/141297921@N05/25989204581)</a:t>
+            </a:r>
+            <a:endParaRPr lang="en-US" sz="1800" dirty="0"/>
           </a:p>
           <a:p>
             <a:pPr algn="l" marL="342900" indent="-342900">
@@ -24095,7 +25394,7 @@
               <a:buChar char="•"/>
             </a:pPr>
             <a:r>
-              <a:rPr lang="en-US" sz="2000" dirty="0">
+              <a:rPr lang="en-US" sz="1800" dirty="0">
                 <a:solidFill>
                   <a:srgbClr val="111111"/>
                 </a:solidFill>
@@ -24103,9 +25402,9 @@
                 <a:ea typeface="Calibri" pitchFamily="34" charset="-122"/>
                 <a:cs typeface="Calibri" pitchFamily="34" charset="-120"/>
               </a:rPr>
-              <a:t>Without the projector (Activity 4): compare water and thick porridge.</a:t>
-            </a:r>
-            <a:endParaRPr lang="en-US" sz="2000" dirty="0"/>
+              <a:t>Photo, Activity 4: “Pahoehoe Lava Flow” by graysky., CC BY-NC-SA 2.0, via Flickr (https://www.flickr.com/photos/20021588@N00/540223861)</a:t>
+            </a:r>
+            <a:endParaRPr lang="en-US" sz="1800" dirty="0"/>
           </a:p>
           <a:p>
             <a:pPr algn="l" marL="342900" indent="-342900">
@@ -24116,7 +25415,7 @@
               <a:buChar char="•"/>
             </a:pPr>
             <a:r>
-              <a:rPr lang="en-US" sz="2000" dirty="0">
+              <a:rPr lang="en-US" sz="1800" dirty="0">
                 <a:solidFill>
                   <a:srgbClr val="111111"/>
                 </a:solidFill>
@@ -24124,9 +25423,30 @@
                 <a:ea typeface="Calibri" pitchFamily="34" charset="-122"/>
                 <a:cs typeface="Calibri" pitchFamily="34" charset="-120"/>
               </a:rPr>
-              <a:t>Without the projector (Activity 5): draw a crater and a caldera.</a:t>
-            </a:r>
-            <a:endParaRPr lang="en-US" sz="2000" dirty="0"/>
+              <a:t>Photo, Activity 5: “Taal Lake and Volcano, Tagaytay, Philippines” by Ray in Manila, CC BY 2.0, via Flickr (https://www.flickr.com/photos/21186555@N07/28260012661)</a:t>
+            </a:r>
+            <a:endParaRPr lang="en-US" sz="1800" dirty="0"/>
+          </a:p>
+          <a:p>
+            <a:pPr algn="l" marL="342900" indent="-342900">
+              <a:spcAft>
+                <a:spcPts val="800"/>
+              </a:spcAft>
+              <a:buSzPct val="100000"/>
+              <a:buChar char="•"/>
+            </a:pPr>
+            <a:r>
+              <a:rPr lang="en-US" sz="1800" dirty="0">
+                <a:solidFill>
+                  <a:srgbClr val="111111"/>
+                </a:solidFill>
+                <a:latin typeface="Calibri" pitchFamily="34" charset="0"/>
+                <a:ea typeface="Calibri" pitchFamily="34" charset="-122"/>
+                <a:cs typeface="Calibri" pitchFamily="34" charset="-120"/>
+              </a:rPr>
+              <a:t>Photo, board summary (Dormant volcano): “Kilimanjaro” by ian 1602, CC BY-NC 2.0, via Flickr (https://www.flickr.com/photos/98181641@N00/2179855841)</a:t>
+            </a:r>
+            <a:endParaRPr lang="en-US" sz="1800" dirty="0"/>
           </a:p>
         </p:txBody>
       </p:sp>
@@ -24172,7 +25492,7 @@
             <a:pPr algn="ctr"/>
             <a:fld id="{F7021451-1387-4CA6-816F-3879F97B5CBC}" type="slidenum">
               <a:rPr b="1" lang="en-US"/>
-              <a:t>60</a:t>
+              <a:t>64</a:t>
             </a:fld>
             <a:endParaRPr lang="en-US"/>
           </a:p>
@@ -24186,9 +25506,9 @@
 </p:sld>
 </file>
 
-<file path=ppt/slides/slide61.xml><?xml version="1.0" encoding="utf-8"?>
+<file path=ppt/slides/slide65.xml><?xml version="1.0" encoding="utf-8"?>
 <p:sld xmlns:a="http://schemas.openxmlformats.org/drawingml/2006/main" xmlns:r="http://schemas.openxmlformats.org/officeDocument/2006/relationships" xmlns:p="http://schemas.openxmlformats.org/presentationml/2006/main">
-  <p:cSld name="Slide 61">
+  <p:cSld name="Slide 65">
     <p:spTree>
       <p:nvGrpSpPr>
         <p:cNvPr id="1" name=""/>
@@ -24259,7 +25579,7 @@
         <p:spPr>
           <a:xfrm>
             <a:off x="0" y="658368"/>
-            <a:ext cx="2468880" cy="5833872"/>
+            <a:ext cx="5120640" cy="5833872"/>
           </a:xfrm>
           <a:prstGeom prst="rect">
             <a:avLst/>
@@ -24274,8 +25594,8 @@
         </p:nvSpPr>
         <p:spPr>
           <a:xfrm>
-            <a:off x="2697480" y="1005840"/>
-            <a:ext cx="9174175" cy="731520"/>
+            <a:off x="5349240" y="1005840"/>
+            <a:ext cx="6522415" cy="731520"/>
           </a:xfrm>
           <a:prstGeom prst="rect">
             <a:avLst/>
@@ -24301,7 +25621,7 @@
                 <a:ea typeface="Times New Roman" pitchFamily="34" charset="-122"/>
                 <a:cs typeface="Times New Roman" pitchFamily="34" charset="-120"/>
               </a:rPr>
-              <a:t>References</a:t>
+              <a:t>References (continued)</a:t>
             </a:r>
             <a:endParaRPr lang="en-US" sz="3600" dirty="0"/>
           </a:p>
@@ -24315,8 +25635,8 @@
         </p:nvSpPr>
         <p:spPr>
           <a:xfrm>
-            <a:off x="2697480" y="1783080"/>
-            <a:ext cx="9174175" cy="4663440"/>
+            <a:off x="5349240" y="1783080"/>
+            <a:ext cx="6522415" cy="4663440"/>
           </a:xfrm>
           <a:prstGeom prst="rect">
             <a:avLst/>
@@ -24344,7 +25664,7 @@
                 <a:ea typeface="Calibri" pitchFamily="34" charset="-122"/>
                 <a:cs typeface="Calibri" pitchFamily="34" charset="-120"/>
               </a:rPr>
-              <a:t>Geography Syllabus for Sixth Forms (Lower and Upper Sixth), MINESEC, 2019 — Module 2 (Geomorphology).</a:t>
+              <a:t>Photo, board summary (Basic lava cones (shield volcanoes)): “Fire and Stars” by howardignatius, CC BY-NC-ND 2.0, via Flickr (https://www.flickr.com/photos/25659032@N07/39966052052)</a:t>
             </a:r>
             <a:endParaRPr lang="en-US" sz="1800" dirty="0"/>
           </a:p>
@@ -24365,7 +25685,7 @@
                 <a:ea typeface="Calibri" pitchFamily="34" charset="-122"/>
                 <a:cs typeface="Calibri" pitchFamily="34" charset="-120"/>
               </a:rPr>
-              <a:t>Teacher's course notes: Mr KAMDEM E., Geomorphology (LSA), GBHS Garoua, 2026.</a:t>
+              <a:t>Photo, board summary (Composite cones (strato-volcanoes)): “Mayon Volcano, Albay, Luzon, Philippines” by Ray in Manila, CC BY 2.0, via Flickr (https://www.flickr.com/photos/21186555@N07/20591774278)</a:t>
             </a:r>
             <a:endParaRPr lang="en-US" sz="1800" dirty="0"/>
           </a:p>
@@ -24386,7 +25706,7 @@
                 <a:ea typeface="Calibri" pitchFamily="34" charset="-122"/>
                 <a:cs typeface="Calibri" pitchFamily="34" charset="-120"/>
               </a:rPr>
-              <a:t>Photo, Activity 2: “Mount Cameroon” by John &amp; Mel Kots, CC BY-NC-ND 2.0, via Flickr (https://www.flickr.com/photos/26745817@N00/2347261849)</a:t>
+              <a:t>Photo, board summary (Lava plateaux): “Snapshot, Daguoye Columnar Basalt, Penghu, Taiwan, 隨拍, 池東大菓葉玄武岩, 大菓葉柱狀” by bryan..., CC BY-SA 2.0, via Flickr (https://www.flickr.com/photos/91049143@N00/52316527525)</a:t>
             </a:r>
             <a:endParaRPr lang="en-US" sz="1800" dirty="0"/>
           </a:p>
@@ -24407,70 +25727,7 @@
                 <a:ea typeface="Calibri" pitchFamily="34" charset="-122"/>
                 <a:cs typeface="Calibri" pitchFamily="34" charset="-120"/>
               </a:rPr>
-              <a:t>Photo, Activity 3: “Rhumsiki peak, North Cameroon” by krishna.naudin, CC BY-SA 2.0, via Flickr (https://www.flickr.com/photos/141297921@N05/25989204581)</a:t>
-            </a:r>
-            <a:endParaRPr lang="en-US" sz="1800" dirty="0"/>
-          </a:p>
-          <a:p>
-            <a:pPr algn="l" marL="342900" indent="-342900">
-              <a:spcAft>
-                <a:spcPts val="800"/>
-              </a:spcAft>
-              <a:buSzPct val="100000"/>
-              <a:buChar char="•"/>
-            </a:pPr>
-            <a:r>
-              <a:rPr lang="en-US" sz="1800" dirty="0">
-                <a:solidFill>
-                  <a:srgbClr val="111111"/>
-                </a:solidFill>
-                <a:latin typeface="Calibri" pitchFamily="34" charset="0"/>
-                <a:ea typeface="Calibri" pitchFamily="34" charset="-122"/>
-                <a:cs typeface="Calibri" pitchFamily="34" charset="-120"/>
-              </a:rPr>
-              <a:t>Photo, Activity 4: “Pahoehoe Lava Flow” by graysky., CC BY-NC-SA 2.0, via Flickr (https://www.flickr.com/photos/20021588@N00/540223861)</a:t>
-            </a:r>
-            <a:endParaRPr lang="en-US" sz="1800" dirty="0"/>
-          </a:p>
-          <a:p>
-            <a:pPr algn="l" marL="342900" indent="-342900">
-              <a:spcAft>
-                <a:spcPts val="800"/>
-              </a:spcAft>
-              <a:buSzPct val="100000"/>
-              <a:buChar char="•"/>
-            </a:pPr>
-            <a:r>
-              <a:rPr lang="en-US" sz="1800" dirty="0">
-                <a:solidFill>
-                  <a:srgbClr val="111111"/>
-                </a:solidFill>
-                <a:latin typeface="Calibri" pitchFamily="34" charset="0"/>
-                <a:ea typeface="Calibri" pitchFamily="34" charset="-122"/>
-                <a:cs typeface="Calibri" pitchFamily="34" charset="-120"/>
-              </a:rPr>
-              <a:t>Photo, Activity 5: “Taal Lake and Volcano, Tagaytay, Philippines” by Ray in Manila, CC BY 2.0, via Flickr (https://www.flickr.com/photos/21186555@N07/28260012661)</a:t>
-            </a:r>
-            <a:endParaRPr lang="en-US" sz="1800" dirty="0"/>
-          </a:p>
-          <a:p>
-            <a:pPr algn="l" marL="342900" indent="-342900">
-              <a:spcAft>
-                <a:spcPts val="800"/>
-              </a:spcAft>
-              <a:buSzPct val="100000"/>
-              <a:buChar char="•"/>
-            </a:pPr>
-            <a:r>
-              <a:rPr lang="en-US" sz="1800" dirty="0">
-                <a:solidFill>
-                  <a:srgbClr val="111111"/>
-                </a:solidFill>
-                <a:latin typeface="Calibri" pitchFamily="34" charset="0"/>
-                <a:ea typeface="Calibri" pitchFamily="34" charset="-122"/>
-                <a:cs typeface="Calibri" pitchFamily="34" charset="-120"/>
-              </a:rPr>
-              <a:t>Photo, board summary (Dormant volcano): “Kilimanjaro” by ian 1602, CC BY-NC 2.0, via Flickr (https://www.flickr.com/photos/98181641@N00/2179855841)</a:t>
+              <a:t>Diagrams and animations: drawn for this lesson (Geography Department).</a:t>
             </a:r>
             <a:endParaRPr lang="en-US" sz="1800" dirty="0"/>
           </a:p>
@@ -24518,290 +25775,7 @@
             <a:pPr algn="ctr"/>
             <a:fld id="{F7021451-1387-4CA6-816F-3879F97B5CBC}" type="slidenum">
               <a:rPr b="1" lang="en-US"/>
-              <a:t>61</a:t>
-            </a:fld>
-            <a:endParaRPr lang="en-US"/>
-          </a:p>
-        </p:txBody>
-      </p:sp>
-    </p:spTree>
-  </p:cSld>
-  <p:clrMapOvr>
-    <a:masterClrMapping/>
-  </p:clrMapOvr>
-</p:sld>
-</file>
-
-<file path=ppt/slides/slide62.xml><?xml version="1.0" encoding="utf-8"?>
-<p:sld xmlns:a="http://schemas.openxmlformats.org/drawingml/2006/main" xmlns:r="http://schemas.openxmlformats.org/officeDocument/2006/relationships" xmlns:p="http://schemas.openxmlformats.org/presentationml/2006/main">
-  <p:cSld name="Slide 62">
-    <p:spTree>
-      <p:nvGrpSpPr>
-        <p:cNvPr id="1" name=""/>
-        <p:cNvGrpSpPr/>
-        <p:nvPr/>
-      </p:nvGrpSpPr>
-      <p:grpSpPr>
-        <a:xfrm>
-          <a:off x="0" y="0"/>
-          <a:ext cx="0" cy="0"/>
-          <a:chOff x="0" y="0"/>
-          <a:chExt cx="0" cy="0"/>
-        </a:xfrm>
-      </p:grpSpPr>
-      <p:sp>
-        <p:nvSpPr>
-          <p:cNvPr id="2" name="Text 0"/>
-          <p:cNvSpPr/>
-          <p:nvPr/>
-        </p:nvSpPr>
-        <p:spPr>
-          <a:xfrm>
-            <a:off x="457200" y="713232"/>
-            <a:ext cx="11368735" cy="274320"/>
-          </a:xfrm>
-          <a:prstGeom prst="rect">
-            <a:avLst/>
-          </a:prstGeom>
-          <a:noFill/>
-          <a:ln/>
-        </p:spPr>
-        <p:txBody>
-          <a:bodyPr wrap="square" lIns="0" tIns="0" rIns="0" bIns="0" rtlCol="0" anchor="ctr"/>
-          <a:lstStyle/>
-          <a:p>
-            <a:pPr algn="r" indent="0" marL="0">
-              <a:buNone/>
-            </a:pPr>
-            <a:r>
-              <a:rPr lang="en-US" sz="1400" b="1" dirty="0">
-                <a:solidFill>
-                  <a:srgbClr val="1C3F6E"/>
-                </a:solidFill>
-                <a:latin typeface="Calibri" pitchFamily="34" charset="0"/>
-                <a:ea typeface="Calibri" pitchFamily="34" charset="-122"/>
-                <a:cs typeface="Calibri" pitchFamily="34" charset="-120"/>
-              </a:rPr>
-              <a:t>REFERENCES</a:t>
-            </a:r>
-            <a:endParaRPr lang="en-US" sz="1400" dirty="0"/>
-          </a:p>
-        </p:txBody>
-      </p:sp>
-      <p:pic>
-        <p:nvPicPr>
-          <p:cNvPr id="3" name="Image 0" descr="/home/claude/f4/img/minesec_sheet.png">    </p:cNvPr>
-          <p:cNvPicPr>
-            <a:picLocks noChangeAspect="1"/>
-          </p:cNvPicPr>
-          <p:nvPr/>
-        </p:nvPicPr>
-        <p:blipFill>
-          <a:blip r:embed="rId1"/>
-          <a:stretch>
-            <a:fillRect/>
-          </a:stretch>
-        </p:blipFill>
-        <p:spPr>
-          <a:xfrm>
-            <a:off x="0" y="658368"/>
-            <a:ext cx="5120640" cy="5833872"/>
-          </a:xfrm>
-          <a:prstGeom prst="rect">
-            <a:avLst/>
-          </a:prstGeom>
-        </p:spPr>
-      </p:pic>
-      <p:sp>
-        <p:nvSpPr>
-          <p:cNvPr id="4" name="Text 1"/>
-          <p:cNvSpPr/>
-          <p:nvPr/>
-        </p:nvSpPr>
-        <p:spPr>
-          <a:xfrm>
-            <a:off x="5349240" y="1005840"/>
-            <a:ext cx="6522415" cy="731520"/>
-          </a:xfrm>
-          <a:prstGeom prst="rect">
-            <a:avLst/>
-          </a:prstGeom>
-          <a:noFill/>
-          <a:ln/>
-        </p:spPr>
-        <p:txBody>
-          <a:bodyPr wrap="square" lIns="0" tIns="0" rIns="0" bIns="0" rtlCol="0" anchor="ctr">
-            <a:normAutofit/>
-          </a:bodyPr>
-          <a:lstStyle/>
-          <a:p>
-            <a:pPr algn="ctr" indent="0" marL="0">
-              <a:buNone/>
-            </a:pPr>
-            <a:r>
-              <a:rPr lang="en-US" sz="3600" b="1" dirty="0">
-                <a:solidFill>
-                  <a:srgbClr val="990011"/>
-                </a:solidFill>
-                <a:latin typeface="Times New Roman" pitchFamily="34" charset="0"/>
-                <a:ea typeface="Times New Roman" pitchFamily="34" charset="-122"/>
-                <a:cs typeface="Times New Roman" pitchFamily="34" charset="-120"/>
-              </a:rPr>
-              <a:t>References (continued)</a:t>
-            </a:r>
-            <a:endParaRPr lang="en-US" sz="3600" dirty="0"/>
-          </a:p>
-        </p:txBody>
-      </p:sp>
-      <p:sp>
-        <p:nvSpPr>
-          <p:cNvPr id="5" name="Text 2"/>
-          <p:cNvSpPr/>
-          <p:nvPr/>
-        </p:nvSpPr>
-        <p:spPr>
-          <a:xfrm>
-            <a:off x="5349240" y="1783080"/>
-            <a:ext cx="6522415" cy="4663440"/>
-          </a:xfrm>
-          <a:prstGeom prst="rect">
-            <a:avLst/>
-          </a:prstGeom>
-          <a:noFill/>
-          <a:ln/>
-        </p:spPr>
-        <p:txBody>
-          <a:bodyPr wrap="square" lIns="0" tIns="0" rIns="0" bIns="0" rtlCol="0" anchor="t"/>
-          <a:lstStyle/>
-          <a:p>
-            <a:pPr algn="l" marL="342900" indent="-342900">
-              <a:spcAft>
-                <a:spcPts val="800"/>
-              </a:spcAft>
-              <a:buSzPct val="100000"/>
-              <a:buChar char="•"/>
-            </a:pPr>
-            <a:r>
-              <a:rPr lang="en-US" sz="1800" dirty="0">
-                <a:solidFill>
-                  <a:srgbClr val="111111"/>
-                </a:solidFill>
-                <a:latin typeface="Calibri" pitchFamily="34" charset="0"/>
-                <a:ea typeface="Calibri" pitchFamily="34" charset="-122"/>
-                <a:cs typeface="Calibri" pitchFamily="34" charset="-120"/>
-              </a:rPr>
-              <a:t>Photo, board summary (Shield (basic lava) cones): “Fire and Stars” by howardignatius, CC BY-NC-ND 2.0, via Flickr (https://www.flickr.com/photos/25659032@N07/39966052052)</a:t>
-            </a:r>
-            <a:endParaRPr lang="en-US" sz="1800" dirty="0"/>
-          </a:p>
-          <a:p>
-            <a:pPr algn="l" marL="342900" indent="-342900">
-              <a:spcAft>
-                <a:spcPts val="800"/>
-              </a:spcAft>
-              <a:buSzPct val="100000"/>
-              <a:buChar char="•"/>
-            </a:pPr>
-            <a:r>
-              <a:rPr lang="en-US" sz="1800" dirty="0">
-                <a:solidFill>
-                  <a:srgbClr val="111111"/>
-                </a:solidFill>
-                <a:latin typeface="Calibri" pitchFamily="34" charset="0"/>
-                <a:ea typeface="Calibri" pitchFamily="34" charset="-122"/>
-                <a:cs typeface="Calibri" pitchFamily="34" charset="-120"/>
-              </a:rPr>
-              <a:t>Photo, board summary (Composite cones (stratovolcanoes)): “Mayon Volcano, Albay, Luzon, Philippines” by Ray in Manila, CC BY 2.0, via Flickr (https://www.flickr.com/photos/21186555@N07/20591774278)</a:t>
-            </a:r>
-            <a:endParaRPr lang="en-US" sz="1800" dirty="0"/>
-          </a:p>
-          <a:p>
-            <a:pPr algn="l" marL="342900" indent="-342900">
-              <a:spcAft>
-                <a:spcPts val="800"/>
-              </a:spcAft>
-              <a:buSzPct val="100000"/>
-              <a:buChar char="•"/>
-            </a:pPr>
-            <a:r>
-              <a:rPr lang="en-US" sz="1800" dirty="0">
-                <a:solidFill>
-                  <a:srgbClr val="111111"/>
-                </a:solidFill>
-                <a:latin typeface="Calibri" pitchFamily="34" charset="0"/>
-                <a:ea typeface="Calibri" pitchFamily="34" charset="-122"/>
-                <a:cs typeface="Calibri" pitchFamily="34" charset="-120"/>
-              </a:rPr>
-              <a:t>Photo, board summary (Lava plateau): “Snapshot, Daguoye Columnar Basalt, Penghu, Taiwan, 隨拍, 池東大菓葉玄武岩, 大菓葉柱狀” by bryan..., CC BY-SA 2.0, via Flickr (https://www.flickr.com/photos/91049143@N00/52316527525)</a:t>
-            </a:r>
-            <a:endParaRPr lang="en-US" sz="1800" dirty="0"/>
-          </a:p>
-          <a:p>
-            <a:pPr algn="l" marL="342900" indent="-342900">
-              <a:spcAft>
-                <a:spcPts val="800"/>
-              </a:spcAft>
-              <a:buSzPct val="100000"/>
-              <a:buChar char="•"/>
-            </a:pPr>
-            <a:r>
-              <a:rPr lang="en-US" sz="1800" dirty="0">
-                <a:solidFill>
-                  <a:srgbClr val="111111"/>
-                </a:solidFill>
-                <a:latin typeface="Calibri" pitchFamily="34" charset="0"/>
-                <a:ea typeface="Calibri" pitchFamily="34" charset="-122"/>
-                <a:cs typeface="Calibri" pitchFamily="34" charset="-120"/>
-              </a:rPr>
-              <a:t>Diagrams and animations: drawn for this lesson (Geography Department).</a:t>
-            </a:r>
-            <a:endParaRPr lang="en-US" sz="1800" dirty="0"/>
-          </a:p>
-        </p:txBody>
-      </p:sp>
-      <p:sp>
-        <p:nvSpPr>
-          <p:cNvPr id="25" name="Slide Number Placeholder 0"/>
-          <p:cNvSpPr>
-            <a:spLocks noGrp="1"/>
-          </p:cNvSpPr>
-          <p:nvPr>
-            <p:ph type="sldNum" sz="quarter" idx="4294967295"/>
-          </p:nvPr>
-        </p:nvSpPr>
-        <p:spPr>
-          <a:xfrm>
-            <a:off x="27432" y="91440"/>
-            <a:ext cx="585216" cy="475488"/>
-          </a:xfrm>
-          <a:prstGeom prst="rect">
-            <a:avLst/>
-          </a:prstGeom>
-          <a:extLst>
-            <a:ext uri="{C572A759-6A51-4108-AA02-DFA0A04FC94B}">
-              <ma14:wrappingTextBoxFlag xmlns:ma14="http://schemas.microsoft.com/office/mac/drawingml/2011/main" val="0"/>
-            </a:ext>
-          </a:extLst>
-        </p:spPr>
-        <p:txBody>
-          <a:bodyPr/>
-          <a:lstStyle>
-            <a:lvl1pPr>
-              <a:defRPr sz="2000">
-                <a:solidFill>
-                  <a:srgbClr val="FFFFFF"/>
-                </a:solidFill>
-                <a:latin typeface="Calibri"/>
-                <a:ea typeface="Calibri"/>
-                <a:cs typeface="Calibri"/>
-              </a:defRPr>
-            </a:lvl1pPr>
-          </a:lstStyle>
-          <a:p>
-            <a:pPr algn="ctr"/>
-            <a:fld id="{F7021451-1387-4CA6-816F-3879F97B5CBC}" type="slidenum">
-              <a:rPr b="1" lang="en-US"/>
-              <a:t>62</a:t>
+              <a:t>65</a:t>
             </a:fld>
             <a:endParaRPr lang="en-US"/>
           </a:p>
